--- a/slides/parallel_sift_presentation.pptx
+++ b/slides/parallel_sift_presentation.pptx
@@ -31,9 +31,10 @@
     <p:sldId id="279" r:id="rId25"/>
     <p:sldId id="280" r:id="rId26"/>
     <p:sldId id="281" r:id="rId27"/>
+    <p:sldId id="282" r:id="rId28"/>
   </p:sldIdLst>
   <p:notesMasterIdLst>
-    <p:notesMasterId r:id="rId28"/>
+    <p:notesMasterId r:id="rId29"/>
   </p:notesMasterIdLst>
   <p:sldSz cx="9144000" cy="5143500"/>
   <p:notesSz cx="5143500" cy="9144000"/>
@@ -132,13 +133,13 @@
   <p:extLst>
     <p:ext uri="{521415D9-36F7-43E2-AB2F-B90AF26B5E84}">
       <p14:sectionLst xmlns:p14="http://schemas.microsoft.com/office/powerpoint/2010/main">
-        <p14:section name="Introduction" id="{cc62502e-3af1-4fa4-afd4-a995282bd33f}">
+        <p14:section name="Introduction" id="{d7dd4df8-cbb9-997d-5976-178a57a6f145}">
           <p14:sldIdLst>
             <p14:sldId id="256"/>
             <p14:sldId id="257"/>
           </p14:sldIdLst>
         </p14:section>
-        <p14:section name="Background" id="{fe22f613-0536-a4d9-0cc0-8b0a758afd6c}">
+        <p14:section name="Background" id="{c1b2ba21-9392-1441-8851-42c3435c2c9c}">
           <p14:sldIdLst>
             <p14:sldId id="258"/>
             <p14:sldId id="259"/>
@@ -147,7 +148,7 @@
             <p14:sldId id="262"/>
           </p14:sldIdLst>
         </p14:section>
-        <p14:section name="The 2023 study" id="{11db6a3e-5e13-1c6e-2a75-882298963354}">
+        <p14:section name="The 2023 study" id="{915abd5d-76cd-e64e-a318-c27a2d8583be}">
           <p14:sldIdLst>
             <p14:sldId id="263"/>
             <p14:sldId id="264"/>
@@ -155,14 +156,14 @@
             <p14:sldId id="266"/>
           </p14:sldIdLst>
         </p14:section>
-        <p14:section name="Diagnosis" id="{5792178f-7967-acad-801c-20de7ccec1b7}">
+        <p14:section name="Diagnosis" id="{bd35576f-dd56-c65f-5f78-54cf015d04ab}">
           <p14:sldIdLst>
             <p14:sldId id="267"/>
             <p14:sldId id="268"/>
             <p14:sldId id="269"/>
           </p14:sldIdLst>
         </p14:section>
-        <p14:section name="The fix" id="{cae441b4-9e92-ae46-d97f-8fd62ad25caf}">
+        <p14:section name="The fix" id="{c1e50aa3-df0c-067f-c83a-574456d1671c}">
           <p14:sldIdLst>
             <p14:sldId id="270"/>
             <p14:sldId id="271"/>
@@ -171,15 +172,16 @@
             <p14:sldId id="274"/>
             <p14:sldId id="275"/>
             <p14:sldId id="276"/>
+            <p14:sldId id="277"/>
           </p14:sldIdLst>
         </p14:section>
-        <p14:section name="Conclusions" id="{173ec56b-211a-10f8-f04c-196e927aa44b}">
+        <p14:section name="Conclusions" id="{9dbea07d-7f2a-b9a9-d29e-26801cede115}">
           <p14:sldIdLst>
-            <p14:sldId id="277"/>
             <p14:sldId id="278"/>
             <p14:sldId id="279"/>
             <p14:sldId id="280"/>
             <p14:sldId id="281"/>
+            <p14:sldId id="282"/>
           </p14:sldIdLst>
         </p14:section>
       </p14:sectionLst>
@@ -5044,7 +5046,7 @@
           <a:p>
             <a:r>
               <a:rPr lang="en-US" dirty="0"/>
-              <a:t>Python 3.14 officially supports a free-threaded build with no GIL. Plain threads then reach 5.8x at 16 tiles, close to processes. The interpreter is about 11 percent slower single-threaded, which explains most of the gap. The catch today is the ecosystem: OpenCV has no free-threaded build, so I reimplemented the four OpenCV calls SIFT needs in NumPy.</a:t>
+              <a:t>The actual times behind the speedups. Serial takes about 72 seconds per image, an hour for all 50. Threads with the GIL barely change that. Processes bring it down to about 11 seconds per image, under 9 minutes for the whole set. No-GIL threads land at 13.5 seconds, even though the free-threaded interpreter is about 11 percent slower single-threaded.</a:t>
             </a:r>
             <a:endParaRPr lang="en-US" dirty="0"/>
           </a:p>
@@ -5220,7 +5222,7 @@
           <a:p>
             <a:r>
               <a:rPr lang="en-US" dirty="0"/>
-              <a:t>Splitting the image isn't free. Each tile is processed as if it were a whole image, so a strip along every cut gets no keypoints. 4 tiles lose 3 percent of keypoints and 16 tiles lose 8 percent on average, up to 12 percent. That is also why serial code on 16 tiles is slightly faster: less descriptor work.</a:t>
+              <a:t>Python 3.14 officially supports a free-threaded build with no GIL. Plain threads then reach 5.8x at 16 tiles, close to processes. The interpreter is about 11 percent slower single-threaded, which explains most of the gap. The catch today is the ecosystem: OpenCV has no free-threaded build, so I reimplemented the four OpenCV calls SIFT needs in NumPy.</a:t>
             </a:r>
             <a:endParaRPr lang="en-US" dirty="0"/>
           </a:p>
@@ -5308,7 +5310,7 @@
           <a:p>
             <a:r>
               <a:rPr lang="en-US" dirty="0"/>
-              <a:t>Rebuilding the code turned up three bugs. The most interesting is a race: each thread appended its result when it finished, but the merge assumed submission order, so keypoints could be shifted into the wrong quadrant. Timings and counts weren't affected.</a:t>
+              <a:t>Splitting the image isn't free. Each tile is processed as if it were a whole image, so a strip along every cut gets no keypoints. 4 tiles lose 3 percent of keypoints and 16 tiles lose 8 percent on average, up to 12 percent. That is also why serial code on 16 tiles is slightly faster: less descriptor work.</a:t>
             </a:r>
             <a:endParaRPr lang="en-US" dirty="0"/>
           </a:p>
@@ -5396,7 +5398,7 @@
           <a:p>
             <a:r>
               <a:rPr lang="en-US" dirty="0"/>
-              <a:t>What I learned and what I'd do next.</a:t>
+              <a:t>Rebuilding the code turned up three bugs. The most interesting is a race: each thread appended its result when it finished, but the merge assumed submission order, so keypoints could be shifted into the wrong quadrant. Timings and counts weren't affected.</a:t>
             </a:r>
             <a:endParaRPr lang="en-US" dirty="0"/>
           </a:p>
@@ -5484,7 +5486,7 @@
           <a:p>
             <a:r>
               <a:rPr lang="en-US" dirty="0"/>
-              <a:t>Three conclusions. The 2023 null result was caused by the GIL, not by the tiling idea. The small gain 16 tiles showed came from losing keypoints, not from parallelism. And with real parallelism, either processes or Python without the GIL, the speedup is large and 16 tiles do beat 4.</a:t>
+              <a:t>What I learned and what I'd do next.</a:t>
             </a:r>
             <a:endParaRPr lang="en-US" dirty="0"/>
           </a:p>
@@ -5572,7 +5574,7 @@
           <a:p>
             <a:r>
               <a:rPr lang="en-US" dirty="0"/>
-              <a:t>Next steps. First, get further around the GIL by compiling the hot loops so they release it. Second, move SIFT to a GPU, since nearly every stage is data-parallel, batching images so transfer costs don't dominate. Third, stop losing keypoints with overlapping tiles. Fourth, measure whether lost keypoints hurt retrieval. And for perspective: compiled SIFT is about 600 times faster than this pure-Python version, so per-core speed matters even more than core count.</a:t>
+              <a:t>Three conclusions. The 2023 null result was caused by the GIL, not by the tiling idea. The small gain 16 tiles showed came from losing keypoints, not from parallelism. And with real parallelism, either processes or Python without the GIL, the speedup is large and 16 tiles do beat 4.</a:t>
             </a:r>
             <a:endParaRPr lang="en-US" dirty="0"/>
           </a:p>
@@ -5660,7 +5662,7 @@
           <a:p>
             <a:r>
               <a:rPr lang="en-US" dirty="0"/>
-              <a:t>References.</a:t>
+              <a:t>Next steps. First, get further around the GIL by compiling the hot loops so they release it. Second, move SIFT to a GPU, since nearly every stage is data-parallel, batching images so transfer costs don't dominate. Third, stop losing keypoints with overlapping tiles. Fourth, measure whether lost keypoints hurt retrieval. And for perspective: compiled SIFT is about 600 times faster than this pure-Python version, so per-core speed matters even more than core count.</a:t>
             </a:r>
             <a:endParaRPr lang="en-US" dirty="0"/>
           </a:p>
@@ -5748,7 +5750,7 @@
           <a:p>
             <a:r>
               <a:rPr lang="en-US" dirty="0"/>
-              <a:t>Thanks to Sairaj Jadhav and Dr. John Korah for the original NMS-SIFT code. Everything, including the raw timings and the notebook, is in the GitHub repository.</a:t>
+              <a:t>References.</a:t>
             </a:r>
             <a:endParaRPr lang="en-US" dirty="0"/>
           </a:p>
@@ -5772,6 +5774,94 @@
             <a:fld id="{F7021451-1387-4CA6-816F-3879F97B5CBC}" type="slidenum">
               <a:rPr lang="en-US"/>
               <a:t>26</a:t>
+            </a:fld>
+            <a:endParaRPr lang="en-US"/>
+          </a:p>
+        </p:txBody>
+      </p:sp>
+    </p:spTree>
+    <p:extLst>
+      <p:ext uri="{BB962C8B-B14F-4D97-AF65-F5344CB8AC3E}">
+        <p14:creationId xmlns:p14="http://schemas.microsoft.com/office/powerpoint/2010/main" val="1024086991"/>
+      </p:ext>
+    </p:extLst>
+  </p:cSld>
+  <p:clrMapOvr>
+    <a:masterClrMapping/>
+  </p:clrMapOvr>
+</p:notes>
+</file>
+
+<file path=ppt/notesSlides/notesSlide27.xml><?xml version="1.0" encoding="utf-8"?>
+<p:notes xmlns:a="http://schemas.openxmlformats.org/drawingml/2006/main" xmlns:r="http://schemas.openxmlformats.org/officeDocument/2006/relationships" xmlns:p="http://schemas.openxmlformats.org/presentationml/2006/main">
+  <p:cSld>
+    <p:spTree>
+      <p:nvGrpSpPr>
+        <p:cNvPr id="1" name=""/>
+        <p:cNvGrpSpPr/>
+        <p:nvPr/>
+      </p:nvGrpSpPr>
+      <p:grpSpPr>
+        <a:xfrm>
+          <a:off x="0" y="0"/>
+          <a:ext cx="0" cy="0"/>
+          <a:chOff x="0" y="0"/>
+          <a:chExt cx="0" cy="0"/>
+        </a:xfrm>
+      </p:grpSpPr>
+      <p:sp>
+        <p:nvSpPr>
+          <p:cNvPr id="2" name="Slide Image Placeholder 1"/>
+          <p:cNvSpPr>
+            <a:spLocks noGrp="1" noRot="1" noChangeAspect="1"/>
+          </p:cNvSpPr>
+          <p:nvPr>
+            <p:ph type="sldImg"/>
+          </p:nvPr>
+        </p:nvSpPr>
+        <p:spPr/>
+      </p:sp>
+      <p:sp>
+        <p:nvSpPr>
+          <p:cNvPr id="3" name="Notes Placeholder 2"/>
+          <p:cNvSpPr>
+            <a:spLocks noGrp="1"/>
+          </p:cNvSpPr>
+          <p:nvPr>
+            <p:ph type="body" idx="1"/>
+          </p:nvPr>
+        </p:nvSpPr>
+        <p:spPr/>
+        <p:txBody>
+          <a:bodyPr/>
+          <a:lstStyle/>
+          <a:p>
+            <a:r>
+              <a:rPr lang="en-US" dirty="0"/>
+              <a:t>Thanks to Sairaj Jadhav and Dr. John Korah for the original NMS-SIFT code. Everything, including the raw timings and the notebook, is in the GitHub repository.</a:t>
+            </a:r>
+            <a:endParaRPr lang="en-US" dirty="0"/>
+          </a:p>
+        </p:txBody>
+      </p:sp>
+      <p:sp>
+        <p:nvSpPr>
+          <p:cNvPr id="4" name="Slide Number Placeholder 3"/>
+          <p:cNvSpPr>
+            <a:spLocks noGrp="1"/>
+          </p:cNvSpPr>
+          <p:nvPr>
+            <p:ph type="sldNum" sz="quarter" idx="10"/>
+          </p:nvPr>
+        </p:nvSpPr>
+        <p:spPr/>
+        <p:txBody>
+          <a:bodyPr/>
+          <a:lstStyle/>
+          <a:p>
+            <a:fld id="{F7021451-1387-4CA6-816F-3879F97B5CBC}" type="slidenum">
+              <a:rPr lang="en-US"/>
+              <a:t>27</a:t>
             </a:fld>
             <a:endParaRPr lang="en-US"/>
           </a:p>
@@ -11795,44 +11885,3068 @@
                   <a:schemeClr val="bg1"/>
                 </a:solidFill>
               </a:rPr>
-              <a:t>Python 3.14 without the GIL: threads finally scale</a:t>
+              <a:t>Processing time per version</a:t>
             </a:r>
             <a:endParaRPr lang="en-US" sz="3000" dirty="0"/>
           </a:p>
         </p:txBody>
       </p:sp>
-      <p:sp>
-        <p:nvSpPr>
-          <p:cNvPr id="3" name="card-153"/>
-          <p:cNvSpPr/>
-          <p:nvPr/>
-        </p:nvSpPr>
-        <p:spPr>
-          <a:xfrm>
-            <a:off x="457200" y="1234440"/>
-            <a:ext cx="2606040" cy="2651760"/>
-          </a:xfrm>
-          <a:prstGeom prst="roundRect">
-            <a:avLst>
-              <a:gd name="adj" fmla="val 2807"/>
-            </a:avLst>
-          </a:prstGeom>
-          <a:solidFill>
-            <a:schemeClr val="accent6"/>
-          </a:solidFill>
-          <a:ln/>
-        </p:spPr>
-      </p:sp>
-      <p:sp>
-        <p:nvSpPr>
-          <p:cNvPr id="4" name="text-154"/>
+      <p:graphicFrame>
+        <p:nvGraphicFramePr>
+          <p:cNvPr id="20" name="table-times"/>
+          <p:cNvGraphicFramePr>
+            <a:graphicFrameLocks noGrp="1"/>
+          </p:cNvGraphicFramePr>
+          <p:nvPr>
+            <p:extLst>
+              <p:ext uri="{D42A27DB-BD31-4B8C-83A1-F6EECF244321}">
+                <p14:modId xmlns:p14="http://schemas.microsoft.com/office/powerpoint/2010/main" val="1579011935"/>
+              </p:ext>
+            </p:extLst>
+          </p:nvPr>
+        </p:nvGraphicFramePr>
+        <p:xfrm>
+          <a:off x="457200" y="1097280"/>
+          <a:ext cx="8229600" cy="914400"/>
+        </p:xfrm>
+        <a:graphic>
+          <a:graphicData uri="http://schemas.openxmlformats.org/drawingml/2006/table">
+            <a:tbl>
+              <a:tblPr/>
+              <a:tblGrid>
+                <a:gridCol w="3017520"/>
+                <a:gridCol w="1645920"/>
+                <a:gridCol w="1920240"/>
+                <a:gridCol w="1645920"/>
+              </a:tblGrid>
+              <a:tr h="274320">
+                <a:tc>
+                  <a:txBody>
+                    <a:bodyPr/>
+                    <a:lstStyle/>
+                    <a:p>
+                      <a:pPr indent="0" marL="0">
+                        <a:buNone/>
+                      </a:pPr>
+                      <a:r>
+                        <a:rPr lang="en-US" sz="1200" b="1" dirty="0">
+                          <a:solidFill>
+                            <a:srgbClr val="263238"/>
+                          </a:solidFill>
+                          <a:latin typeface="Bahnschrift" pitchFamily="34" charset="0"/>
+                          <a:ea typeface="Bahnschrift" pitchFamily="34" charset="-122"/>
+                          <a:cs typeface="Bahnschrift" pitchFamily="34" charset="-120"/>
+                        </a:rPr>
+                        <a:t>Version</a:t>
+                      </a:r>
+                      <a:endParaRPr lang="en-US" sz="1200" dirty="0">
+                        <a:latin typeface="Bahnschrift" charset="0"/>
+                        <a:ea typeface="Bahnschrift" charset="0"/>
+                        <a:cs typeface="Bahnschrift" charset="0"/>
+                      </a:endParaRPr>
+                    </a:p>
+                  </a:txBody>
+                  <a:tcPr marL="73152" marR="73152" marT="18288" marB="18288" anchor="ctr">
+                    <a:lnL w="12700" cap="flat" cmpd="sng" algn="ctr">
+                      <a:solidFill>
+                        <a:srgbClr val="37474F"/>
+                      </a:solidFill>
+                      <a:prstDash val="solid"/>
+                      <a:round/>
+                      <a:headEnd type="none" w="med" len="med"/>
+                      <a:tailEnd type="none" w="med" len="med"/>
+                    </a:lnL>
+                    <a:lnR w="12700" cap="flat" cmpd="sng" algn="ctr">
+                      <a:solidFill>
+                        <a:srgbClr val="37474F"/>
+                      </a:solidFill>
+                      <a:prstDash val="solid"/>
+                      <a:round/>
+                      <a:headEnd type="none" w="med" len="med"/>
+                      <a:tailEnd type="none" w="med" len="med"/>
+                    </a:lnR>
+                    <a:lnT w="12700" cap="flat" cmpd="sng" algn="ctr">
+                      <a:solidFill>
+                        <a:srgbClr val="37474F"/>
+                      </a:solidFill>
+                      <a:prstDash val="solid"/>
+                      <a:round/>
+                      <a:headEnd type="none" w="med" len="med"/>
+                      <a:tailEnd type="none" w="med" len="med"/>
+                    </a:lnT>
+                    <a:lnB w="12700" cap="flat" cmpd="sng" algn="ctr">
+                      <a:solidFill>
+                        <a:srgbClr val="37474F"/>
+                      </a:solidFill>
+                      <a:prstDash val="solid"/>
+                      <a:round/>
+                      <a:headEnd type="none" w="med" len="med"/>
+                      <a:tailEnd type="none" w="med" len="med"/>
+                    </a:lnB>
+                    <a:solidFill>
+                      <a:srgbClr val="F2B830"/>
+                    </a:solidFill>
+                  </a:tcPr>
+                </a:tc>
+                <a:tc>
+                  <a:txBody>
+                    <a:bodyPr/>
+                    <a:lstStyle/>
+                    <a:p>
+                      <a:pPr indent="0" marL="0">
+                        <a:buNone/>
+                      </a:pPr>
+                      <a:r>
+                        <a:rPr lang="en-US" sz="1200" b="1" dirty="0">
+                          <a:solidFill>
+                            <a:srgbClr val="263238"/>
+                          </a:solidFill>
+                          <a:latin typeface="Bahnschrift" pitchFamily="34" charset="0"/>
+                          <a:ea typeface="Bahnschrift" pitchFamily="34" charset="-122"/>
+                          <a:cs typeface="Bahnschrift" pitchFamily="34" charset="-120"/>
+                        </a:rPr>
+                        <a:t>Mean per image</a:t>
+                      </a:r>
+                      <a:endParaRPr lang="en-US" sz="1200" dirty="0">
+                        <a:latin typeface="Bahnschrift" charset="0"/>
+                        <a:ea typeface="Bahnschrift" charset="0"/>
+                        <a:cs typeface="Bahnschrift" charset="0"/>
+                      </a:endParaRPr>
+                    </a:p>
+                  </a:txBody>
+                  <a:tcPr marL="73152" marR="73152" marT="18288" marB="18288" anchor="ctr">
+                    <a:lnL w="12700" cap="flat" cmpd="sng" algn="ctr">
+                      <a:solidFill>
+                        <a:srgbClr val="37474F"/>
+                      </a:solidFill>
+                      <a:prstDash val="solid"/>
+                      <a:round/>
+                      <a:headEnd type="none" w="med" len="med"/>
+                      <a:tailEnd type="none" w="med" len="med"/>
+                    </a:lnL>
+                    <a:lnR w="12700" cap="flat" cmpd="sng" algn="ctr">
+                      <a:solidFill>
+                        <a:srgbClr val="37474F"/>
+                      </a:solidFill>
+                      <a:prstDash val="solid"/>
+                      <a:round/>
+                      <a:headEnd type="none" w="med" len="med"/>
+                      <a:tailEnd type="none" w="med" len="med"/>
+                    </a:lnR>
+                    <a:lnT w="12700" cap="flat" cmpd="sng" algn="ctr">
+                      <a:solidFill>
+                        <a:srgbClr val="37474F"/>
+                      </a:solidFill>
+                      <a:prstDash val="solid"/>
+                      <a:round/>
+                      <a:headEnd type="none" w="med" len="med"/>
+                      <a:tailEnd type="none" w="med" len="med"/>
+                    </a:lnT>
+                    <a:lnB w="12700" cap="flat" cmpd="sng" algn="ctr">
+                      <a:solidFill>
+                        <a:srgbClr val="37474F"/>
+                      </a:solidFill>
+                      <a:prstDash val="solid"/>
+                      <a:round/>
+                      <a:headEnd type="none" w="med" len="med"/>
+                      <a:tailEnd type="none" w="med" len="med"/>
+                    </a:lnB>
+                    <a:solidFill>
+                      <a:srgbClr val="F2B830"/>
+                    </a:solidFill>
+                  </a:tcPr>
+                </a:tc>
+                <a:tc>
+                  <a:txBody>
+                    <a:bodyPr/>
+                    <a:lstStyle/>
+                    <a:p>
+                      <a:pPr indent="0" marL="0">
+                        <a:buNone/>
+                      </a:pPr>
+                      <a:r>
+                        <a:rPr lang="en-US" sz="1200" b="1" dirty="0">
+                          <a:solidFill>
+                            <a:srgbClr val="263238"/>
+                          </a:solidFill>
+                          <a:latin typeface="Bahnschrift" pitchFamily="34" charset="0"/>
+                          <a:ea typeface="Bahnschrift" pitchFamily="34" charset="-122"/>
+                          <a:cs typeface="Bahnschrift" pitchFamily="34" charset="-120"/>
+                        </a:rPr>
+                        <a:t>Fastest / slowest</a:t>
+                      </a:r>
+                      <a:endParaRPr lang="en-US" sz="1200" dirty="0">
+                        <a:latin typeface="Bahnschrift" charset="0"/>
+                        <a:ea typeface="Bahnschrift" charset="0"/>
+                        <a:cs typeface="Bahnschrift" charset="0"/>
+                      </a:endParaRPr>
+                    </a:p>
+                  </a:txBody>
+                  <a:tcPr marL="73152" marR="73152" marT="18288" marB="18288" anchor="ctr">
+                    <a:lnL w="12700" cap="flat" cmpd="sng" algn="ctr">
+                      <a:solidFill>
+                        <a:srgbClr val="37474F"/>
+                      </a:solidFill>
+                      <a:prstDash val="solid"/>
+                      <a:round/>
+                      <a:headEnd type="none" w="med" len="med"/>
+                      <a:tailEnd type="none" w="med" len="med"/>
+                    </a:lnL>
+                    <a:lnR w="12700" cap="flat" cmpd="sng" algn="ctr">
+                      <a:solidFill>
+                        <a:srgbClr val="37474F"/>
+                      </a:solidFill>
+                      <a:prstDash val="solid"/>
+                      <a:round/>
+                      <a:headEnd type="none" w="med" len="med"/>
+                      <a:tailEnd type="none" w="med" len="med"/>
+                    </a:lnR>
+                    <a:lnT w="12700" cap="flat" cmpd="sng" algn="ctr">
+                      <a:solidFill>
+                        <a:srgbClr val="37474F"/>
+                      </a:solidFill>
+                      <a:prstDash val="solid"/>
+                      <a:round/>
+                      <a:headEnd type="none" w="med" len="med"/>
+                      <a:tailEnd type="none" w="med" len="med"/>
+                    </a:lnT>
+                    <a:lnB w="12700" cap="flat" cmpd="sng" algn="ctr">
+                      <a:solidFill>
+                        <a:srgbClr val="37474F"/>
+                      </a:solidFill>
+                      <a:prstDash val="solid"/>
+                      <a:round/>
+                      <a:headEnd type="none" w="med" len="med"/>
+                      <a:tailEnd type="none" w="med" len="med"/>
+                    </a:lnB>
+                    <a:solidFill>
+                      <a:srgbClr val="F2B830"/>
+                    </a:solidFill>
+                  </a:tcPr>
+                </a:tc>
+                <a:tc>
+                  <a:txBody>
+                    <a:bodyPr/>
+                    <a:lstStyle/>
+                    <a:p>
+                      <a:pPr indent="0" marL="0">
+                        <a:buNone/>
+                      </a:pPr>
+                      <a:r>
+                        <a:rPr lang="en-US" sz="1200" b="1" dirty="0">
+                          <a:solidFill>
+                            <a:srgbClr val="263238"/>
+                          </a:solidFill>
+                          <a:latin typeface="Bahnschrift" pitchFamily="34" charset="0"/>
+                          <a:ea typeface="Bahnschrift" pitchFamily="34" charset="-122"/>
+                          <a:cs typeface="Bahnschrift" pitchFamily="34" charset="-120"/>
+                        </a:rPr>
+                        <a:t>All 50 images</a:t>
+                      </a:r>
+                      <a:endParaRPr lang="en-US" sz="1200" dirty="0">
+                        <a:latin typeface="Bahnschrift" charset="0"/>
+                        <a:ea typeface="Bahnschrift" charset="0"/>
+                        <a:cs typeface="Bahnschrift" charset="0"/>
+                      </a:endParaRPr>
+                    </a:p>
+                  </a:txBody>
+                  <a:tcPr marL="73152" marR="73152" marT="18288" marB="18288" anchor="ctr">
+                    <a:lnL w="12700" cap="flat" cmpd="sng" algn="ctr">
+                      <a:solidFill>
+                        <a:srgbClr val="37474F"/>
+                      </a:solidFill>
+                      <a:prstDash val="solid"/>
+                      <a:round/>
+                      <a:headEnd type="none" w="med" len="med"/>
+                      <a:tailEnd type="none" w="med" len="med"/>
+                    </a:lnL>
+                    <a:lnR w="12700" cap="flat" cmpd="sng" algn="ctr">
+                      <a:solidFill>
+                        <a:srgbClr val="37474F"/>
+                      </a:solidFill>
+                      <a:prstDash val="solid"/>
+                      <a:round/>
+                      <a:headEnd type="none" w="med" len="med"/>
+                      <a:tailEnd type="none" w="med" len="med"/>
+                    </a:lnR>
+                    <a:lnT w="12700" cap="flat" cmpd="sng" algn="ctr">
+                      <a:solidFill>
+                        <a:srgbClr val="37474F"/>
+                      </a:solidFill>
+                      <a:prstDash val="solid"/>
+                      <a:round/>
+                      <a:headEnd type="none" w="med" len="med"/>
+                      <a:tailEnd type="none" w="med" len="med"/>
+                    </a:lnT>
+                    <a:lnB w="12700" cap="flat" cmpd="sng" algn="ctr">
+                      <a:solidFill>
+                        <a:srgbClr val="37474F"/>
+                      </a:solidFill>
+                      <a:prstDash val="solid"/>
+                      <a:round/>
+                      <a:headEnd type="none" w="med" len="med"/>
+                      <a:tailEnd type="none" w="med" len="med"/>
+                    </a:lnB>
+                    <a:solidFill>
+                      <a:srgbClr val="F2B830"/>
+                    </a:solidFill>
+                  </a:tcPr>
+                </a:tc>
+              </a:tr>
+              <a:tr h="274320">
+                <a:tc>
+                  <a:txBody>
+                    <a:bodyPr/>
+                    <a:lstStyle/>
+                    <a:p>
+                      <a:pPr indent="0" marL="0">
+                        <a:buNone/>
+                      </a:pPr>
+                      <a:r>
+                        <a:rPr lang="en-US" sz="1200" dirty="0">
+                          <a:solidFill>
+                            <a:srgbClr val="FFFFFF"/>
+                          </a:solidFill>
+                          <a:latin typeface="Cambria" pitchFamily="34" charset="0"/>
+                          <a:ea typeface="Cambria" pitchFamily="34" charset="-122"/>
+                          <a:cs typeface="Cambria" pitchFamily="34" charset="-120"/>
+                        </a:rPr>
+                        <a:t>Serial, whole image</a:t>
+                      </a:r>
+                      <a:endParaRPr lang="en-US" sz="1200" dirty="0">
+                        <a:latin typeface="Cambria" charset="0"/>
+                        <a:ea typeface="Cambria" charset="0"/>
+                        <a:cs typeface="Cambria" charset="0"/>
+                      </a:endParaRPr>
+                    </a:p>
+                  </a:txBody>
+                  <a:tcPr marL="73152" marR="73152" marT="18288" marB="18288" anchor="ctr">
+                    <a:lnL w="12700" cap="flat" cmpd="sng" algn="ctr">
+                      <a:solidFill>
+                        <a:srgbClr val="37474F"/>
+                      </a:solidFill>
+                      <a:prstDash val="solid"/>
+                      <a:round/>
+                      <a:headEnd type="none" w="med" len="med"/>
+                      <a:tailEnd type="none" w="med" len="med"/>
+                    </a:lnL>
+                    <a:lnR w="12700" cap="flat" cmpd="sng" algn="ctr">
+                      <a:solidFill>
+                        <a:srgbClr val="37474F"/>
+                      </a:solidFill>
+                      <a:prstDash val="solid"/>
+                      <a:round/>
+                      <a:headEnd type="none" w="med" len="med"/>
+                      <a:tailEnd type="none" w="med" len="med"/>
+                    </a:lnR>
+                    <a:lnT w="12700" cap="flat" cmpd="sng" algn="ctr">
+                      <a:solidFill>
+                        <a:srgbClr val="37474F"/>
+                      </a:solidFill>
+                      <a:prstDash val="solid"/>
+                      <a:round/>
+                      <a:headEnd type="none" w="med" len="med"/>
+                      <a:tailEnd type="none" w="med" len="med"/>
+                    </a:lnT>
+                    <a:lnB w="12700" cap="flat" cmpd="sng" algn="ctr">
+                      <a:solidFill>
+                        <a:srgbClr val="37474F"/>
+                      </a:solidFill>
+                      <a:prstDash val="solid"/>
+                      <a:round/>
+                      <a:headEnd type="none" w="med" len="med"/>
+                      <a:tailEnd type="none" w="med" len="med"/>
+                    </a:lnB>
+                    <a:solidFill>
+                      <a:srgbClr val="455A64"/>
+                    </a:solidFill>
+                  </a:tcPr>
+                </a:tc>
+                <a:tc>
+                  <a:txBody>
+                    <a:bodyPr/>
+                    <a:lstStyle/>
+                    <a:p>
+                      <a:pPr indent="0" marL="0">
+                        <a:buNone/>
+                      </a:pPr>
+                      <a:r>
+                        <a:rPr lang="en-US" sz="1200" dirty="0">
+                          <a:solidFill>
+                            <a:srgbClr val="FFFFFF"/>
+                          </a:solidFill>
+                          <a:latin typeface="Cambria" pitchFamily="34" charset="0"/>
+                          <a:ea typeface="Cambria" pitchFamily="34" charset="-122"/>
+                          <a:cs typeface="Cambria" pitchFamily="34" charset="-120"/>
+                        </a:rPr>
+                        <a:t>71.5 s</a:t>
+                      </a:r>
+                      <a:endParaRPr lang="en-US" sz="1200" dirty="0">
+                        <a:latin typeface="Cambria" charset="0"/>
+                        <a:ea typeface="Cambria" charset="0"/>
+                        <a:cs typeface="Cambria" charset="0"/>
+                      </a:endParaRPr>
+                    </a:p>
+                  </a:txBody>
+                  <a:tcPr marL="73152" marR="73152" marT="18288" marB="18288" anchor="ctr">
+                    <a:lnL w="12700" cap="flat" cmpd="sng" algn="ctr">
+                      <a:solidFill>
+                        <a:srgbClr val="37474F"/>
+                      </a:solidFill>
+                      <a:prstDash val="solid"/>
+                      <a:round/>
+                      <a:headEnd type="none" w="med" len="med"/>
+                      <a:tailEnd type="none" w="med" len="med"/>
+                    </a:lnL>
+                    <a:lnR w="12700" cap="flat" cmpd="sng" algn="ctr">
+                      <a:solidFill>
+                        <a:srgbClr val="37474F"/>
+                      </a:solidFill>
+                      <a:prstDash val="solid"/>
+                      <a:round/>
+                      <a:headEnd type="none" w="med" len="med"/>
+                      <a:tailEnd type="none" w="med" len="med"/>
+                    </a:lnR>
+                    <a:lnT w="12700" cap="flat" cmpd="sng" algn="ctr">
+                      <a:solidFill>
+                        <a:srgbClr val="37474F"/>
+                      </a:solidFill>
+                      <a:prstDash val="solid"/>
+                      <a:round/>
+                      <a:headEnd type="none" w="med" len="med"/>
+                      <a:tailEnd type="none" w="med" len="med"/>
+                    </a:lnT>
+                    <a:lnB w="12700" cap="flat" cmpd="sng" algn="ctr">
+                      <a:solidFill>
+                        <a:srgbClr val="37474F"/>
+                      </a:solidFill>
+                      <a:prstDash val="solid"/>
+                      <a:round/>
+                      <a:headEnd type="none" w="med" len="med"/>
+                      <a:tailEnd type="none" w="med" len="med"/>
+                    </a:lnB>
+                    <a:solidFill>
+                      <a:srgbClr val="455A64"/>
+                    </a:solidFill>
+                  </a:tcPr>
+                </a:tc>
+                <a:tc>
+                  <a:txBody>
+                    <a:bodyPr/>
+                    <a:lstStyle/>
+                    <a:p>
+                      <a:pPr indent="0" marL="0">
+                        <a:buNone/>
+                      </a:pPr>
+                      <a:r>
+                        <a:rPr lang="en-US" sz="1200" dirty="0">
+                          <a:solidFill>
+                            <a:srgbClr val="FFFFFF"/>
+                          </a:solidFill>
+                          <a:latin typeface="Cambria" pitchFamily="34" charset="0"/>
+                          <a:ea typeface="Cambria" pitchFamily="34" charset="-122"/>
+                          <a:cs typeface="Cambria" pitchFamily="34" charset="-120"/>
+                        </a:rPr>
+                        <a:t>42.3 / 118.1 s</a:t>
+                      </a:r>
+                      <a:endParaRPr lang="en-US" sz="1200" dirty="0">
+                        <a:latin typeface="Cambria" charset="0"/>
+                        <a:ea typeface="Cambria" charset="0"/>
+                        <a:cs typeface="Cambria" charset="0"/>
+                      </a:endParaRPr>
+                    </a:p>
+                  </a:txBody>
+                  <a:tcPr marL="73152" marR="73152" marT="18288" marB="18288" anchor="ctr">
+                    <a:lnL w="12700" cap="flat" cmpd="sng" algn="ctr">
+                      <a:solidFill>
+                        <a:srgbClr val="37474F"/>
+                      </a:solidFill>
+                      <a:prstDash val="solid"/>
+                      <a:round/>
+                      <a:headEnd type="none" w="med" len="med"/>
+                      <a:tailEnd type="none" w="med" len="med"/>
+                    </a:lnL>
+                    <a:lnR w="12700" cap="flat" cmpd="sng" algn="ctr">
+                      <a:solidFill>
+                        <a:srgbClr val="37474F"/>
+                      </a:solidFill>
+                      <a:prstDash val="solid"/>
+                      <a:round/>
+                      <a:headEnd type="none" w="med" len="med"/>
+                      <a:tailEnd type="none" w="med" len="med"/>
+                    </a:lnR>
+                    <a:lnT w="12700" cap="flat" cmpd="sng" algn="ctr">
+                      <a:solidFill>
+                        <a:srgbClr val="37474F"/>
+                      </a:solidFill>
+                      <a:prstDash val="solid"/>
+                      <a:round/>
+                      <a:headEnd type="none" w="med" len="med"/>
+                      <a:tailEnd type="none" w="med" len="med"/>
+                    </a:lnT>
+                    <a:lnB w="12700" cap="flat" cmpd="sng" algn="ctr">
+                      <a:solidFill>
+                        <a:srgbClr val="37474F"/>
+                      </a:solidFill>
+                      <a:prstDash val="solid"/>
+                      <a:round/>
+                      <a:headEnd type="none" w="med" len="med"/>
+                      <a:tailEnd type="none" w="med" len="med"/>
+                    </a:lnB>
+                    <a:solidFill>
+                      <a:srgbClr val="455A64"/>
+                    </a:solidFill>
+                  </a:tcPr>
+                </a:tc>
+                <a:tc>
+                  <a:txBody>
+                    <a:bodyPr/>
+                    <a:lstStyle/>
+                    <a:p>
+                      <a:pPr indent="0" marL="0">
+                        <a:buNone/>
+                      </a:pPr>
+                      <a:r>
+                        <a:rPr lang="en-US" sz="1200" dirty="0">
+                          <a:solidFill>
+                            <a:srgbClr val="FFFFFF"/>
+                          </a:solidFill>
+                          <a:latin typeface="Cambria" pitchFamily="34" charset="0"/>
+                          <a:ea typeface="Cambria" pitchFamily="34" charset="-122"/>
+                          <a:cs typeface="Cambria" pitchFamily="34" charset="-120"/>
+                        </a:rPr>
+                        <a:t>59.6 min</a:t>
+                      </a:r>
+                      <a:endParaRPr lang="en-US" sz="1200" dirty="0">
+                        <a:latin typeface="Cambria" charset="0"/>
+                        <a:ea typeface="Cambria" charset="0"/>
+                        <a:cs typeface="Cambria" charset="0"/>
+                      </a:endParaRPr>
+                    </a:p>
+                  </a:txBody>
+                  <a:tcPr marL="73152" marR="73152" marT="18288" marB="18288" anchor="ctr">
+                    <a:lnL w="12700" cap="flat" cmpd="sng" algn="ctr">
+                      <a:solidFill>
+                        <a:srgbClr val="37474F"/>
+                      </a:solidFill>
+                      <a:prstDash val="solid"/>
+                      <a:round/>
+                      <a:headEnd type="none" w="med" len="med"/>
+                      <a:tailEnd type="none" w="med" len="med"/>
+                    </a:lnL>
+                    <a:lnR w="12700" cap="flat" cmpd="sng" algn="ctr">
+                      <a:solidFill>
+                        <a:srgbClr val="37474F"/>
+                      </a:solidFill>
+                      <a:prstDash val="solid"/>
+                      <a:round/>
+                      <a:headEnd type="none" w="med" len="med"/>
+                      <a:tailEnd type="none" w="med" len="med"/>
+                    </a:lnR>
+                    <a:lnT w="12700" cap="flat" cmpd="sng" algn="ctr">
+                      <a:solidFill>
+                        <a:srgbClr val="37474F"/>
+                      </a:solidFill>
+                      <a:prstDash val="solid"/>
+                      <a:round/>
+                      <a:headEnd type="none" w="med" len="med"/>
+                      <a:tailEnd type="none" w="med" len="med"/>
+                    </a:lnT>
+                    <a:lnB w="12700" cap="flat" cmpd="sng" algn="ctr">
+                      <a:solidFill>
+                        <a:srgbClr val="37474F"/>
+                      </a:solidFill>
+                      <a:prstDash val="solid"/>
+                      <a:round/>
+                      <a:headEnd type="none" w="med" len="med"/>
+                      <a:tailEnd type="none" w="med" len="med"/>
+                    </a:lnB>
+                    <a:solidFill>
+                      <a:srgbClr val="455A64"/>
+                    </a:solidFill>
+                  </a:tcPr>
+                </a:tc>
+              </a:tr>
+              <a:tr h="274320">
+                <a:tc>
+                  <a:txBody>
+                    <a:bodyPr/>
+                    <a:lstStyle/>
+                    <a:p>
+                      <a:pPr indent="0" marL="0">
+                        <a:buNone/>
+                      </a:pPr>
+                      <a:r>
+                        <a:rPr lang="en-US" sz="1200" dirty="0">
+                          <a:solidFill>
+                            <a:srgbClr val="FFFFFF"/>
+                          </a:solidFill>
+                          <a:latin typeface="Cambria" pitchFamily="34" charset="0"/>
+                          <a:ea typeface="Cambria" pitchFamily="34" charset="-122"/>
+                          <a:cs typeface="Cambria" pitchFamily="34" charset="-120"/>
+                        </a:rPr>
+                        <a:t>Serial, 4 tiles</a:t>
+                      </a:r>
+                      <a:endParaRPr lang="en-US" sz="1200" dirty="0">
+                        <a:latin typeface="Cambria" charset="0"/>
+                        <a:ea typeface="Cambria" charset="0"/>
+                        <a:cs typeface="Cambria" charset="0"/>
+                      </a:endParaRPr>
+                    </a:p>
+                  </a:txBody>
+                  <a:tcPr marL="73152" marR="73152" marT="18288" marB="18288" anchor="ctr">
+                    <a:lnL w="12700" cap="flat" cmpd="sng" algn="ctr">
+                      <a:solidFill>
+                        <a:srgbClr val="37474F"/>
+                      </a:solidFill>
+                      <a:prstDash val="solid"/>
+                      <a:round/>
+                      <a:headEnd type="none" w="med" len="med"/>
+                      <a:tailEnd type="none" w="med" len="med"/>
+                    </a:lnL>
+                    <a:lnR w="12700" cap="flat" cmpd="sng" algn="ctr">
+                      <a:solidFill>
+                        <a:srgbClr val="37474F"/>
+                      </a:solidFill>
+                      <a:prstDash val="solid"/>
+                      <a:round/>
+                      <a:headEnd type="none" w="med" len="med"/>
+                      <a:tailEnd type="none" w="med" len="med"/>
+                    </a:lnR>
+                    <a:lnT w="12700" cap="flat" cmpd="sng" algn="ctr">
+                      <a:solidFill>
+                        <a:srgbClr val="37474F"/>
+                      </a:solidFill>
+                      <a:prstDash val="solid"/>
+                      <a:round/>
+                      <a:headEnd type="none" w="med" len="med"/>
+                      <a:tailEnd type="none" w="med" len="med"/>
+                    </a:lnT>
+                    <a:lnB w="12700" cap="flat" cmpd="sng" algn="ctr">
+                      <a:solidFill>
+                        <a:srgbClr val="37474F"/>
+                      </a:solidFill>
+                      <a:prstDash val="solid"/>
+                      <a:round/>
+                      <a:headEnd type="none" w="med" len="med"/>
+                      <a:tailEnd type="none" w="med" len="med"/>
+                    </a:lnB>
+                    <a:solidFill>
+                      <a:srgbClr val="455A64"/>
+                    </a:solidFill>
+                  </a:tcPr>
+                </a:tc>
+                <a:tc>
+                  <a:txBody>
+                    <a:bodyPr/>
+                    <a:lstStyle/>
+                    <a:p>
+                      <a:pPr indent="0" marL="0">
+                        <a:buNone/>
+                      </a:pPr>
+                      <a:r>
+                        <a:rPr lang="en-US" sz="1200" dirty="0">
+                          <a:solidFill>
+                            <a:srgbClr val="FFFFFF"/>
+                          </a:solidFill>
+                          <a:latin typeface="Cambria" pitchFamily="34" charset="0"/>
+                          <a:ea typeface="Cambria" pitchFamily="34" charset="-122"/>
+                          <a:cs typeface="Cambria" pitchFamily="34" charset="-120"/>
+                        </a:rPr>
+                        <a:t>67.9 s</a:t>
+                      </a:r>
+                      <a:endParaRPr lang="en-US" sz="1200" dirty="0">
+                        <a:latin typeface="Cambria" charset="0"/>
+                        <a:ea typeface="Cambria" charset="0"/>
+                        <a:cs typeface="Cambria" charset="0"/>
+                      </a:endParaRPr>
+                    </a:p>
+                  </a:txBody>
+                  <a:tcPr marL="73152" marR="73152" marT="18288" marB="18288" anchor="ctr">
+                    <a:lnL w="12700" cap="flat" cmpd="sng" algn="ctr">
+                      <a:solidFill>
+                        <a:srgbClr val="37474F"/>
+                      </a:solidFill>
+                      <a:prstDash val="solid"/>
+                      <a:round/>
+                      <a:headEnd type="none" w="med" len="med"/>
+                      <a:tailEnd type="none" w="med" len="med"/>
+                    </a:lnL>
+                    <a:lnR w="12700" cap="flat" cmpd="sng" algn="ctr">
+                      <a:solidFill>
+                        <a:srgbClr val="37474F"/>
+                      </a:solidFill>
+                      <a:prstDash val="solid"/>
+                      <a:round/>
+                      <a:headEnd type="none" w="med" len="med"/>
+                      <a:tailEnd type="none" w="med" len="med"/>
+                    </a:lnR>
+                    <a:lnT w="12700" cap="flat" cmpd="sng" algn="ctr">
+                      <a:solidFill>
+                        <a:srgbClr val="37474F"/>
+                      </a:solidFill>
+                      <a:prstDash val="solid"/>
+                      <a:round/>
+                      <a:headEnd type="none" w="med" len="med"/>
+                      <a:tailEnd type="none" w="med" len="med"/>
+                    </a:lnT>
+                    <a:lnB w="12700" cap="flat" cmpd="sng" algn="ctr">
+                      <a:solidFill>
+                        <a:srgbClr val="37474F"/>
+                      </a:solidFill>
+                      <a:prstDash val="solid"/>
+                      <a:round/>
+                      <a:headEnd type="none" w="med" len="med"/>
+                      <a:tailEnd type="none" w="med" len="med"/>
+                    </a:lnB>
+                    <a:solidFill>
+                      <a:srgbClr val="455A64"/>
+                    </a:solidFill>
+                  </a:tcPr>
+                </a:tc>
+                <a:tc>
+                  <a:txBody>
+                    <a:bodyPr/>
+                    <a:lstStyle/>
+                    <a:p>
+                      <a:pPr indent="0" marL="0">
+                        <a:buNone/>
+                      </a:pPr>
+                      <a:r>
+                        <a:rPr lang="en-US" sz="1200" dirty="0">
+                          <a:solidFill>
+                            <a:srgbClr val="FFFFFF"/>
+                          </a:solidFill>
+                          <a:latin typeface="Cambria" pitchFamily="34" charset="0"/>
+                          <a:ea typeface="Cambria" pitchFamily="34" charset="-122"/>
+                          <a:cs typeface="Cambria" pitchFamily="34" charset="-120"/>
+                        </a:rPr>
+                        <a:t>39.6 / 107.2 s</a:t>
+                      </a:r>
+                      <a:endParaRPr lang="en-US" sz="1200" dirty="0">
+                        <a:latin typeface="Cambria" charset="0"/>
+                        <a:ea typeface="Cambria" charset="0"/>
+                        <a:cs typeface="Cambria" charset="0"/>
+                      </a:endParaRPr>
+                    </a:p>
+                  </a:txBody>
+                  <a:tcPr marL="73152" marR="73152" marT="18288" marB="18288" anchor="ctr">
+                    <a:lnL w="12700" cap="flat" cmpd="sng" algn="ctr">
+                      <a:solidFill>
+                        <a:srgbClr val="37474F"/>
+                      </a:solidFill>
+                      <a:prstDash val="solid"/>
+                      <a:round/>
+                      <a:headEnd type="none" w="med" len="med"/>
+                      <a:tailEnd type="none" w="med" len="med"/>
+                    </a:lnL>
+                    <a:lnR w="12700" cap="flat" cmpd="sng" algn="ctr">
+                      <a:solidFill>
+                        <a:srgbClr val="37474F"/>
+                      </a:solidFill>
+                      <a:prstDash val="solid"/>
+                      <a:round/>
+                      <a:headEnd type="none" w="med" len="med"/>
+                      <a:tailEnd type="none" w="med" len="med"/>
+                    </a:lnR>
+                    <a:lnT w="12700" cap="flat" cmpd="sng" algn="ctr">
+                      <a:solidFill>
+                        <a:srgbClr val="37474F"/>
+                      </a:solidFill>
+                      <a:prstDash val="solid"/>
+                      <a:round/>
+                      <a:headEnd type="none" w="med" len="med"/>
+                      <a:tailEnd type="none" w="med" len="med"/>
+                    </a:lnT>
+                    <a:lnB w="12700" cap="flat" cmpd="sng" algn="ctr">
+                      <a:solidFill>
+                        <a:srgbClr val="37474F"/>
+                      </a:solidFill>
+                      <a:prstDash val="solid"/>
+                      <a:round/>
+                      <a:headEnd type="none" w="med" len="med"/>
+                      <a:tailEnd type="none" w="med" len="med"/>
+                    </a:lnB>
+                    <a:solidFill>
+                      <a:srgbClr val="455A64"/>
+                    </a:solidFill>
+                  </a:tcPr>
+                </a:tc>
+                <a:tc>
+                  <a:txBody>
+                    <a:bodyPr/>
+                    <a:lstStyle/>
+                    <a:p>
+                      <a:pPr indent="0" marL="0">
+                        <a:buNone/>
+                      </a:pPr>
+                      <a:r>
+                        <a:rPr lang="en-US" sz="1200" dirty="0">
+                          <a:solidFill>
+                            <a:srgbClr val="FFFFFF"/>
+                          </a:solidFill>
+                          <a:latin typeface="Cambria" pitchFamily="34" charset="0"/>
+                          <a:ea typeface="Cambria" pitchFamily="34" charset="-122"/>
+                          <a:cs typeface="Cambria" pitchFamily="34" charset="-120"/>
+                        </a:rPr>
+                        <a:t>56.6 min</a:t>
+                      </a:r>
+                      <a:endParaRPr lang="en-US" sz="1200" dirty="0">
+                        <a:latin typeface="Cambria" charset="0"/>
+                        <a:ea typeface="Cambria" charset="0"/>
+                        <a:cs typeface="Cambria" charset="0"/>
+                      </a:endParaRPr>
+                    </a:p>
+                  </a:txBody>
+                  <a:tcPr marL="73152" marR="73152" marT="18288" marB="18288" anchor="ctr">
+                    <a:lnL w="12700" cap="flat" cmpd="sng" algn="ctr">
+                      <a:solidFill>
+                        <a:srgbClr val="37474F"/>
+                      </a:solidFill>
+                      <a:prstDash val="solid"/>
+                      <a:round/>
+                      <a:headEnd type="none" w="med" len="med"/>
+                      <a:tailEnd type="none" w="med" len="med"/>
+                    </a:lnL>
+                    <a:lnR w="12700" cap="flat" cmpd="sng" algn="ctr">
+                      <a:solidFill>
+                        <a:srgbClr val="37474F"/>
+                      </a:solidFill>
+                      <a:prstDash val="solid"/>
+                      <a:round/>
+                      <a:headEnd type="none" w="med" len="med"/>
+                      <a:tailEnd type="none" w="med" len="med"/>
+                    </a:lnR>
+                    <a:lnT w="12700" cap="flat" cmpd="sng" algn="ctr">
+                      <a:solidFill>
+                        <a:srgbClr val="37474F"/>
+                      </a:solidFill>
+                      <a:prstDash val="solid"/>
+                      <a:round/>
+                      <a:headEnd type="none" w="med" len="med"/>
+                      <a:tailEnd type="none" w="med" len="med"/>
+                    </a:lnT>
+                    <a:lnB w="12700" cap="flat" cmpd="sng" algn="ctr">
+                      <a:solidFill>
+                        <a:srgbClr val="37474F"/>
+                      </a:solidFill>
+                      <a:prstDash val="solid"/>
+                      <a:round/>
+                      <a:headEnd type="none" w="med" len="med"/>
+                      <a:tailEnd type="none" w="med" len="med"/>
+                    </a:lnB>
+                    <a:solidFill>
+                      <a:srgbClr val="455A64"/>
+                    </a:solidFill>
+                  </a:tcPr>
+                </a:tc>
+              </a:tr>
+              <a:tr h="274320">
+                <a:tc>
+                  <a:txBody>
+                    <a:bodyPr/>
+                    <a:lstStyle/>
+                    <a:p>
+                      <a:pPr indent="0" marL="0">
+                        <a:buNone/>
+                      </a:pPr>
+                      <a:r>
+                        <a:rPr lang="en-US" sz="1200" dirty="0">
+                          <a:solidFill>
+                            <a:srgbClr val="FFFFFF"/>
+                          </a:solidFill>
+                          <a:latin typeface="Cambria" pitchFamily="34" charset="0"/>
+                          <a:ea typeface="Cambria" pitchFamily="34" charset="-122"/>
+                          <a:cs typeface="Cambria" pitchFamily="34" charset="-120"/>
+                        </a:rPr>
+                        <a:t>Serial, 16 tiles</a:t>
+                      </a:r>
+                      <a:endParaRPr lang="en-US" sz="1200" dirty="0">
+                        <a:latin typeface="Cambria" charset="0"/>
+                        <a:ea typeface="Cambria" charset="0"/>
+                        <a:cs typeface="Cambria" charset="0"/>
+                      </a:endParaRPr>
+                    </a:p>
+                  </a:txBody>
+                  <a:tcPr marL="73152" marR="73152" marT="18288" marB="18288" anchor="ctr">
+                    <a:lnL w="12700" cap="flat" cmpd="sng" algn="ctr">
+                      <a:solidFill>
+                        <a:srgbClr val="37474F"/>
+                      </a:solidFill>
+                      <a:prstDash val="solid"/>
+                      <a:round/>
+                      <a:headEnd type="none" w="med" len="med"/>
+                      <a:tailEnd type="none" w="med" len="med"/>
+                    </a:lnL>
+                    <a:lnR w="12700" cap="flat" cmpd="sng" algn="ctr">
+                      <a:solidFill>
+                        <a:srgbClr val="37474F"/>
+                      </a:solidFill>
+                      <a:prstDash val="solid"/>
+                      <a:round/>
+                      <a:headEnd type="none" w="med" len="med"/>
+                      <a:tailEnd type="none" w="med" len="med"/>
+                    </a:lnR>
+                    <a:lnT w="12700" cap="flat" cmpd="sng" algn="ctr">
+                      <a:solidFill>
+                        <a:srgbClr val="37474F"/>
+                      </a:solidFill>
+                      <a:prstDash val="solid"/>
+                      <a:round/>
+                      <a:headEnd type="none" w="med" len="med"/>
+                      <a:tailEnd type="none" w="med" len="med"/>
+                    </a:lnT>
+                    <a:lnB w="12700" cap="flat" cmpd="sng" algn="ctr">
+                      <a:solidFill>
+                        <a:srgbClr val="37474F"/>
+                      </a:solidFill>
+                      <a:prstDash val="solid"/>
+                      <a:round/>
+                      <a:headEnd type="none" w="med" len="med"/>
+                      <a:tailEnd type="none" w="med" len="med"/>
+                    </a:lnB>
+                    <a:solidFill>
+                      <a:srgbClr val="455A64"/>
+                    </a:solidFill>
+                  </a:tcPr>
+                </a:tc>
+                <a:tc>
+                  <a:txBody>
+                    <a:bodyPr/>
+                    <a:lstStyle/>
+                    <a:p>
+                      <a:pPr indent="0" marL="0">
+                        <a:buNone/>
+                      </a:pPr>
+                      <a:r>
+                        <a:rPr lang="en-US" sz="1200" dirty="0">
+                          <a:solidFill>
+                            <a:srgbClr val="FFFFFF"/>
+                          </a:solidFill>
+                          <a:latin typeface="Cambria" pitchFamily="34" charset="0"/>
+                          <a:ea typeface="Cambria" pitchFamily="34" charset="-122"/>
+                          <a:cs typeface="Cambria" pitchFamily="34" charset="-120"/>
+                        </a:rPr>
+                        <a:t>62.5 s</a:t>
+                      </a:r>
+                      <a:endParaRPr lang="en-US" sz="1200" dirty="0">
+                        <a:latin typeface="Cambria" charset="0"/>
+                        <a:ea typeface="Cambria" charset="0"/>
+                        <a:cs typeface="Cambria" charset="0"/>
+                      </a:endParaRPr>
+                    </a:p>
+                  </a:txBody>
+                  <a:tcPr marL="73152" marR="73152" marT="18288" marB="18288" anchor="ctr">
+                    <a:lnL w="12700" cap="flat" cmpd="sng" algn="ctr">
+                      <a:solidFill>
+                        <a:srgbClr val="37474F"/>
+                      </a:solidFill>
+                      <a:prstDash val="solid"/>
+                      <a:round/>
+                      <a:headEnd type="none" w="med" len="med"/>
+                      <a:tailEnd type="none" w="med" len="med"/>
+                    </a:lnL>
+                    <a:lnR w="12700" cap="flat" cmpd="sng" algn="ctr">
+                      <a:solidFill>
+                        <a:srgbClr val="37474F"/>
+                      </a:solidFill>
+                      <a:prstDash val="solid"/>
+                      <a:round/>
+                      <a:headEnd type="none" w="med" len="med"/>
+                      <a:tailEnd type="none" w="med" len="med"/>
+                    </a:lnR>
+                    <a:lnT w="12700" cap="flat" cmpd="sng" algn="ctr">
+                      <a:solidFill>
+                        <a:srgbClr val="37474F"/>
+                      </a:solidFill>
+                      <a:prstDash val="solid"/>
+                      <a:round/>
+                      <a:headEnd type="none" w="med" len="med"/>
+                      <a:tailEnd type="none" w="med" len="med"/>
+                    </a:lnT>
+                    <a:lnB w="12700" cap="flat" cmpd="sng" algn="ctr">
+                      <a:solidFill>
+                        <a:srgbClr val="37474F"/>
+                      </a:solidFill>
+                      <a:prstDash val="solid"/>
+                      <a:round/>
+                      <a:headEnd type="none" w="med" len="med"/>
+                      <a:tailEnd type="none" w="med" len="med"/>
+                    </a:lnB>
+                    <a:solidFill>
+                      <a:srgbClr val="455A64"/>
+                    </a:solidFill>
+                  </a:tcPr>
+                </a:tc>
+                <a:tc>
+                  <a:txBody>
+                    <a:bodyPr/>
+                    <a:lstStyle/>
+                    <a:p>
+                      <a:pPr indent="0" marL="0">
+                        <a:buNone/>
+                      </a:pPr>
+                      <a:r>
+                        <a:rPr lang="en-US" sz="1200" dirty="0">
+                          <a:solidFill>
+                            <a:srgbClr val="FFFFFF"/>
+                          </a:solidFill>
+                          <a:latin typeface="Cambria" pitchFamily="34" charset="0"/>
+                          <a:ea typeface="Cambria" pitchFamily="34" charset="-122"/>
+                          <a:cs typeface="Cambria" pitchFamily="34" charset="-120"/>
+                        </a:rPr>
+                        <a:t>36.1 / 98.3 s</a:t>
+                      </a:r>
+                      <a:endParaRPr lang="en-US" sz="1200" dirty="0">
+                        <a:latin typeface="Cambria" charset="0"/>
+                        <a:ea typeface="Cambria" charset="0"/>
+                        <a:cs typeface="Cambria" charset="0"/>
+                      </a:endParaRPr>
+                    </a:p>
+                  </a:txBody>
+                  <a:tcPr marL="73152" marR="73152" marT="18288" marB="18288" anchor="ctr">
+                    <a:lnL w="12700" cap="flat" cmpd="sng" algn="ctr">
+                      <a:solidFill>
+                        <a:srgbClr val="37474F"/>
+                      </a:solidFill>
+                      <a:prstDash val="solid"/>
+                      <a:round/>
+                      <a:headEnd type="none" w="med" len="med"/>
+                      <a:tailEnd type="none" w="med" len="med"/>
+                    </a:lnL>
+                    <a:lnR w="12700" cap="flat" cmpd="sng" algn="ctr">
+                      <a:solidFill>
+                        <a:srgbClr val="37474F"/>
+                      </a:solidFill>
+                      <a:prstDash val="solid"/>
+                      <a:round/>
+                      <a:headEnd type="none" w="med" len="med"/>
+                      <a:tailEnd type="none" w="med" len="med"/>
+                    </a:lnR>
+                    <a:lnT w="12700" cap="flat" cmpd="sng" algn="ctr">
+                      <a:solidFill>
+                        <a:srgbClr val="37474F"/>
+                      </a:solidFill>
+                      <a:prstDash val="solid"/>
+                      <a:round/>
+                      <a:headEnd type="none" w="med" len="med"/>
+                      <a:tailEnd type="none" w="med" len="med"/>
+                    </a:lnT>
+                    <a:lnB w="12700" cap="flat" cmpd="sng" algn="ctr">
+                      <a:solidFill>
+                        <a:srgbClr val="37474F"/>
+                      </a:solidFill>
+                      <a:prstDash val="solid"/>
+                      <a:round/>
+                      <a:headEnd type="none" w="med" len="med"/>
+                      <a:tailEnd type="none" w="med" len="med"/>
+                    </a:lnB>
+                    <a:solidFill>
+                      <a:srgbClr val="455A64"/>
+                    </a:solidFill>
+                  </a:tcPr>
+                </a:tc>
+                <a:tc>
+                  <a:txBody>
+                    <a:bodyPr/>
+                    <a:lstStyle/>
+                    <a:p>
+                      <a:pPr indent="0" marL="0">
+                        <a:buNone/>
+                      </a:pPr>
+                      <a:r>
+                        <a:rPr lang="en-US" sz="1200" dirty="0">
+                          <a:solidFill>
+                            <a:srgbClr val="FFFFFF"/>
+                          </a:solidFill>
+                          <a:latin typeface="Cambria" pitchFamily="34" charset="0"/>
+                          <a:ea typeface="Cambria" pitchFamily="34" charset="-122"/>
+                          <a:cs typeface="Cambria" pitchFamily="34" charset="-120"/>
+                        </a:rPr>
+                        <a:t>52.1 min</a:t>
+                      </a:r>
+                      <a:endParaRPr lang="en-US" sz="1200" dirty="0">
+                        <a:latin typeface="Cambria" charset="0"/>
+                        <a:ea typeface="Cambria" charset="0"/>
+                        <a:cs typeface="Cambria" charset="0"/>
+                      </a:endParaRPr>
+                    </a:p>
+                  </a:txBody>
+                  <a:tcPr marL="73152" marR="73152" marT="18288" marB="18288" anchor="ctr">
+                    <a:lnL w="12700" cap="flat" cmpd="sng" algn="ctr">
+                      <a:solidFill>
+                        <a:srgbClr val="37474F"/>
+                      </a:solidFill>
+                      <a:prstDash val="solid"/>
+                      <a:round/>
+                      <a:headEnd type="none" w="med" len="med"/>
+                      <a:tailEnd type="none" w="med" len="med"/>
+                    </a:lnL>
+                    <a:lnR w="12700" cap="flat" cmpd="sng" algn="ctr">
+                      <a:solidFill>
+                        <a:srgbClr val="37474F"/>
+                      </a:solidFill>
+                      <a:prstDash val="solid"/>
+                      <a:round/>
+                      <a:headEnd type="none" w="med" len="med"/>
+                      <a:tailEnd type="none" w="med" len="med"/>
+                    </a:lnR>
+                    <a:lnT w="12700" cap="flat" cmpd="sng" algn="ctr">
+                      <a:solidFill>
+                        <a:srgbClr val="37474F"/>
+                      </a:solidFill>
+                      <a:prstDash val="solid"/>
+                      <a:round/>
+                      <a:headEnd type="none" w="med" len="med"/>
+                      <a:tailEnd type="none" w="med" len="med"/>
+                    </a:lnT>
+                    <a:lnB w="12700" cap="flat" cmpd="sng" algn="ctr">
+                      <a:solidFill>
+                        <a:srgbClr val="37474F"/>
+                      </a:solidFill>
+                      <a:prstDash val="solid"/>
+                      <a:round/>
+                      <a:headEnd type="none" w="med" len="med"/>
+                      <a:tailEnd type="none" w="med" len="med"/>
+                    </a:lnB>
+                    <a:solidFill>
+                      <a:srgbClr val="455A64"/>
+                    </a:solidFill>
+                  </a:tcPr>
+                </a:tc>
+              </a:tr>
+              <a:tr h="274320">
+                <a:tc>
+                  <a:txBody>
+                    <a:bodyPr/>
+                    <a:lstStyle/>
+                    <a:p>
+                      <a:pPr indent="0" marL="0">
+                        <a:buNone/>
+                      </a:pPr>
+                      <a:r>
+                        <a:rPr lang="en-US" sz="1200" dirty="0">
+                          <a:solidFill>
+                            <a:srgbClr val="FFFFFF"/>
+                          </a:solidFill>
+                          <a:latin typeface="Cambria" pitchFamily="34" charset="0"/>
+                          <a:ea typeface="Cambria" pitchFamily="34" charset="-122"/>
+                          <a:cs typeface="Cambria" pitchFamily="34" charset="-120"/>
+                        </a:rPr>
+                        <a:t>Threads (GIL), 4 tiles</a:t>
+                      </a:r>
+                      <a:endParaRPr lang="en-US" sz="1200" dirty="0">
+                        <a:latin typeface="Cambria" charset="0"/>
+                        <a:ea typeface="Cambria" charset="0"/>
+                        <a:cs typeface="Cambria" charset="0"/>
+                      </a:endParaRPr>
+                    </a:p>
+                  </a:txBody>
+                  <a:tcPr marL="73152" marR="73152" marT="18288" marB="18288" anchor="ctr">
+                    <a:lnL w="12700" cap="flat" cmpd="sng" algn="ctr">
+                      <a:solidFill>
+                        <a:srgbClr val="37474F"/>
+                      </a:solidFill>
+                      <a:prstDash val="solid"/>
+                      <a:round/>
+                      <a:headEnd type="none" w="med" len="med"/>
+                      <a:tailEnd type="none" w="med" len="med"/>
+                    </a:lnL>
+                    <a:lnR w="12700" cap="flat" cmpd="sng" algn="ctr">
+                      <a:solidFill>
+                        <a:srgbClr val="37474F"/>
+                      </a:solidFill>
+                      <a:prstDash val="solid"/>
+                      <a:round/>
+                      <a:headEnd type="none" w="med" len="med"/>
+                      <a:tailEnd type="none" w="med" len="med"/>
+                    </a:lnR>
+                    <a:lnT w="12700" cap="flat" cmpd="sng" algn="ctr">
+                      <a:solidFill>
+                        <a:srgbClr val="37474F"/>
+                      </a:solidFill>
+                      <a:prstDash val="solid"/>
+                      <a:round/>
+                      <a:headEnd type="none" w="med" len="med"/>
+                      <a:tailEnd type="none" w="med" len="med"/>
+                    </a:lnT>
+                    <a:lnB w="12700" cap="flat" cmpd="sng" algn="ctr">
+                      <a:solidFill>
+                        <a:srgbClr val="37474F"/>
+                      </a:solidFill>
+                      <a:prstDash val="solid"/>
+                      <a:round/>
+                      <a:headEnd type="none" w="med" len="med"/>
+                      <a:tailEnd type="none" w="med" len="med"/>
+                    </a:lnB>
+                    <a:solidFill>
+                      <a:srgbClr val="455A64"/>
+                    </a:solidFill>
+                  </a:tcPr>
+                </a:tc>
+                <a:tc>
+                  <a:txBody>
+                    <a:bodyPr/>
+                    <a:lstStyle/>
+                    <a:p>
+                      <a:pPr indent="0" marL="0">
+                        <a:buNone/>
+                      </a:pPr>
+                      <a:r>
+                        <a:rPr lang="en-US" sz="1200" dirty="0">
+                          <a:solidFill>
+                            <a:srgbClr val="FFFFFF"/>
+                          </a:solidFill>
+                          <a:latin typeface="Cambria" pitchFamily="34" charset="0"/>
+                          <a:ea typeface="Cambria" pitchFamily="34" charset="-122"/>
+                          <a:cs typeface="Cambria" pitchFamily="34" charset="-120"/>
+                        </a:rPr>
+                        <a:t>68.5 s</a:t>
+                      </a:r>
+                      <a:endParaRPr lang="en-US" sz="1200" dirty="0">
+                        <a:latin typeface="Cambria" charset="0"/>
+                        <a:ea typeface="Cambria" charset="0"/>
+                        <a:cs typeface="Cambria" charset="0"/>
+                      </a:endParaRPr>
+                    </a:p>
+                  </a:txBody>
+                  <a:tcPr marL="73152" marR="73152" marT="18288" marB="18288" anchor="ctr">
+                    <a:lnL w="12700" cap="flat" cmpd="sng" algn="ctr">
+                      <a:solidFill>
+                        <a:srgbClr val="37474F"/>
+                      </a:solidFill>
+                      <a:prstDash val="solid"/>
+                      <a:round/>
+                      <a:headEnd type="none" w="med" len="med"/>
+                      <a:tailEnd type="none" w="med" len="med"/>
+                    </a:lnL>
+                    <a:lnR w="12700" cap="flat" cmpd="sng" algn="ctr">
+                      <a:solidFill>
+                        <a:srgbClr val="37474F"/>
+                      </a:solidFill>
+                      <a:prstDash val="solid"/>
+                      <a:round/>
+                      <a:headEnd type="none" w="med" len="med"/>
+                      <a:tailEnd type="none" w="med" len="med"/>
+                    </a:lnR>
+                    <a:lnT w="12700" cap="flat" cmpd="sng" algn="ctr">
+                      <a:solidFill>
+                        <a:srgbClr val="37474F"/>
+                      </a:solidFill>
+                      <a:prstDash val="solid"/>
+                      <a:round/>
+                      <a:headEnd type="none" w="med" len="med"/>
+                      <a:tailEnd type="none" w="med" len="med"/>
+                    </a:lnT>
+                    <a:lnB w="12700" cap="flat" cmpd="sng" algn="ctr">
+                      <a:solidFill>
+                        <a:srgbClr val="37474F"/>
+                      </a:solidFill>
+                      <a:prstDash val="solid"/>
+                      <a:round/>
+                      <a:headEnd type="none" w="med" len="med"/>
+                      <a:tailEnd type="none" w="med" len="med"/>
+                    </a:lnB>
+                    <a:solidFill>
+                      <a:srgbClr val="455A64"/>
+                    </a:solidFill>
+                  </a:tcPr>
+                </a:tc>
+                <a:tc>
+                  <a:txBody>
+                    <a:bodyPr/>
+                    <a:lstStyle/>
+                    <a:p>
+                      <a:pPr indent="0" marL="0">
+                        <a:buNone/>
+                      </a:pPr>
+                      <a:r>
+                        <a:rPr lang="en-US" sz="1200" dirty="0">
+                          <a:solidFill>
+                            <a:srgbClr val="FFFFFF"/>
+                          </a:solidFill>
+                          <a:latin typeface="Cambria" pitchFamily="34" charset="0"/>
+                          <a:ea typeface="Cambria" pitchFamily="34" charset="-122"/>
+                          <a:cs typeface="Cambria" pitchFamily="34" charset="-120"/>
+                        </a:rPr>
+                        <a:t>40.2 / 107.9 s</a:t>
+                      </a:r>
+                      <a:endParaRPr lang="en-US" sz="1200" dirty="0">
+                        <a:latin typeface="Cambria" charset="0"/>
+                        <a:ea typeface="Cambria" charset="0"/>
+                        <a:cs typeface="Cambria" charset="0"/>
+                      </a:endParaRPr>
+                    </a:p>
+                  </a:txBody>
+                  <a:tcPr marL="73152" marR="73152" marT="18288" marB="18288" anchor="ctr">
+                    <a:lnL w="12700" cap="flat" cmpd="sng" algn="ctr">
+                      <a:solidFill>
+                        <a:srgbClr val="37474F"/>
+                      </a:solidFill>
+                      <a:prstDash val="solid"/>
+                      <a:round/>
+                      <a:headEnd type="none" w="med" len="med"/>
+                      <a:tailEnd type="none" w="med" len="med"/>
+                    </a:lnL>
+                    <a:lnR w="12700" cap="flat" cmpd="sng" algn="ctr">
+                      <a:solidFill>
+                        <a:srgbClr val="37474F"/>
+                      </a:solidFill>
+                      <a:prstDash val="solid"/>
+                      <a:round/>
+                      <a:headEnd type="none" w="med" len="med"/>
+                      <a:tailEnd type="none" w="med" len="med"/>
+                    </a:lnR>
+                    <a:lnT w="12700" cap="flat" cmpd="sng" algn="ctr">
+                      <a:solidFill>
+                        <a:srgbClr val="37474F"/>
+                      </a:solidFill>
+                      <a:prstDash val="solid"/>
+                      <a:round/>
+                      <a:headEnd type="none" w="med" len="med"/>
+                      <a:tailEnd type="none" w="med" len="med"/>
+                    </a:lnT>
+                    <a:lnB w="12700" cap="flat" cmpd="sng" algn="ctr">
+                      <a:solidFill>
+                        <a:srgbClr val="37474F"/>
+                      </a:solidFill>
+                      <a:prstDash val="solid"/>
+                      <a:round/>
+                      <a:headEnd type="none" w="med" len="med"/>
+                      <a:tailEnd type="none" w="med" len="med"/>
+                    </a:lnB>
+                    <a:solidFill>
+                      <a:srgbClr val="455A64"/>
+                    </a:solidFill>
+                  </a:tcPr>
+                </a:tc>
+                <a:tc>
+                  <a:txBody>
+                    <a:bodyPr/>
+                    <a:lstStyle/>
+                    <a:p>
+                      <a:pPr indent="0" marL="0">
+                        <a:buNone/>
+                      </a:pPr>
+                      <a:r>
+                        <a:rPr lang="en-US" sz="1200" dirty="0">
+                          <a:solidFill>
+                            <a:srgbClr val="FFFFFF"/>
+                          </a:solidFill>
+                          <a:latin typeface="Cambria" pitchFamily="34" charset="0"/>
+                          <a:ea typeface="Cambria" pitchFamily="34" charset="-122"/>
+                          <a:cs typeface="Cambria" pitchFamily="34" charset="-120"/>
+                        </a:rPr>
+                        <a:t>57.1 min</a:t>
+                      </a:r>
+                      <a:endParaRPr lang="en-US" sz="1200" dirty="0">
+                        <a:latin typeface="Cambria" charset="0"/>
+                        <a:ea typeface="Cambria" charset="0"/>
+                        <a:cs typeface="Cambria" charset="0"/>
+                      </a:endParaRPr>
+                    </a:p>
+                  </a:txBody>
+                  <a:tcPr marL="73152" marR="73152" marT="18288" marB="18288" anchor="ctr">
+                    <a:lnL w="12700" cap="flat" cmpd="sng" algn="ctr">
+                      <a:solidFill>
+                        <a:srgbClr val="37474F"/>
+                      </a:solidFill>
+                      <a:prstDash val="solid"/>
+                      <a:round/>
+                      <a:headEnd type="none" w="med" len="med"/>
+                      <a:tailEnd type="none" w="med" len="med"/>
+                    </a:lnL>
+                    <a:lnR w="12700" cap="flat" cmpd="sng" algn="ctr">
+                      <a:solidFill>
+                        <a:srgbClr val="37474F"/>
+                      </a:solidFill>
+                      <a:prstDash val="solid"/>
+                      <a:round/>
+                      <a:headEnd type="none" w="med" len="med"/>
+                      <a:tailEnd type="none" w="med" len="med"/>
+                    </a:lnR>
+                    <a:lnT w="12700" cap="flat" cmpd="sng" algn="ctr">
+                      <a:solidFill>
+                        <a:srgbClr val="37474F"/>
+                      </a:solidFill>
+                      <a:prstDash val="solid"/>
+                      <a:round/>
+                      <a:headEnd type="none" w="med" len="med"/>
+                      <a:tailEnd type="none" w="med" len="med"/>
+                    </a:lnT>
+                    <a:lnB w="12700" cap="flat" cmpd="sng" algn="ctr">
+                      <a:solidFill>
+                        <a:srgbClr val="37474F"/>
+                      </a:solidFill>
+                      <a:prstDash val="solid"/>
+                      <a:round/>
+                      <a:headEnd type="none" w="med" len="med"/>
+                      <a:tailEnd type="none" w="med" len="med"/>
+                    </a:lnB>
+                    <a:solidFill>
+                      <a:srgbClr val="455A64"/>
+                    </a:solidFill>
+                  </a:tcPr>
+                </a:tc>
+              </a:tr>
+              <a:tr h="274320">
+                <a:tc>
+                  <a:txBody>
+                    <a:bodyPr/>
+                    <a:lstStyle/>
+                    <a:p>
+                      <a:pPr indent="0" marL="0">
+                        <a:buNone/>
+                      </a:pPr>
+                      <a:r>
+                        <a:rPr lang="en-US" sz="1200" dirty="0">
+                          <a:solidFill>
+                            <a:srgbClr val="FFFFFF"/>
+                          </a:solidFill>
+                          <a:latin typeface="Cambria" pitchFamily="34" charset="0"/>
+                          <a:ea typeface="Cambria" pitchFamily="34" charset="-122"/>
+                          <a:cs typeface="Cambria" pitchFamily="34" charset="-120"/>
+                        </a:rPr>
+                        <a:t>Threads (GIL), 16 tiles</a:t>
+                      </a:r>
+                      <a:endParaRPr lang="en-US" sz="1200" dirty="0">
+                        <a:latin typeface="Cambria" charset="0"/>
+                        <a:ea typeface="Cambria" charset="0"/>
+                        <a:cs typeface="Cambria" charset="0"/>
+                      </a:endParaRPr>
+                    </a:p>
+                  </a:txBody>
+                  <a:tcPr marL="73152" marR="73152" marT="18288" marB="18288" anchor="ctr">
+                    <a:lnL w="12700" cap="flat" cmpd="sng" algn="ctr">
+                      <a:solidFill>
+                        <a:srgbClr val="37474F"/>
+                      </a:solidFill>
+                      <a:prstDash val="solid"/>
+                      <a:round/>
+                      <a:headEnd type="none" w="med" len="med"/>
+                      <a:tailEnd type="none" w="med" len="med"/>
+                    </a:lnL>
+                    <a:lnR w="12700" cap="flat" cmpd="sng" algn="ctr">
+                      <a:solidFill>
+                        <a:srgbClr val="37474F"/>
+                      </a:solidFill>
+                      <a:prstDash val="solid"/>
+                      <a:round/>
+                      <a:headEnd type="none" w="med" len="med"/>
+                      <a:tailEnd type="none" w="med" len="med"/>
+                    </a:lnR>
+                    <a:lnT w="12700" cap="flat" cmpd="sng" algn="ctr">
+                      <a:solidFill>
+                        <a:srgbClr val="37474F"/>
+                      </a:solidFill>
+                      <a:prstDash val="solid"/>
+                      <a:round/>
+                      <a:headEnd type="none" w="med" len="med"/>
+                      <a:tailEnd type="none" w="med" len="med"/>
+                    </a:lnT>
+                    <a:lnB w="12700" cap="flat" cmpd="sng" algn="ctr">
+                      <a:solidFill>
+                        <a:srgbClr val="37474F"/>
+                      </a:solidFill>
+                      <a:prstDash val="solid"/>
+                      <a:round/>
+                      <a:headEnd type="none" w="med" len="med"/>
+                      <a:tailEnd type="none" w="med" len="med"/>
+                    </a:lnB>
+                    <a:solidFill>
+                      <a:srgbClr val="455A64"/>
+                    </a:solidFill>
+                  </a:tcPr>
+                </a:tc>
+                <a:tc>
+                  <a:txBody>
+                    <a:bodyPr/>
+                    <a:lstStyle/>
+                    <a:p>
+                      <a:pPr indent="0" marL="0">
+                        <a:buNone/>
+                      </a:pPr>
+                      <a:r>
+                        <a:rPr lang="en-US" sz="1200" dirty="0">
+                          <a:solidFill>
+                            <a:srgbClr val="FFFFFF"/>
+                          </a:solidFill>
+                          <a:latin typeface="Cambria" pitchFamily="34" charset="0"/>
+                          <a:ea typeface="Cambria" pitchFamily="34" charset="-122"/>
+                          <a:cs typeface="Cambria" pitchFamily="34" charset="-120"/>
+                        </a:rPr>
+                        <a:t>63.3 s</a:t>
+                      </a:r>
+                      <a:endParaRPr lang="en-US" sz="1200" dirty="0">
+                        <a:latin typeface="Cambria" charset="0"/>
+                        <a:ea typeface="Cambria" charset="0"/>
+                        <a:cs typeface="Cambria" charset="0"/>
+                      </a:endParaRPr>
+                    </a:p>
+                  </a:txBody>
+                  <a:tcPr marL="73152" marR="73152" marT="18288" marB="18288" anchor="ctr">
+                    <a:lnL w="12700" cap="flat" cmpd="sng" algn="ctr">
+                      <a:solidFill>
+                        <a:srgbClr val="37474F"/>
+                      </a:solidFill>
+                      <a:prstDash val="solid"/>
+                      <a:round/>
+                      <a:headEnd type="none" w="med" len="med"/>
+                      <a:tailEnd type="none" w="med" len="med"/>
+                    </a:lnL>
+                    <a:lnR w="12700" cap="flat" cmpd="sng" algn="ctr">
+                      <a:solidFill>
+                        <a:srgbClr val="37474F"/>
+                      </a:solidFill>
+                      <a:prstDash val="solid"/>
+                      <a:round/>
+                      <a:headEnd type="none" w="med" len="med"/>
+                      <a:tailEnd type="none" w="med" len="med"/>
+                    </a:lnR>
+                    <a:lnT w="12700" cap="flat" cmpd="sng" algn="ctr">
+                      <a:solidFill>
+                        <a:srgbClr val="37474F"/>
+                      </a:solidFill>
+                      <a:prstDash val="solid"/>
+                      <a:round/>
+                      <a:headEnd type="none" w="med" len="med"/>
+                      <a:tailEnd type="none" w="med" len="med"/>
+                    </a:lnT>
+                    <a:lnB w="12700" cap="flat" cmpd="sng" algn="ctr">
+                      <a:solidFill>
+                        <a:srgbClr val="37474F"/>
+                      </a:solidFill>
+                      <a:prstDash val="solid"/>
+                      <a:round/>
+                      <a:headEnd type="none" w="med" len="med"/>
+                      <a:tailEnd type="none" w="med" len="med"/>
+                    </a:lnB>
+                    <a:solidFill>
+                      <a:srgbClr val="455A64"/>
+                    </a:solidFill>
+                  </a:tcPr>
+                </a:tc>
+                <a:tc>
+                  <a:txBody>
+                    <a:bodyPr/>
+                    <a:lstStyle/>
+                    <a:p>
+                      <a:pPr indent="0" marL="0">
+                        <a:buNone/>
+                      </a:pPr>
+                      <a:r>
+                        <a:rPr lang="en-US" sz="1200" dirty="0">
+                          <a:solidFill>
+                            <a:srgbClr val="FFFFFF"/>
+                          </a:solidFill>
+                          <a:latin typeface="Cambria" pitchFamily="34" charset="0"/>
+                          <a:ea typeface="Cambria" pitchFamily="34" charset="-122"/>
+                          <a:cs typeface="Cambria" pitchFamily="34" charset="-120"/>
+                        </a:rPr>
+                        <a:t>36.7 / 100.8 s</a:t>
+                      </a:r>
+                      <a:endParaRPr lang="en-US" sz="1200" dirty="0">
+                        <a:latin typeface="Cambria" charset="0"/>
+                        <a:ea typeface="Cambria" charset="0"/>
+                        <a:cs typeface="Cambria" charset="0"/>
+                      </a:endParaRPr>
+                    </a:p>
+                  </a:txBody>
+                  <a:tcPr marL="73152" marR="73152" marT="18288" marB="18288" anchor="ctr">
+                    <a:lnL w="12700" cap="flat" cmpd="sng" algn="ctr">
+                      <a:solidFill>
+                        <a:srgbClr val="37474F"/>
+                      </a:solidFill>
+                      <a:prstDash val="solid"/>
+                      <a:round/>
+                      <a:headEnd type="none" w="med" len="med"/>
+                      <a:tailEnd type="none" w="med" len="med"/>
+                    </a:lnL>
+                    <a:lnR w="12700" cap="flat" cmpd="sng" algn="ctr">
+                      <a:solidFill>
+                        <a:srgbClr val="37474F"/>
+                      </a:solidFill>
+                      <a:prstDash val="solid"/>
+                      <a:round/>
+                      <a:headEnd type="none" w="med" len="med"/>
+                      <a:tailEnd type="none" w="med" len="med"/>
+                    </a:lnR>
+                    <a:lnT w="12700" cap="flat" cmpd="sng" algn="ctr">
+                      <a:solidFill>
+                        <a:srgbClr val="37474F"/>
+                      </a:solidFill>
+                      <a:prstDash val="solid"/>
+                      <a:round/>
+                      <a:headEnd type="none" w="med" len="med"/>
+                      <a:tailEnd type="none" w="med" len="med"/>
+                    </a:lnT>
+                    <a:lnB w="12700" cap="flat" cmpd="sng" algn="ctr">
+                      <a:solidFill>
+                        <a:srgbClr val="37474F"/>
+                      </a:solidFill>
+                      <a:prstDash val="solid"/>
+                      <a:round/>
+                      <a:headEnd type="none" w="med" len="med"/>
+                      <a:tailEnd type="none" w="med" len="med"/>
+                    </a:lnB>
+                    <a:solidFill>
+                      <a:srgbClr val="455A64"/>
+                    </a:solidFill>
+                  </a:tcPr>
+                </a:tc>
+                <a:tc>
+                  <a:txBody>
+                    <a:bodyPr/>
+                    <a:lstStyle/>
+                    <a:p>
+                      <a:pPr indent="0" marL="0">
+                        <a:buNone/>
+                      </a:pPr>
+                      <a:r>
+                        <a:rPr lang="en-US" sz="1200" dirty="0">
+                          <a:solidFill>
+                            <a:srgbClr val="FFFFFF"/>
+                          </a:solidFill>
+                          <a:latin typeface="Cambria" pitchFamily="34" charset="0"/>
+                          <a:ea typeface="Cambria" pitchFamily="34" charset="-122"/>
+                          <a:cs typeface="Cambria" pitchFamily="34" charset="-120"/>
+                        </a:rPr>
+                        <a:t>52.7 min</a:t>
+                      </a:r>
+                      <a:endParaRPr lang="en-US" sz="1200" dirty="0">
+                        <a:latin typeface="Cambria" charset="0"/>
+                        <a:ea typeface="Cambria" charset="0"/>
+                        <a:cs typeface="Cambria" charset="0"/>
+                      </a:endParaRPr>
+                    </a:p>
+                  </a:txBody>
+                  <a:tcPr marL="73152" marR="73152" marT="18288" marB="18288" anchor="ctr">
+                    <a:lnL w="12700" cap="flat" cmpd="sng" algn="ctr">
+                      <a:solidFill>
+                        <a:srgbClr val="37474F"/>
+                      </a:solidFill>
+                      <a:prstDash val="solid"/>
+                      <a:round/>
+                      <a:headEnd type="none" w="med" len="med"/>
+                      <a:tailEnd type="none" w="med" len="med"/>
+                    </a:lnL>
+                    <a:lnR w="12700" cap="flat" cmpd="sng" algn="ctr">
+                      <a:solidFill>
+                        <a:srgbClr val="37474F"/>
+                      </a:solidFill>
+                      <a:prstDash val="solid"/>
+                      <a:round/>
+                      <a:headEnd type="none" w="med" len="med"/>
+                      <a:tailEnd type="none" w="med" len="med"/>
+                    </a:lnR>
+                    <a:lnT w="12700" cap="flat" cmpd="sng" algn="ctr">
+                      <a:solidFill>
+                        <a:srgbClr val="37474F"/>
+                      </a:solidFill>
+                      <a:prstDash val="solid"/>
+                      <a:round/>
+                      <a:headEnd type="none" w="med" len="med"/>
+                      <a:tailEnd type="none" w="med" len="med"/>
+                    </a:lnT>
+                    <a:lnB w="12700" cap="flat" cmpd="sng" algn="ctr">
+                      <a:solidFill>
+                        <a:srgbClr val="37474F"/>
+                      </a:solidFill>
+                      <a:prstDash val="solid"/>
+                      <a:round/>
+                      <a:headEnd type="none" w="med" len="med"/>
+                      <a:tailEnd type="none" w="med" len="med"/>
+                    </a:lnB>
+                    <a:solidFill>
+                      <a:srgbClr val="455A64"/>
+                    </a:solidFill>
+                  </a:tcPr>
+                </a:tc>
+              </a:tr>
+              <a:tr h="274320">
+                <a:tc>
+                  <a:txBody>
+                    <a:bodyPr/>
+                    <a:lstStyle/>
+                    <a:p>
+                      <a:pPr indent="0" marL="0">
+                        <a:buNone/>
+                      </a:pPr>
+                      <a:r>
+                        <a:rPr lang="en-US" sz="1200" b="1" dirty="0">
+                          <a:solidFill>
+                            <a:srgbClr val="F2B830"/>
+                          </a:solidFill>
+                          <a:latin typeface="Cambria" pitchFamily="34" charset="0"/>
+                          <a:ea typeface="Cambria" pitchFamily="34" charset="-122"/>
+                          <a:cs typeface="Cambria" pitchFamily="34" charset="-120"/>
+                        </a:rPr>
+                        <a:t>Processes, 4 tiles</a:t>
+                      </a:r>
+                      <a:endParaRPr lang="en-US" sz="1200" dirty="0">
+                        <a:latin typeface="Cambria" charset="0"/>
+                        <a:ea typeface="Cambria" charset="0"/>
+                        <a:cs typeface="Cambria" charset="0"/>
+                      </a:endParaRPr>
+                    </a:p>
+                  </a:txBody>
+                  <a:tcPr marL="73152" marR="73152" marT="18288" marB="18288" anchor="ctr">
+                    <a:lnL w="12700" cap="flat" cmpd="sng" algn="ctr">
+                      <a:solidFill>
+                        <a:srgbClr val="37474F"/>
+                      </a:solidFill>
+                      <a:prstDash val="solid"/>
+                      <a:round/>
+                      <a:headEnd type="none" w="med" len="med"/>
+                      <a:tailEnd type="none" w="med" len="med"/>
+                    </a:lnL>
+                    <a:lnR w="12700" cap="flat" cmpd="sng" algn="ctr">
+                      <a:solidFill>
+                        <a:srgbClr val="37474F"/>
+                      </a:solidFill>
+                      <a:prstDash val="solid"/>
+                      <a:round/>
+                      <a:headEnd type="none" w="med" len="med"/>
+                      <a:tailEnd type="none" w="med" len="med"/>
+                    </a:lnR>
+                    <a:lnT w="12700" cap="flat" cmpd="sng" algn="ctr">
+                      <a:solidFill>
+                        <a:srgbClr val="37474F"/>
+                      </a:solidFill>
+                      <a:prstDash val="solid"/>
+                      <a:round/>
+                      <a:headEnd type="none" w="med" len="med"/>
+                      <a:tailEnd type="none" w="med" len="med"/>
+                    </a:lnT>
+                    <a:lnB w="12700" cap="flat" cmpd="sng" algn="ctr">
+                      <a:solidFill>
+                        <a:srgbClr val="37474F"/>
+                      </a:solidFill>
+                      <a:prstDash val="solid"/>
+                      <a:round/>
+                      <a:headEnd type="none" w="med" len="med"/>
+                      <a:tailEnd type="none" w="med" len="med"/>
+                    </a:lnB>
+                    <a:solidFill>
+                      <a:srgbClr val="455A64"/>
+                    </a:solidFill>
+                  </a:tcPr>
+                </a:tc>
+                <a:tc>
+                  <a:txBody>
+                    <a:bodyPr/>
+                    <a:lstStyle/>
+                    <a:p>
+                      <a:pPr indent="0" marL="0">
+                        <a:buNone/>
+                      </a:pPr>
+                      <a:r>
+                        <a:rPr lang="en-US" sz="1200" b="1" dirty="0">
+                          <a:solidFill>
+                            <a:srgbClr val="F2B830"/>
+                          </a:solidFill>
+                          <a:latin typeface="Cambria" pitchFamily="34" charset="0"/>
+                          <a:ea typeface="Cambria" pitchFamily="34" charset="-122"/>
+                          <a:cs typeface="Cambria" pitchFamily="34" charset="-120"/>
+                        </a:rPr>
+                        <a:t>20.9 s</a:t>
+                      </a:r>
+                      <a:endParaRPr lang="en-US" sz="1200" dirty="0">
+                        <a:latin typeface="Cambria" charset="0"/>
+                        <a:ea typeface="Cambria" charset="0"/>
+                        <a:cs typeface="Cambria" charset="0"/>
+                      </a:endParaRPr>
+                    </a:p>
+                  </a:txBody>
+                  <a:tcPr marL="73152" marR="73152" marT="18288" marB="18288" anchor="ctr">
+                    <a:lnL w="12700" cap="flat" cmpd="sng" algn="ctr">
+                      <a:solidFill>
+                        <a:srgbClr val="37474F"/>
+                      </a:solidFill>
+                      <a:prstDash val="solid"/>
+                      <a:round/>
+                      <a:headEnd type="none" w="med" len="med"/>
+                      <a:tailEnd type="none" w="med" len="med"/>
+                    </a:lnL>
+                    <a:lnR w="12700" cap="flat" cmpd="sng" algn="ctr">
+                      <a:solidFill>
+                        <a:srgbClr val="37474F"/>
+                      </a:solidFill>
+                      <a:prstDash val="solid"/>
+                      <a:round/>
+                      <a:headEnd type="none" w="med" len="med"/>
+                      <a:tailEnd type="none" w="med" len="med"/>
+                    </a:lnR>
+                    <a:lnT w="12700" cap="flat" cmpd="sng" algn="ctr">
+                      <a:solidFill>
+                        <a:srgbClr val="37474F"/>
+                      </a:solidFill>
+                      <a:prstDash val="solid"/>
+                      <a:round/>
+                      <a:headEnd type="none" w="med" len="med"/>
+                      <a:tailEnd type="none" w="med" len="med"/>
+                    </a:lnT>
+                    <a:lnB w="12700" cap="flat" cmpd="sng" algn="ctr">
+                      <a:solidFill>
+                        <a:srgbClr val="37474F"/>
+                      </a:solidFill>
+                      <a:prstDash val="solid"/>
+                      <a:round/>
+                      <a:headEnd type="none" w="med" len="med"/>
+                      <a:tailEnd type="none" w="med" len="med"/>
+                    </a:lnB>
+                    <a:solidFill>
+                      <a:srgbClr val="455A64"/>
+                    </a:solidFill>
+                  </a:tcPr>
+                </a:tc>
+                <a:tc>
+                  <a:txBody>
+                    <a:bodyPr/>
+                    <a:lstStyle/>
+                    <a:p>
+                      <a:pPr indent="0" marL="0">
+                        <a:buNone/>
+                      </a:pPr>
+                      <a:r>
+                        <a:rPr lang="en-US" sz="1200" dirty="0">
+                          <a:solidFill>
+                            <a:srgbClr val="FFFFFF"/>
+                          </a:solidFill>
+                          <a:latin typeface="Cambria" pitchFamily="34" charset="0"/>
+                          <a:ea typeface="Cambria" pitchFamily="34" charset="-122"/>
+                          <a:cs typeface="Cambria" pitchFamily="34" charset="-120"/>
+                        </a:rPr>
+                        <a:t>13.1 / 34.6 s</a:t>
+                      </a:r>
+                      <a:endParaRPr lang="en-US" sz="1200" dirty="0">
+                        <a:latin typeface="Cambria" charset="0"/>
+                        <a:ea typeface="Cambria" charset="0"/>
+                        <a:cs typeface="Cambria" charset="0"/>
+                      </a:endParaRPr>
+                    </a:p>
+                  </a:txBody>
+                  <a:tcPr marL="73152" marR="73152" marT="18288" marB="18288" anchor="ctr">
+                    <a:lnL w="12700" cap="flat" cmpd="sng" algn="ctr">
+                      <a:solidFill>
+                        <a:srgbClr val="37474F"/>
+                      </a:solidFill>
+                      <a:prstDash val="solid"/>
+                      <a:round/>
+                      <a:headEnd type="none" w="med" len="med"/>
+                      <a:tailEnd type="none" w="med" len="med"/>
+                    </a:lnL>
+                    <a:lnR w="12700" cap="flat" cmpd="sng" algn="ctr">
+                      <a:solidFill>
+                        <a:srgbClr val="37474F"/>
+                      </a:solidFill>
+                      <a:prstDash val="solid"/>
+                      <a:round/>
+                      <a:headEnd type="none" w="med" len="med"/>
+                      <a:tailEnd type="none" w="med" len="med"/>
+                    </a:lnR>
+                    <a:lnT w="12700" cap="flat" cmpd="sng" algn="ctr">
+                      <a:solidFill>
+                        <a:srgbClr val="37474F"/>
+                      </a:solidFill>
+                      <a:prstDash val="solid"/>
+                      <a:round/>
+                      <a:headEnd type="none" w="med" len="med"/>
+                      <a:tailEnd type="none" w="med" len="med"/>
+                    </a:lnT>
+                    <a:lnB w="12700" cap="flat" cmpd="sng" algn="ctr">
+                      <a:solidFill>
+                        <a:srgbClr val="37474F"/>
+                      </a:solidFill>
+                      <a:prstDash val="solid"/>
+                      <a:round/>
+                      <a:headEnd type="none" w="med" len="med"/>
+                      <a:tailEnd type="none" w="med" len="med"/>
+                    </a:lnB>
+                    <a:solidFill>
+                      <a:srgbClr val="455A64"/>
+                    </a:solidFill>
+                  </a:tcPr>
+                </a:tc>
+                <a:tc>
+                  <a:txBody>
+                    <a:bodyPr/>
+                    <a:lstStyle/>
+                    <a:p>
+                      <a:pPr indent="0" marL="0">
+                        <a:buNone/>
+                      </a:pPr>
+                      <a:r>
+                        <a:rPr lang="en-US" sz="1200" b="1" dirty="0">
+                          <a:solidFill>
+                            <a:srgbClr val="F2B830"/>
+                          </a:solidFill>
+                          <a:latin typeface="Cambria" pitchFamily="34" charset="0"/>
+                          <a:ea typeface="Cambria" pitchFamily="34" charset="-122"/>
+                          <a:cs typeface="Cambria" pitchFamily="34" charset="-120"/>
+                        </a:rPr>
+                        <a:t>17.5 min</a:t>
+                      </a:r>
+                      <a:endParaRPr lang="en-US" sz="1200" dirty="0">
+                        <a:latin typeface="Cambria" charset="0"/>
+                        <a:ea typeface="Cambria" charset="0"/>
+                        <a:cs typeface="Cambria" charset="0"/>
+                      </a:endParaRPr>
+                    </a:p>
+                  </a:txBody>
+                  <a:tcPr marL="73152" marR="73152" marT="18288" marB="18288" anchor="ctr">
+                    <a:lnL w="12700" cap="flat" cmpd="sng" algn="ctr">
+                      <a:solidFill>
+                        <a:srgbClr val="37474F"/>
+                      </a:solidFill>
+                      <a:prstDash val="solid"/>
+                      <a:round/>
+                      <a:headEnd type="none" w="med" len="med"/>
+                      <a:tailEnd type="none" w="med" len="med"/>
+                    </a:lnL>
+                    <a:lnR w="12700" cap="flat" cmpd="sng" algn="ctr">
+                      <a:solidFill>
+                        <a:srgbClr val="37474F"/>
+                      </a:solidFill>
+                      <a:prstDash val="solid"/>
+                      <a:round/>
+                      <a:headEnd type="none" w="med" len="med"/>
+                      <a:tailEnd type="none" w="med" len="med"/>
+                    </a:lnR>
+                    <a:lnT w="12700" cap="flat" cmpd="sng" algn="ctr">
+                      <a:solidFill>
+                        <a:srgbClr val="37474F"/>
+                      </a:solidFill>
+                      <a:prstDash val="solid"/>
+                      <a:round/>
+                      <a:headEnd type="none" w="med" len="med"/>
+                      <a:tailEnd type="none" w="med" len="med"/>
+                    </a:lnT>
+                    <a:lnB w="12700" cap="flat" cmpd="sng" algn="ctr">
+                      <a:solidFill>
+                        <a:srgbClr val="37474F"/>
+                      </a:solidFill>
+                      <a:prstDash val="solid"/>
+                      <a:round/>
+                      <a:headEnd type="none" w="med" len="med"/>
+                      <a:tailEnd type="none" w="med" len="med"/>
+                    </a:lnB>
+                    <a:solidFill>
+                      <a:srgbClr val="455A64"/>
+                    </a:solidFill>
+                  </a:tcPr>
+                </a:tc>
+              </a:tr>
+              <a:tr h="274320">
+                <a:tc>
+                  <a:txBody>
+                    <a:bodyPr/>
+                    <a:lstStyle/>
+                    <a:p>
+                      <a:pPr indent="0" marL="0">
+                        <a:buNone/>
+                      </a:pPr>
+                      <a:r>
+                        <a:rPr lang="en-US" sz="1200" b="1" dirty="0">
+                          <a:solidFill>
+                            <a:srgbClr val="F2B830"/>
+                          </a:solidFill>
+                          <a:latin typeface="Cambria" pitchFamily="34" charset="0"/>
+                          <a:ea typeface="Cambria" pitchFamily="34" charset="-122"/>
+                          <a:cs typeface="Cambria" pitchFamily="34" charset="-120"/>
+                        </a:rPr>
+                        <a:t>Processes, 16 tiles</a:t>
+                      </a:r>
+                      <a:endParaRPr lang="en-US" sz="1200" dirty="0">
+                        <a:latin typeface="Cambria" charset="0"/>
+                        <a:ea typeface="Cambria" charset="0"/>
+                        <a:cs typeface="Cambria" charset="0"/>
+                      </a:endParaRPr>
+                    </a:p>
+                  </a:txBody>
+                  <a:tcPr marL="73152" marR="73152" marT="18288" marB="18288" anchor="ctr">
+                    <a:lnL w="12700" cap="flat" cmpd="sng" algn="ctr">
+                      <a:solidFill>
+                        <a:srgbClr val="37474F"/>
+                      </a:solidFill>
+                      <a:prstDash val="solid"/>
+                      <a:round/>
+                      <a:headEnd type="none" w="med" len="med"/>
+                      <a:tailEnd type="none" w="med" len="med"/>
+                    </a:lnL>
+                    <a:lnR w="12700" cap="flat" cmpd="sng" algn="ctr">
+                      <a:solidFill>
+                        <a:srgbClr val="37474F"/>
+                      </a:solidFill>
+                      <a:prstDash val="solid"/>
+                      <a:round/>
+                      <a:headEnd type="none" w="med" len="med"/>
+                      <a:tailEnd type="none" w="med" len="med"/>
+                    </a:lnR>
+                    <a:lnT w="12700" cap="flat" cmpd="sng" algn="ctr">
+                      <a:solidFill>
+                        <a:srgbClr val="37474F"/>
+                      </a:solidFill>
+                      <a:prstDash val="solid"/>
+                      <a:round/>
+                      <a:headEnd type="none" w="med" len="med"/>
+                      <a:tailEnd type="none" w="med" len="med"/>
+                    </a:lnT>
+                    <a:lnB w="12700" cap="flat" cmpd="sng" algn="ctr">
+                      <a:solidFill>
+                        <a:srgbClr val="37474F"/>
+                      </a:solidFill>
+                      <a:prstDash val="solid"/>
+                      <a:round/>
+                      <a:headEnd type="none" w="med" len="med"/>
+                      <a:tailEnd type="none" w="med" len="med"/>
+                    </a:lnB>
+                    <a:solidFill>
+                      <a:srgbClr val="455A64"/>
+                    </a:solidFill>
+                  </a:tcPr>
+                </a:tc>
+                <a:tc>
+                  <a:txBody>
+                    <a:bodyPr/>
+                    <a:lstStyle/>
+                    <a:p>
+                      <a:pPr indent="0" marL="0">
+                        <a:buNone/>
+                      </a:pPr>
+                      <a:r>
+                        <a:rPr lang="en-US" sz="1200" b="1" dirty="0">
+                          <a:solidFill>
+                            <a:srgbClr val="F2B830"/>
+                          </a:solidFill>
+                          <a:latin typeface="Cambria" pitchFamily="34" charset="0"/>
+                          <a:ea typeface="Cambria" pitchFamily="34" charset="-122"/>
+                          <a:cs typeface="Cambria" pitchFamily="34" charset="-120"/>
+                        </a:rPr>
+                        <a:t>10.6 s</a:t>
+                      </a:r>
+                      <a:endParaRPr lang="en-US" sz="1200" dirty="0">
+                        <a:latin typeface="Cambria" charset="0"/>
+                        <a:ea typeface="Cambria" charset="0"/>
+                        <a:cs typeface="Cambria" charset="0"/>
+                      </a:endParaRPr>
+                    </a:p>
+                  </a:txBody>
+                  <a:tcPr marL="73152" marR="73152" marT="18288" marB="18288" anchor="ctr">
+                    <a:lnL w="12700" cap="flat" cmpd="sng" algn="ctr">
+                      <a:solidFill>
+                        <a:srgbClr val="37474F"/>
+                      </a:solidFill>
+                      <a:prstDash val="solid"/>
+                      <a:round/>
+                      <a:headEnd type="none" w="med" len="med"/>
+                      <a:tailEnd type="none" w="med" len="med"/>
+                    </a:lnL>
+                    <a:lnR w="12700" cap="flat" cmpd="sng" algn="ctr">
+                      <a:solidFill>
+                        <a:srgbClr val="37474F"/>
+                      </a:solidFill>
+                      <a:prstDash val="solid"/>
+                      <a:round/>
+                      <a:headEnd type="none" w="med" len="med"/>
+                      <a:tailEnd type="none" w="med" len="med"/>
+                    </a:lnR>
+                    <a:lnT w="12700" cap="flat" cmpd="sng" algn="ctr">
+                      <a:solidFill>
+                        <a:srgbClr val="37474F"/>
+                      </a:solidFill>
+                      <a:prstDash val="solid"/>
+                      <a:round/>
+                      <a:headEnd type="none" w="med" len="med"/>
+                      <a:tailEnd type="none" w="med" len="med"/>
+                    </a:lnT>
+                    <a:lnB w="12700" cap="flat" cmpd="sng" algn="ctr">
+                      <a:solidFill>
+                        <a:srgbClr val="37474F"/>
+                      </a:solidFill>
+                      <a:prstDash val="solid"/>
+                      <a:round/>
+                      <a:headEnd type="none" w="med" len="med"/>
+                      <a:tailEnd type="none" w="med" len="med"/>
+                    </a:lnB>
+                    <a:solidFill>
+                      <a:srgbClr val="455A64"/>
+                    </a:solidFill>
+                  </a:tcPr>
+                </a:tc>
+                <a:tc>
+                  <a:txBody>
+                    <a:bodyPr/>
+                    <a:lstStyle/>
+                    <a:p>
+                      <a:pPr indent="0" marL="0">
+                        <a:buNone/>
+                      </a:pPr>
+                      <a:r>
+                        <a:rPr lang="en-US" sz="1200" dirty="0">
+                          <a:solidFill>
+                            <a:srgbClr val="FFFFFF"/>
+                          </a:solidFill>
+                          <a:latin typeface="Cambria" pitchFamily="34" charset="0"/>
+                          <a:ea typeface="Cambria" pitchFamily="34" charset="-122"/>
+                          <a:cs typeface="Cambria" pitchFamily="34" charset="-120"/>
+                        </a:rPr>
+                        <a:t>7.5 / 16.2 s</a:t>
+                      </a:r>
+                      <a:endParaRPr lang="en-US" sz="1200" dirty="0">
+                        <a:latin typeface="Cambria" charset="0"/>
+                        <a:ea typeface="Cambria" charset="0"/>
+                        <a:cs typeface="Cambria" charset="0"/>
+                      </a:endParaRPr>
+                    </a:p>
+                  </a:txBody>
+                  <a:tcPr marL="73152" marR="73152" marT="18288" marB="18288" anchor="ctr">
+                    <a:lnL w="12700" cap="flat" cmpd="sng" algn="ctr">
+                      <a:solidFill>
+                        <a:srgbClr val="37474F"/>
+                      </a:solidFill>
+                      <a:prstDash val="solid"/>
+                      <a:round/>
+                      <a:headEnd type="none" w="med" len="med"/>
+                      <a:tailEnd type="none" w="med" len="med"/>
+                    </a:lnL>
+                    <a:lnR w="12700" cap="flat" cmpd="sng" algn="ctr">
+                      <a:solidFill>
+                        <a:srgbClr val="37474F"/>
+                      </a:solidFill>
+                      <a:prstDash val="solid"/>
+                      <a:round/>
+                      <a:headEnd type="none" w="med" len="med"/>
+                      <a:tailEnd type="none" w="med" len="med"/>
+                    </a:lnR>
+                    <a:lnT w="12700" cap="flat" cmpd="sng" algn="ctr">
+                      <a:solidFill>
+                        <a:srgbClr val="37474F"/>
+                      </a:solidFill>
+                      <a:prstDash val="solid"/>
+                      <a:round/>
+                      <a:headEnd type="none" w="med" len="med"/>
+                      <a:tailEnd type="none" w="med" len="med"/>
+                    </a:lnT>
+                    <a:lnB w="12700" cap="flat" cmpd="sng" algn="ctr">
+                      <a:solidFill>
+                        <a:srgbClr val="37474F"/>
+                      </a:solidFill>
+                      <a:prstDash val="solid"/>
+                      <a:round/>
+                      <a:headEnd type="none" w="med" len="med"/>
+                      <a:tailEnd type="none" w="med" len="med"/>
+                    </a:lnB>
+                    <a:solidFill>
+                      <a:srgbClr val="455A64"/>
+                    </a:solidFill>
+                  </a:tcPr>
+                </a:tc>
+                <a:tc>
+                  <a:txBody>
+                    <a:bodyPr/>
+                    <a:lstStyle/>
+                    <a:p>
+                      <a:pPr indent="0" marL="0">
+                        <a:buNone/>
+                      </a:pPr>
+                      <a:r>
+                        <a:rPr lang="en-US" sz="1200" b="1" dirty="0">
+                          <a:solidFill>
+                            <a:srgbClr val="F2B830"/>
+                          </a:solidFill>
+                          <a:latin typeface="Cambria" pitchFamily="34" charset="0"/>
+                          <a:ea typeface="Cambria" pitchFamily="34" charset="-122"/>
+                          <a:cs typeface="Cambria" pitchFamily="34" charset="-120"/>
+                        </a:rPr>
+                        <a:t>8.8 min</a:t>
+                      </a:r>
+                      <a:endParaRPr lang="en-US" sz="1200" dirty="0">
+                        <a:latin typeface="Cambria" charset="0"/>
+                        <a:ea typeface="Cambria" charset="0"/>
+                        <a:cs typeface="Cambria" charset="0"/>
+                      </a:endParaRPr>
+                    </a:p>
+                  </a:txBody>
+                  <a:tcPr marL="73152" marR="73152" marT="18288" marB="18288" anchor="ctr">
+                    <a:lnL w="12700" cap="flat" cmpd="sng" algn="ctr">
+                      <a:solidFill>
+                        <a:srgbClr val="37474F"/>
+                      </a:solidFill>
+                      <a:prstDash val="solid"/>
+                      <a:round/>
+                      <a:headEnd type="none" w="med" len="med"/>
+                      <a:tailEnd type="none" w="med" len="med"/>
+                    </a:lnL>
+                    <a:lnR w="12700" cap="flat" cmpd="sng" algn="ctr">
+                      <a:solidFill>
+                        <a:srgbClr val="37474F"/>
+                      </a:solidFill>
+                      <a:prstDash val="solid"/>
+                      <a:round/>
+                      <a:headEnd type="none" w="med" len="med"/>
+                      <a:tailEnd type="none" w="med" len="med"/>
+                    </a:lnR>
+                    <a:lnT w="12700" cap="flat" cmpd="sng" algn="ctr">
+                      <a:solidFill>
+                        <a:srgbClr val="37474F"/>
+                      </a:solidFill>
+                      <a:prstDash val="solid"/>
+                      <a:round/>
+                      <a:headEnd type="none" w="med" len="med"/>
+                      <a:tailEnd type="none" w="med" len="med"/>
+                    </a:lnT>
+                    <a:lnB w="12700" cap="flat" cmpd="sng" algn="ctr">
+                      <a:solidFill>
+                        <a:srgbClr val="37474F"/>
+                      </a:solidFill>
+                      <a:prstDash val="solid"/>
+                      <a:round/>
+                      <a:headEnd type="none" w="med" len="med"/>
+                      <a:tailEnd type="none" w="med" len="med"/>
+                    </a:lnB>
+                    <a:solidFill>
+                      <a:srgbClr val="455A64"/>
+                    </a:solidFill>
+                  </a:tcPr>
+                </a:tc>
+              </a:tr>
+              <a:tr h="274320">
+                <a:tc>
+                  <a:txBody>
+                    <a:bodyPr/>
+                    <a:lstStyle/>
+                    <a:p>
+                      <a:pPr indent="0" marL="0">
+                        <a:buNone/>
+                      </a:pPr>
+                      <a:r>
+                        <a:rPr lang="en-US" sz="1200" dirty="0">
+                          <a:solidFill>
+                            <a:srgbClr val="FFFFFF"/>
+                          </a:solidFill>
+                          <a:latin typeface="Cambria" pitchFamily="34" charset="0"/>
+                          <a:ea typeface="Cambria" pitchFamily="34" charset="-122"/>
+                          <a:cs typeface="Cambria" pitchFamily="34" charset="-120"/>
+                        </a:rPr>
+                        <a:t>No-GIL: serial, whole image</a:t>
+                      </a:r>
+                      <a:endParaRPr lang="en-US" sz="1200" dirty="0">
+                        <a:latin typeface="Cambria" charset="0"/>
+                        <a:ea typeface="Cambria" charset="0"/>
+                        <a:cs typeface="Cambria" charset="0"/>
+                      </a:endParaRPr>
+                    </a:p>
+                  </a:txBody>
+                  <a:tcPr marL="73152" marR="73152" marT="18288" marB="18288" anchor="ctr">
+                    <a:lnL w="12700" cap="flat" cmpd="sng" algn="ctr">
+                      <a:solidFill>
+                        <a:srgbClr val="37474F"/>
+                      </a:solidFill>
+                      <a:prstDash val="solid"/>
+                      <a:round/>
+                      <a:headEnd type="none" w="med" len="med"/>
+                      <a:tailEnd type="none" w="med" len="med"/>
+                    </a:lnL>
+                    <a:lnR w="12700" cap="flat" cmpd="sng" algn="ctr">
+                      <a:solidFill>
+                        <a:srgbClr val="37474F"/>
+                      </a:solidFill>
+                      <a:prstDash val="solid"/>
+                      <a:round/>
+                      <a:headEnd type="none" w="med" len="med"/>
+                      <a:tailEnd type="none" w="med" len="med"/>
+                    </a:lnR>
+                    <a:lnT w="12700" cap="flat" cmpd="sng" algn="ctr">
+                      <a:solidFill>
+                        <a:srgbClr val="37474F"/>
+                      </a:solidFill>
+                      <a:prstDash val="solid"/>
+                      <a:round/>
+                      <a:headEnd type="none" w="med" len="med"/>
+                      <a:tailEnd type="none" w="med" len="med"/>
+                    </a:lnT>
+                    <a:lnB w="12700" cap="flat" cmpd="sng" algn="ctr">
+                      <a:solidFill>
+                        <a:srgbClr val="37474F"/>
+                      </a:solidFill>
+                      <a:prstDash val="solid"/>
+                      <a:round/>
+                      <a:headEnd type="none" w="med" len="med"/>
+                      <a:tailEnd type="none" w="med" len="med"/>
+                    </a:lnB>
+                    <a:solidFill>
+                      <a:srgbClr val="455A64"/>
+                    </a:solidFill>
+                  </a:tcPr>
+                </a:tc>
+                <a:tc>
+                  <a:txBody>
+                    <a:bodyPr/>
+                    <a:lstStyle/>
+                    <a:p>
+                      <a:pPr indent="0" marL="0">
+                        <a:buNone/>
+                      </a:pPr>
+                      <a:r>
+                        <a:rPr lang="en-US" sz="1200" dirty="0">
+                          <a:solidFill>
+                            <a:srgbClr val="FFFFFF"/>
+                          </a:solidFill>
+                          <a:latin typeface="Cambria" pitchFamily="34" charset="0"/>
+                          <a:ea typeface="Cambria" pitchFamily="34" charset="-122"/>
+                          <a:cs typeface="Cambria" pitchFamily="34" charset="-120"/>
+                        </a:rPr>
+                        <a:t>79.5 s</a:t>
+                      </a:r>
+                      <a:endParaRPr lang="en-US" sz="1200" dirty="0">
+                        <a:latin typeface="Cambria" charset="0"/>
+                        <a:ea typeface="Cambria" charset="0"/>
+                        <a:cs typeface="Cambria" charset="0"/>
+                      </a:endParaRPr>
+                    </a:p>
+                  </a:txBody>
+                  <a:tcPr marL="73152" marR="73152" marT="18288" marB="18288" anchor="ctr">
+                    <a:lnL w="12700" cap="flat" cmpd="sng" algn="ctr">
+                      <a:solidFill>
+                        <a:srgbClr val="37474F"/>
+                      </a:solidFill>
+                      <a:prstDash val="solid"/>
+                      <a:round/>
+                      <a:headEnd type="none" w="med" len="med"/>
+                      <a:tailEnd type="none" w="med" len="med"/>
+                    </a:lnL>
+                    <a:lnR w="12700" cap="flat" cmpd="sng" algn="ctr">
+                      <a:solidFill>
+                        <a:srgbClr val="37474F"/>
+                      </a:solidFill>
+                      <a:prstDash val="solid"/>
+                      <a:round/>
+                      <a:headEnd type="none" w="med" len="med"/>
+                      <a:tailEnd type="none" w="med" len="med"/>
+                    </a:lnR>
+                    <a:lnT w="12700" cap="flat" cmpd="sng" algn="ctr">
+                      <a:solidFill>
+                        <a:srgbClr val="37474F"/>
+                      </a:solidFill>
+                      <a:prstDash val="solid"/>
+                      <a:round/>
+                      <a:headEnd type="none" w="med" len="med"/>
+                      <a:tailEnd type="none" w="med" len="med"/>
+                    </a:lnT>
+                    <a:lnB w="12700" cap="flat" cmpd="sng" algn="ctr">
+                      <a:solidFill>
+                        <a:srgbClr val="37474F"/>
+                      </a:solidFill>
+                      <a:prstDash val="solid"/>
+                      <a:round/>
+                      <a:headEnd type="none" w="med" len="med"/>
+                      <a:tailEnd type="none" w="med" len="med"/>
+                    </a:lnB>
+                    <a:solidFill>
+                      <a:srgbClr val="455A64"/>
+                    </a:solidFill>
+                  </a:tcPr>
+                </a:tc>
+                <a:tc>
+                  <a:txBody>
+                    <a:bodyPr/>
+                    <a:lstStyle/>
+                    <a:p>
+                      <a:pPr indent="0" marL="0">
+                        <a:buNone/>
+                      </a:pPr>
+                      <a:r>
+                        <a:rPr lang="en-US" sz="1200" dirty="0">
+                          <a:solidFill>
+                            <a:srgbClr val="FFFFFF"/>
+                          </a:solidFill>
+                          <a:latin typeface="Cambria" pitchFamily="34" charset="0"/>
+                          <a:ea typeface="Cambria" pitchFamily="34" charset="-122"/>
+                          <a:cs typeface="Cambria" pitchFamily="34" charset="-120"/>
+                        </a:rPr>
+                        <a:t>47.8 / 127.9 s</a:t>
+                      </a:r>
+                      <a:endParaRPr lang="en-US" sz="1200" dirty="0">
+                        <a:latin typeface="Cambria" charset="0"/>
+                        <a:ea typeface="Cambria" charset="0"/>
+                        <a:cs typeface="Cambria" charset="0"/>
+                      </a:endParaRPr>
+                    </a:p>
+                  </a:txBody>
+                  <a:tcPr marL="73152" marR="73152" marT="18288" marB="18288" anchor="ctr">
+                    <a:lnL w="12700" cap="flat" cmpd="sng" algn="ctr">
+                      <a:solidFill>
+                        <a:srgbClr val="37474F"/>
+                      </a:solidFill>
+                      <a:prstDash val="solid"/>
+                      <a:round/>
+                      <a:headEnd type="none" w="med" len="med"/>
+                      <a:tailEnd type="none" w="med" len="med"/>
+                    </a:lnL>
+                    <a:lnR w="12700" cap="flat" cmpd="sng" algn="ctr">
+                      <a:solidFill>
+                        <a:srgbClr val="37474F"/>
+                      </a:solidFill>
+                      <a:prstDash val="solid"/>
+                      <a:round/>
+                      <a:headEnd type="none" w="med" len="med"/>
+                      <a:tailEnd type="none" w="med" len="med"/>
+                    </a:lnR>
+                    <a:lnT w="12700" cap="flat" cmpd="sng" algn="ctr">
+                      <a:solidFill>
+                        <a:srgbClr val="37474F"/>
+                      </a:solidFill>
+                      <a:prstDash val="solid"/>
+                      <a:round/>
+                      <a:headEnd type="none" w="med" len="med"/>
+                      <a:tailEnd type="none" w="med" len="med"/>
+                    </a:lnT>
+                    <a:lnB w="12700" cap="flat" cmpd="sng" algn="ctr">
+                      <a:solidFill>
+                        <a:srgbClr val="37474F"/>
+                      </a:solidFill>
+                      <a:prstDash val="solid"/>
+                      <a:round/>
+                      <a:headEnd type="none" w="med" len="med"/>
+                      <a:tailEnd type="none" w="med" len="med"/>
+                    </a:lnB>
+                    <a:solidFill>
+                      <a:srgbClr val="455A64"/>
+                    </a:solidFill>
+                  </a:tcPr>
+                </a:tc>
+                <a:tc>
+                  <a:txBody>
+                    <a:bodyPr/>
+                    <a:lstStyle/>
+                    <a:p>
+                      <a:pPr indent="0" marL="0">
+                        <a:buNone/>
+                      </a:pPr>
+                      <a:r>
+                        <a:rPr lang="en-US" sz="1200" dirty="0">
+                          <a:solidFill>
+                            <a:srgbClr val="FFFFFF"/>
+                          </a:solidFill>
+                          <a:latin typeface="Cambria" pitchFamily="34" charset="0"/>
+                          <a:ea typeface="Cambria" pitchFamily="34" charset="-122"/>
+                          <a:cs typeface="Cambria" pitchFamily="34" charset="-120"/>
+                        </a:rPr>
+                        <a:t>66.2 min</a:t>
+                      </a:r>
+                      <a:endParaRPr lang="en-US" sz="1200" dirty="0">
+                        <a:latin typeface="Cambria" charset="0"/>
+                        <a:ea typeface="Cambria" charset="0"/>
+                        <a:cs typeface="Cambria" charset="0"/>
+                      </a:endParaRPr>
+                    </a:p>
+                  </a:txBody>
+                  <a:tcPr marL="73152" marR="73152" marT="18288" marB="18288" anchor="ctr">
+                    <a:lnL w="12700" cap="flat" cmpd="sng" algn="ctr">
+                      <a:solidFill>
+                        <a:srgbClr val="37474F"/>
+                      </a:solidFill>
+                      <a:prstDash val="solid"/>
+                      <a:round/>
+                      <a:headEnd type="none" w="med" len="med"/>
+                      <a:tailEnd type="none" w="med" len="med"/>
+                    </a:lnL>
+                    <a:lnR w="12700" cap="flat" cmpd="sng" algn="ctr">
+                      <a:solidFill>
+                        <a:srgbClr val="37474F"/>
+                      </a:solidFill>
+                      <a:prstDash val="solid"/>
+                      <a:round/>
+                      <a:headEnd type="none" w="med" len="med"/>
+                      <a:tailEnd type="none" w="med" len="med"/>
+                    </a:lnR>
+                    <a:lnT w="12700" cap="flat" cmpd="sng" algn="ctr">
+                      <a:solidFill>
+                        <a:srgbClr val="37474F"/>
+                      </a:solidFill>
+                      <a:prstDash val="solid"/>
+                      <a:round/>
+                      <a:headEnd type="none" w="med" len="med"/>
+                      <a:tailEnd type="none" w="med" len="med"/>
+                    </a:lnT>
+                    <a:lnB w="12700" cap="flat" cmpd="sng" algn="ctr">
+                      <a:solidFill>
+                        <a:srgbClr val="37474F"/>
+                      </a:solidFill>
+                      <a:prstDash val="solid"/>
+                      <a:round/>
+                      <a:headEnd type="none" w="med" len="med"/>
+                      <a:tailEnd type="none" w="med" len="med"/>
+                    </a:lnB>
+                    <a:solidFill>
+                      <a:srgbClr val="455A64"/>
+                    </a:solidFill>
+                  </a:tcPr>
+                </a:tc>
+              </a:tr>
+              <a:tr h="274320">
+                <a:tc>
+                  <a:txBody>
+                    <a:bodyPr/>
+                    <a:lstStyle/>
+                    <a:p>
+                      <a:pPr indent="0" marL="0">
+                        <a:buNone/>
+                      </a:pPr>
+                      <a:r>
+                        <a:rPr lang="en-US" sz="1200" dirty="0">
+                          <a:solidFill>
+                            <a:srgbClr val="FFFFFF"/>
+                          </a:solidFill>
+                          <a:latin typeface="Cambria" pitchFamily="34" charset="0"/>
+                          <a:ea typeface="Cambria" pitchFamily="34" charset="-122"/>
+                          <a:cs typeface="Cambria" pitchFamily="34" charset="-120"/>
+                        </a:rPr>
+                        <a:t>No-GIL: threads, 4 tiles</a:t>
+                      </a:r>
+                      <a:endParaRPr lang="en-US" sz="1200" dirty="0">
+                        <a:latin typeface="Cambria" charset="0"/>
+                        <a:ea typeface="Cambria" charset="0"/>
+                        <a:cs typeface="Cambria" charset="0"/>
+                      </a:endParaRPr>
+                    </a:p>
+                  </a:txBody>
+                  <a:tcPr marL="73152" marR="73152" marT="18288" marB="18288" anchor="ctr">
+                    <a:lnL w="12700" cap="flat" cmpd="sng" algn="ctr">
+                      <a:solidFill>
+                        <a:srgbClr val="37474F"/>
+                      </a:solidFill>
+                      <a:prstDash val="solid"/>
+                      <a:round/>
+                      <a:headEnd type="none" w="med" len="med"/>
+                      <a:tailEnd type="none" w="med" len="med"/>
+                    </a:lnL>
+                    <a:lnR w="12700" cap="flat" cmpd="sng" algn="ctr">
+                      <a:solidFill>
+                        <a:srgbClr val="37474F"/>
+                      </a:solidFill>
+                      <a:prstDash val="solid"/>
+                      <a:round/>
+                      <a:headEnd type="none" w="med" len="med"/>
+                      <a:tailEnd type="none" w="med" len="med"/>
+                    </a:lnR>
+                    <a:lnT w="12700" cap="flat" cmpd="sng" algn="ctr">
+                      <a:solidFill>
+                        <a:srgbClr val="37474F"/>
+                      </a:solidFill>
+                      <a:prstDash val="solid"/>
+                      <a:round/>
+                      <a:headEnd type="none" w="med" len="med"/>
+                      <a:tailEnd type="none" w="med" len="med"/>
+                    </a:lnT>
+                    <a:lnB w="12700" cap="flat" cmpd="sng" algn="ctr">
+                      <a:solidFill>
+                        <a:srgbClr val="37474F"/>
+                      </a:solidFill>
+                      <a:prstDash val="solid"/>
+                      <a:round/>
+                      <a:headEnd type="none" w="med" len="med"/>
+                      <a:tailEnd type="none" w="med" len="med"/>
+                    </a:lnB>
+                    <a:solidFill>
+                      <a:srgbClr val="455A64"/>
+                    </a:solidFill>
+                  </a:tcPr>
+                </a:tc>
+                <a:tc>
+                  <a:txBody>
+                    <a:bodyPr/>
+                    <a:lstStyle/>
+                    <a:p>
+                      <a:pPr indent="0" marL="0">
+                        <a:buNone/>
+                      </a:pPr>
+                      <a:r>
+                        <a:rPr lang="en-US" sz="1200" dirty="0">
+                          <a:solidFill>
+                            <a:srgbClr val="FFFFFF"/>
+                          </a:solidFill>
+                          <a:latin typeface="Cambria" pitchFamily="34" charset="0"/>
+                          <a:ea typeface="Cambria" pitchFamily="34" charset="-122"/>
+                          <a:cs typeface="Cambria" pitchFamily="34" charset="-120"/>
+                        </a:rPr>
+                        <a:t>24.1 s</a:t>
+                      </a:r>
+                      <a:endParaRPr lang="en-US" sz="1200" dirty="0">
+                        <a:latin typeface="Cambria" charset="0"/>
+                        <a:ea typeface="Cambria" charset="0"/>
+                        <a:cs typeface="Cambria" charset="0"/>
+                      </a:endParaRPr>
+                    </a:p>
+                  </a:txBody>
+                  <a:tcPr marL="73152" marR="73152" marT="18288" marB="18288" anchor="ctr">
+                    <a:lnL w="12700" cap="flat" cmpd="sng" algn="ctr">
+                      <a:solidFill>
+                        <a:srgbClr val="37474F"/>
+                      </a:solidFill>
+                      <a:prstDash val="solid"/>
+                      <a:round/>
+                      <a:headEnd type="none" w="med" len="med"/>
+                      <a:tailEnd type="none" w="med" len="med"/>
+                    </a:lnL>
+                    <a:lnR w="12700" cap="flat" cmpd="sng" algn="ctr">
+                      <a:solidFill>
+                        <a:srgbClr val="37474F"/>
+                      </a:solidFill>
+                      <a:prstDash val="solid"/>
+                      <a:round/>
+                      <a:headEnd type="none" w="med" len="med"/>
+                      <a:tailEnd type="none" w="med" len="med"/>
+                    </a:lnR>
+                    <a:lnT w="12700" cap="flat" cmpd="sng" algn="ctr">
+                      <a:solidFill>
+                        <a:srgbClr val="37474F"/>
+                      </a:solidFill>
+                      <a:prstDash val="solid"/>
+                      <a:round/>
+                      <a:headEnd type="none" w="med" len="med"/>
+                      <a:tailEnd type="none" w="med" len="med"/>
+                    </a:lnT>
+                    <a:lnB w="12700" cap="flat" cmpd="sng" algn="ctr">
+                      <a:solidFill>
+                        <a:srgbClr val="37474F"/>
+                      </a:solidFill>
+                      <a:prstDash val="solid"/>
+                      <a:round/>
+                      <a:headEnd type="none" w="med" len="med"/>
+                      <a:tailEnd type="none" w="med" len="med"/>
+                    </a:lnB>
+                    <a:solidFill>
+                      <a:srgbClr val="455A64"/>
+                    </a:solidFill>
+                  </a:tcPr>
+                </a:tc>
+                <a:tc>
+                  <a:txBody>
+                    <a:bodyPr/>
+                    <a:lstStyle/>
+                    <a:p>
+                      <a:pPr indent="0" marL="0">
+                        <a:buNone/>
+                      </a:pPr>
+                      <a:r>
+                        <a:rPr lang="en-US" sz="1200" dirty="0">
+                          <a:solidFill>
+                            <a:srgbClr val="FFFFFF"/>
+                          </a:solidFill>
+                          <a:latin typeface="Cambria" pitchFamily="34" charset="0"/>
+                          <a:ea typeface="Cambria" pitchFamily="34" charset="-122"/>
+                          <a:cs typeface="Cambria" pitchFamily="34" charset="-120"/>
+                        </a:rPr>
+                        <a:t>15.0 / 39.2 s</a:t>
+                      </a:r>
+                      <a:endParaRPr lang="en-US" sz="1200" dirty="0">
+                        <a:latin typeface="Cambria" charset="0"/>
+                        <a:ea typeface="Cambria" charset="0"/>
+                        <a:cs typeface="Cambria" charset="0"/>
+                      </a:endParaRPr>
+                    </a:p>
+                  </a:txBody>
+                  <a:tcPr marL="73152" marR="73152" marT="18288" marB="18288" anchor="ctr">
+                    <a:lnL w="12700" cap="flat" cmpd="sng" algn="ctr">
+                      <a:solidFill>
+                        <a:srgbClr val="37474F"/>
+                      </a:solidFill>
+                      <a:prstDash val="solid"/>
+                      <a:round/>
+                      <a:headEnd type="none" w="med" len="med"/>
+                      <a:tailEnd type="none" w="med" len="med"/>
+                    </a:lnL>
+                    <a:lnR w="12700" cap="flat" cmpd="sng" algn="ctr">
+                      <a:solidFill>
+                        <a:srgbClr val="37474F"/>
+                      </a:solidFill>
+                      <a:prstDash val="solid"/>
+                      <a:round/>
+                      <a:headEnd type="none" w="med" len="med"/>
+                      <a:tailEnd type="none" w="med" len="med"/>
+                    </a:lnR>
+                    <a:lnT w="12700" cap="flat" cmpd="sng" algn="ctr">
+                      <a:solidFill>
+                        <a:srgbClr val="37474F"/>
+                      </a:solidFill>
+                      <a:prstDash val="solid"/>
+                      <a:round/>
+                      <a:headEnd type="none" w="med" len="med"/>
+                      <a:tailEnd type="none" w="med" len="med"/>
+                    </a:lnT>
+                    <a:lnB w="12700" cap="flat" cmpd="sng" algn="ctr">
+                      <a:solidFill>
+                        <a:srgbClr val="37474F"/>
+                      </a:solidFill>
+                      <a:prstDash val="solid"/>
+                      <a:round/>
+                      <a:headEnd type="none" w="med" len="med"/>
+                      <a:tailEnd type="none" w="med" len="med"/>
+                    </a:lnB>
+                    <a:solidFill>
+                      <a:srgbClr val="455A64"/>
+                    </a:solidFill>
+                  </a:tcPr>
+                </a:tc>
+                <a:tc>
+                  <a:txBody>
+                    <a:bodyPr/>
+                    <a:lstStyle/>
+                    <a:p>
+                      <a:pPr indent="0" marL="0">
+                        <a:buNone/>
+                      </a:pPr>
+                      <a:r>
+                        <a:rPr lang="en-US" sz="1200" dirty="0">
+                          <a:solidFill>
+                            <a:srgbClr val="FFFFFF"/>
+                          </a:solidFill>
+                          <a:latin typeface="Cambria" pitchFamily="34" charset="0"/>
+                          <a:ea typeface="Cambria" pitchFamily="34" charset="-122"/>
+                          <a:cs typeface="Cambria" pitchFamily="34" charset="-120"/>
+                        </a:rPr>
+                        <a:t>20.1 min</a:t>
+                      </a:r>
+                      <a:endParaRPr lang="en-US" sz="1200" dirty="0">
+                        <a:latin typeface="Cambria" charset="0"/>
+                        <a:ea typeface="Cambria" charset="0"/>
+                        <a:cs typeface="Cambria" charset="0"/>
+                      </a:endParaRPr>
+                    </a:p>
+                  </a:txBody>
+                  <a:tcPr marL="73152" marR="73152" marT="18288" marB="18288" anchor="ctr">
+                    <a:lnL w="12700" cap="flat" cmpd="sng" algn="ctr">
+                      <a:solidFill>
+                        <a:srgbClr val="37474F"/>
+                      </a:solidFill>
+                      <a:prstDash val="solid"/>
+                      <a:round/>
+                      <a:headEnd type="none" w="med" len="med"/>
+                      <a:tailEnd type="none" w="med" len="med"/>
+                    </a:lnL>
+                    <a:lnR w="12700" cap="flat" cmpd="sng" algn="ctr">
+                      <a:solidFill>
+                        <a:srgbClr val="37474F"/>
+                      </a:solidFill>
+                      <a:prstDash val="solid"/>
+                      <a:round/>
+                      <a:headEnd type="none" w="med" len="med"/>
+                      <a:tailEnd type="none" w="med" len="med"/>
+                    </a:lnR>
+                    <a:lnT w="12700" cap="flat" cmpd="sng" algn="ctr">
+                      <a:solidFill>
+                        <a:srgbClr val="37474F"/>
+                      </a:solidFill>
+                      <a:prstDash val="solid"/>
+                      <a:round/>
+                      <a:headEnd type="none" w="med" len="med"/>
+                      <a:tailEnd type="none" w="med" len="med"/>
+                    </a:lnT>
+                    <a:lnB w="12700" cap="flat" cmpd="sng" algn="ctr">
+                      <a:solidFill>
+                        <a:srgbClr val="37474F"/>
+                      </a:solidFill>
+                      <a:prstDash val="solid"/>
+                      <a:round/>
+                      <a:headEnd type="none" w="med" len="med"/>
+                      <a:tailEnd type="none" w="med" len="med"/>
+                    </a:lnB>
+                    <a:solidFill>
+                      <a:srgbClr val="455A64"/>
+                    </a:solidFill>
+                  </a:tcPr>
+                </a:tc>
+              </a:tr>
+              <a:tr h="274320">
+                <a:tc>
+                  <a:txBody>
+                    <a:bodyPr/>
+                    <a:lstStyle/>
+                    <a:p>
+                      <a:pPr indent="0" marL="0">
+                        <a:buNone/>
+                      </a:pPr>
+                      <a:r>
+                        <a:rPr lang="en-US" sz="1200" dirty="0">
+                          <a:solidFill>
+                            <a:srgbClr val="FFFFFF"/>
+                          </a:solidFill>
+                          <a:latin typeface="Cambria" pitchFamily="34" charset="0"/>
+                          <a:ea typeface="Cambria" pitchFamily="34" charset="-122"/>
+                          <a:cs typeface="Cambria" pitchFamily="34" charset="-120"/>
+                        </a:rPr>
+                        <a:t>No-GIL: threads, 16 tiles</a:t>
+                      </a:r>
+                      <a:endParaRPr lang="en-US" sz="1200" dirty="0">
+                        <a:latin typeface="Cambria" charset="0"/>
+                        <a:ea typeface="Cambria" charset="0"/>
+                        <a:cs typeface="Cambria" charset="0"/>
+                      </a:endParaRPr>
+                    </a:p>
+                  </a:txBody>
+                  <a:tcPr marL="73152" marR="73152" marT="18288" marB="18288" anchor="ctr">
+                    <a:lnL w="12700" cap="flat" cmpd="sng" algn="ctr">
+                      <a:solidFill>
+                        <a:srgbClr val="37474F"/>
+                      </a:solidFill>
+                      <a:prstDash val="solid"/>
+                      <a:round/>
+                      <a:headEnd type="none" w="med" len="med"/>
+                      <a:tailEnd type="none" w="med" len="med"/>
+                    </a:lnL>
+                    <a:lnR w="12700" cap="flat" cmpd="sng" algn="ctr">
+                      <a:solidFill>
+                        <a:srgbClr val="37474F"/>
+                      </a:solidFill>
+                      <a:prstDash val="solid"/>
+                      <a:round/>
+                      <a:headEnd type="none" w="med" len="med"/>
+                      <a:tailEnd type="none" w="med" len="med"/>
+                    </a:lnR>
+                    <a:lnT w="12700" cap="flat" cmpd="sng" algn="ctr">
+                      <a:solidFill>
+                        <a:srgbClr val="37474F"/>
+                      </a:solidFill>
+                      <a:prstDash val="solid"/>
+                      <a:round/>
+                      <a:headEnd type="none" w="med" len="med"/>
+                      <a:tailEnd type="none" w="med" len="med"/>
+                    </a:lnT>
+                    <a:lnB w="12700" cap="flat" cmpd="sng" algn="ctr">
+                      <a:solidFill>
+                        <a:srgbClr val="37474F"/>
+                      </a:solidFill>
+                      <a:prstDash val="solid"/>
+                      <a:round/>
+                      <a:headEnd type="none" w="med" len="med"/>
+                      <a:tailEnd type="none" w="med" len="med"/>
+                    </a:lnB>
+                    <a:solidFill>
+                      <a:srgbClr val="455A64"/>
+                    </a:solidFill>
+                  </a:tcPr>
+                </a:tc>
+                <a:tc>
+                  <a:txBody>
+                    <a:bodyPr/>
+                    <a:lstStyle/>
+                    <a:p>
+                      <a:pPr indent="0" marL="0">
+                        <a:buNone/>
+                      </a:pPr>
+                      <a:r>
+                        <a:rPr lang="en-US" sz="1200" dirty="0">
+                          <a:solidFill>
+                            <a:srgbClr val="FFFFFF"/>
+                          </a:solidFill>
+                          <a:latin typeface="Cambria" pitchFamily="34" charset="0"/>
+                          <a:ea typeface="Cambria" pitchFamily="34" charset="-122"/>
+                          <a:cs typeface="Cambria" pitchFamily="34" charset="-120"/>
+                        </a:rPr>
+                        <a:t>13.5 s</a:t>
+                      </a:r>
+                      <a:endParaRPr lang="en-US" sz="1200" dirty="0">
+                        <a:latin typeface="Cambria" charset="0"/>
+                        <a:ea typeface="Cambria" charset="0"/>
+                        <a:cs typeface="Cambria" charset="0"/>
+                      </a:endParaRPr>
+                    </a:p>
+                  </a:txBody>
+                  <a:tcPr marL="73152" marR="73152" marT="18288" marB="18288" anchor="ctr">
+                    <a:lnL w="12700" cap="flat" cmpd="sng" algn="ctr">
+                      <a:solidFill>
+                        <a:srgbClr val="37474F"/>
+                      </a:solidFill>
+                      <a:prstDash val="solid"/>
+                      <a:round/>
+                      <a:headEnd type="none" w="med" len="med"/>
+                      <a:tailEnd type="none" w="med" len="med"/>
+                    </a:lnL>
+                    <a:lnR w="12700" cap="flat" cmpd="sng" algn="ctr">
+                      <a:solidFill>
+                        <a:srgbClr val="37474F"/>
+                      </a:solidFill>
+                      <a:prstDash val="solid"/>
+                      <a:round/>
+                      <a:headEnd type="none" w="med" len="med"/>
+                      <a:tailEnd type="none" w="med" len="med"/>
+                    </a:lnR>
+                    <a:lnT w="12700" cap="flat" cmpd="sng" algn="ctr">
+                      <a:solidFill>
+                        <a:srgbClr val="37474F"/>
+                      </a:solidFill>
+                      <a:prstDash val="solid"/>
+                      <a:round/>
+                      <a:headEnd type="none" w="med" len="med"/>
+                      <a:tailEnd type="none" w="med" len="med"/>
+                    </a:lnT>
+                    <a:lnB w="12700" cap="flat" cmpd="sng" algn="ctr">
+                      <a:solidFill>
+                        <a:srgbClr val="37474F"/>
+                      </a:solidFill>
+                      <a:prstDash val="solid"/>
+                      <a:round/>
+                      <a:headEnd type="none" w="med" len="med"/>
+                      <a:tailEnd type="none" w="med" len="med"/>
+                    </a:lnB>
+                    <a:solidFill>
+                      <a:srgbClr val="455A64"/>
+                    </a:solidFill>
+                  </a:tcPr>
+                </a:tc>
+                <a:tc>
+                  <a:txBody>
+                    <a:bodyPr/>
+                    <a:lstStyle/>
+                    <a:p>
+                      <a:pPr indent="0" marL="0">
+                        <a:buNone/>
+                      </a:pPr>
+                      <a:r>
+                        <a:rPr lang="en-US" sz="1200" dirty="0">
+                          <a:solidFill>
+                            <a:srgbClr val="FFFFFF"/>
+                          </a:solidFill>
+                          <a:latin typeface="Cambria" pitchFamily="34" charset="0"/>
+                          <a:ea typeface="Cambria" pitchFamily="34" charset="-122"/>
+                          <a:cs typeface="Cambria" pitchFamily="34" charset="-120"/>
+                        </a:rPr>
+                        <a:t>9.2 / 22.0 s</a:t>
+                      </a:r>
+                      <a:endParaRPr lang="en-US" sz="1200" dirty="0">
+                        <a:latin typeface="Cambria" charset="0"/>
+                        <a:ea typeface="Cambria" charset="0"/>
+                        <a:cs typeface="Cambria" charset="0"/>
+                      </a:endParaRPr>
+                    </a:p>
+                  </a:txBody>
+                  <a:tcPr marL="73152" marR="73152" marT="18288" marB="18288" anchor="ctr">
+                    <a:lnL w="12700" cap="flat" cmpd="sng" algn="ctr">
+                      <a:solidFill>
+                        <a:srgbClr val="37474F"/>
+                      </a:solidFill>
+                      <a:prstDash val="solid"/>
+                      <a:round/>
+                      <a:headEnd type="none" w="med" len="med"/>
+                      <a:tailEnd type="none" w="med" len="med"/>
+                    </a:lnL>
+                    <a:lnR w="12700" cap="flat" cmpd="sng" algn="ctr">
+                      <a:solidFill>
+                        <a:srgbClr val="37474F"/>
+                      </a:solidFill>
+                      <a:prstDash val="solid"/>
+                      <a:round/>
+                      <a:headEnd type="none" w="med" len="med"/>
+                      <a:tailEnd type="none" w="med" len="med"/>
+                    </a:lnR>
+                    <a:lnT w="12700" cap="flat" cmpd="sng" algn="ctr">
+                      <a:solidFill>
+                        <a:srgbClr val="37474F"/>
+                      </a:solidFill>
+                      <a:prstDash val="solid"/>
+                      <a:round/>
+                      <a:headEnd type="none" w="med" len="med"/>
+                      <a:tailEnd type="none" w="med" len="med"/>
+                    </a:lnT>
+                    <a:lnB w="12700" cap="flat" cmpd="sng" algn="ctr">
+                      <a:solidFill>
+                        <a:srgbClr val="37474F"/>
+                      </a:solidFill>
+                      <a:prstDash val="solid"/>
+                      <a:round/>
+                      <a:headEnd type="none" w="med" len="med"/>
+                      <a:tailEnd type="none" w="med" len="med"/>
+                    </a:lnB>
+                    <a:solidFill>
+                      <a:srgbClr val="455A64"/>
+                    </a:solidFill>
+                  </a:tcPr>
+                </a:tc>
+                <a:tc>
+                  <a:txBody>
+                    <a:bodyPr/>
+                    <a:lstStyle/>
+                    <a:p>
+                      <a:pPr indent="0" marL="0">
+                        <a:buNone/>
+                      </a:pPr>
+                      <a:r>
+                        <a:rPr lang="en-US" sz="1200" dirty="0">
+                          <a:solidFill>
+                            <a:srgbClr val="FFFFFF"/>
+                          </a:solidFill>
+                          <a:latin typeface="Cambria" pitchFamily="34" charset="0"/>
+                          <a:ea typeface="Cambria" pitchFamily="34" charset="-122"/>
+                          <a:cs typeface="Cambria" pitchFamily="34" charset="-120"/>
+                        </a:rPr>
+                        <a:t>11.3 min</a:t>
+                      </a:r>
+                      <a:endParaRPr lang="en-US" sz="1200" dirty="0">
+                        <a:latin typeface="Cambria" charset="0"/>
+                        <a:ea typeface="Cambria" charset="0"/>
+                        <a:cs typeface="Cambria" charset="0"/>
+                      </a:endParaRPr>
+                    </a:p>
+                  </a:txBody>
+                  <a:tcPr marL="73152" marR="73152" marT="18288" marB="18288" anchor="ctr">
+                    <a:lnL w="12700" cap="flat" cmpd="sng" algn="ctr">
+                      <a:solidFill>
+                        <a:srgbClr val="37474F"/>
+                      </a:solidFill>
+                      <a:prstDash val="solid"/>
+                      <a:round/>
+                      <a:headEnd type="none" w="med" len="med"/>
+                      <a:tailEnd type="none" w="med" len="med"/>
+                    </a:lnL>
+                    <a:lnR w="12700" cap="flat" cmpd="sng" algn="ctr">
+                      <a:solidFill>
+                        <a:srgbClr val="37474F"/>
+                      </a:solidFill>
+                      <a:prstDash val="solid"/>
+                      <a:round/>
+                      <a:headEnd type="none" w="med" len="med"/>
+                      <a:tailEnd type="none" w="med" len="med"/>
+                    </a:lnR>
+                    <a:lnT w="12700" cap="flat" cmpd="sng" algn="ctr">
+                      <a:solidFill>
+                        <a:srgbClr val="37474F"/>
+                      </a:solidFill>
+                      <a:prstDash val="solid"/>
+                      <a:round/>
+                      <a:headEnd type="none" w="med" len="med"/>
+                      <a:tailEnd type="none" w="med" len="med"/>
+                    </a:lnT>
+                    <a:lnB w="12700" cap="flat" cmpd="sng" algn="ctr">
+                      <a:solidFill>
+                        <a:srgbClr val="37474F"/>
+                      </a:solidFill>
+                      <a:prstDash val="solid"/>
+                      <a:round/>
+                      <a:headEnd type="none" w="med" len="med"/>
+                      <a:tailEnd type="none" w="med" len="med"/>
+                    </a:lnB>
+                    <a:solidFill>
+                      <a:srgbClr val="455A64"/>
+                    </a:solidFill>
+                  </a:tcPr>
+                </a:tc>
+              </a:tr>
+            </a:tbl>
+          </a:graphicData>
+        </a:graphic>
+      </p:graphicFrame>
+      <p:sp>
+        <p:nvSpPr>
+          <p:cNvPr id="4" name="text-153"/>
           <p:cNvSpPr txBox="1"/>
           <p:nvPr/>
         </p:nvSpPr>
         <p:spPr>
           <a:xfrm>
-            <a:off x="685800" y="1463040"/>
-            <a:ext cx="2148840" cy="822960"/>
+            <a:off x="457200" y="4407408"/>
+            <a:ext cx="8229600" cy="274320"/>
           </a:xfrm>
           <a:prstGeom prst="rect">
             <a:avLst/>
@@ -11848,285 +14962,7 @@
               <a:buNone/>
             </a:pPr>
             <a:r>
-              <a:rPr lang="en-US" sz="4000" b="1" dirty="0">
-                <a:solidFill>
-                  <a:schemeClr val="accent4"/>
-                </a:solidFill>
-                <a:latin typeface="Bahnschrift" pitchFamily="34" charset="0"/>
-                <a:ea typeface="Bahnschrift" pitchFamily="34" charset="-122"/>
-                <a:cs typeface="Bahnschrift" pitchFamily="34" charset="-120"/>
-              </a:rPr>
-              <a:t>5.82×</a:t>
-            </a:r>
-            <a:endParaRPr lang="en-US" sz="4000" dirty="0"/>
-          </a:p>
-        </p:txBody>
-      </p:sp>
-      <p:sp>
-        <p:nvSpPr>
-          <p:cNvPr id="5" name="text-155"/>
-          <p:cNvSpPr txBox="1"/>
-          <p:nvPr/>
-        </p:nvSpPr>
-        <p:spPr>
-          <a:xfrm>
-            <a:off x="685800" y="2377440"/>
-            <a:ext cx="2148840" cy="1371600"/>
-          </a:xfrm>
-          <a:prstGeom prst="rect">
-            <a:avLst/>
-          </a:prstGeom>
-          <a:noFill/>
-          <a:ln/>
-        </p:spPr>
-        <p:txBody>
-          <a:bodyPr wrap="square" lIns="0" tIns="0" rIns="0" bIns="0" rtlCol="0" anchor="t"/>
-          <a:lstStyle/>
-          <a:p>
-            <a:pPr indent="0" marL="0">
-              <a:buNone/>
-            </a:pPr>
-            <a:r>
-              <a:rPr lang="en-US" sz="1500" dirty="0">
-                <a:solidFill>
-                  <a:schemeClr val="bg1"/>
-                </a:solidFill>
-                <a:latin typeface="Cambria" pitchFamily="34" charset="0"/>
-                <a:ea typeface="Cambria" pitchFamily="34" charset="-122"/>
-                <a:cs typeface="Cambria" pitchFamily="34" charset="-120"/>
-              </a:rPr>
-              <a:t>No-GIL threads at 16 tiles (3.30× at 4), close to processes</a:t>
-            </a:r>
-            <a:endParaRPr lang="en-US" sz="1500" dirty="0"/>
-          </a:p>
-        </p:txBody>
-      </p:sp>
-      <p:sp>
-        <p:nvSpPr>
-          <p:cNvPr id="6" name="card-156"/>
-          <p:cNvSpPr/>
-          <p:nvPr/>
-        </p:nvSpPr>
-        <p:spPr>
-          <a:xfrm>
-            <a:off x="3246120" y="1234440"/>
-            <a:ext cx="2606040" cy="2651760"/>
-          </a:xfrm>
-          <a:prstGeom prst="roundRect">
-            <a:avLst>
-              <a:gd name="adj" fmla="val 2807"/>
-            </a:avLst>
-          </a:prstGeom>
-          <a:solidFill>
-            <a:schemeClr val="accent6"/>
-          </a:solidFill>
-          <a:ln/>
-        </p:spPr>
-      </p:sp>
-      <p:sp>
-        <p:nvSpPr>
-          <p:cNvPr id="7" name="text-157"/>
-          <p:cNvSpPr txBox="1"/>
-          <p:nvPr/>
-        </p:nvSpPr>
-        <p:spPr>
-          <a:xfrm>
-            <a:off x="3474720" y="1463040"/>
-            <a:ext cx="2148840" cy="822960"/>
-          </a:xfrm>
-          <a:prstGeom prst="rect">
-            <a:avLst/>
-          </a:prstGeom>
-          <a:noFill/>
-          <a:ln/>
-        </p:spPr>
-        <p:txBody>
-          <a:bodyPr wrap="square" lIns="0" tIns="0" rIns="0" bIns="0" rtlCol="0" anchor="ctr"/>
-          <a:lstStyle/>
-          <a:p>
-            <a:pPr indent="0" marL="0">
-              <a:buNone/>
-            </a:pPr>
-            <a:r>
-              <a:rPr lang="en-US" sz="4000" b="1" dirty="0">
-                <a:solidFill>
-                  <a:schemeClr val="accent4"/>
-                </a:solidFill>
-                <a:latin typeface="Bahnschrift" pitchFamily="34" charset="0"/>
-                <a:ea typeface="Bahnschrift" pitchFamily="34" charset="-122"/>
-                <a:cs typeface="Bahnschrift" pitchFamily="34" charset="-120"/>
-              </a:rPr>
-              <a:t>+11%</a:t>
-            </a:r>
-            <a:endParaRPr lang="en-US" sz="4000" dirty="0"/>
-          </a:p>
-        </p:txBody>
-      </p:sp>
-      <p:sp>
-        <p:nvSpPr>
-          <p:cNvPr id="8" name="text-158"/>
-          <p:cNvSpPr txBox="1"/>
-          <p:nvPr/>
-        </p:nvSpPr>
-        <p:spPr>
-          <a:xfrm>
-            <a:off x="3474720" y="2377440"/>
-            <a:ext cx="2148840" cy="1371600"/>
-          </a:xfrm>
-          <a:prstGeom prst="rect">
-            <a:avLst/>
-          </a:prstGeom>
-          <a:noFill/>
-          <a:ln/>
-        </p:spPr>
-        <p:txBody>
-          <a:bodyPr wrap="square" lIns="0" tIns="0" rIns="0" bIns="0" rtlCol="0" anchor="t"/>
-          <a:lstStyle/>
-          <a:p>
-            <a:pPr indent="0" marL="0">
-              <a:buNone/>
-            </a:pPr>
-            <a:r>
-              <a:rPr lang="en-US" sz="1500" dirty="0">
-                <a:solidFill>
-                  <a:schemeClr val="bg1"/>
-                </a:solidFill>
-                <a:latin typeface="Cambria" pitchFamily="34" charset="0"/>
-                <a:ea typeface="Cambria" pitchFamily="34" charset="-122"/>
-                <a:cs typeface="Cambria" pitchFamily="34" charset="-120"/>
-              </a:rPr>
-              <a:t>Slower single-threaded: the cost of a thread-safe interpreter</a:t>
-            </a:r>
-            <a:endParaRPr lang="en-US" sz="1500" dirty="0"/>
-          </a:p>
-        </p:txBody>
-      </p:sp>
-      <p:sp>
-        <p:nvSpPr>
-          <p:cNvPr id="9" name="card-159"/>
-          <p:cNvSpPr/>
-          <p:nvPr/>
-        </p:nvSpPr>
-        <p:spPr>
-          <a:xfrm>
-            <a:off x="6035040" y="1234440"/>
-            <a:ext cx="2606040" cy="2651760"/>
-          </a:xfrm>
-          <a:prstGeom prst="roundRect">
-            <a:avLst>
-              <a:gd name="adj" fmla="val 2807"/>
-            </a:avLst>
-          </a:prstGeom>
-          <a:solidFill>
-            <a:schemeClr val="accent6"/>
-          </a:solidFill>
-          <a:ln/>
-        </p:spPr>
-      </p:sp>
-      <p:sp>
-        <p:nvSpPr>
-          <p:cNvPr id="10" name="text-160"/>
-          <p:cNvSpPr txBox="1"/>
-          <p:nvPr/>
-        </p:nvSpPr>
-        <p:spPr>
-          <a:xfrm>
-            <a:off x="6263640" y="1463040"/>
-            <a:ext cx="2148840" cy="822960"/>
-          </a:xfrm>
-          <a:prstGeom prst="rect">
-            <a:avLst/>
-          </a:prstGeom>
-          <a:noFill/>
-          <a:ln/>
-        </p:spPr>
-        <p:txBody>
-          <a:bodyPr wrap="square" lIns="0" tIns="0" rIns="0" bIns="0" rtlCol="0" anchor="ctr"/>
-          <a:lstStyle/>
-          <a:p>
-            <a:pPr indent="0" marL="0">
-              <a:buNone/>
-            </a:pPr>
-            <a:r>
-              <a:rPr lang="en-US" sz="4000" b="1" dirty="0">
-                <a:solidFill>
-                  <a:schemeClr val="accent4"/>
-                </a:solidFill>
-                <a:latin typeface="Bahnschrift" pitchFamily="34" charset="0"/>
-                <a:ea typeface="Bahnschrift" pitchFamily="34" charset="-122"/>
-                <a:cs typeface="Bahnschrift" pitchFamily="34" charset="-120"/>
-              </a:rPr>
-              <a:t>0</a:t>
-            </a:r>
-            <a:endParaRPr lang="en-US" sz="4000" dirty="0"/>
-          </a:p>
-        </p:txBody>
-      </p:sp>
-      <p:sp>
-        <p:nvSpPr>
-          <p:cNvPr id="11" name="text-161"/>
-          <p:cNvSpPr txBox="1"/>
-          <p:nvPr/>
-        </p:nvSpPr>
-        <p:spPr>
-          <a:xfrm>
-            <a:off x="6263640" y="2377440"/>
-            <a:ext cx="2148840" cy="1371600"/>
-          </a:xfrm>
-          <a:prstGeom prst="rect">
-            <a:avLst/>
-          </a:prstGeom>
-          <a:noFill/>
-          <a:ln/>
-        </p:spPr>
-        <p:txBody>
-          <a:bodyPr wrap="square" lIns="0" tIns="0" rIns="0" bIns="0" rtlCol="0" anchor="t"/>
-          <a:lstStyle/>
-          <a:p>
-            <a:pPr indent="0" marL="0">
-              <a:buNone/>
-            </a:pPr>
-            <a:r>
-              <a:rPr lang="en-US" sz="1500" dirty="0">
-                <a:solidFill>
-                  <a:schemeClr val="bg1"/>
-                </a:solidFill>
-                <a:latin typeface="Cambria" pitchFamily="34" charset="0"/>
-                <a:ea typeface="Cambria" pitchFamily="34" charset="-122"/>
-                <a:cs typeface="Cambria" pitchFamily="34" charset="-120"/>
-              </a:rPr>
-              <a:t>OpenCV builds for free-threaded Python. I reimplemented 4 calls in NumPy</a:t>
-            </a:r>
-            <a:endParaRPr lang="en-US" sz="1500" dirty="0"/>
-          </a:p>
-        </p:txBody>
-      </p:sp>
-      <p:sp>
-        <p:nvSpPr>
-          <p:cNvPr id="12" name="text-162"/>
-          <p:cNvSpPr txBox="1"/>
-          <p:nvPr/>
-        </p:nvSpPr>
-        <p:spPr>
-          <a:xfrm>
-            <a:off x="457200" y="4069080"/>
-            <a:ext cx="8229600" cy="457200"/>
-          </a:xfrm>
-          <a:prstGeom prst="rect">
-            <a:avLst/>
-          </a:prstGeom>
-          <a:noFill/>
-          <a:ln/>
-        </p:spPr>
-        <p:txBody>
-          <a:bodyPr wrap="square" lIns="0" tIns="0" rIns="0" bIns="0" rtlCol="0" anchor="ctr"/>
-          <a:lstStyle/>
-          <a:p>
-            <a:pPr indent="0" marL="0">
-              <a:buNone/>
-            </a:pPr>
-            <a:r>
-              <a:rPr lang="en-US" sz="1400" dirty="0">
+              <a:rPr lang="en-US" sz="1100" dirty="0">
                 <a:solidFill>
                   <a:schemeClr val="bg2"/>
                 </a:solidFill>
@@ -12134,9 +14970,9 @@
                 <a:ea typeface="Cambria" pitchFamily="34" charset="-122"/>
                 <a:cs typeface="Cambria" pitchFamily="34" charset="-120"/>
               </a:rPr>
-              <a:t>PEP 703 made the GIL optional [7]. For this workload it already works, though libraries are still catching up.</a:t>
+              <a:t>Wall-clock time to extract keypoints and descriptors. Other rows: Python 3.14 with the GIL. No-GIL: free-threaded 3.14t.</a:t>
             </a:r>
-            <a:endParaRPr lang="en-US" sz="1400" dirty="0"/>
+            <a:endParaRPr lang="en-US" sz="1100" dirty="0"/>
           </a:p>
         </p:txBody>
       </p:sp>
@@ -12750,6 +15586,453 @@
                   <a:schemeClr val="bg1"/>
                 </a:solidFill>
               </a:rPr>
+              <a:t>Python 3.14 without the GIL: threads finally scale</a:t>
+            </a:r>
+            <a:endParaRPr lang="en-US" sz="3000" dirty="0"/>
+          </a:p>
+        </p:txBody>
+      </p:sp>
+      <p:sp>
+        <p:nvSpPr>
+          <p:cNvPr id="3" name="card-154"/>
+          <p:cNvSpPr/>
+          <p:nvPr/>
+        </p:nvSpPr>
+        <p:spPr>
+          <a:xfrm>
+            <a:off x="457200" y="1234440"/>
+            <a:ext cx="2606040" cy="2651760"/>
+          </a:xfrm>
+          <a:prstGeom prst="roundRect">
+            <a:avLst>
+              <a:gd name="adj" fmla="val 2807"/>
+            </a:avLst>
+          </a:prstGeom>
+          <a:solidFill>
+            <a:schemeClr val="accent6"/>
+          </a:solidFill>
+          <a:ln/>
+        </p:spPr>
+      </p:sp>
+      <p:sp>
+        <p:nvSpPr>
+          <p:cNvPr id="4" name="text-155"/>
+          <p:cNvSpPr txBox="1"/>
+          <p:nvPr/>
+        </p:nvSpPr>
+        <p:spPr>
+          <a:xfrm>
+            <a:off x="685800" y="1463040"/>
+            <a:ext cx="2148840" cy="822960"/>
+          </a:xfrm>
+          <a:prstGeom prst="rect">
+            <a:avLst/>
+          </a:prstGeom>
+          <a:noFill/>
+          <a:ln/>
+        </p:spPr>
+        <p:txBody>
+          <a:bodyPr wrap="square" lIns="0" tIns="0" rIns="0" bIns="0" rtlCol="0" anchor="ctr"/>
+          <a:lstStyle/>
+          <a:p>
+            <a:pPr indent="0" marL="0">
+              <a:buNone/>
+            </a:pPr>
+            <a:r>
+              <a:rPr lang="en-US" sz="4000" b="1" dirty="0">
+                <a:solidFill>
+                  <a:schemeClr val="accent4"/>
+                </a:solidFill>
+                <a:latin typeface="Bahnschrift" pitchFamily="34" charset="0"/>
+                <a:ea typeface="Bahnschrift" pitchFamily="34" charset="-122"/>
+                <a:cs typeface="Bahnschrift" pitchFamily="34" charset="-120"/>
+              </a:rPr>
+              <a:t>5.82×</a:t>
+            </a:r>
+            <a:endParaRPr lang="en-US" sz="4000" dirty="0"/>
+          </a:p>
+        </p:txBody>
+      </p:sp>
+      <p:sp>
+        <p:nvSpPr>
+          <p:cNvPr id="5" name="text-156"/>
+          <p:cNvSpPr txBox="1"/>
+          <p:nvPr/>
+        </p:nvSpPr>
+        <p:spPr>
+          <a:xfrm>
+            <a:off x="685800" y="2377440"/>
+            <a:ext cx="2148840" cy="1371600"/>
+          </a:xfrm>
+          <a:prstGeom prst="rect">
+            <a:avLst/>
+          </a:prstGeom>
+          <a:noFill/>
+          <a:ln/>
+        </p:spPr>
+        <p:txBody>
+          <a:bodyPr wrap="square" lIns="0" tIns="0" rIns="0" bIns="0" rtlCol="0" anchor="t"/>
+          <a:lstStyle/>
+          <a:p>
+            <a:pPr indent="0" marL="0">
+              <a:buNone/>
+            </a:pPr>
+            <a:r>
+              <a:rPr lang="en-US" sz="1500" dirty="0">
+                <a:solidFill>
+                  <a:schemeClr val="bg1"/>
+                </a:solidFill>
+                <a:latin typeface="Cambria" pitchFamily="34" charset="0"/>
+                <a:ea typeface="Cambria" pitchFamily="34" charset="-122"/>
+                <a:cs typeface="Cambria" pitchFamily="34" charset="-120"/>
+              </a:rPr>
+              <a:t>No-GIL threads at 16 tiles (3.30× at 4), close to processes</a:t>
+            </a:r>
+            <a:endParaRPr lang="en-US" sz="1500" dirty="0"/>
+          </a:p>
+        </p:txBody>
+      </p:sp>
+      <p:sp>
+        <p:nvSpPr>
+          <p:cNvPr id="6" name="card-157"/>
+          <p:cNvSpPr/>
+          <p:nvPr/>
+        </p:nvSpPr>
+        <p:spPr>
+          <a:xfrm>
+            <a:off x="3246120" y="1234440"/>
+            <a:ext cx="2606040" cy="2651760"/>
+          </a:xfrm>
+          <a:prstGeom prst="roundRect">
+            <a:avLst>
+              <a:gd name="adj" fmla="val 2807"/>
+            </a:avLst>
+          </a:prstGeom>
+          <a:solidFill>
+            <a:schemeClr val="accent6"/>
+          </a:solidFill>
+          <a:ln/>
+        </p:spPr>
+      </p:sp>
+      <p:sp>
+        <p:nvSpPr>
+          <p:cNvPr id="7" name="text-158"/>
+          <p:cNvSpPr txBox="1"/>
+          <p:nvPr/>
+        </p:nvSpPr>
+        <p:spPr>
+          <a:xfrm>
+            <a:off x="3474720" y="1463040"/>
+            <a:ext cx="2148840" cy="822960"/>
+          </a:xfrm>
+          <a:prstGeom prst="rect">
+            <a:avLst/>
+          </a:prstGeom>
+          <a:noFill/>
+          <a:ln/>
+        </p:spPr>
+        <p:txBody>
+          <a:bodyPr wrap="square" lIns="0" tIns="0" rIns="0" bIns="0" rtlCol="0" anchor="ctr"/>
+          <a:lstStyle/>
+          <a:p>
+            <a:pPr indent="0" marL="0">
+              <a:buNone/>
+            </a:pPr>
+            <a:r>
+              <a:rPr lang="en-US" sz="4000" b="1" dirty="0">
+                <a:solidFill>
+                  <a:schemeClr val="accent4"/>
+                </a:solidFill>
+                <a:latin typeface="Bahnschrift" pitchFamily="34" charset="0"/>
+                <a:ea typeface="Bahnschrift" pitchFamily="34" charset="-122"/>
+                <a:cs typeface="Bahnschrift" pitchFamily="34" charset="-120"/>
+              </a:rPr>
+              <a:t>+11%</a:t>
+            </a:r>
+            <a:endParaRPr lang="en-US" sz="4000" dirty="0"/>
+          </a:p>
+        </p:txBody>
+      </p:sp>
+      <p:sp>
+        <p:nvSpPr>
+          <p:cNvPr id="8" name="text-159"/>
+          <p:cNvSpPr txBox="1"/>
+          <p:nvPr/>
+        </p:nvSpPr>
+        <p:spPr>
+          <a:xfrm>
+            <a:off x="3474720" y="2377440"/>
+            <a:ext cx="2148840" cy="1371600"/>
+          </a:xfrm>
+          <a:prstGeom prst="rect">
+            <a:avLst/>
+          </a:prstGeom>
+          <a:noFill/>
+          <a:ln/>
+        </p:spPr>
+        <p:txBody>
+          <a:bodyPr wrap="square" lIns="0" tIns="0" rIns="0" bIns="0" rtlCol="0" anchor="t"/>
+          <a:lstStyle/>
+          <a:p>
+            <a:pPr indent="0" marL="0">
+              <a:buNone/>
+            </a:pPr>
+            <a:r>
+              <a:rPr lang="en-US" sz="1500" dirty="0">
+                <a:solidFill>
+                  <a:schemeClr val="bg1"/>
+                </a:solidFill>
+                <a:latin typeface="Cambria" pitchFamily="34" charset="0"/>
+                <a:ea typeface="Cambria" pitchFamily="34" charset="-122"/>
+                <a:cs typeface="Cambria" pitchFamily="34" charset="-120"/>
+              </a:rPr>
+              <a:t>Slower single-threaded: the cost of a thread-safe interpreter</a:t>
+            </a:r>
+            <a:endParaRPr lang="en-US" sz="1500" dirty="0"/>
+          </a:p>
+        </p:txBody>
+      </p:sp>
+      <p:sp>
+        <p:nvSpPr>
+          <p:cNvPr id="9" name="card-160"/>
+          <p:cNvSpPr/>
+          <p:nvPr/>
+        </p:nvSpPr>
+        <p:spPr>
+          <a:xfrm>
+            <a:off x="6035040" y="1234440"/>
+            <a:ext cx="2606040" cy="2651760"/>
+          </a:xfrm>
+          <a:prstGeom prst="roundRect">
+            <a:avLst>
+              <a:gd name="adj" fmla="val 2807"/>
+            </a:avLst>
+          </a:prstGeom>
+          <a:solidFill>
+            <a:schemeClr val="accent6"/>
+          </a:solidFill>
+          <a:ln/>
+        </p:spPr>
+      </p:sp>
+      <p:sp>
+        <p:nvSpPr>
+          <p:cNvPr id="10" name="text-161"/>
+          <p:cNvSpPr txBox="1"/>
+          <p:nvPr/>
+        </p:nvSpPr>
+        <p:spPr>
+          <a:xfrm>
+            <a:off x="6263640" y="1463040"/>
+            <a:ext cx="2148840" cy="822960"/>
+          </a:xfrm>
+          <a:prstGeom prst="rect">
+            <a:avLst/>
+          </a:prstGeom>
+          <a:noFill/>
+          <a:ln/>
+        </p:spPr>
+        <p:txBody>
+          <a:bodyPr wrap="square" lIns="0" tIns="0" rIns="0" bIns="0" rtlCol="0" anchor="ctr"/>
+          <a:lstStyle/>
+          <a:p>
+            <a:pPr indent="0" marL="0">
+              <a:buNone/>
+            </a:pPr>
+            <a:r>
+              <a:rPr lang="en-US" sz="4000" b="1" dirty="0">
+                <a:solidFill>
+                  <a:schemeClr val="accent4"/>
+                </a:solidFill>
+                <a:latin typeface="Bahnschrift" pitchFamily="34" charset="0"/>
+                <a:ea typeface="Bahnschrift" pitchFamily="34" charset="-122"/>
+                <a:cs typeface="Bahnschrift" pitchFamily="34" charset="-120"/>
+              </a:rPr>
+              <a:t>0</a:t>
+            </a:r>
+            <a:endParaRPr lang="en-US" sz="4000" dirty="0"/>
+          </a:p>
+        </p:txBody>
+      </p:sp>
+      <p:sp>
+        <p:nvSpPr>
+          <p:cNvPr id="11" name="text-162"/>
+          <p:cNvSpPr txBox="1"/>
+          <p:nvPr/>
+        </p:nvSpPr>
+        <p:spPr>
+          <a:xfrm>
+            <a:off x="6263640" y="2377440"/>
+            <a:ext cx="2148840" cy="1371600"/>
+          </a:xfrm>
+          <a:prstGeom prst="rect">
+            <a:avLst/>
+          </a:prstGeom>
+          <a:noFill/>
+          <a:ln/>
+        </p:spPr>
+        <p:txBody>
+          <a:bodyPr wrap="square" lIns="0" tIns="0" rIns="0" bIns="0" rtlCol="0" anchor="t"/>
+          <a:lstStyle/>
+          <a:p>
+            <a:pPr indent="0" marL="0">
+              <a:buNone/>
+            </a:pPr>
+            <a:r>
+              <a:rPr lang="en-US" sz="1500" dirty="0">
+                <a:solidFill>
+                  <a:schemeClr val="bg1"/>
+                </a:solidFill>
+                <a:latin typeface="Cambria" pitchFamily="34" charset="0"/>
+                <a:ea typeface="Cambria" pitchFamily="34" charset="-122"/>
+                <a:cs typeface="Cambria" pitchFamily="34" charset="-120"/>
+              </a:rPr>
+              <a:t>OpenCV builds for free-threaded Python. I reimplemented 4 calls in NumPy</a:t>
+            </a:r>
+            <a:endParaRPr lang="en-US" sz="1500" dirty="0"/>
+          </a:p>
+        </p:txBody>
+      </p:sp>
+      <p:sp>
+        <p:nvSpPr>
+          <p:cNvPr id="12" name="text-163"/>
+          <p:cNvSpPr txBox="1"/>
+          <p:nvPr/>
+        </p:nvSpPr>
+        <p:spPr>
+          <a:xfrm>
+            <a:off x="457200" y="4069080"/>
+            <a:ext cx="8229600" cy="457200"/>
+          </a:xfrm>
+          <a:prstGeom prst="rect">
+            <a:avLst/>
+          </a:prstGeom>
+          <a:noFill/>
+          <a:ln/>
+        </p:spPr>
+        <p:txBody>
+          <a:bodyPr wrap="square" lIns="0" tIns="0" rIns="0" bIns="0" rtlCol="0" anchor="ctr"/>
+          <a:lstStyle/>
+          <a:p>
+            <a:pPr indent="0" marL="0">
+              <a:buNone/>
+            </a:pPr>
+            <a:r>
+              <a:rPr lang="en-US" sz="1400" dirty="0">
+                <a:solidFill>
+                  <a:schemeClr val="bg2"/>
+                </a:solidFill>
+                <a:latin typeface="Cambria" pitchFamily="34" charset="0"/>
+                <a:ea typeface="Cambria" pitchFamily="34" charset="-122"/>
+                <a:cs typeface="Cambria" pitchFamily="34" charset="-120"/>
+              </a:rPr>
+              <a:t>PEP 703 made the GIL optional [7]. For this workload it already works, though libraries are still catching up.</a:t>
+            </a:r>
+            <a:endParaRPr lang="en-US" sz="1400" dirty="0"/>
+          </a:p>
+        </p:txBody>
+      </p:sp>
+      <p:sp>
+        <p:nvSpPr>
+          <p:cNvPr id="25" name="Slide Number Placeholder 0"/>
+          <p:cNvSpPr>
+            <a:spLocks noGrp="1"/>
+          </p:cNvSpPr>
+          <p:nvPr>
+            <p:ph type="sldNum" sz="quarter" idx="4294967295"/>
+          </p:nvPr>
+        </p:nvSpPr>
+        <p:spPr>
+          <a:xfrm>
+            <a:off x="8229600" y="4754880"/>
+            <a:ext cx="457200" cy="274320"/>
+          </a:xfrm>
+          <a:prstGeom prst="rect">
+            <a:avLst/>
+          </a:prstGeom>
+          <a:extLst>
+            <a:ext uri="{C572A759-6A51-4108-AA02-DFA0A04FC94B}">
+              <ma14:wrappingTextBoxFlag xmlns:ma14="http://schemas.microsoft.com/office/mac/drawingml/2011/main" val="0"/>
+            </a:ext>
+          </a:extLst>
+        </p:spPr>
+        <p:txBody>
+          <a:bodyPr/>
+          <a:lstStyle>
+            <a:lvl1pPr>
+              <a:defRPr sz="1000">
+                <a:solidFill>
+                  <a:schemeClr val="bg2"/>
+                </a:solidFill>
+              </a:defRPr>
+            </a:lvl1pPr>
+          </a:lstStyle>
+          <a:p>
+            <a:pPr algn="r"/>
+            <a:fld id="{F7021451-1387-4CA6-816F-3879F97B5CBC}" type="slidenum">
+              <a:rPr b="0" lang="en-US"/>
+              <a:t>20</a:t>
+            </a:fld>
+            <a:endParaRPr lang="en-US"/>
+          </a:p>
+        </p:txBody>
+      </p:sp>
+    </p:spTree>
+  </p:cSld>
+  <p:clrMapOvr>
+    <a:masterClrMapping/>
+  </p:clrMapOvr>
+</p:sld>
+</file>
+
+<file path=ppt/slides/slide21.xml><?xml version="1.0" encoding="utf-8"?>
+<p:sld xmlns:a="http://schemas.openxmlformats.org/drawingml/2006/main" xmlns:r="http://schemas.openxmlformats.org/officeDocument/2006/relationships" xmlns:p="http://schemas.openxmlformats.org/presentationml/2006/main">
+  <p:cSld name="Slide 21">
+    <p:spTree>
+      <p:nvGrpSpPr>
+        <p:cNvPr id="1" name=""/>
+        <p:cNvGrpSpPr/>
+        <p:nvPr/>
+      </p:nvGrpSpPr>
+      <p:grpSpPr>
+        <a:xfrm>
+          <a:off x="0" y="0"/>
+          <a:ext cx="0" cy="0"/>
+          <a:chOff x="0" y="0"/>
+          <a:chExt cx="0" cy="0"/>
+        </a:xfrm>
+      </p:grpSpPr>
+      <p:sp>
+        <p:nvSpPr>
+          <p:cNvPr id="2" name="Text 0"/>
+          <p:cNvSpPr/>
+          <p:nvPr>
+            <p:ph idx="100" type="title" hasCustomPrompt="1"/>
+          </p:nvPr>
+        </p:nvSpPr>
+        <p:spPr>
+          <a:xfrm>
+            <a:off x="457200" y="274320"/>
+            <a:ext cx="8229600" cy="685800"/>
+          </a:xfrm>
+          <a:prstGeom prst="rect">
+            <a:avLst/>
+          </a:prstGeom>
+          <a:noFill/>
+          <a:ln/>
+        </p:spPr>
+        <p:txBody>
+          <a:bodyPr wrap="square" lIns="0" tIns="0" rIns="0" bIns="0" rtlCol="0" anchor="ctr"/>
+          <a:lstStyle/>
+          <a:p>
+            <a:pPr algn="l" indent="0" marL="0">
+              <a:buNone/>
+            </a:pPr>
+            <a:r>
+              <a:rPr lang="en-US" sz="3000" b="1" dirty="0">
+                <a:solidFill>
+                  <a:schemeClr val="bg1"/>
+                </a:solidFill>
+              </a:rPr>
               <a:t>The hidden cost: keypoints lost at tile borders</a:t>
             </a:r>
             <a:endParaRPr lang="en-US" sz="3000" dirty="0"/>
@@ -12758,7 +16041,7 @@
       </p:sp>
       <p:sp>
         <p:nvSpPr>
-          <p:cNvPr id="3" name="frame-163"/>
+          <p:cNvPr id="3" name="frame-164"/>
           <p:cNvSpPr/>
           <p:nvPr/>
         </p:nvSpPr>
@@ -12780,7 +16063,7 @@
       </p:sp>
       <p:pic>
         <p:nvPicPr>
-          <p:cNvPr id="4" name="image-164" descr="C:\Users\Musa Waghu\.claude\jobs\3cc2589d\tmp\deck\kp_lost16.png">    </p:cNvPr>
+          <p:cNvPr id="4" name="image-165" descr="C:\Users\Musa Waghu\.claude\jobs\3cc2589d\tmp\deck\kp_lost16.png">    </p:cNvPr>
           <p:cNvPicPr>
             <a:picLocks noChangeAspect="1"/>
           </p:cNvPicPr>
@@ -12804,7 +16087,7 @@
       </p:pic>
       <p:sp>
         <p:nvSpPr>
-          <p:cNvPr id="5" name="text-165"/>
+          <p:cNvPr id="5" name="text-166"/>
           <p:cNvSpPr txBox="1"/>
           <p:nvPr/>
         </p:nvSpPr>
@@ -12843,7 +16126,7 @@
       </p:sp>
       <p:graphicFrame>
         <p:nvGraphicFramePr>
-          <p:cNvPr id="21" name="table-keypoints"/>
+          <p:cNvPr id="22" name="table-keypoints"/>
           <p:cNvGraphicFramePr>
             <a:graphicFrameLocks noGrp="1"/>
           </p:cNvGraphicFramePr>
@@ -13698,7 +16981,7 @@
       </p:graphicFrame>
       <p:sp>
         <p:nvSpPr>
-          <p:cNvPr id="7" name="text-166"/>
+          <p:cNvPr id="7" name="text-167"/>
           <p:cNvSpPr txBox="1"/>
           <p:nvPr/>
         </p:nvSpPr>
@@ -13776,546 +17059,6 @@
                 <a:cs typeface="Cambria" pitchFamily="34" charset="-120"/>
               </a:rPr>
               <a:t>Worst image loses 12.1% at 16 tiles</a:t>
-            </a:r>
-            <a:endParaRPr lang="en-US" sz="1400" dirty="0"/>
-          </a:p>
-        </p:txBody>
-      </p:sp>
-      <p:sp>
-        <p:nvSpPr>
-          <p:cNvPr id="25" name="Slide Number Placeholder 0"/>
-          <p:cNvSpPr>
-            <a:spLocks noGrp="1"/>
-          </p:cNvSpPr>
-          <p:nvPr>
-            <p:ph type="sldNum" sz="quarter" idx="4294967295"/>
-          </p:nvPr>
-        </p:nvSpPr>
-        <p:spPr>
-          <a:xfrm>
-            <a:off x="8229600" y="4754880"/>
-            <a:ext cx="457200" cy="274320"/>
-          </a:xfrm>
-          <a:prstGeom prst="rect">
-            <a:avLst/>
-          </a:prstGeom>
-          <a:extLst>
-            <a:ext uri="{C572A759-6A51-4108-AA02-DFA0A04FC94B}">
-              <ma14:wrappingTextBoxFlag xmlns:ma14="http://schemas.microsoft.com/office/mac/drawingml/2011/main" val="0"/>
-            </a:ext>
-          </a:extLst>
-        </p:spPr>
-        <p:txBody>
-          <a:bodyPr/>
-          <a:lstStyle>
-            <a:lvl1pPr>
-              <a:defRPr sz="1000">
-                <a:solidFill>
-                  <a:schemeClr val="bg2"/>
-                </a:solidFill>
-              </a:defRPr>
-            </a:lvl1pPr>
-          </a:lstStyle>
-          <a:p>
-            <a:pPr algn="r"/>
-            <a:fld id="{F7021451-1387-4CA6-816F-3879F97B5CBC}" type="slidenum">
-              <a:rPr b="0" lang="en-US"/>
-              <a:t>20</a:t>
-            </a:fld>
-            <a:endParaRPr lang="en-US"/>
-          </a:p>
-        </p:txBody>
-      </p:sp>
-    </p:spTree>
-  </p:cSld>
-  <p:clrMapOvr>
-    <a:masterClrMapping/>
-  </p:clrMapOvr>
-</p:sld>
-</file>
-
-<file path=ppt/slides/slide21.xml><?xml version="1.0" encoding="utf-8"?>
-<p:sld xmlns:a="http://schemas.openxmlformats.org/drawingml/2006/main" xmlns:r="http://schemas.openxmlformats.org/officeDocument/2006/relationships" xmlns:p="http://schemas.openxmlformats.org/presentationml/2006/main">
-  <p:cSld name="Slide 21">
-    <p:spTree>
-      <p:nvGrpSpPr>
-        <p:cNvPr id="1" name=""/>
-        <p:cNvGrpSpPr/>
-        <p:nvPr/>
-      </p:nvGrpSpPr>
-      <p:grpSpPr>
-        <a:xfrm>
-          <a:off x="0" y="0"/>
-          <a:ext cx="0" cy="0"/>
-          <a:chOff x="0" y="0"/>
-          <a:chExt cx="0" cy="0"/>
-        </a:xfrm>
-      </p:grpSpPr>
-      <p:sp>
-        <p:nvSpPr>
-          <p:cNvPr id="2" name="Text 0"/>
-          <p:cNvSpPr/>
-          <p:nvPr>
-            <p:ph idx="100" type="title" hasCustomPrompt="1"/>
-          </p:nvPr>
-        </p:nvSpPr>
-        <p:spPr>
-          <a:xfrm>
-            <a:off x="457200" y="274320"/>
-            <a:ext cx="8229600" cy="685800"/>
-          </a:xfrm>
-          <a:prstGeom prst="rect">
-            <a:avLst/>
-          </a:prstGeom>
-          <a:noFill/>
-          <a:ln/>
-        </p:spPr>
-        <p:txBody>
-          <a:bodyPr wrap="square" lIns="0" tIns="0" rIns="0" bIns="0" rtlCol="0" anchor="ctr"/>
-          <a:lstStyle/>
-          <a:p>
-            <a:pPr algn="l" indent="0" marL="0">
-              <a:buNone/>
-            </a:pPr>
-            <a:r>
-              <a:rPr lang="en-US" sz="3000" b="1" dirty="0">
-                <a:solidFill>
-                  <a:schemeClr val="bg1"/>
-                </a:solidFill>
-              </a:rPr>
-              <a:t>Bugs found while rebuilding</a:t>
-            </a:r>
-            <a:endParaRPr lang="en-US" sz="3000" dirty="0"/>
-          </a:p>
-        </p:txBody>
-      </p:sp>
-      <p:sp>
-        <p:nvSpPr>
-          <p:cNvPr id="3" name="card-167"/>
-          <p:cNvSpPr/>
-          <p:nvPr/>
-        </p:nvSpPr>
-        <p:spPr>
-          <a:xfrm>
-            <a:off x="457200" y="1234440"/>
-            <a:ext cx="2606040" cy="3108960"/>
-          </a:xfrm>
-          <a:prstGeom prst="roundRect">
-            <a:avLst>
-              <a:gd name="adj" fmla="val 2807"/>
-            </a:avLst>
-          </a:prstGeom>
-          <a:solidFill>
-            <a:schemeClr val="accent6"/>
-          </a:solidFill>
-          <a:ln/>
-        </p:spPr>
-      </p:sp>
-      <p:sp>
-        <p:nvSpPr>
-          <p:cNvPr id="4" name="icon-bg-168"/>
-          <p:cNvSpPr/>
-          <p:nvPr/>
-        </p:nvSpPr>
-        <p:spPr>
-          <a:xfrm>
-            <a:off x="685800" y="1463040"/>
-            <a:ext cx="548640" cy="548640"/>
-          </a:xfrm>
-          <a:prstGeom prst="ellipse">
-            <a:avLst/>
-          </a:prstGeom>
-          <a:solidFill>
-            <a:schemeClr val="accent1"/>
-          </a:solidFill>
-          <a:ln/>
-        </p:spPr>
-      </p:sp>
-      <p:pic>
-        <p:nvPicPr>
-          <p:cNvPr id="5" name="icon-169" descr="preencoded.png">    </p:cNvPr>
-          <p:cNvPicPr>
-            <a:picLocks noChangeAspect="1"/>
-          </p:cNvPicPr>
-          <p:nvPr/>
-        </p:nvPicPr>
-        <p:blipFill>
-          <a:blip r:embed="rId1"/>
-          <a:stretch>
-            <a:fillRect/>
-          </a:stretch>
-        </p:blipFill>
-        <p:spPr>
-          <a:xfrm>
-            <a:off x="806501" y="1583741"/>
-            <a:ext cx="307238" cy="307238"/>
-          </a:xfrm>
-          <a:prstGeom prst="rect">
-            <a:avLst/>
-          </a:prstGeom>
-        </p:spPr>
-      </p:pic>
-      <p:sp>
-        <p:nvSpPr>
-          <p:cNvPr id="6" name="text-170"/>
-          <p:cNvSpPr txBox="1"/>
-          <p:nvPr/>
-        </p:nvSpPr>
-        <p:spPr>
-          <a:xfrm>
-            <a:off x="685800" y="2194560"/>
-            <a:ext cx="2148840" cy="411480"/>
-          </a:xfrm>
-          <a:prstGeom prst="rect">
-            <a:avLst/>
-          </a:prstGeom>
-          <a:noFill/>
-          <a:ln/>
-        </p:spPr>
-        <p:txBody>
-          <a:bodyPr wrap="square" lIns="0" tIns="0" rIns="0" bIns="0" rtlCol="0" anchor="ctr"/>
-          <a:lstStyle/>
-          <a:p>
-            <a:pPr indent="0" marL="0">
-              <a:buNone/>
-            </a:pPr>
-            <a:r>
-              <a:rPr lang="en-US" sz="1800" b="1" dirty="0">
-                <a:solidFill>
-                  <a:schemeClr val="bg1"/>
-                </a:solidFill>
-                <a:latin typeface="Bahnschrift" pitchFamily="34" charset="0"/>
-                <a:ea typeface="Bahnschrift" pitchFamily="34" charset="-122"/>
-                <a:cs typeface="Bahnschrift" pitchFamily="34" charset="-120"/>
-              </a:rPr>
-              <a:t>Ordering race</a:t>
-            </a:r>
-            <a:endParaRPr lang="en-US" sz="1800" dirty="0"/>
-          </a:p>
-        </p:txBody>
-      </p:sp>
-      <p:sp>
-        <p:nvSpPr>
-          <p:cNvPr id="7" name="text-171"/>
-          <p:cNvSpPr txBox="1"/>
-          <p:nvPr/>
-        </p:nvSpPr>
-        <p:spPr>
-          <a:xfrm>
-            <a:off x="685800" y="2651760"/>
-            <a:ext cx="2148840" cy="1600200"/>
-          </a:xfrm>
-          <a:prstGeom prst="rect">
-            <a:avLst/>
-          </a:prstGeom>
-          <a:noFill/>
-          <a:ln/>
-        </p:spPr>
-        <p:txBody>
-          <a:bodyPr wrap="square" lIns="0" tIns="0" rIns="0" bIns="0" rtlCol="0" anchor="t"/>
-          <a:lstStyle/>
-          <a:p>
-            <a:pPr indent="0" marL="0">
-              <a:buNone/>
-            </a:pPr>
-            <a:r>
-              <a:rPr lang="en-US" sz="1400" dirty="0">
-                <a:solidFill>
-                  <a:schemeClr val="bg1"/>
-                </a:solidFill>
-                <a:latin typeface="Cambria" pitchFamily="34" charset="0"/>
-                <a:ea typeface="Cambria" pitchFamily="34" charset="-122"/>
-                <a:cs typeface="Cambria" pitchFamily="34" charset="-120"/>
-              </a:rPr>
-              <a:t>Threads saved results as they finished (e.g. 3, 1, 0, 2), but merging assumed order 0 to 3. Keypoints could land in the wrong quadrant.</a:t>
-            </a:r>
-            <a:endParaRPr lang="en-US" sz="1400" dirty="0"/>
-          </a:p>
-        </p:txBody>
-      </p:sp>
-      <p:sp>
-        <p:nvSpPr>
-          <p:cNvPr id="8" name="card-172"/>
-          <p:cNvSpPr/>
-          <p:nvPr/>
-        </p:nvSpPr>
-        <p:spPr>
-          <a:xfrm>
-            <a:off x="3246120" y="1234440"/>
-            <a:ext cx="2606040" cy="3108960"/>
-          </a:xfrm>
-          <a:prstGeom prst="roundRect">
-            <a:avLst>
-              <a:gd name="adj" fmla="val 2807"/>
-            </a:avLst>
-          </a:prstGeom>
-          <a:solidFill>
-            <a:schemeClr val="accent6"/>
-          </a:solidFill>
-          <a:ln/>
-        </p:spPr>
-      </p:sp>
-      <p:sp>
-        <p:nvSpPr>
-          <p:cNvPr id="9" name="icon-bg-173"/>
-          <p:cNvSpPr/>
-          <p:nvPr/>
-        </p:nvSpPr>
-        <p:spPr>
-          <a:xfrm>
-            <a:off x="3474720" y="1463040"/>
-            <a:ext cx="548640" cy="548640"/>
-          </a:xfrm>
-          <a:prstGeom prst="ellipse">
-            <a:avLst/>
-          </a:prstGeom>
-          <a:solidFill>
-            <a:schemeClr val="accent1"/>
-          </a:solidFill>
-          <a:ln/>
-        </p:spPr>
-      </p:sp>
-      <p:pic>
-        <p:nvPicPr>
-          <p:cNvPr id="10" name="icon-174" descr="preencoded.png">    </p:cNvPr>
-          <p:cNvPicPr>
-            <a:picLocks noChangeAspect="1"/>
-          </p:cNvPicPr>
-          <p:nvPr/>
-        </p:nvPicPr>
-        <p:blipFill>
-          <a:blip r:embed="rId2"/>
-          <a:stretch>
-            <a:fillRect/>
-          </a:stretch>
-        </p:blipFill>
-        <p:spPr>
-          <a:xfrm>
-            <a:off x="3595421" y="1583741"/>
-            <a:ext cx="307238" cy="307238"/>
-          </a:xfrm>
-          <a:prstGeom prst="rect">
-            <a:avLst/>
-          </a:prstGeom>
-        </p:spPr>
-      </p:pic>
-      <p:sp>
-        <p:nvSpPr>
-          <p:cNvPr id="11" name="text-175"/>
-          <p:cNvSpPr txBox="1"/>
-          <p:nvPr/>
-        </p:nvSpPr>
-        <p:spPr>
-          <a:xfrm>
-            <a:off x="3474720" y="2194560"/>
-            <a:ext cx="2148840" cy="411480"/>
-          </a:xfrm>
-          <a:prstGeom prst="rect">
-            <a:avLst/>
-          </a:prstGeom>
-          <a:noFill/>
-          <a:ln/>
-        </p:spPr>
-        <p:txBody>
-          <a:bodyPr wrap="square" lIns="0" tIns="0" rIns="0" bIns="0" rtlCol="0" anchor="ctr"/>
-          <a:lstStyle/>
-          <a:p>
-            <a:pPr indent="0" marL="0">
-              <a:buNone/>
-            </a:pPr>
-            <a:r>
-              <a:rPr lang="en-US" sz="1800" b="1" dirty="0">
-                <a:solidFill>
-                  <a:schemeClr val="bg1"/>
-                </a:solidFill>
-                <a:latin typeface="Bahnschrift" pitchFamily="34" charset="0"/>
-                <a:ea typeface="Bahnschrift" pitchFamily="34" charset="-122"/>
-                <a:cs typeface="Bahnschrift" pitchFamily="34" charset="-120"/>
-              </a:rPr>
-              <a:t>Pickling error</a:t>
-            </a:r>
-            <a:endParaRPr lang="en-US" sz="1800" dirty="0"/>
-          </a:p>
-        </p:txBody>
-      </p:sp>
-      <p:sp>
-        <p:nvSpPr>
-          <p:cNvPr id="12" name="text-176"/>
-          <p:cNvSpPr txBox="1"/>
-          <p:nvPr/>
-        </p:nvSpPr>
-        <p:spPr>
-          <a:xfrm>
-            <a:off x="3474720" y="2651760"/>
-            <a:ext cx="2148840" cy="1600200"/>
-          </a:xfrm>
-          <a:prstGeom prst="rect">
-            <a:avLst/>
-          </a:prstGeom>
-          <a:noFill/>
-          <a:ln/>
-        </p:spPr>
-        <p:txBody>
-          <a:bodyPr wrap="square" lIns="0" tIns="0" rIns="0" bIns="0" rtlCol="0" anchor="t"/>
-          <a:lstStyle/>
-          <a:p>
-            <a:pPr indent="0" marL="0">
-              <a:buNone/>
-            </a:pPr>
-            <a:r>
-              <a:rPr lang="en-US" sz="1400" dirty="0">
-                <a:solidFill>
-                  <a:schemeClr val="bg1"/>
-                </a:solidFill>
-                <a:latin typeface="Cambria" pitchFamily="34" charset="0"/>
-                <a:ea typeface="Cambria" pitchFamily="34" charset="-122"/>
-                <a:cs typeface="Cambria" pitchFamily="34" charset="-120"/>
-              </a:rPr>
-              <a:t>cv2.KeyPoint can't be pickled, which blocks saving results and multiprocessing. Fixed by passing plain tuples.</a:t>
-            </a:r>
-            <a:endParaRPr lang="en-US" sz="1400" dirty="0"/>
-          </a:p>
-        </p:txBody>
-      </p:sp>
-      <p:sp>
-        <p:nvSpPr>
-          <p:cNvPr id="13" name="card-177"/>
-          <p:cNvSpPr/>
-          <p:nvPr/>
-        </p:nvSpPr>
-        <p:spPr>
-          <a:xfrm>
-            <a:off x="6035040" y="1234440"/>
-            <a:ext cx="2606040" cy="3108960"/>
-          </a:xfrm>
-          <a:prstGeom prst="roundRect">
-            <a:avLst>
-              <a:gd name="adj" fmla="val 2807"/>
-            </a:avLst>
-          </a:prstGeom>
-          <a:solidFill>
-            <a:schemeClr val="accent6"/>
-          </a:solidFill>
-          <a:ln/>
-        </p:spPr>
-      </p:sp>
-      <p:sp>
-        <p:nvSpPr>
-          <p:cNvPr id="14" name="icon-bg-178"/>
-          <p:cNvSpPr/>
-          <p:nvPr/>
-        </p:nvSpPr>
-        <p:spPr>
-          <a:xfrm>
-            <a:off x="6263640" y="1463040"/>
-            <a:ext cx="548640" cy="548640"/>
-          </a:xfrm>
-          <a:prstGeom prst="ellipse">
-            <a:avLst/>
-          </a:prstGeom>
-          <a:solidFill>
-            <a:schemeClr val="accent1"/>
-          </a:solidFill>
-          <a:ln/>
-        </p:spPr>
-      </p:sp>
-      <p:pic>
-        <p:nvPicPr>
-          <p:cNvPr id="15" name="icon-179" descr="preencoded.png">    </p:cNvPr>
-          <p:cNvPicPr>
-            <a:picLocks noChangeAspect="1"/>
-          </p:cNvPicPr>
-          <p:nvPr/>
-        </p:nvPicPr>
-        <p:blipFill>
-          <a:blip r:embed="rId3"/>
-          <a:stretch>
-            <a:fillRect/>
-          </a:stretch>
-        </p:blipFill>
-        <p:spPr>
-          <a:xfrm>
-            <a:off x="6384341" y="1583741"/>
-            <a:ext cx="307238" cy="307238"/>
-          </a:xfrm>
-          <a:prstGeom prst="rect">
-            <a:avLst/>
-          </a:prstGeom>
-        </p:spPr>
-      </p:pic>
-      <p:sp>
-        <p:nvSpPr>
-          <p:cNvPr id="16" name="text-180"/>
-          <p:cNvSpPr txBox="1"/>
-          <p:nvPr/>
-        </p:nvSpPr>
-        <p:spPr>
-          <a:xfrm>
-            <a:off x="6263640" y="2194560"/>
-            <a:ext cx="2148840" cy="411480"/>
-          </a:xfrm>
-          <a:prstGeom prst="rect">
-            <a:avLst/>
-          </a:prstGeom>
-          <a:noFill/>
-          <a:ln/>
-        </p:spPr>
-        <p:txBody>
-          <a:bodyPr wrap="square" lIns="0" tIns="0" rIns="0" bIns="0" rtlCol="0" anchor="ctr"/>
-          <a:lstStyle/>
-          <a:p>
-            <a:pPr indent="0" marL="0">
-              <a:buNone/>
-            </a:pPr>
-            <a:r>
-              <a:rPr lang="en-US" sz="1800" b="1" dirty="0">
-                <a:solidFill>
-                  <a:schemeClr val="bg1"/>
-                </a:solidFill>
-                <a:latin typeface="Bahnschrift" pitchFamily="34" charset="0"/>
-                <a:ea typeface="Bahnschrift" pitchFamily="34" charset="-122"/>
-                <a:cs typeface="Bahnschrift" pitchFamily="34" charset="-120"/>
-              </a:rPr>
-              <a:t>Matching crash</a:t>
-            </a:r>
-            <a:endParaRPr lang="en-US" sz="1800" dirty="0"/>
-          </a:p>
-        </p:txBody>
-      </p:sp>
-      <p:sp>
-        <p:nvSpPr>
-          <p:cNvPr id="17" name="text-181"/>
-          <p:cNvSpPr txBox="1"/>
-          <p:nvPr/>
-        </p:nvSpPr>
-        <p:spPr>
-          <a:xfrm>
-            <a:off x="6263640" y="2651760"/>
-            <a:ext cx="2148840" cy="1600200"/>
-          </a:xfrm>
-          <a:prstGeom prst="rect">
-            <a:avLst/>
-          </a:prstGeom>
-          <a:noFill/>
-          <a:ln/>
-        </p:spPr>
-        <p:txBody>
-          <a:bodyPr wrap="square" lIns="0" tIns="0" rIns="0" bIns="0" rtlCol="0" anchor="t"/>
-          <a:lstStyle/>
-          <a:p>
-            <a:pPr indent="0" marL="0">
-              <a:buNone/>
-            </a:pPr>
-            <a:r>
-              <a:rPr lang="en-US" sz="1400" dirty="0">
-                <a:solidFill>
-                  <a:schemeClr val="bg1"/>
-                </a:solidFill>
-                <a:latin typeface="Cambria" pitchFamily="34" charset="0"/>
-                <a:ea typeface="Cambria" pitchFamily="34" charset="-122"/>
-                <a:cs typeface="Cambria" pitchFamily="34" charset="-120"/>
-              </a:rPr>
-              <a:t>The retrieval step passed the wrong image shape to perspectiveTransform.</a:t>
             </a:r>
             <a:endParaRPr lang="en-US" sz="1400" dirty="0"/>
           </a:p>
@@ -14393,14 +17136,118 @@
       </p:grpSpPr>
       <p:sp>
         <p:nvSpPr>
-          <p:cNvPr id="2" name="text-182"/>
+          <p:cNvPr id="2" name="Text 0"/>
+          <p:cNvSpPr/>
+          <p:nvPr>
+            <p:ph idx="100" type="title" hasCustomPrompt="1"/>
+          </p:nvPr>
+        </p:nvSpPr>
+        <p:spPr>
+          <a:xfrm>
+            <a:off x="457200" y="274320"/>
+            <a:ext cx="8229600" cy="685800"/>
+          </a:xfrm>
+          <a:prstGeom prst="rect">
+            <a:avLst/>
+          </a:prstGeom>
+          <a:noFill/>
+          <a:ln/>
+        </p:spPr>
+        <p:txBody>
+          <a:bodyPr wrap="square" lIns="0" tIns="0" rIns="0" bIns="0" rtlCol="0" anchor="ctr"/>
+          <a:lstStyle/>
+          <a:p>
+            <a:pPr algn="l" indent="0" marL="0">
+              <a:buNone/>
+            </a:pPr>
+            <a:r>
+              <a:rPr lang="en-US" sz="3000" b="1" dirty="0">
+                <a:solidFill>
+                  <a:schemeClr val="bg1"/>
+                </a:solidFill>
+              </a:rPr>
+              <a:t>Bugs found while rebuilding</a:t>
+            </a:r>
+            <a:endParaRPr lang="en-US" sz="3000" dirty="0"/>
+          </a:p>
+        </p:txBody>
+      </p:sp>
+      <p:sp>
+        <p:nvSpPr>
+          <p:cNvPr id="3" name="card-168"/>
+          <p:cNvSpPr/>
+          <p:nvPr/>
+        </p:nvSpPr>
+        <p:spPr>
+          <a:xfrm>
+            <a:off x="457200" y="1234440"/>
+            <a:ext cx="2606040" cy="3108960"/>
+          </a:xfrm>
+          <a:prstGeom prst="roundRect">
+            <a:avLst>
+              <a:gd name="adj" fmla="val 2807"/>
+            </a:avLst>
+          </a:prstGeom>
+          <a:solidFill>
+            <a:schemeClr val="accent6"/>
+          </a:solidFill>
+          <a:ln/>
+        </p:spPr>
+      </p:sp>
+      <p:sp>
+        <p:nvSpPr>
+          <p:cNvPr id="4" name="icon-bg-169"/>
+          <p:cNvSpPr/>
+          <p:nvPr/>
+        </p:nvSpPr>
+        <p:spPr>
+          <a:xfrm>
+            <a:off x="685800" y="1463040"/>
+            <a:ext cx="548640" cy="548640"/>
+          </a:xfrm>
+          <a:prstGeom prst="ellipse">
+            <a:avLst/>
+          </a:prstGeom>
+          <a:solidFill>
+            <a:schemeClr val="accent1"/>
+          </a:solidFill>
+          <a:ln/>
+        </p:spPr>
+      </p:sp>
+      <p:pic>
+        <p:nvPicPr>
+          <p:cNvPr id="5" name="icon-170" descr="preencoded.png">    </p:cNvPr>
+          <p:cNvPicPr>
+            <a:picLocks noChangeAspect="1"/>
+          </p:cNvPicPr>
+          <p:nvPr/>
+        </p:nvPicPr>
+        <p:blipFill>
+          <a:blip r:embed="rId1"/>
+          <a:stretch>
+            <a:fillRect/>
+          </a:stretch>
+        </p:blipFill>
+        <p:spPr>
+          <a:xfrm>
+            <a:off x="806501" y="1583741"/>
+            <a:ext cx="307238" cy="307238"/>
+          </a:xfrm>
+          <a:prstGeom prst="rect">
+            <a:avLst/>
+          </a:prstGeom>
+        </p:spPr>
+      </p:pic>
+      <p:sp>
+        <p:nvSpPr>
+          <p:cNvPr id="6" name="text-171"/>
           <p:cNvSpPr txBox="1"/>
           <p:nvPr/>
         </p:nvSpPr>
         <p:spPr>
           <a:xfrm>
-            <a:off x="548640" y="1554480"/>
-            <a:ext cx="8046720" cy="411480"/>
+            <a:off x="685800" y="2194560"/>
+            <a:ext cx="2148840" cy="411480"/>
           </a:xfrm>
           <a:prstGeom prst="rect">
             <a:avLst/>
@@ -14416,32 +17263,135 @@
               <a:buNone/>
             </a:pPr>
             <a:r>
-              <a:rPr lang="en-US" sz="1800" dirty="0">
+              <a:rPr lang="en-US" sz="1800" b="1" dirty="0">
                 <a:solidFill>
-                  <a:schemeClr val="accent1"/>
+                  <a:schemeClr val="bg1"/>
+                </a:solidFill>
+                <a:latin typeface="Bahnschrift" pitchFamily="34" charset="0"/>
+                <a:ea typeface="Bahnschrift" pitchFamily="34" charset="-122"/>
+                <a:cs typeface="Bahnschrift" pitchFamily="34" charset="-120"/>
+              </a:rPr>
+              <a:t>Ordering race</a:t>
+            </a:r>
+            <a:endParaRPr lang="en-US" sz="1800" dirty="0"/>
+          </a:p>
+        </p:txBody>
+      </p:sp>
+      <p:sp>
+        <p:nvSpPr>
+          <p:cNvPr id="7" name="text-172"/>
+          <p:cNvSpPr txBox="1"/>
+          <p:nvPr/>
+        </p:nvSpPr>
+        <p:spPr>
+          <a:xfrm>
+            <a:off x="685800" y="2651760"/>
+            <a:ext cx="2148840" cy="1600200"/>
+          </a:xfrm>
+          <a:prstGeom prst="rect">
+            <a:avLst/>
+          </a:prstGeom>
+          <a:noFill/>
+          <a:ln/>
+        </p:spPr>
+        <p:txBody>
+          <a:bodyPr wrap="square" lIns="0" tIns="0" rIns="0" bIns="0" rtlCol="0" anchor="t"/>
+          <a:lstStyle/>
+          <a:p>
+            <a:pPr indent="0" marL="0">
+              <a:buNone/>
+            </a:pPr>
+            <a:r>
+              <a:rPr lang="en-US" sz="1400" dirty="0">
+                <a:solidFill>
+                  <a:schemeClr val="bg1"/>
                 </a:solidFill>
                 <a:latin typeface="Cambria" pitchFamily="34" charset="0"/>
                 <a:ea typeface="Cambria" pitchFamily="34" charset="-122"/>
                 <a:cs typeface="Cambria" pitchFamily="34" charset="-120"/>
               </a:rPr>
-              <a:t>Part 5</a:t>
+              <a:t>Threads saved results as they finished (e.g. 3, 1, 0, 2), but merging assumed order 0 to 3. Keypoints could land in the wrong quadrant.</a:t>
             </a:r>
-            <a:endParaRPr lang="en-US" sz="1800" dirty="0"/>
-          </a:p>
-        </p:txBody>
-      </p:sp>
-      <p:sp>
-        <p:nvSpPr>
-          <p:cNvPr id="3" name="Text 0"/>
+            <a:endParaRPr lang="en-US" sz="1400" dirty="0"/>
+          </a:p>
+        </p:txBody>
+      </p:sp>
+      <p:sp>
+        <p:nvSpPr>
+          <p:cNvPr id="8" name="card-173"/>
           <p:cNvSpPr/>
-          <p:nvPr>
-            <p:ph idx="100" type="title" hasCustomPrompt="1"/>
-          </p:nvPr>
-        </p:nvSpPr>
-        <p:spPr>
-          <a:xfrm>
-            <a:off x="548640" y="2011680"/>
-            <a:ext cx="8046720" cy="1097280"/>
+          <p:nvPr/>
+        </p:nvSpPr>
+        <p:spPr>
+          <a:xfrm>
+            <a:off x="3246120" y="1234440"/>
+            <a:ext cx="2606040" cy="3108960"/>
+          </a:xfrm>
+          <a:prstGeom prst="roundRect">
+            <a:avLst>
+              <a:gd name="adj" fmla="val 2807"/>
+            </a:avLst>
+          </a:prstGeom>
+          <a:solidFill>
+            <a:schemeClr val="accent6"/>
+          </a:solidFill>
+          <a:ln/>
+        </p:spPr>
+      </p:sp>
+      <p:sp>
+        <p:nvSpPr>
+          <p:cNvPr id="9" name="icon-bg-174"/>
+          <p:cNvSpPr/>
+          <p:nvPr/>
+        </p:nvSpPr>
+        <p:spPr>
+          <a:xfrm>
+            <a:off x="3474720" y="1463040"/>
+            <a:ext cx="548640" cy="548640"/>
+          </a:xfrm>
+          <a:prstGeom prst="ellipse">
+            <a:avLst/>
+          </a:prstGeom>
+          <a:solidFill>
+            <a:schemeClr val="accent1"/>
+          </a:solidFill>
+          <a:ln/>
+        </p:spPr>
+      </p:sp>
+      <p:pic>
+        <p:nvPicPr>
+          <p:cNvPr id="10" name="icon-175" descr="preencoded.png">    </p:cNvPr>
+          <p:cNvPicPr>
+            <a:picLocks noChangeAspect="1"/>
+          </p:cNvPicPr>
+          <p:nvPr/>
+        </p:nvPicPr>
+        <p:blipFill>
+          <a:blip r:embed="rId2"/>
+          <a:stretch>
+            <a:fillRect/>
+          </a:stretch>
+        </p:blipFill>
+        <p:spPr>
+          <a:xfrm>
+            <a:off x="3595421" y="1583741"/>
+            <a:ext cx="307238" cy="307238"/>
+          </a:xfrm>
+          <a:prstGeom prst="rect">
+            <a:avLst/>
+          </a:prstGeom>
+        </p:spPr>
+      </p:pic>
+      <p:sp>
+        <p:nvSpPr>
+          <p:cNvPr id="11" name="text-176"/>
+          <p:cNvSpPr txBox="1"/>
+          <p:nvPr/>
+        </p:nvSpPr>
+        <p:spPr>
+          <a:xfrm>
+            <a:off x="3474720" y="2194560"/>
+            <a:ext cx="2148840" cy="411480"/>
           </a:xfrm>
           <a:prstGeom prst="rect">
             <a:avLst/>
@@ -14450,21 +17400,207 @@
           <a:ln/>
         </p:spPr>
         <p:txBody>
-          <a:bodyPr wrap="square" lIns="0" tIns="0" rIns="0" bIns="0" rtlCol="0" anchor="t"/>
+          <a:bodyPr wrap="square" lIns="0" tIns="0" rIns="0" bIns="0" rtlCol="0" anchor="ctr"/>
           <a:lstStyle/>
           <a:p>
-            <a:pPr algn="l" indent="0" marL="0">
+            <a:pPr indent="0" marL="0">
               <a:buNone/>
             </a:pPr>
             <a:r>
-              <a:rPr lang="en-US" sz="4000" b="1" dirty="0">
+              <a:rPr lang="en-US" sz="1800" b="1" dirty="0">
                 <a:solidFill>
                   <a:schemeClr val="bg1"/>
                 </a:solidFill>
+                <a:latin typeface="Bahnschrift" pitchFamily="34" charset="0"/>
+                <a:ea typeface="Bahnschrift" pitchFamily="34" charset="-122"/>
+                <a:cs typeface="Bahnschrift" pitchFamily="34" charset="-120"/>
               </a:rPr>
-              <a:t>Conclusions and future work</a:t>
+              <a:t>Pickling error</a:t>
             </a:r>
-            <a:endParaRPr lang="en-US" sz="4000" dirty="0"/>
+            <a:endParaRPr lang="en-US" sz="1800" dirty="0"/>
+          </a:p>
+        </p:txBody>
+      </p:sp>
+      <p:sp>
+        <p:nvSpPr>
+          <p:cNvPr id="12" name="text-177"/>
+          <p:cNvSpPr txBox="1"/>
+          <p:nvPr/>
+        </p:nvSpPr>
+        <p:spPr>
+          <a:xfrm>
+            <a:off x="3474720" y="2651760"/>
+            <a:ext cx="2148840" cy="1600200"/>
+          </a:xfrm>
+          <a:prstGeom prst="rect">
+            <a:avLst/>
+          </a:prstGeom>
+          <a:noFill/>
+          <a:ln/>
+        </p:spPr>
+        <p:txBody>
+          <a:bodyPr wrap="square" lIns="0" tIns="0" rIns="0" bIns="0" rtlCol="0" anchor="t"/>
+          <a:lstStyle/>
+          <a:p>
+            <a:pPr indent="0" marL="0">
+              <a:buNone/>
+            </a:pPr>
+            <a:r>
+              <a:rPr lang="en-US" sz="1400" dirty="0">
+                <a:solidFill>
+                  <a:schemeClr val="bg1"/>
+                </a:solidFill>
+                <a:latin typeface="Cambria" pitchFamily="34" charset="0"/>
+                <a:ea typeface="Cambria" pitchFamily="34" charset="-122"/>
+                <a:cs typeface="Cambria" pitchFamily="34" charset="-120"/>
+              </a:rPr>
+              <a:t>cv2.KeyPoint can't be pickled, which blocks saving results and multiprocessing. Fixed by passing plain tuples.</a:t>
+            </a:r>
+            <a:endParaRPr lang="en-US" sz="1400" dirty="0"/>
+          </a:p>
+        </p:txBody>
+      </p:sp>
+      <p:sp>
+        <p:nvSpPr>
+          <p:cNvPr id="13" name="card-178"/>
+          <p:cNvSpPr/>
+          <p:nvPr/>
+        </p:nvSpPr>
+        <p:spPr>
+          <a:xfrm>
+            <a:off x="6035040" y="1234440"/>
+            <a:ext cx="2606040" cy="3108960"/>
+          </a:xfrm>
+          <a:prstGeom prst="roundRect">
+            <a:avLst>
+              <a:gd name="adj" fmla="val 2807"/>
+            </a:avLst>
+          </a:prstGeom>
+          <a:solidFill>
+            <a:schemeClr val="accent6"/>
+          </a:solidFill>
+          <a:ln/>
+        </p:spPr>
+      </p:sp>
+      <p:sp>
+        <p:nvSpPr>
+          <p:cNvPr id="14" name="icon-bg-179"/>
+          <p:cNvSpPr/>
+          <p:nvPr/>
+        </p:nvSpPr>
+        <p:spPr>
+          <a:xfrm>
+            <a:off x="6263640" y="1463040"/>
+            <a:ext cx="548640" cy="548640"/>
+          </a:xfrm>
+          <a:prstGeom prst="ellipse">
+            <a:avLst/>
+          </a:prstGeom>
+          <a:solidFill>
+            <a:schemeClr val="accent1"/>
+          </a:solidFill>
+          <a:ln/>
+        </p:spPr>
+      </p:sp>
+      <p:pic>
+        <p:nvPicPr>
+          <p:cNvPr id="15" name="icon-180" descr="preencoded.png">    </p:cNvPr>
+          <p:cNvPicPr>
+            <a:picLocks noChangeAspect="1"/>
+          </p:cNvPicPr>
+          <p:nvPr/>
+        </p:nvPicPr>
+        <p:blipFill>
+          <a:blip r:embed="rId3"/>
+          <a:stretch>
+            <a:fillRect/>
+          </a:stretch>
+        </p:blipFill>
+        <p:spPr>
+          <a:xfrm>
+            <a:off x="6384341" y="1583741"/>
+            <a:ext cx="307238" cy="307238"/>
+          </a:xfrm>
+          <a:prstGeom prst="rect">
+            <a:avLst/>
+          </a:prstGeom>
+        </p:spPr>
+      </p:pic>
+      <p:sp>
+        <p:nvSpPr>
+          <p:cNvPr id="16" name="text-181"/>
+          <p:cNvSpPr txBox="1"/>
+          <p:nvPr/>
+        </p:nvSpPr>
+        <p:spPr>
+          <a:xfrm>
+            <a:off x="6263640" y="2194560"/>
+            <a:ext cx="2148840" cy="411480"/>
+          </a:xfrm>
+          <a:prstGeom prst="rect">
+            <a:avLst/>
+          </a:prstGeom>
+          <a:noFill/>
+          <a:ln/>
+        </p:spPr>
+        <p:txBody>
+          <a:bodyPr wrap="square" lIns="0" tIns="0" rIns="0" bIns="0" rtlCol="0" anchor="ctr"/>
+          <a:lstStyle/>
+          <a:p>
+            <a:pPr indent="0" marL="0">
+              <a:buNone/>
+            </a:pPr>
+            <a:r>
+              <a:rPr lang="en-US" sz="1800" b="1" dirty="0">
+                <a:solidFill>
+                  <a:schemeClr val="bg1"/>
+                </a:solidFill>
+                <a:latin typeface="Bahnschrift" pitchFamily="34" charset="0"/>
+                <a:ea typeface="Bahnschrift" pitchFamily="34" charset="-122"/>
+                <a:cs typeface="Bahnschrift" pitchFamily="34" charset="-120"/>
+              </a:rPr>
+              <a:t>Matching crash</a:t>
+            </a:r>
+            <a:endParaRPr lang="en-US" sz="1800" dirty="0"/>
+          </a:p>
+        </p:txBody>
+      </p:sp>
+      <p:sp>
+        <p:nvSpPr>
+          <p:cNvPr id="17" name="text-182"/>
+          <p:cNvSpPr txBox="1"/>
+          <p:nvPr/>
+        </p:nvSpPr>
+        <p:spPr>
+          <a:xfrm>
+            <a:off x="6263640" y="2651760"/>
+            <a:ext cx="2148840" cy="1600200"/>
+          </a:xfrm>
+          <a:prstGeom prst="rect">
+            <a:avLst/>
+          </a:prstGeom>
+          <a:noFill/>
+          <a:ln/>
+        </p:spPr>
+        <p:txBody>
+          <a:bodyPr wrap="square" lIns="0" tIns="0" rIns="0" bIns="0" rtlCol="0" anchor="t"/>
+          <a:lstStyle/>
+          <a:p>
+            <a:pPr indent="0" marL="0">
+              <a:buNone/>
+            </a:pPr>
+            <a:r>
+              <a:rPr lang="en-US" sz="1400" dirty="0">
+                <a:solidFill>
+                  <a:schemeClr val="bg1"/>
+                </a:solidFill>
+                <a:latin typeface="Cambria" pitchFamily="34" charset="0"/>
+                <a:ea typeface="Cambria" pitchFamily="34" charset="-122"/>
+                <a:cs typeface="Cambria" pitchFamily="34" charset="-120"/>
+              </a:rPr>
+              <a:t>The retrieval step passed the wrong image shape to perspectiveTransform.</a:t>
+            </a:r>
+            <a:endParaRPr lang="en-US" sz="1400" dirty="0"/>
           </a:p>
         </p:txBody>
       </p:sp>
@@ -14540,111 +17676,14 @@
       </p:grpSpPr>
       <p:sp>
         <p:nvSpPr>
-          <p:cNvPr id="2" name="Text 0"/>
-          <p:cNvSpPr/>
-          <p:nvPr>
-            <p:ph idx="100" type="title" hasCustomPrompt="1"/>
-          </p:nvPr>
-        </p:nvSpPr>
-        <p:spPr>
-          <a:xfrm>
-            <a:off x="457200" y="274320"/>
-            <a:ext cx="8229600" cy="685800"/>
-          </a:xfrm>
-          <a:prstGeom prst="rect">
-            <a:avLst/>
-          </a:prstGeom>
-          <a:noFill/>
-          <a:ln/>
-        </p:spPr>
-        <p:txBody>
-          <a:bodyPr wrap="square" lIns="0" tIns="0" rIns="0" bIns="0" rtlCol="0" anchor="ctr"/>
-          <a:lstStyle/>
-          <a:p>
-            <a:pPr algn="l" indent="0" marL="0">
-              <a:buNone/>
-            </a:pPr>
-            <a:r>
-              <a:rPr lang="en-US" sz="3000" b="1" dirty="0">
-                <a:solidFill>
-                  <a:schemeClr val="bg1"/>
-                </a:solidFill>
-              </a:rPr>
-              <a:t>Conclusions</a:t>
-            </a:r>
-            <a:endParaRPr lang="en-US" sz="3000" dirty="0"/>
-          </a:p>
-        </p:txBody>
-      </p:sp>
-      <p:sp>
-        <p:nvSpPr>
-          <p:cNvPr id="3" name="num-183"/>
-          <p:cNvSpPr/>
-          <p:nvPr/>
-        </p:nvSpPr>
-        <p:spPr>
-          <a:xfrm>
-            <a:off x="457200" y="1280160"/>
-            <a:ext cx="548640" cy="548640"/>
-          </a:xfrm>
-          <a:prstGeom prst="ellipse">
-            <a:avLst/>
-          </a:prstGeom>
-          <a:solidFill>
-            <a:schemeClr val="accent1"/>
-          </a:solidFill>
-          <a:ln/>
-        </p:spPr>
-      </p:sp>
-      <p:sp>
-        <p:nvSpPr>
-          <p:cNvPr id="4" name="text-184"/>
+          <p:cNvPr id="2" name="text-183"/>
           <p:cNvSpPr txBox="1"/>
           <p:nvPr/>
         </p:nvSpPr>
         <p:spPr>
           <a:xfrm>
-            <a:off x="457200" y="1280160"/>
-            <a:ext cx="548640" cy="548640"/>
-          </a:xfrm>
-          <a:prstGeom prst="rect">
-            <a:avLst/>
-          </a:prstGeom>
-          <a:noFill/>
-          <a:ln/>
-        </p:spPr>
-        <p:txBody>
-          <a:bodyPr wrap="square" lIns="0" tIns="0" rIns="0" bIns="0" rtlCol="0" anchor="ctr"/>
-          <a:lstStyle/>
-          <a:p>
-            <a:pPr algn="ctr" indent="0" marL="0">
-              <a:buNone/>
-            </a:pPr>
-            <a:r>
-              <a:rPr lang="en-US" sz="2200" b="1" dirty="0">
-                <a:solidFill>
-                  <a:schemeClr val="tx1"/>
-                </a:solidFill>
-                <a:latin typeface="Bahnschrift" pitchFamily="34" charset="0"/>
-                <a:ea typeface="Bahnschrift" pitchFamily="34" charset="-122"/>
-                <a:cs typeface="Bahnschrift" pitchFamily="34" charset="-120"/>
-              </a:rPr>
-              <a:t>1</a:t>
-            </a:r>
-            <a:endParaRPr lang="en-US" sz="2200" dirty="0"/>
-          </a:p>
-        </p:txBody>
-      </p:sp>
-      <p:sp>
-        <p:nvSpPr>
-          <p:cNvPr id="5" name="text-185"/>
-          <p:cNvSpPr txBox="1"/>
-          <p:nvPr/>
-        </p:nvSpPr>
-        <p:spPr>
-          <a:xfrm>
-            <a:off x="1234440" y="1188720"/>
-            <a:ext cx="7406640" cy="411480"/>
+            <a:off x="548640" y="1554480"/>
+            <a:ext cx="8046720" cy="411480"/>
           </a:xfrm>
           <a:prstGeom prst="rect">
             <a:avLst/>
@@ -14660,89 +17699,32 @@
               <a:buNone/>
             </a:pPr>
             <a:r>
-              <a:rPr lang="en-US" sz="2000" b="1" dirty="0">
+              <a:rPr lang="en-US" sz="1800" dirty="0">
                 <a:solidFill>
-                  <a:schemeClr val="bg1"/>
-                </a:solidFill>
-                <a:latin typeface="Bahnschrift" pitchFamily="34" charset="0"/>
-                <a:ea typeface="Bahnschrift" pitchFamily="34" charset="-122"/>
-                <a:cs typeface="Bahnschrift" pitchFamily="34" charset="-120"/>
-              </a:rPr>
-              <a:t>The GIL, not the idea, sank 2023</a:t>
-            </a:r>
-            <a:endParaRPr lang="en-US" sz="2000" dirty="0"/>
-          </a:p>
-        </p:txBody>
-      </p:sp>
-      <p:sp>
-        <p:nvSpPr>
-          <p:cNvPr id="6" name="text-186"/>
-          <p:cNvSpPr txBox="1"/>
-          <p:nvPr/>
-        </p:nvSpPr>
-        <p:spPr>
-          <a:xfrm>
-            <a:off x="1234440" y="1600200"/>
-            <a:ext cx="7406640" cy="365760"/>
-          </a:xfrm>
-          <a:prstGeom prst="rect">
-            <a:avLst/>
-          </a:prstGeom>
-          <a:noFill/>
-          <a:ln/>
-        </p:spPr>
-        <p:txBody>
-          <a:bodyPr wrap="square" lIns="0" tIns="0" rIns="0" bIns="0" rtlCol="0" anchor="ctr"/>
-          <a:lstStyle/>
-          <a:p>
-            <a:pPr indent="0" marL="0">
-              <a:buNone/>
-            </a:pPr>
-            <a:r>
-              <a:rPr lang="en-US" sz="1500" dirty="0">
-                <a:solidFill>
-                  <a:schemeClr val="bg2"/>
+                  <a:schemeClr val="accent1"/>
                 </a:solidFill>
                 <a:latin typeface="Cambria" pitchFamily="34" charset="0"/>
                 <a:ea typeface="Cambria" pitchFamily="34" charset="-122"/>
                 <a:cs typeface="Cambria" pitchFamily="34" charset="-120"/>
               </a:rPr>
-              <a:t>Pure-Python loops on threads never used more than one core.</a:t>
+              <a:t>Part 5</a:t>
             </a:r>
-            <a:endParaRPr lang="en-US" sz="1500" dirty="0"/>
-          </a:p>
-        </p:txBody>
-      </p:sp>
-      <p:sp>
-        <p:nvSpPr>
-          <p:cNvPr id="7" name="num-187"/>
+            <a:endParaRPr lang="en-US" sz="1800" dirty="0"/>
+          </a:p>
+        </p:txBody>
+      </p:sp>
+      <p:sp>
+        <p:nvSpPr>
+          <p:cNvPr id="3" name="Text 0"/>
           <p:cNvSpPr/>
-          <p:nvPr/>
-        </p:nvSpPr>
-        <p:spPr>
-          <a:xfrm>
-            <a:off x="457200" y="2377440"/>
-            <a:ext cx="548640" cy="548640"/>
-          </a:xfrm>
-          <a:prstGeom prst="ellipse">
-            <a:avLst/>
-          </a:prstGeom>
-          <a:solidFill>
-            <a:schemeClr val="accent1"/>
-          </a:solidFill>
-          <a:ln/>
-        </p:spPr>
-      </p:sp>
-      <p:sp>
-        <p:nvSpPr>
-          <p:cNvPr id="8" name="text-188"/>
-          <p:cNvSpPr txBox="1"/>
-          <p:nvPr/>
-        </p:nvSpPr>
-        <p:spPr>
-          <a:xfrm>
-            <a:off x="457200" y="2377440"/>
-            <a:ext cx="548640" cy="548640"/>
+          <p:nvPr>
+            <p:ph idx="100" type="title" hasCustomPrompt="1"/>
+          </p:nvPr>
+        </p:nvSpPr>
+        <p:spPr>
+          <a:xfrm>
+            <a:off x="548640" y="2011680"/>
+            <a:ext cx="8046720" cy="1097280"/>
           </a:xfrm>
           <a:prstGeom prst="rect">
             <a:avLst/>
@@ -14751,239 +17733,21 @@
           <a:ln/>
         </p:spPr>
         <p:txBody>
-          <a:bodyPr wrap="square" lIns="0" tIns="0" rIns="0" bIns="0" rtlCol="0" anchor="ctr"/>
+          <a:bodyPr wrap="square" lIns="0" tIns="0" rIns="0" bIns="0" rtlCol="0" anchor="t"/>
           <a:lstStyle/>
           <a:p>
-            <a:pPr algn="ctr" indent="0" marL="0">
+            <a:pPr algn="l" indent="0" marL="0">
               <a:buNone/>
             </a:pPr>
             <a:r>
-              <a:rPr lang="en-US" sz="2200" b="1" dirty="0">
-                <a:solidFill>
-                  <a:schemeClr val="tx1"/>
-                </a:solidFill>
-                <a:latin typeface="Bahnschrift" pitchFamily="34" charset="0"/>
-                <a:ea typeface="Bahnschrift" pitchFamily="34" charset="-122"/>
-                <a:cs typeface="Bahnschrift" pitchFamily="34" charset="-120"/>
-              </a:rPr>
-              <a:t>2</a:t>
-            </a:r>
-            <a:endParaRPr lang="en-US" sz="2200" dirty="0"/>
-          </a:p>
-        </p:txBody>
-      </p:sp>
-      <p:sp>
-        <p:nvSpPr>
-          <p:cNvPr id="9" name="text-189"/>
-          <p:cNvSpPr txBox="1"/>
-          <p:nvPr/>
-        </p:nvSpPr>
-        <p:spPr>
-          <a:xfrm>
-            <a:off x="1234440" y="2286000"/>
-            <a:ext cx="7406640" cy="411480"/>
-          </a:xfrm>
-          <a:prstGeom prst="rect">
-            <a:avLst/>
-          </a:prstGeom>
-          <a:noFill/>
-          <a:ln/>
-        </p:spPr>
-        <p:txBody>
-          <a:bodyPr wrap="square" lIns="0" tIns="0" rIns="0" bIns="0" rtlCol="0" anchor="ctr"/>
-          <a:lstStyle/>
-          <a:p>
-            <a:pPr indent="0" marL="0">
-              <a:buNone/>
-            </a:pPr>
-            <a:r>
-              <a:rPr lang="en-US" sz="2000" b="1" dirty="0">
+              <a:rPr lang="en-US" sz="4000" b="1" dirty="0">
                 <a:solidFill>
                   <a:schemeClr val="bg1"/>
                 </a:solidFill>
-                <a:latin typeface="Bahnschrift" pitchFamily="34" charset="0"/>
-                <a:ea typeface="Bahnschrift" pitchFamily="34" charset="-122"/>
-                <a:cs typeface="Bahnschrift" pitchFamily="34" charset="-120"/>
               </a:rPr>
-              <a:t>The small 2023 gain came from tiling</a:t>
+              <a:t>Conclusions and future work</a:t>
             </a:r>
-            <a:endParaRPr lang="en-US" sz="2000" dirty="0"/>
-          </a:p>
-        </p:txBody>
-      </p:sp>
-      <p:sp>
-        <p:nvSpPr>
-          <p:cNvPr id="10" name="text-190"/>
-          <p:cNvSpPr txBox="1"/>
-          <p:nvPr/>
-        </p:nvSpPr>
-        <p:spPr>
-          <a:xfrm>
-            <a:off x="1234440" y="2697480"/>
-            <a:ext cx="7406640" cy="365760"/>
-          </a:xfrm>
-          <a:prstGeom prst="rect">
-            <a:avLst/>
-          </a:prstGeom>
-          <a:noFill/>
-          <a:ln/>
-        </p:spPr>
-        <p:txBody>
-          <a:bodyPr wrap="square" lIns="0" tIns="0" rIns="0" bIns="0" rtlCol="0" anchor="ctr"/>
-          <a:lstStyle/>
-          <a:p>
-            <a:pPr indent="0" marL="0">
-              <a:buNone/>
-            </a:pPr>
-            <a:r>
-              <a:rPr lang="en-US" sz="1500" dirty="0">
-                <a:solidFill>
-                  <a:schemeClr val="bg2"/>
-                </a:solidFill>
-                <a:latin typeface="Cambria" pitchFamily="34" charset="0"/>
-                <a:ea typeface="Cambria" pitchFamily="34" charset="-122"/>
-                <a:cs typeface="Cambria" pitchFamily="34" charset="-120"/>
-              </a:rPr>
-              <a:t>Fewer keypoints meant less work, at the cost of accuracy.</a:t>
-            </a:r>
-            <a:endParaRPr lang="en-US" sz="1500" dirty="0"/>
-          </a:p>
-        </p:txBody>
-      </p:sp>
-      <p:sp>
-        <p:nvSpPr>
-          <p:cNvPr id="11" name="num-191"/>
-          <p:cNvSpPr/>
-          <p:nvPr/>
-        </p:nvSpPr>
-        <p:spPr>
-          <a:xfrm>
-            <a:off x="457200" y="3474720"/>
-            <a:ext cx="548640" cy="548640"/>
-          </a:xfrm>
-          <a:prstGeom prst="ellipse">
-            <a:avLst/>
-          </a:prstGeom>
-          <a:solidFill>
-            <a:schemeClr val="accent1"/>
-          </a:solidFill>
-          <a:ln/>
-        </p:spPr>
-      </p:sp>
-      <p:sp>
-        <p:nvSpPr>
-          <p:cNvPr id="12" name="text-192"/>
-          <p:cNvSpPr txBox="1"/>
-          <p:nvPr/>
-        </p:nvSpPr>
-        <p:spPr>
-          <a:xfrm>
-            <a:off x="457200" y="3474720"/>
-            <a:ext cx="548640" cy="548640"/>
-          </a:xfrm>
-          <a:prstGeom prst="rect">
-            <a:avLst/>
-          </a:prstGeom>
-          <a:noFill/>
-          <a:ln/>
-        </p:spPr>
-        <p:txBody>
-          <a:bodyPr wrap="square" lIns="0" tIns="0" rIns="0" bIns="0" rtlCol="0" anchor="ctr"/>
-          <a:lstStyle/>
-          <a:p>
-            <a:pPr algn="ctr" indent="0" marL="0">
-              <a:buNone/>
-            </a:pPr>
-            <a:r>
-              <a:rPr lang="en-US" sz="2200" b="1" dirty="0">
-                <a:solidFill>
-                  <a:schemeClr val="tx1"/>
-                </a:solidFill>
-                <a:latin typeface="Bahnschrift" pitchFamily="34" charset="0"/>
-                <a:ea typeface="Bahnschrift" pitchFamily="34" charset="-122"/>
-                <a:cs typeface="Bahnschrift" pitchFamily="34" charset="-120"/>
-              </a:rPr>
-              <a:t>3</a:t>
-            </a:r>
-            <a:endParaRPr lang="en-US" sz="2200" dirty="0"/>
-          </a:p>
-        </p:txBody>
-      </p:sp>
-      <p:sp>
-        <p:nvSpPr>
-          <p:cNvPr id="13" name="text-193"/>
-          <p:cNvSpPr txBox="1"/>
-          <p:nvPr/>
-        </p:nvSpPr>
-        <p:spPr>
-          <a:xfrm>
-            <a:off x="1234440" y="3383280"/>
-            <a:ext cx="7406640" cy="411480"/>
-          </a:xfrm>
-          <a:prstGeom prst="rect">
-            <a:avLst/>
-          </a:prstGeom>
-          <a:noFill/>
-          <a:ln/>
-        </p:spPr>
-        <p:txBody>
-          <a:bodyPr wrap="square" lIns="0" tIns="0" rIns="0" bIns="0" rtlCol="0" anchor="ctr"/>
-          <a:lstStyle/>
-          <a:p>
-            <a:pPr indent="0" marL="0">
-              <a:buNone/>
-            </a:pPr>
-            <a:r>
-              <a:rPr lang="en-US" sz="2000" b="1" dirty="0">
-                <a:solidFill>
-                  <a:schemeClr val="bg1"/>
-                </a:solidFill>
-                <a:latin typeface="Bahnschrift" pitchFamily="34" charset="0"/>
-                <a:ea typeface="Bahnschrift" pitchFamily="34" charset="-122"/>
-                <a:cs typeface="Bahnschrift" pitchFamily="34" charset="-120"/>
-              </a:rPr>
-              <a:t>Real parallelism works</a:t>
-            </a:r>
-            <a:endParaRPr lang="en-US" sz="2000" dirty="0"/>
-          </a:p>
-        </p:txBody>
-      </p:sp>
-      <p:sp>
-        <p:nvSpPr>
-          <p:cNvPr id="14" name="text-194"/>
-          <p:cNvSpPr txBox="1"/>
-          <p:nvPr/>
-        </p:nvSpPr>
-        <p:spPr>
-          <a:xfrm>
-            <a:off x="1234440" y="3794760"/>
-            <a:ext cx="7406640" cy="365760"/>
-          </a:xfrm>
-          <a:prstGeom prst="rect">
-            <a:avLst/>
-          </a:prstGeom>
-          <a:noFill/>
-          <a:ln/>
-        </p:spPr>
-        <p:txBody>
-          <a:bodyPr wrap="square" lIns="0" tIns="0" rIns="0" bIns="0" rtlCol="0" anchor="ctr"/>
-          <a:lstStyle/>
-          <a:p>
-            <a:pPr indent="0" marL="0">
-              <a:buNone/>
-            </a:pPr>
-            <a:r>
-              <a:rPr lang="en-US" sz="1500" dirty="0">
-                <a:solidFill>
-                  <a:schemeClr val="bg2"/>
-                </a:solidFill>
-                <a:latin typeface="Cambria" pitchFamily="34" charset="0"/>
-                <a:ea typeface="Cambria" pitchFamily="34" charset="-122"/>
-                <a:cs typeface="Cambria" pitchFamily="34" charset="-120"/>
-              </a:rPr>
-              <a:t>Processes: 6.65×. No-GIL threads: 5.82×. 16 tiles beat 4.</a:t>
-            </a:r>
-            <a:endParaRPr lang="en-US" sz="1500" dirty="0"/>
+            <a:endParaRPr lang="en-US" sz="4000" dirty="0"/>
           </a:p>
         </p:txBody>
       </p:sp>
@@ -15089,6 +17853,525 @@
                   <a:schemeClr val="bg1"/>
                 </a:solidFill>
               </a:rPr>
+              <a:t>Conclusions</a:t>
+            </a:r>
+            <a:endParaRPr lang="en-US" sz="3000" dirty="0"/>
+          </a:p>
+        </p:txBody>
+      </p:sp>
+      <p:sp>
+        <p:nvSpPr>
+          <p:cNvPr id="3" name="num-184"/>
+          <p:cNvSpPr/>
+          <p:nvPr/>
+        </p:nvSpPr>
+        <p:spPr>
+          <a:xfrm>
+            <a:off x="457200" y="1280160"/>
+            <a:ext cx="548640" cy="548640"/>
+          </a:xfrm>
+          <a:prstGeom prst="ellipse">
+            <a:avLst/>
+          </a:prstGeom>
+          <a:solidFill>
+            <a:schemeClr val="accent1"/>
+          </a:solidFill>
+          <a:ln/>
+        </p:spPr>
+      </p:sp>
+      <p:sp>
+        <p:nvSpPr>
+          <p:cNvPr id="4" name="text-185"/>
+          <p:cNvSpPr txBox="1"/>
+          <p:nvPr/>
+        </p:nvSpPr>
+        <p:spPr>
+          <a:xfrm>
+            <a:off x="457200" y="1280160"/>
+            <a:ext cx="548640" cy="548640"/>
+          </a:xfrm>
+          <a:prstGeom prst="rect">
+            <a:avLst/>
+          </a:prstGeom>
+          <a:noFill/>
+          <a:ln/>
+        </p:spPr>
+        <p:txBody>
+          <a:bodyPr wrap="square" lIns="0" tIns="0" rIns="0" bIns="0" rtlCol="0" anchor="ctr"/>
+          <a:lstStyle/>
+          <a:p>
+            <a:pPr algn="ctr" indent="0" marL="0">
+              <a:buNone/>
+            </a:pPr>
+            <a:r>
+              <a:rPr lang="en-US" sz="2200" b="1" dirty="0">
+                <a:solidFill>
+                  <a:schemeClr val="tx1"/>
+                </a:solidFill>
+                <a:latin typeface="Bahnschrift" pitchFamily="34" charset="0"/>
+                <a:ea typeface="Bahnschrift" pitchFamily="34" charset="-122"/>
+                <a:cs typeface="Bahnschrift" pitchFamily="34" charset="-120"/>
+              </a:rPr>
+              <a:t>1</a:t>
+            </a:r>
+            <a:endParaRPr lang="en-US" sz="2200" dirty="0"/>
+          </a:p>
+        </p:txBody>
+      </p:sp>
+      <p:sp>
+        <p:nvSpPr>
+          <p:cNvPr id="5" name="text-186"/>
+          <p:cNvSpPr txBox="1"/>
+          <p:nvPr/>
+        </p:nvSpPr>
+        <p:spPr>
+          <a:xfrm>
+            <a:off x="1234440" y="1188720"/>
+            <a:ext cx="7406640" cy="411480"/>
+          </a:xfrm>
+          <a:prstGeom prst="rect">
+            <a:avLst/>
+          </a:prstGeom>
+          <a:noFill/>
+          <a:ln/>
+        </p:spPr>
+        <p:txBody>
+          <a:bodyPr wrap="square" lIns="0" tIns="0" rIns="0" bIns="0" rtlCol="0" anchor="ctr"/>
+          <a:lstStyle/>
+          <a:p>
+            <a:pPr indent="0" marL="0">
+              <a:buNone/>
+            </a:pPr>
+            <a:r>
+              <a:rPr lang="en-US" sz="2000" b="1" dirty="0">
+                <a:solidFill>
+                  <a:schemeClr val="bg1"/>
+                </a:solidFill>
+                <a:latin typeface="Bahnschrift" pitchFamily="34" charset="0"/>
+                <a:ea typeface="Bahnschrift" pitchFamily="34" charset="-122"/>
+                <a:cs typeface="Bahnschrift" pitchFamily="34" charset="-120"/>
+              </a:rPr>
+              <a:t>The GIL, not the idea, sank 2023</a:t>
+            </a:r>
+            <a:endParaRPr lang="en-US" sz="2000" dirty="0"/>
+          </a:p>
+        </p:txBody>
+      </p:sp>
+      <p:sp>
+        <p:nvSpPr>
+          <p:cNvPr id="6" name="text-187"/>
+          <p:cNvSpPr txBox="1"/>
+          <p:nvPr/>
+        </p:nvSpPr>
+        <p:spPr>
+          <a:xfrm>
+            <a:off x="1234440" y="1600200"/>
+            <a:ext cx="7406640" cy="365760"/>
+          </a:xfrm>
+          <a:prstGeom prst="rect">
+            <a:avLst/>
+          </a:prstGeom>
+          <a:noFill/>
+          <a:ln/>
+        </p:spPr>
+        <p:txBody>
+          <a:bodyPr wrap="square" lIns="0" tIns="0" rIns="0" bIns="0" rtlCol="0" anchor="ctr"/>
+          <a:lstStyle/>
+          <a:p>
+            <a:pPr indent="0" marL="0">
+              <a:buNone/>
+            </a:pPr>
+            <a:r>
+              <a:rPr lang="en-US" sz="1500" dirty="0">
+                <a:solidFill>
+                  <a:schemeClr val="bg2"/>
+                </a:solidFill>
+                <a:latin typeface="Cambria" pitchFamily="34" charset="0"/>
+                <a:ea typeface="Cambria" pitchFamily="34" charset="-122"/>
+                <a:cs typeface="Cambria" pitchFamily="34" charset="-120"/>
+              </a:rPr>
+              <a:t>Pure-Python loops on threads never used more than one core.</a:t>
+            </a:r>
+            <a:endParaRPr lang="en-US" sz="1500" dirty="0"/>
+          </a:p>
+        </p:txBody>
+      </p:sp>
+      <p:sp>
+        <p:nvSpPr>
+          <p:cNvPr id="7" name="num-188"/>
+          <p:cNvSpPr/>
+          <p:nvPr/>
+        </p:nvSpPr>
+        <p:spPr>
+          <a:xfrm>
+            <a:off x="457200" y="2377440"/>
+            <a:ext cx="548640" cy="548640"/>
+          </a:xfrm>
+          <a:prstGeom prst="ellipse">
+            <a:avLst/>
+          </a:prstGeom>
+          <a:solidFill>
+            <a:schemeClr val="accent1"/>
+          </a:solidFill>
+          <a:ln/>
+        </p:spPr>
+      </p:sp>
+      <p:sp>
+        <p:nvSpPr>
+          <p:cNvPr id="8" name="text-189"/>
+          <p:cNvSpPr txBox="1"/>
+          <p:nvPr/>
+        </p:nvSpPr>
+        <p:spPr>
+          <a:xfrm>
+            <a:off x="457200" y="2377440"/>
+            <a:ext cx="548640" cy="548640"/>
+          </a:xfrm>
+          <a:prstGeom prst="rect">
+            <a:avLst/>
+          </a:prstGeom>
+          <a:noFill/>
+          <a:ln/>
+        </p:spPr>
+        <p:txBody>
+          <a:bodyPr wrap="square" lIns="0" tIns="0" rIns="0" bIns="0" rtlCol="0" anchor="ctr"/>
+          <a:lstStyle/>
+          <a:p>
+            <a:pPr algn="ctr" indent="0" marL="0">
+              <a:buNone/>
+            </a:pPr>
+            <a:r>
+              <a:rPr lang="en-US" sz="2200" b="1" dirty="0">
+                <a:solidFill>
+                  <a:schemeClr val="tx1"/>
+                </a:solidFill>
+                <a:latin typeface="Bahnschrift" pitchFamily="34" charset="0"/>
+                <a:ea typeface="Bahnschrift" pitchFamily="34" charset="-122"/>
+                <a:cs typeface="Bahnschrift" pitchFamily="34" charset="-120"/>
+              </a:rPr>
+              <a:t>2</a:t>
+            </a:r>
+            <a:endParaRPr lang="en-US" sz="2200" dirty="0"/>
+          </a:p>
+        </p:txBody>
+      </p:sp>
+      <p:sp>
+        <p:nvSpPr>
+          <p:cNvPr id="9" name="text-190"/>
+          <p:cNvSpPr txBox="1"/>
+          <p:nvPr/>
+        </p:nvSpPr>
+        <p:spPr>
+          <a:xfrm>
+            <a:off x="1234440" y="2286000"/>
+            <a:ext cx="7406640" cy="411480"/>
+          </a:xfrm>
+          <a:prstGeom prst="rect">
+            <a:avLst/>
+          </a:prstGeom>
+          <a:noFill/>
+          <a:ln/>
+        </p:spPr>
+        <p:txBody>
+          <a:bodyPr wrap="square" lIns="0" tIns="0" rIns="0" bIns="0" rtlCol="0" anchor="ctr"/>
+          <a:lstStyle/>
+          <a:p>
+            <a:pPr indent="0" marL="0">
+              <a:buNone/>
+            </a:pPr>
+            <a:r>
+              <a:rPr lang="en-US" sz="2000" b="1" dirty="0">
+                <a:solidFill>
+                  <a:schemeClr val="bg1"/>
+                </a:solidFill>
+                <a:latin typeface="Bahnschrift" pitchFamily="34" charset="0"/>
+                <a:ea typeface="Bahnschrift" pitchFamily="34" charset="-122"/>
+                <a:cs typeface="Bahnschrift" pitchFamily="34" charset="-120"/>
+              </a:rPr>
+              <a:t>The small 2023 gain came from tiling</a:t>
+            </a:r>
+            <a:endParaRPr lang="en-US" sz="2000" dirty="0"/>
+          </a:p>
+        </p:txBody>
+      </p:sp>
+      <p:sp>
+        <p:nvSpPr>
+          <p:cNvPr id="10" name="text-191"/>
+          <p:cNvSpPr txBox="1"/>
+          <p:nvPr/>
+        </p:nvSpPr>
+        <p:spPr>
+          <a:xfrm>
+            <a:off x="1234440" y="2697480"/>
+            <a:ext cx="7406640" cy="365760"/>
+          </a:xfrm>
+          <a:prstGeom prst="rect">
+            <a:avLst/>
+          </a:prstGeom>
+          <a:noFill/>
+          <a:ln/>
+        </p:spPr>
+        <p:txBody>
+          <a:bodyPr wrap="square" lIns="0" tIns="0" rIns="0" bIns="0" rtlCol="0" anchor="ctr"/>
+          <a:lstStyle/>
+          <a:p>
+            <a:pPr indent="0" marL="0">
+              <a:buNone/>
+            </a:pPr>
+            <a:r>
+              <a:rPr lang="en-US" sz="1500" dirty="0">
+                <a:solidFill>
+                  <a:schemeClr val="bg2"/>
+                </a:solidFill>
+                <a:latin typeface="Cambria" pitchFamily="34" charset="0"/>
+                <a:ea typeface="Cambria" pitchFamily="34" charset="-122"/>
+                <a:cs typeface="Cambria" pitchFamily="34" charset="-120"/>
+              </a:rPr>
+              <a:t>Fewer keypoints meant less work, at the cost of accuracy.</a:t>
+            </a:r>
+            <a:endParaRPr lang="en-US" sz="1500" dirty="0"/>
+          </a:p>
+        </p:txBody>
+      </p:sp>
+      <p:sp>
+        <p:nvSpPr>
+          <p:cNvPr id="11" name="num-192"/>
+          <p:cNvSpPr/>
+          <p:nvPr/>
+        </p:nvSpPr>
+        <p:spPr>
+          <a:xfrm>
+            <a:off x="457200" y="3474720"/>
+            <a:ext cx="548640" cy="548640"/>
+          </a:xfrm>
+          <a:prstGeom prst="ellipse">
+            <a:avLst/>
+          </a:prstGeom>
+          <a:solidFill>
+            <a:schemeClr val="accent1"/>
+          </a:solidFill>
+          <a:ln/>
+        </p:spPr>
+      </p:sp>
+      <p:sp>
+        <p:nvSpPr>
+          <p:cNvPr id="12" name="text-193"/>
+          <p:cNvSpPr txBox="1"/>
+          <p:nvPr/>
+        </p:nvSpPr>
+        <p:spPr>
+          <a:xfrm>
+            <a:off x="457200" y="3474720"/>
+            <a:ext cx="548640" cy="548640"/>
+          </a:xfrm>
+          <a:prstGeom prst="rect">
+            <a:avLst/>
+          </a:prstGeom>
+          <a:noFill/>
+          <a:ln/>
+        </p:spPr>
+        <p:txBody>
+          <a:bodyPr wrap="square" lIns="0" tIns="0" rIns="0" bIns="0" rtlCol="0" anchor="ctr"/>
+          <a:lstStyle/>
+          <a:p>
+            <a:pPr algn="ctr" indent="0" marL="0">
+              <a:buNone/>
+            </a:pPr>
+            <a:r>
+              <a:rPr lang="en-US" sz="2200" b="1" dirty="0">
+                <a:solidFill>
+                  <a:schemeClr val="tx1"/>
+                </a:solidFill>
+                <a:latin typeface="Bahnschrift" pitchFamily="34" charset="0"/>
+                <a:ea typeface="Bahnschrift" pitchFamily="34" charset="-122"/>
+                <a:cs typeface="Bahnschrift" pitchFamily="34" charset="-120"/>
+              </a:rPr>
+              <a:t>3</a:t>
+            </a:r>
+            <a:endParaRPr lang="en-US" sz="2200" dirty="0"/>
+          </a:p>
+        </p:txBody>
+      </p:sp>
+      <p:sp>
+        <p:nvSpPr>
+          <p:cNvPr id="13" name="text-194"/>
+          <p:cNvSpPr txBox="1"/>
+          <p:nvPr/>
+        </p:nvSpPr>
+        <p:spPr>
+          <a:xfrm>
+            <a:off x="1234440" y="3383280"/>
+            <a:ext cx="7406640" cy="411480"/>
+          </a:xfrm>
+          <a:prstGeom prst="rect">
+            <a:avLst/>
+          </a:prstGeom>
+          <a:noFill/>
+          <a:ln/>
+        </p:spPr>
+        <p:txBody>
+          <a:bodyPr wrap="square" lIns="0" tIns="0" rIns="0" bIns="0" rtlCol="0" anchor="ctr"/>
+          <a:lstStyle/>
+          <a:p>
+            <a:pPr indent="0" marL="0">
+              <a:buNone/>
+            </a:pPr>
+            <a:r>
+              <a:rPr lang="en-US" sz="2000" b="1" dirty="0">
+                <a:solidFill>
+                  <a:schemeClr val="bg1"/>
+                </a:solidFill>
+                <a:latin typeface="Bahnschrift" pitchFamily="34" charset="0"/>
+                <a:ea typeface="Bahnschrift" pitchFamily="34" charset="-122"/>
+                <a:cs typeface="Bahnschrift" pitchFamily="34" charset="-120"/>
+              </a:rPr>
+              <a:t>Real parallelism works</a:t>
+            </a:r>
+            <a:endParaRPr lang="en-US" sz="2000" dirty="0"/>
+          </a:p>
+        </p:txBody>
+      </p:sp>
+      <p:sp>
+        <p:nvSpPr>
+          <p:cNvPr id="14" name="text-195"/>
+          <p:cNvSpPr txBox="1"/>
+          <p:nvPr/>
+        </p:nvSpPr>
+        <p:spPr>
+          <a:xfrm>
+            <a:off x="1234440" y="3794760"/>
+            <a:ext cx="7406640" cy="365760"/>
+          </a:xfrm>
+          <a:prstGeom prst="rect">
+            <a:avLst/>
+          </a:prstGeom>
+          <a:noFill/>
+          <a:ln/>
+        </p:spPr>
+        <p:txBody>
+          <a:bodyPr wrap="square" lIns="0" tIns="0" rIns="0" bIns="0" rtlCol="0" anchor="ctr"/>
+          <a:lstStyle/>
+          <a:p>
+            <a:pPr indent="0" marL="0">
+              <a:buNone/>
+            </a:pPr>
+            <a:r>
+              <a:rPr lang="en-US" sz="1500" dirty="0">
+                <a:solidFill>
+                  <a:schemeClr val="bg2"/>
+                </a:solidFill>
+                <a:latin typeface="Cambria" pitchFamily="34" charset="0"/>
+                <a:ea typeface="Cambria" pitchFamily="34" charset="-122"/>
+                <a:cs typeface="Cambria" pitchFamily="34" charset="-120"/>
+              </a:rPr>
+              <a:t>Processes: 6.65×. No-GIL threads: 5.82×. 16 tiles beat 4.</a:t>
+            </a:r>
+            <a:endParaRPr lang="en-US" sz="1500" dirty="0"/>
+          </a:p>
+        </p:txBody>
+      </p:sp>
+      <p:sp>
+        <p:nvSpPr>
+          <p:cNvPr id="25" name="Slide Number Placeholder 0"/>
+          <p:cNvSpPr>
+            <a:spLocks noGrp="1"/>
+          </p:cNvSpPr>
+          <p:nvPr>
+            <p:ph type="sldNum" sz="quarter" idx="4294967295"/>
+          </p:nvPr>
+        </p:nvSpPr>
+        <p:spPr>
+          <a:xfrm>
+            <a:off x="8229600" y="4754880"/>
+            <a:ext cx="457200" cy="274320"/>
+          </a:xfrm>
+          <a:prstGeom prst="rect">
+            <a:avLst/>
+          </a:prstGeom>
+          <a:extLst>
+            <a:ext uri="{C572A759-6A51-4108-AA02-DFA0A04FC94B}">
+              <ma14:wrappingTextBoxFlag xmlns:ma14="http://schemas.microsoft.com/office/mac/drawingml/2011/main" val="0"/>
+            </a:ext>
+          </a:extLst>
+        </p:spPr>
+        <p:txBody>
+          <a:bodyPr/>
+          <a:lstStyle>
+            <a:lvl1pPr>
+              <a:defRPr sz="1000">
+                <a:solidFill>
+                  <a:schemeClr val="bg2"/>
+                </a:solidFill>
+              </a:defRPr>
+            </a:lvl1pPr>
+          </a:lstStyle>
+          <a:p>
+            <a:pPr algn="r"/>
+            <a:fld id="{F7021451-1387-4CA6-816F-3879F97B5CBC}" type="slidenum">
+              <a:rPr b="0" lang="en-US"/>
+              <a:t>24</a:t>
+            </a:fld>
+            <a:endParaRPr lang="en-US"/>
+          </a:p>
+        </p:txBody>
+      </p:sp>
+    </p:spTree>
+  </p:cSld>
+  <p:clrMapOvr>
+    <a:masterClrMapping/>
+  </p:clrMapOvr>
+</p:sld>
+</file>
+
+<file path=ppt/slides/slide25.xml><?xml version="1.0" encoding="utf-8"?>
+<p:sld xmlns:a="http://schemas.openxmlformats.org/drawingml/2006/main" xmlns:r="http://schemas.openxmlformats.org/officeDocument/2006/relationships" xmlns:p="http://schemas.openxmlformats.org/presentationml/2006/main">
+  <p:cSld name="Slide 25">
+    <p:spTree>
+      <p:nvGrpSpPr>
+        <p:cNvPr id="1" name=""/>
+        <p:cNvGrpSpPr/>
+        <p:nvPr/>
+      </p:nvGrpSpPr>
+      <p:grpSpPr>
+        <a:xfrm>
+          <a:off x="0" y="0"/>
+          <a:ext cx="0" cy="0"/>
+          <a:chOff x="0" y="0"/>
+          <a:chExt cx="0" cy="0"/>
+        </a:xfrm>
+      </p:grpSpPr>
+      <p:sp>
+        <p:nvSpPr>
+          <p:cNvPr id="2" name="Text 0"/>
+          <p:cNvSpPr/>
+          <p:nvPr>
+            <p:ph idx="100" type="title" hasCustomPrompt="1"/>
+          </p:nvPr>
+        </p:nvSpPr>
+        <p:spPr>
+          <a:xfrm>
+            <a:off x="457200" y="274320"/>
+            <a:ext cx="8229600" cy="685800"/>
+          </a:xfrm>
+          <a:prstGeom prst="rect">
+            <a:avLst/>
+          </a:prstGeom>
+          <a:noFill/>
+          <a:ln/>
+        </p:spPr>
+        <p:txBody>
+          <a:bodyPr wrap="square" lIns="0" tIns="0" rIns="0" bIns="0" rtlCol="0" anchor="ctr"/>
+          <a:lstStyle/>
+          <a:p>
+            <a:pPr algn="l" indent="0" marL="0">
+              <a:buNone/>
+            </a:pPr>
+            <a:r>
+              <a:rPr lang="en-US" sz="3000" b="1" dirty="0">
+                <a:solidFill>
+                  <a:schemeClr val="bg1"/>
+                </a:solidFill>
+              </a:rPr>
               <a:t>Future work</a:t>
             </a:r>
             <a:endParaRPr lang="en-US" sz="3000" dirty="0"/>
@@ -15097,7 +18380,7 @@
       </p:sp>
       <p:sp>
         <p:nvSpPr>
-          <p:cNvPr id="3" name="card-195"/>
+          <p:cNvPr id="3" name="card-196"/>
           <p:cNvSpPr/>
           <p:nvPr/>
         </p:nvSpPr>
@@ -15119,7 +18402,7 @@
       </p:sp>
       <p:sp>
         <p:nvSpPr>
-          <p:cNvPr id="4" name="icon-bg-196"/>
+          <p:cNvPr id="4" name="icon-bg-197"/>
           <p:cNvSpPr/>
           <p:nvPr/>
         </p:nvSpPr>
@@ -15139,7 +18422,7 @@
       </p:sp>
       <p:pic>
         <p:nvPicPr>
-          <p:cNvPr id="5" name="icon-197" descr="preencoded.png">    </p:cNvPr>
+          <p:cNvPr id="5" name="icon-198" descr="preencoded.png">    </p:cNvPr>
           <p:cNvPicPr>
             <a:picLocks noChangeAspect="1"/>
           </p:cNvPicPr>
@@ -15163,7 +18446,7 @@
       </p:pic>
       <p:sp>
         <p:nvSpPr>
-          <p:cNvPr id="6" name="text-198"/>
+          <p:cNvPr id="6" name="text-199"/>
           <p:cNvSpPr txBox="1"/>
           <p:nvPr/>
         </p:nvSpPr>
@@ -15202,7 +18485,7 @@
       </p:sp>
       <p:sp>
         <p:nvSpPr>
-          <p:cNvPr id="7" name="text-199"/>
+          <p:cNvPr id="7" name="text-200"/>
           <p:cNvSpPr txBox="1"/>
           <p:nvPr/>
         </p:nvSpPr>
@@ -15241,7 +18524,7 @@
       </p:sp>
       <p:sp>
         <p:nvSpPr>
-          <p:cNvPr id="8" name="card-200"/>
+          <p:cNvPr id="8" name="card-201"/>
           <p:cNvSpPr/>
           <p:nvPr/>
         </p:nvSpPr>
@@ -15263,7 +18546,7 @@
       </p:sp>
       <p:sp>
         <p:nvSpPr>
-          <p:cNvPr id="9" name="icon-bg-201"/>
+          <p:cNvPr id="9" name="icon-bg-202"/>
           <p:cNvSpPr/>
           <p:nvPr/>
         </p:nvSpPr>
@@ -15283,7 +18566,7 @@
       </p:sp>
       <p:pic>
         <p:nvPicPr>
-          <p:cNvPr id="10" name="icon-202" descr="preencoded.png">    </p:cNvPr>
+          <p:cNvPr id="10" name="icon-203" descr="preencoded.png">    </p:cNvPr>
           <p:cNvPicPr>
             <a:picLocks noChangeAspect="1"/>
           </p:cNvPicPr>
@@ -15307,7 +18590,7 @@
       </p:pic>
       <p:sp>
         <p:nvSpPr>
-          <p:cNvPr id="11" name="text-203"/>
+          <p:cNvPr id="11" name="text-204"/>
           <p:cNvSpPr txBox="1"/>
           <p:nvPr/>
         </p:nvSpPr>
@@ -15346,7 +18629,7 @@
       </p:sp>
       <p:sp>
         <p:nvSpPr>
-          <p:cNvPr id="12" name="text-204"/>
+          <p:cNvPr id="12" name="text-205"/>
           <p:cNvSpPr txBox="1"/>
           <p:nvPr/>
         </p:nvSpPr>
@@ -15385,7 +18668,7 @@
       </p:sp>
       <p:sp>
         <p:nvSpPr>
-          <p:cNvPr id="13" name="card-205"/>
+          <p:cNvPr id="13" name="card-206"/>
           <p:cNvSpPr/>
           <p:nvPr/>
         </p:nvSpPr>
@@ -15407,7 +18690,7 @@
       </p:sp>
       <p:sp>
         <p:nvSpPr>
-          <p:cNvPr id="14" name="icon-bg-206"/>
+          <p:cNvPr id="14" name="icon-bg-207"/>
           <p:cNvSpPr/>
           <p:nvPr/>
         </p:nvSpPr>
@@ -15427,7 +18710,7 @@
       </p:sp>
       <p:pic>
         <p:nvPicPr>
-          <p:cNvPr id="15" name="icon-207" descr="preencoded.png">    </p:cNvPr>
+          <p:cNvPr id="15" name="icon-208" descr="preencoded.png">    </p:cNvPr>
           <p:cNvPicPr>
             <a:picLocks noChangeAspect="1"/>
           </p:cNvPicPr>
@@ -15451,7 +18734,7 @@
       </p:pic>
       <p:sp>
         <p:nvSpPr>
-          <p:cNvPr id="16" name="text-208"/>
+          <p:cNvPr id="16" name="text-209"/>
           <p:cNvSpPr txBox="1"/>
           <p:nvPr/>
         </p:nvSpPr>
@@ -15490,7 +18773,7 @@
       </p:sp>
       <p:sp>
         <p:nvSpPr>
-          <p:cNvPr id="17" name="text-209"/>
+          <p:cNvPr id="17" name="text-210"/>
           <p:cNvSpPr txBox="1"/>
           <p:nvPr/>
         </p:nvSpPr>
@@ -15529,7 +18812,7 @@
       </p:sp>
       <p:sp>
         <p:nvSpPr>
-          <p:cNvPr id="18" name="card-210"/>
+          <p:cNvPr id="18" name="card-211"/>
           <p:cNvSpPr/>
           <p:nvPr/>
         </p:nvSpPr>
@@ -15551,7 +18834,7 @@
       </p:sp>
       <p:sp>
         <p:nvSpPr>
-          <p:cNvPr id="19" name="icon-bg-211"/>
+          <p:cNvPr id="19" name="icon-bg-212"/>
           <p:cNvSpPr/>
           <p:nvPr/>
         </p:nvSpPr>
@@ -15571,7 +18854,7 @@
       </p:sp>
       <p:pic>
         <p:nvPicPr>
-          <p:cNvPr id="20" name="icon-212" descr="preencoded.png">    </p:cNvPr>
+          <p:cNvPr id="20" name="icon-213" descr="preencoded.png">    </p:cNvPr>
           <p:cNvPicPr>
             <a:picLocks noChangeAspect="1"/>
           </p:cNvPicPr>
@@ -15595,7 +18878,7 @@
       </p:pic>
       <p:sp>
         <p:nvSpPr>
-          <p:cNvPr id="21" name="text-213"/>
+          <p:cNvPr id="21" name="text-214"/>
           <p:cNvSpPr txBox="1"/>
           <p:nvPr/>
         </p:nvSpPr>
@@ -15634,7 +18917,7 @@
       </p:sp>
       <p:sp>
         <p:nvSpPr>
-          <p:cNvPr id="22" name="text-214"/>
+          <p:cNvPr id="22" name="text-215"/>
           <p:cNvSpPr txBox="1"/>
           <p:nvPr/>
         </p:nvSpPr>
@@ -15673,7 +18956,7 @@
       </p:sp>
       <p:sp>
         <p:nvSpPr>
-          <p:cNvPr id="23" name="text-215"/>
+          <p:cNvPr id="23" name="text-216"/>
           <p:cNvSpPr txBox="1"/>
           <p:nvPr/>
         </p:nvSpPr>
@@ -15763,296 +19046,6 @@
             <a:pPr algn="r"/>
             <a:fld id="{F7021451-1387-4CA6-816F-3879F97B5CBC}" type="slidenum">
               <a:rPr b="0" lang="en-US"/>
-              <a:t>24</a:t>
-            </a:fld>
-            <a:endParaRPr lang="en-US"/>
-          </a:p>
-        </p:txBody>
-      </p:sp>
-    </p:spTree>
-  </p:cSld>
-  <p:clrMapOvr>
-    <a:masterClrMapping/>
-  </p:clrMapOvr>
-</p:sld>
-</file>
-
-<file path=ppt/slides/slide25.xml><?xml version="1.0" encoding="utf-8"?>
-<p:sld xmlns:a="http://schemas.openxmlformats.org/drawingml/2006/main" xmlns:r="http://schemas.openxmlformats.org/officeDocument/2006/relationships" xmlns:p="http://schemas.openxmlformats.org/presentationml/2006/main">
-  <p:cSld name="Slide 25">
-    <p:spTree>
-      <p:nvGrpSpPr>
-        <p:cNvPr id="1" name=""/>
-        <p:cNvGrpSpPr/>
-        <p:nvPr/>
-      </p:nvGrpSpPr>
-      <p:grpSpPr>
-        <a:xfrm>
-          <a:off x="0" y="0"/>
-          <a:ext cx="0" cy="0"/>
-          <a:chOff x="0" y="0"/>
-          <a:chExt cx="0" cy="0"/>
-        </a:xfrm>
-      </p:grpSpPr>
-      <p:sp>
-        <p:nvSpPr>
-          <p:cNvPr id="2" name="Text 0"/>
-          <p:cNvSpPr/>
-          <p:nvPr>
-            <p:ph idx="100" type="title" hasCustomPrompt="1"/>
-          </p:nvPr>
-        </p:nvSpPr>
-        <p:spPr>
-          <a:xfrm>
-            <a:off x="457200" y="274320"/>
-            <a:ext cx="8229600" cy="685800"/>
-          </a:xfrm>
-          <a:prstGeom prst="rect">
-            <a:avLst/>
-          </a:prstGeom>
-          <a:noFill/>
-          <a:ln/>
-        </p:spPr>
-        <p:txBody>
-          <a:bodyPr wrap="square" lIns="0" tIns="0" rIns="0" bIns="0" rtlCol="0" anchor="ctr"/>
-          <a:lstStyle/>
-          <a:p>
-            <a:pPr algn="l" indent="0" marL="0">
-              <a:buNone/>
-            </a:pPr>
-            <a:r>
-              <a:rPr lang="en-US" sz="3000" b="1" dirty="0">
-                <a:solidFill>
-                  <a:schemeClr val="bg1"/>
-                </a:solidFill>
-              </a:rPr>
-              <a:t>References</a:t>
-            </a:r>
-            <a:endParaRPr lang="en-US" sz="3000" dirty="0"/>
-          </a:p>
-        </p:txBody>
-      </p:sp>
-      <p:sp>
-        <p:nvSpPr>
-          <p:cNvPr id="3" name="text-216"/>
-          <p:cNvSpPr txBox="1"/>
-          <p:nvPr/>
-        </p:nvSpPr>
-        <p:spPr>
-          <a:xfrm>
-            <a:off x="457200" y="1143000"/>
-            <a:ext cx="8229600" cy="3474720"/>
-          </a:xfrm>
-          <a:prstGeom prst="rect">
-            <a:avLst/>
-          </a:prstGeom>
-          <a:noFill/>
-          <a:ln/>
-        </p:spPr>
-        <p:txBody>
-          <a:bodyPr wrap="square" lIns="0" tIns="0" rIns="0" bIns="0" rtlCol="0" anchor="t"/>
-          <a:lstStyle/>
-          <a:p>
-            <a:pPr indent="0" marL="0">
-              <a:spcAft>
-                <a:spcPts val="600"/>
-              </a:spcAft>
-              <a:buNone/>
-            </a:pPr>
-            <a:r>
-              <a:rPr lang="en-US" sz="1200" dirty="0">
-                <a:solidFill>
-                  <a:schemeClr val="bg1"/>
-                </a:solidFill>
-                <a:latin typeface="Cambria" pitchFamily="34" charset="0"/>
-                <a:ea typeface="Cambria" pitchFamily="34" charset="-122"/>
-                <a:cs typeface="Cambria" pitchFamily="34" charset="-120"/>
-              </a:rPr>
-              <a:t>[1] Statista, "Data growth worldwide 2010–2025." Accessed Nov. 2023.</a:t>
-            </a:r>
-            <a:endParaRPr lang="en-US" sz="1200" dirty="0"/>
-          </a:p>
-          <a:p>
-            <a:pPr indent="0" marL="0">
-              <a:spcAft>
-                <a:spcPts val="600"/>
-              </a:spcAft>
-              <a:buNone/>
-            </a:pPr>
-            <a:r>
-              <a:rPr lang="en-US" sz="1200" dirty="0">
-                <a:solidFill>
-                  <a:schemeClr val="bg1"/>
-                </a:solidFill>
-                <a:latin typeface="Cambria" pitchFamily="34" charset="0"/>
-                <a:ea typeface="Cambria" pitchFamily="34" charset="-122"/>
-                <a:cs typeface="Cambria" pitchFamily="34" charset="-120"/>
-              </a:rPr>
-              <a:t>[2] Baeldung, "What is content-based image retrieval?" Accessed Nov. 2023.</a:t>
-            </a:r>
-            <a:endParaRPr lang="en-US" sz="1200" dirty="0"/>
-          </a:p>
-          <a:p>
-            <a:pPr indent="0" marL="0">
-              <a:spcAft>
-                <a:spcPts val="600"/>
-              </a:spcAft>
-              <a:buNone/>
-            </a:pPr>
-            <a:r>
-              <a:rPr lang="en-US" sz="1200" dirty="0">
-                <a:solidFill>
-                  <a:schemeClr val="bg1"/>
-                </a:solidFill>
-                <a:latin typeface="Cambria" pitchFamily="34" charset="0"/>
-                <a:ea typeface="Cambria" pitchFamily="34" charset="-122"/>
-                <a:cs typeface="Cambria" pitchFamily="34" charset="-120"/>
-              </a:rPr>
-              <a:t>[3] G. Kumar, P. K. Bhatia, "A detailed review of feature extraction in image processing systems," ACCT, 2014.</a:t>
-            </a:r>
-            <a:endParaRPr lang="en-US" sz="1200" dirty="0"/>
-          </a:p>
-          <a:p>
-            <a:pPr indent="0" marL="0">
-              <a:spcAft>
-                <a:spcPts val="600"/>
-              </a:spcAft>
-              <a:buNone/>
-            </a:pPr>
-            <a:r>
-              <a:rPr lang="en-US" sz="1200" dirty="0">
-                <a:solidFill>
-                  <a:schemeClr val="bg1"/>
-                </a:solidFill>
-                <a:latin typeface="Cambria" pitchFamily="34" charset="0"/>
-                <a:ea typeface="Cambria" pitchFamily="34" charset="-122"/>
-                <a:cs typeface="Cambria" pitchFamily="34" charset="-120"/>
-              </a:rPr>
-              <a:t>[4] D. G. Lowe, "Object recognition from local scale-invariant features," ICCV, 1999.</a:t>
-            </a:r>
-            <a:endParaRPr lang="en-US" sz="1200" dirty="0"/>
-          </a:p>
-          <a:p>
-            <a:pPr indent="0" marL="0">
-              <a:spcAft>
-                <a:spcPts val="600"/>
-              </a:spcAft>
-              <a:buNone/>
-            </a:pPr>
-            <a:r>
-              <a:rPr lang="en-US" sz="1200" dirty="0">
-                <a:solidFill>
-                  <a:schemeClr val="bg1"/>
-                </a:solidFill>
-                <a:latin typeface="Cambria" pitchFamily="34" charset="0"/>
-                <a:ea typeface="Cambria" pitchFamily="34" charset="-122"/>
-                <a:cs typeface="Cambria" pitchFamily="34" charset="-120"/>
-              </a:rPr>
-              <a:t>[5] J. Hosang, R. Benenson, B. Schiele, "Learning non-maximum suppression," CVPR, 2017.</a:t>
-            </a:r>
-            <a:endParaRPr lang="en-US" sz="1200" dirty="0"/>
-          </a:p>
-          <a:p>
-            <a:pPr indent="0" marL="0">
-              <a:spcAft>
-                <a:spcPts val="600"/>
-              </a:spcAft>
-              <a:buNone/>
-            </a:pPr>
-            <a:r>
-              <a:rPr lang="en-US" sz="1200" dirty="0">
-                <a:solidFill>
-                  <a:schemeClr val="bg1"/>
-                </a:solidFill>
-                <a:latin typeface="Cambria" pitchFamily="34" charset="0"/>
-                <a:ea typeface="Cambria" pitchFamily="34" charset="-122"/>
-                <a:cs typeface="Cambria" pitchFamily="34" charset="-120"/>
-              </a:rPr>
-              <a:t>[6] M.-E. Nilsback, A. Zisserman, "Automated flower classification over a large number of classes," ICVGIP, 2008.</a:t>
-            </a:r>
-            <a:endParaRPr lang="en-US" sz="1200" dirty="0"/>
-          </a:p>
-          <a:p>
-            <a:pPr indent="0" marL="0">
-              <a:spcAft>
-                <a:spcPts val="600"/>
-              </a:spcAft>
-              <a:buNone/>
-            </a:pPr>
-            <a:r>
-              <a:rPr lang="en-US" sz="1200" dirty="0">
-                <a:solidFill>
-                  <a:schemeClr val="bg1"/>
-                </a:solidFill>
-                <a:latin typeface="Cambria" pitchFamily="34" charset="0"/>
-                <a:ea typeface="Cambria" pitchFamily="34" charset="-122"/>
-                <a:cs typeface="Cambria" pitchFamily="34" charset="-120"/>
-              </a:rPr>
-              <a:t>[7] S. Gross, "PEP 703: Making the Global Interpreter Lock optional in CPython," 2023.</a:t>
-            </a:r>
-            <a:endParaRPr lang="en-US" sz="1200" dirty="0"/>
-          </a:p>
-          <a:p>
-            <a:pPr indent="0" marL="0">
-              <a:spcAft>
-                <a:spcPts val="600"/>
-              </a:spcAft>
-              <a:buNone/>
-            </a:pPr>
-            <a:r>
-              <a:rPr lang="en-US" sz="1200" dirty="0">
-                <a:solidFill>
-                  <a:schemeClr val="bg1"/>
-                </a:solidFill>
-                <a:latin typeface="Cambria" pitchFamily="34" charset="0"/>
-                <a:ea typeface="Cambria" pitchFamily="34" charset="-122"/>
-                <a:cs typeface="Cambria" pitchFamily="34" charset="-120"/>
-              </a:rPr>
-              <a:t>[8] M. Singh et al., "A comparative study of feature extraction techniques and similarity measures for image retrieval," INCOFT, 2022.</a:t>
-            </a:r>
-            <a:endParaRPr lang="en-US" sz="1200" dirty="0"/>
-          </a:p>
-        </p:txBody>
-      </p:sp>
-      <p:sp>
-        <p:nvSpPr>
-          <p:cNvPr id="25" name="Slide Number Placeholder 0"/>
-          <p:cNvSpPr>
-            <a:spLocks noGrp="1"/>
-          </p:cNvSpPr>
-          <p:nvPr>
-            <p:ph type="sldNum" sz="quarter" idx="4294967295"/>
-          </p:nvPr>
-        </p:nvSpPr>
-        <p:spPr>
-          <a:xfrm>
-            <a:off x="8229600" y="4754880"/>
-            <a:ext cx="457200" cy="274320"/>
-          </a:xfrm>
-          <a:prstGeom prst="rect">
-            <a:avLst/>
-          </a:prstGeom>
-          <a:extLst>
-            <a:ext uri="{C572A759-6A51-4108-AA02-DFA0A04FC94B}">
-              <ma14:wrappingTextBoxFlag xmlns:ma14="http://schemas.microsoft.com/office/mac/drawingml/2011/main" val="0"/>
-            </a:ext>
-          </a:extLst>
-        </p:spPr>
-        <p:txBody>
-          <a:bodyPr/>
-          <a:lstStyle>
-            <a:lvl1pPr>
-              <a:defRPr sz="1000">
-                <a:solidFill>
-                  <a:schemeClr val="bg2"/>
-                </a:solidFill>
-              </a:defRPr>
-            </a:lvl1pPr>
-          </a:lstStyle>
-          <a:p>
-            <a:pPr algn="r"/>
-            <a:fld id="{F7021451-1387-4CA6-816F-3879F97B5CBC}" type="slidenum">
-              <a:rPr b="0" lang="en-US"/>
               <a:t>25</a:t>
             </a:fld>
             <a:endParaRPr lang="en-US"/>
@@ -16094,6 +19087,296 @@
         </p:nvSpPr>
         <p:spPr>
           <a:xfrm>
+            <a:off x="457200" y="274320"/>
+            <a:ext cx="8229600" cy="685800"/>
+          </a:xfrm>
+          <a:prstGeom prst="rect">
+            <a:avLst/>
+          </a:prstGeom>
+          <a:noFill/>
+          <a:ln/>
+        </p:spPr>
+        <p:txBody>
+          <a:bodyPr wrap="square" lIns="0" tIns="0" rIns="0" bIns="0" rtlCol="0" anchor="ctr"/>
+          <a:lstStyle/>
+          <a:p>
+            <a:pPr algn="l" indent="0" marL="0">
+              <a:buNone/>
+            </a:pPr>
+            <a:r>
+              <a:rPr lang="en-US" sz="3000" b="1" dirty="0">
+                <a:solidFill>
+                  <a:schemeClr val="bg1"/>
+                </a:solidFill>
+              </a:rPr>
+              <a:t>References</a:t>
+            </a:r>
+            <a:endParaRPr lang="en-US" sz="3000" dirty="0"/>
+          </a:p>
+        </p:txBody>
+      </p:sp>
+      <p:sp>
+        <p:nvSpPr>
+          <p:cNvPr id="3" name="text-217"/>
+          <p:cNvSpPr txBox="1"/>
+          <p:nvPr/>
+        </p:nvSpPr>
+        <p:spPr>
+          <a:xfrm>
+            <a:off x="457200" y="1143000"/>
+            <a:ext cx="8229600" cy="3474720"/>
+          </a:xfrm>
+          <a:prstGeom prst="rect">
+            <a:avLst/>
+          </a:prstGeom>
+          <a:noFill/>
+          <a:ln/>
+        </p:spPr>
+        <p:txBody>
+          <a:bodyPr wrap="square" lIns="0" tIns="0" rIns="0" bIns="0" rtlCol="0" anchor="t"/>
+          <a:lstStyle/>
+          <a:p>
+            <a:pPr indent="0" marL="0">
+              <a:spcAft>
+                <a:spcPts val="600"/>
+              </a:spcAft>
+              <a:buNone/>
+            </a:pPr>
+            <a:r>
+              <a:rPr lang="en-US" sz="1200" dirty="0">
+                <a:solidFill>
+                  <a:schemeClr val="bg1"/>
+                </a:solidFill>
+                <a:latin typeface="Cambria" pitchFamily="34" charset="0"/>
+                <a:ea typeface="Cambria" pitchFamily="34" charset="-122"/>
+                <a:cs typeface="Cambria" pitchFamily="34" charset="-120"/>
+              </a:rPr>
+              <a:t>[1] Statista, "Data growth worldwide 2010–2025." Accessed Nov. 2023.</a:t>
+            </a:r>
+            <a:endParaRPr lang="en-US" sz="1200" dirty="0"/>
+          </a:p>
+          <a:p>
+            <a:pPr indent="0" marL="0">
+              <a:spcAft>
+                <a:spcPts val="600"/>
+              </a:spcAft>
+              <a:buNone/>
+            </a:pPr>
+            <a:r>
+              <a:rPr lang="en-US" sz="1200" dirty="0">
+                <a:solidFill>
+                  <a:schemeClr val="bg1"/>
+                </a:solidFill>
+                <a:latin typeface="Cambria" pitchFamily="34" charset="0"/>
+                <a:ea typeface="Cambria" pitchFamily="34" charset="-122"/>
+                <a:cs typeface="Cambria" pitchFamily="34" charset="-120"/>
+              </a:rPr>
+              <a:t>[2] Baeldung, "What is content-based image retrieval?" Accessed Nov. 2023.</a:t>
+            </a:r>
+            <a:endParaRPr lang="en-US" sz="1200" dirty="0"/>
+          </a:p>
+          <a:p>
+            <a:pPr indent="0" marL="0">
+              <a:spcAft>
+                <a:spcPts val="600"/>
+              </a:spcAft>
+              <a:buNone/>
+            </a:pPr>
+            <a:r>
+              <a:rPr lang="en-US" sz="1200" dirty="0">
+                <a:solidFill>
+                  <a:schemeClr val="bg1"/>
+                </a:solidFill>
+                <a:latin typeface="Cambria" pitchFamily="34" charset="0"/>
+                <a:ea typeface="Cambria" pitchFamily="34" charset="-122"/>
+                <a:cs typeface="Cambria" pitchFamily="34" charset="-120"/>
+              </a:rPr>
+              <a:t>[3] G. Kumar, P. K. Bhatia, "A detailed review of feature extraction in image processing systems," ACCT, 2014.</a:t>
+            </a:r>
+            <a:endParaRPr lang="en-US" sz="1200" dirty="0"/>
+          </a:p>
+          <a:p>
+            <a:pPr indent="0" marL="0">
+              <a:spcAft>
+                <a:spcPts val="600"/>
+              </a:spcAft>
+              <a:buNone/>
+            </a:pPr>
+            <a:r>
+              <a:rPr lang="en-US" sz="1200" dirty="0">
+                <a:solidFill>
+                  <a:schemeClr val="bg1"/>
+                </a:solidFill>
+                <a:latin typeface="Cambria" pitchFamily="34" charset="0"/>
+                <a:ea typeface="Cambria" pitchFamily="34" charset="-122"/>
+                <a:cs typeface="Cambria" pitchFamily="34" charset="-120"/>
+              </a:rPr>
+              <a:t>[4] D. G. Lowe, "Object recognition from local scale-invariant features," ICCV, 1999.</a:t>
+            </a:r>
+            <a:endParaRPr lang="en-US" sz="1200" dirty="0"/>
+          </a:p>
+          <a:p>
+            <a:pPr indent="0" marL="0">
+              <a:spcAft>
+                <a:spcPts val="600"/>
+              </a:spcAft>
+              <a:buNone/>
+            </a:pPr>
+            <a:r>
+              <a:rPr lang="en-US" sz="1200" dirty="0">
+                <a:solidFill>
+                  <a:schemeClr val="bg1"/>
+                </a:solidFill>
+                <a:latin typeface="Cambria" pitchFamily="34" charset="0"/>
+                <a:ea typeface="Cambria" pitchFamily="34" charset="-122"/>
+                <a:cs typeface="Cambria" pitchFamily="34" charset="-120"/>
+              </a:rPr>
+              <a:t>[5] J. Hosang, R. Benenson, B. Schiele, "Learning non-maximum suppression," CVPR, 2017.</a:t>
+            </a:r>
+            <a:endParaRPr lang="en-US" sz="1200" dirty="0"/>
+          </a:p>
+          <a:p>
+            <a:pPr indent="0" marL="0">
+              <a:spcAft>
+                <a:spcPts val="600"/>
+              </a:spcAft>
+              <a:buNone/>
+            </a:pPr>
+            <a:r>
+              <a:rPr lang="en-US" sz="1200" dirty="0">
+                <a:solidFill>
+                  <a:schemeClr val="bg1"/>
+                </a:solidFill>
+                <a:latin typeface="Cambria" pitchFamily="34" charset="0"/>
+                <a:ea typeface="Cambria" pitchFamily="34" charset="-122"/>
+                <a:cs typeface="Cambria" pitchFamily="34" charset="-120"/>
+              </a:rPr>
+              <a:t>[6] M.-E. Nilsback, A. Zisserman, "Automated flower classification over a large number of classes," ICVGIP, 2008.</a:t>
+            </a:r>
+            <a:endParaRPr lang="en-US" sz="1200" dirty="0"/>
+          </a:p>
+          <a:p>
+            <a:pPr indent="0" marL="0">
+              <a:spcAft>
+                <a:spcPts val="600"/>
+              </a:spcAft>
+              <a:buNone/>
+            </a:pPr>
+            <a:r>
+              <a:rPr lang="en-US" sz="1200" dirty="0">
+                <a:solidFill>
+                  <a:schemeClr val="bg1"/>
+                </a:solidFill>
+                <a:latin typeface="Cambria" pitchFamily="34" charset="0"/>
+                <a:ea typeface="Cambria" pitchFamily="34" charset="-122"/>
+                <a:cs typeface="Cambria" pitchFamily="34" charset="-120"/>
+              </a:rPr>
+              <a:t>[7] S. Gross, "PEP 703: Making the Global Interpreter Lock optional in CPython," 2023.</a:t>
+            </a:r>
+            <a:endParaRPr lang="en-US" sz="1200" dirty="0"/>
+          </a:p>
+          <a:p>
+            <a:pPr indent="0" marL="0">
+              <a:spcAft>
+                <a:spcPts val="600"/>
+              </a:spcAft>
+              <a:buNone/>
+            </a:pPr>
+            <a:r>
+              <a:rPr lang="en-US" sz="1200" dirty="0">
+                <a:solidFill>
+                  <a:schemeClr val="bg1"/>
+                </a:solidFill>
+                <a:latin typeface="Cambria" pitchFamily="34" charset="0"/>
+                <a:ea typeface="Cambria" pitchFamily="34" charset="-122"/>
+                <a:cs typeface="Cambria" pitchFamily="34" charset="-120"/>
+              </a:rPr>
+              <a:t>[8] M. Singh et al., "A comparative study of feature extraction techniques and similarity measures for image retrieval," INCOFT, 2022.</a:t>
+            </a:r>
+            <a:endParaRPr lang="en-US" sz="1200" dirty="0"/>
+          </a:p>
+        </p:txBody>
+      </p:sp>
+      <p:sp>
+        <p:nvSpPr>
+          <p:cNvPr id="25" name="Slide Number Placeholder 0"/>
+          <p:cNvSpPr>
+            <a:spLocks noGrp="1"/>
+          </p:cNvSpPr>
+          <p:nvPr>
+            <p:ph type="sldNum" sz="quarter" idx="4294967295"/>
+          </p:nvPr>
+        </p:nvSpPr>
+        <p:spPr>
+          <a:xfrm>
+            <a:off x="8229600" y="4754880"/>
+            <a:ext cx="457200" cy="274320"/>
+          </a:xfrm>
+          <a:prstGeom prst="rect">
+            <a:avLst/>
+          </a:prstGeom>
+          <a:extLst>
+            <a:ext uri="{C572A759-6A51-4108-AA02-DFA0A04FC94B}">
+              <ma14:wrappingTextBoxFlag xmlns:ma14="http://schemas.microsoft.com/office/mac/drawingml/2011/main" val="0"/>
+            </a:ext>
+          </a:extLst>
+        </p:spPr>
+        <p:txBody>
+          <a:bodyPr/>
+          <a:lstStyle>
+            <a:lvl1pPr>
+              <a:defRPr sz="1000">
+                <a:solidFill>
+                  <a:schemeClr val="bg2"/>
+                </a:solidFill>
+              </a:defRPr>
+            </a:lvl1pPr>
+          </a:lstStyle>
+          <a:p>
+            <a:pPr algn="r"/>
+            <a:fld id="{F7021451-1387-4CA6-816F-3879F97B5CBC}" type="slidenum">
+              <a:rPr b="0" lang="en-US"/>
+              <a:t>26</a:t>
+            </a:fld>
+            <a:endParaRPr lang="en-US"/>
+          </a:p>
+        </p:txBody>
+      </p:sp>
+    </p:spTree>
+  </p:cSld>
+  <p:clrMapOvr>
+    <a:masterClrMapping/>
+  </p:clrMapOvr>
+</p:sld>
+</file>
+
+<file path=ppt/slides/slide27.xml><?xml version="1.0" encoding="utf-8"?>
+<p:sld xmlns:a="http://schemas.openxmlformats.org/drawingml/2006/main" xmlns:r="http://schemas.openxmlformats.org/officeDocument/2006/relationships" xmlns:p="http://schemas.openxmlformats.org/presentationml/2006/main">
+  <p:cSld name="Slide 27">
+    <p:spTree>
+      <p:nvGrpSpPr>
+        <p:cNvPr id="1" name=""/>
+        <p:cNvGrpSpPr/>
+        <p:nvPr/>
+      </p:nvGrpSpPr>
+      <p:grpSpPr>
+        <a:xfrm>
+          <a:off x="0" y="0"/>
+          <a:ext cx="0" cy="0"/>
+          <a:chOff x="0" y="0"/>
+          <a:chExt cx="0" cy="0"/>
+        </a:xfrm>
+      </p:grpSpPr>
+      <p:sp>
+        <p:nvSpPr>
+          <p:cNvPr id="2" name="Text 0"/>
+          <p:cNvSpPr/>
+          <p:nvPr>
+            <p:ph idx="100" type="title" hasCustomPrompt="1"/>
+          </p:nvPr>
+        </p:nvSpPr>
+        <p:spPr>
+          <a:xfrm>
             <a:off x="548640" y="1234440"/>
             <a:ext cx="8046720" cy="1463040"/>
           </a:xfrm>
@@ -16162,7 +19445,7 @@
       </p:sp>
       <p:sp>
         <p:nvSpPr>
-          <p:cNvPr id="4" name="text-217"/>
+          <p:cNvPr id="4" name="text-218"/>
           <p:cNvSpPr txBox="1"/>
           <p:nvPr/>
         </p:nvSpPr>

--- a/slides/parallel_sift_presentation.pptx
+++ b/slides/parallel_sift_presentation.pptx
@@ -32,9 +32,10 @@
     <p:sldId id="280" r:id="rId26"/>
     <p:sldId id="281" r:id="rId27"/>
     <p:sldId id="282" r:id="rId28"/>
+    <p:sldId id="283" r:id="rId29"/>
   </p:sldIdLst>
   <p:notesMasterIdLst>
-    <p:notesMasterId r:id="rId29"/>
+    <p:notesMasterId r:id="rId30"/>
   </p:notesMasterIdLst>
   <p:sldSz cx="9144000" cy="5143500"/>
   <p:notesSz cx="5143500" cy="9144000"/>
@@ -133,13 +134,13 @@
   <p:extLst>
     <p:ext uri="{521415D9-36F7-43E2-AB2F-B90AF26B5E84}">
       <p14:sectionLst xmlns:p14="http://schemas.microsoft.com/office/powerpoint/2010/main">
-        <p14:section name="Introduction" id="{d7dd4df8-cbb9-997d-5976-178a57a6f145}">
+        <p14:section name="Introduction" id="{53370b2d-db41-2643-d526-d41d8064ff9c}">
           <p14:sldIdLst>
             <p14:sldId id="256"/>
             <p14:sldId id="257"/>
           </p14:sldIdLst>
         </p14:section>
-        <p14:section name="Background" id="{c1b2ba21-9392-1441-8851-42c3435c2c9c}">
+        <p14:section name="Background" id="{a721b182-24d1-e19e-75c9-9b660baf1cc8}">
           <p14:sldIdLst>
             <p14:sldId id="258"/>
             <p14:sldId id="259"/>
@@ -148,7 +149,7 @@
             <p14:sldId id="262"/>
           </p14:sldIdLst>
         </p14:section>
-        <p14:section name="The 2023 study" id="{915abd5d-76cd-e64e-a318-c27a2d8583be}">
+        <p14:section name="The 2023 study" id="{5b3f0693-e65e-1cbf-ba78-12d23ad73791}">
           <p14:sldIdLst>
             <p14:sldId id="263"/>
             <p14:sldId id="264"/>
@@ -156,14 +157,14 @@
             <p14:sldId id="266"/>
           </p14:sldIdLst>
         </p14:section>
-        <p14:section name="Diagnosis" id="{bd35576f-dd56-c65f-5f78-54cf015d04ab}">
+        <p14:section name="Diagnosis" id="{7069a4e0-2261-d3a3-ac79-b4d05eb917c6}">
           <p14:sldIdLst>
             <p14:sldId id="267"/>
             <p14:sldId id="268"/>
             <p14:sldId id="269"/>
           </p14:sldIdLst>
         </p14:section>
-        <p14:section name="The fix" id="{c1e50aa3-df0c-067f-c83a-574456d1671c}">
+        <p14:section name="The fix" id="{143369ae-f936-fbe4-e2bd-54d74013f2fe}">
           <p14:sldIdLst>
             <p14:sldId id="270"/>
             <p14:sldId id="271"/>
@@ -173,15 +174,16 @@
             <p14:sldId id="275"/>
             <p14:sldId id="276"/>
             <p14:sldId id="277"/>
+            <p14:sldId id="278"/>
           </p14:sldIdLst>
         </p14:section>
-        <p14:section name="Conclusions" id="{9dbea07d-7f2a-b9a9-d29e-26801cede115}">
+        <p14:section name="Conclusions" id="{27319a4c-41f9-6b1b-3982-135a70bddb29}">
           <p14:sldIdLst>
-            <p14:sldId id="278"/>
             <p14:sldId id="279"/>
             <p14:sldId id="280"/>
             <p14:sldId id="281"/>
             <p14:sldId id="282"/>
+            <p14:sldId id="283"/>
           </p14:sldIdLst>
         </p14:section>
       </p14:sectionLst>
@@ -3755,6 +3757,648 @@
         </a:p>
       </c:txPr>
     </c:legend>
+    <c:plotVisOnly val="1"/>
+    <c:dispBlanksAs val="span"/>
+  </c:chart>
+  <c:spPr>
+    <a:noFill/>
+    <a:ln>
+      <a:noFill/>
+    </a:ln>
+    <a:effectLst/>
+  </c:spPr>
+  <c:externalData r:id="rId1">
+    <c:autoUpdate val="0"/>
+  </c:externalData>
+</c:chartSpace>
+</file>
+
+<file path=ppt/charts/chart5.xml><?xml version="1.0" encoding="utf-8"?>
+<c:chartSpace xmlns:c="http://schemas.openxmlformats.org/drawingml/2006/chart" xmlns:a="http://schemas.openxmlformats.org/drawingml/2006/main" xmlns:r="http://schemas.openxmlformats.org/officeDocument/2006/relationships">
+  <c:date1904 val="0"/>
+  <c:roundedCorners val="1"/>
+  <c:chart>
+    <c:autoTitleDeleted val="1"/>
+    <c:plotArea>
+      <c:layout/>
+      <c:barChart>
+        <c:barDir val="bar"/>
+        <c:grouping val="stacked"/>
+        <c:varyColors val="0"/>
+        <c:ser>
+          <c:idx val="0"/>
+          <c:order val="0"/>
+          <c:tx>
+            <c:strRef>
+              <c:f>Sheet1!$B$1</c:f>
+              <c:strCache>
+                <c:ptCount val="1"/>
+                <c:pt idx="0">
+                  <c:v>Serial</c:v>
+                </c:pt>
+              </c:strCache>
+            </c:strRef>
+          </c:tx>
+          <c:spPr>
+            <a:solidFill>
+              <a:srgbClr val="9AA5AB"/>
+            </a:solidFill>
+            <a:effectLst/>
+          </c:spPr>
+          <c:invertIfNegative val="0"/>
+          <c:dLbls>
+            <c:numFmt formatCode="0.0&quot; s&quot;" sourceLinked="0"/>
+            <c:txPr>
+              <a:bodyPr/>
+              <a:lstStyle/>
+              <a:p>
+                <a:pPr>
+                  <a:defRPr b="0" i="0" strike="noStrike" sz="1100" u="none">
+                    <a:solidFill>
+                      <a:srgbClr val="FFFFFF"/>
+                    </a:solidFill>
+                    <a:latin typeface="+mn-lt"/>
+                  </a:defRPr>
+                </a:pPr>
+              </a:p>
+            </c:txPr>
+            <c:dLblPos val="inEnd"/>
+            <c:showLegendKey val="0"/>
+            <c:showVal val="1"/>
+            <c:showCatName val="0"/>
+            <c:showSerName val="0"/>
+            <c:showPercent val="0"/>
+            <c:showBubbleSize val="0"/>
+            <c:showLeaderLines val="0"/>
+          </c:dLbls>
+          <c:cat>
+            <c:multiLvlStrRef>
+              <c:f>Sheet1!$A$2:$A$9</c:f>
+              <c:multiLvlStrCache>
+                <c:ptCount val="8"/>
+                <c:lvl>
+                  <c:pt idx="0">
+                    <c:v>Serial, whole image</c:v>
+                  </c:pt>
+                  <c:pt idx="1">
+                    <c:v>Serial, 16 tiles</c:v>
+                  </c:pt>
+                  <c:pt idx="2">
+                    <c:v>Threads (GIL), 4 tiles</c:v>
+                  </c:pt>
+                  <c:pt idx="3">
+                    <c:v>Threads (GIL), 16 tiles</c:v>
+                  </c:pt>
+                  <c:pt idx="4">
+                    <c:v>Processes, 4 tiles</c:v>
+                  </c:pt>
+                  <c:pt idx="5">
+                    <c:v>Processes, 16 tiles</c:v>
+                  </c:pt>
+                  <c:pt idx="6">
+                    <c:v>No-GIL threads, 4 tiles</c:v>
+                  </c:pt>
+                  <c:pt idx="7">
+                    <c:v>No-GIL threads, 16 tiles</c:v>
+                  </c:pt>
+                </c:lvl>
+              </c:multiLvlStrCache>
+            </c:multiLvlStrRef>
+          </c:cat>
+          <c:val>
+            <c:numRef>
+              <c:f>Sheet1!$B$2:$B$9</c:f>
+              <c:numCache>
+                <c:formatCode>General</c:formatCode>
+                <c:ptCount val="8"/>
+                <c:pt idx="0">
+                  <c:v>71.5</c:v>
+                </c:pt>
+                <c:pt idx="1">
+                  <c:v>62.5</c:v>
+                </c:pt>
+                <c:pt idx="2">
+                  <c:v/>
+                </c:pt>
+                <c:pt idx="3">
+                  <c:v/>
+                </c:pt>
+                <c:pt idx="4">
+                  <c:v/>
+                </c:pt>
+                <c:pt idx="5">
+                  <c:v/>
+                </c:pt>
+                <c:pt idx="6">
+                  <c:v/>
+                </c:pt>
+                <c:pt idx="7">
+                  <c:v/>
+                </c:pt>
+              </c:numCache>
+            </c:numRef>
+          </c:val>
+        </c:ser>
+        <c:ser>
+          <c:idx val="1"/>
+          <c:order val="1"/>
+          <c:tx>
+            <c:strRef>
+              <c:f>Sheet1!$C$1</c:f>
+              <c:strCache>
+                <c:ptCount val="1"/>
+                <c:pt idx="0">
+                  <c:v>Threads (GIL)</c:v>
+                </c:pt>
+              </c:strCache>
+            </c:strRef>
+          </c:tx>
+          <c:spPr>
+            <a:solidFill>
+              <a:srgbClr val="E8703A"/>
+            </a:solidFill>
+            <a:effectLst/>
+          </c:spPr>
+          <c:invertIfNegative val="0"/>
+          <c:dLbls>
+            <c:numFmt formatCode="0.0&quot; s&quot;" sourceLinked="0"/>
+            <c:txPr>
+              <a:bodyPr/>
+              <a:lstStyle/>
+              <a:p>
+                <a:pPr>
+                  <a:defRPr b="0" i="0" strike="noStrike" sz="1100" u="none">
+                    <a:solidFill>
+                      <a:srgbClr val="FFFFFF"/>
+                    </a:solidFill>
+                    <a:latin typeface="+mn-lt"/>
+                  </a:defRPr>
+                </a:pPr>
+              </a:p>
+            </c:txPr>
+            <c:dLblPos val="inEnd"/>
+            <c:showLegendKey val="0"/>
+            <c:showVal val="1"/>
+            <c:showCatName val="0"/>
+            <c:showSerName val="0"/>
+            <c:showPercent val="0"/>
+            <c:showBubbleSize val="0"/>
+            <c:showLeaderLines val="0"/>
+          </c:dLbls>
+          <c:cat>
+            <c:multiLvlStrRef>
+              <c:f>Sheet1!$A$2:$A$9</c:f>
+              <c:multiLvlStrCache>
+                <c:ptCount val="8"/>
+                <c:lvl>
+                  <c:pt idx="0">
+                    <c:v>Serial, whole image</c:v>
+                  </c:pt>
+                  <c:pt idx="1">
+                    <c:v>Serial, 16 tiles</c:v>
+                  </c:pt>
+                  <c:pt idx="2">
+                    <c:v>Threads (GIL), 4 tiles</c:v>
+                  </c:pt>
+                  <c:pt idx="3">
+                    <c:v>Threads (GIL), 16 tiles</c:v>
+                  </c:pt>
+                  <c:pt idx="4">
+                    <c:v>Processes, 4 tiles</c:v>
+                  </c:pt>
+                  <c:pt idx="5">
+                    <c:v>Processes, 16 tiles</c:v>
+                  </c:pt>
+                  <c:pt idx="6">
+                    <c:v>No-GIL threads, 4 tiles</c:v>
+                  </c:pt>
+                  <c:pt idx="7">
+                    <c:v>No-GIL threads, 16 tiles</c:v>
+                  </c:pt>
+                </c:lvl>
+              </c:multiLvlStrCache>
+            </c:multiLvlStrRef>
+          </c:cat>
+          <c:val>
+            <c:numRef>
+              <c:f>Sheet1!$C$2:$C$9</c:f>
+              <c:numCache>
+                <c:formatCode>General</c:formatCode>
+                <c:ptCount val="8"/>
+                <c:pt idx="0">
+                  <c:v/>
+                </c:pt>
+                <c:pt idx="1">
+                  <c:v/>
+                </c:pt>
+                <c:pt idx="2">
+                  <c:v>68.5</c:v>
+                </c:pt>
+                <c:pt idx="3">
+                  <c:v>63.3</c:v>
+                </c:pt>
+                <c:pt idx="4">
+                  <c:v/>
+                </c:pt>
+                <c:pt idx="5">
+                  <c:v/>
+                </c:pt>
+                <c:pt idx="6">
+                  <c:v/>
+                </c:pt>
+                <c:pt idx="7">
+                  <c:v/>
+                </c:pt>
+              </c:numCache>
+            </c:numRef>
+          </c:val>
+        </c:ser>
+        <c:ser>
+          <c:idx val="2"/>
+          <c:order val="2"/>
+          <c:tx>
+            <c:strRef>
+              <c:f>Sheet1!$D$1</c:f>
+              <c:strCache>
+                <c:ptCount val="1"/>
+                <c:pt idx="0">
+                  <c:v>Processes</c:v>
+                </c:pt>
+              </c:strCache>
+            </c:strRef>
+          </c:tx>
+          <c:spPr>
+            <a:solidFill>
+              <a:srgbClr val="3987E5"/>
+            </a:solidFill>
+            <a:effectLst/>
+          </c:spPr>
+          <c:invertIfNegative val="0"/>
+          <c:dLbls>
+            <c:numFmt formatCode="0.0&quot; s&quot;" sourceLinked="0"/>
+            <c:txPr>
+              <a:bodyPr/>
+              <a:lstStyle/>
+              <a:p>
+                <a:pPr>
+                  <a:defRPr b="0" i="0" strike="noStrike" sz="1100" u="none">
+                    <a:solidFill>
+                      <a:srgbClr val="FFFFFF"/>
+                    </a:solidFill>
+                    <a:latin typeface="+mn-lt"/>
+                  </a:defRPr>
+                </a:pPr>
+              </a:p>
+            </c:txPr>
+            <c:dLblPos val="inEnd"/>
+            <c:showLegendKey val="0"/>
+            <c:showVal val="1"/>
+            <c:showCatName val="0"/>
+            <c:showSerName val="0"/>
+            <c:showPercent val="0"/>
+            <c:showBubbleSize val="0"/>
+            <c:showLeaderLines val="0"/>
+          </c:dLbls>
+          <c:cat>
+            <c:multiLvlStrRef>
+              <c:f>Sheet1!$A$2:$A$9</c:f>
+              <c:multiLvlStrCache>
+                <c:ptCount val="8"/>
+                <c:lvl>
+                  <c:pt idx="0">
+                    <c:v>Serial, whole image</c:v>
+                  </c:pt>
+                  <c:pt idx="1">
+                    <c:v>Serial, 16 tiles</c:v>
+                  </c:pt>
+                  <c:pt idx="2">
+                    <c:v>Threads (GIL), 4 tiles</c:v>
+                  </c:pt>
+                  <c:pt idx="3">
+                    <c:v>Threads (GIL), 16 tiles</c:v>
+                  </c:pt>
+                  <c:pt idx="4">
+                    <c:v>Processes, 4 tiles</c:v>
+                  </c:pt>
+                  <c:pt idx="5">
+                    <c:v>Processes, 16 tiles</c:v>
+                  </c:pt>
+                  <c:pt idx="6">
+                    <c:v>No-GIL threads, 4 tiles</c:v>
+                  </c:pt>
+                  <c:pt idx="7">
+                    <c:v>No-GIL threads, 16 tiles</c:v>
+                  </c:pt>
+                </c:lvl>
+              </c:multiLvlStrCache>
+            </c:multiLvlStrRef>
+          </c:cat>
+          <c:val>
+            <c:numRef>
+              <c:f>Sheet1!$D$2:$D$9</c:f>
+              <c:numCache>
+                <c:formatCode>General</c:formatCode>
+                <c:ptCount val="8"/>
+                <c:pt idx="0">
+                  <c:v/>
+                </c:pt>
+                <c:pt idx="1">
+                  <c:v/>
+                </c:pt>
+                <c:pt idx="2">
+                  <c:v/>
+                </c:pt>
+                <c:pt idx="3">
+                  <c:v/>
+                </c:pt>
+                <c:pt idx="4">
+                  <c:v>20.9</c:v>
+                </c:pt>
+                <c:pt idx="5">
+                  <c:v>10.6</c:v>
+                </c:pt>
+                <c:pt idx="6">
+                  <c:v/>
+                </c:pt>
+                <c:pt idx="7">
+                  <c:v/>
+                </c:pt>
+              </c:numCache>
+            </c:numRef>
+          </c:val>
+        </c:ser>
+        <c:ser>
+          <c:idx val="3"/>
+          <c:order val="3"/>
+          <c:tx>
+            <c:strRef>
+              <c:f>Sheet1!$E$1</c:f>
+              <c:strCache>
+                <c:ptCount val="1"/>
+                <c:pt idx="0">
+                  <c:v>No-GIL threads</c:v>
+                </c:pt>
+              </c:strCache>
+            </c:strRef>
+          </c:tx>
+          <c:spPr>
+            <a:solidFill>
+              <a:srgbClr val="25B07F"/>
+            </a:solidFill>
+            <a:effectLst/>
+          </c:spPr>
+          <c:invertIfNegative val="0"/>
+          <c:dLbls>
+            <c:numFmt formatCode="0.0&quot; s&quot;" sourceLinked="0"/>
+            <c:txPr>
+              <a:bodyPr/>
+              <a:lstStyle/>
+              <a:p>
+                <a:pPr>
+                  <a:defRPr b="0" i="0" strike="noStrike" sz="1100" u="none">
+                    <a:solidFill>
+                      <a:srgbClr val="FFFFFF"/>
+                    </a:solidFill>
+                    <a:latin typeface="+mn-lt"/>
+                  </a:defRPr>
+                </a:pPr>
+              </a:p>
+            </c:txPr>
+            <c:dLblPos val="inEnd"/>
+            <c:showLegendKey val="0"/>
+            <c:showVal val="1"/>
+            <c:showCatName val="0"/>
+            <c:showSerName val="0"/>
+            <c:showPercent val="0"/>
+            <c:showBubbleSize val="0"/>
+            <c:showLeaderLines val="0"/>
+          </c:dLbls>
+          <c:cat>
+            <c:multiLvlStrRef>
+              <c:f>Sheet1!$A$2:$A$9</c:f>
+              <c:multiLvlStrCache>
+                <c:ptCount val="8"/>
+                <c:lvl>
+                  <c:pt idx="0">
+                    <c:v>Serial, whole image</c:v>
+                  </c:pt>
+                  <c:pt idx="1">
+                    <c:v>Serial, 16 tiles</c:v>
+                  </c:pt>
+                  <c:pt idx="2">
+                    <c:v>Threads (GIL), 4 tiles</c:v>
+                  </c:pt>
+                  <c:pt idx="3">
+                    <c:v>Threads (GIL), 16 tiles</c:v>
+                  </c:pt>
+                  <c:pt idx="4">
+                    <c:v>Processes, 4 tiles</c:v>
+                  </c:pt>
+                  <c:pt idx="5">
+                    <c:v>Processes, 16 tiles</c:v>
+                  </c:pt>
+                  <c:pt idx="6">
+                    <c:v>No-GIL threads, 4 tiles</c:v>
+                  </c:pt>
+                  <c:pt idx="7">
+                    <c:v>No-GIL threads, 16 tiles</c:v>
+                  </c:pt>
+                </c:lvl>
+              </c:multiLvlStrCache>
+            </c:multiLvlStrRef>
+          </c:cat>
+          <c:val>
+            <c:numRef>
+              <c:f>Sheet1!$E$2:$E$9</c:f>
+              <c:numCache>
+                <c:formatCode>General</c:formatCode>
+                <c:ptCount val="8"/>
+                <c:pt idx="0">
+                  <c:v/>
+                </c:pt>
+                <c:pt idx="1">
+                  <c:v/>
+                </c:pt>
+                <c:pt idx="2">
+                  <c:v/>
+                </c:pt>
+                <c:pt idx="3">
+                  <c:v/>
+                </c:pt>
+                <c:pt idx="4">
+                  <c:v/>
+                </c:pt>
+                <c:pt idx="5">
+                  <c:v/>
+                </c:pt>
+                <c:pt idx="6">
+                  <c:v>24.1</c:v>
+                </c:pt>
+                <c:pt idx="7">
+                  <c:v>13.5</c:v>
+                </c:pt>
+              </c:numCache>
+            </c:numRef>
+          </c:val>
+        </c:ser>
+        <c:dLbls>
+          <c:numFmt formatCode="0.0&quot; s&quot;" sourceLinked="0"/>
+          <c:txPr>
+            <a:bodyPr/>
+            <a:lstStyle/>
+            <a:p>
+              <a:pPr>
+                <a:defRPr b="0" i="0" strike="noStrike" sz="1100" u="none">
+                  <a:solidFill>
+                    <a:srgbClr val="FFFFFF"/>
+                  </a:solidFill>
+                  <a:latin typeface="+mn-lt"/>
+                </a:defRPr>
+              </a:pPr>
+            </a:p>
+          </c:txPr>
+          <c:dLblPos val="inEnd"/>
+          <c:showLegendKey val="0"/>
+          <c:showVal val="1"/>
+          <c:showCatName val="0"/>
+          <c:showSerName val="0"/>
+          <c:showPercent val="0"/>
+          <c:showBubbleSize val="0"/>
+          <c:showLeaderLines val="0"/>
+        </c:dLbls>
+        <c:gapWidth val="40"/>
+        <c:overlap val="100"/>
+        <c:axId val="2094734554"/>
+        <c:axId val="2094734552"/>
+        <c:axId val="2094734556"/>
+      </c:barChart>
+      <c:catAx>
+        <c:axId val="2094734554"/>
+        <c:scaling>
+          <c:orientation val="maxMin"/>
+        </c:scaling>
+        <c:delete val="0"/>
+        <c:axPos val="l"/>
+        <c:numFmt formatCode="General" sourceLinked="1"/>
+        <c:majorTickMark val="out"/>
+        <c:minorTickMark val="none"/>
+        <c:tickLblPos val="nextTo"/>
+        <c:spPr>
+          <a:ln w="12700" cap="flat">
+            <a:noFill/>
+            <a:prstDash val="solid"/>
+            <a:round/>
+          </a:ln>
+        </c:spPr>
+        <c:txPr>
+          <a:bodyPr/>
+          <a:lstStyle/>
+          <a:p>
+            <a:pPr>
+              <a:defRPr sz="1200" b="0" i="0" u="none" strike="noStrike">
+                <a:solidFill>
+                  <a:srgbClr val="CFD8DC"/>
+                </a:solidFill>
+                <a:latin typeface="+mn-lt"/>
+              </a:defRPr>
+            </a:pPr>
+            <a:endParaRPr lang="en-US"/>
+          </a:p>
+        </c:txPr>
+        <c:crossAx val="2094734552"/>
+        <c:crosses val="autoZero"/>
+        <c:auto val="1"/>
+        <c:lblAlgn val="ctr"/>
+        <c:noMultiLvlLbl val="1"/>
+      </c:catAx>
+      <c:valAx>
+        <c:axId val="2094734552"/>
+        <c:scaling>
+          <c:orientation val="minMax"/>
+          <c:max val="80"/>
+          <c:min val="0"/>
+        </c:scaling>
+        <c:delete val="0"/>
+        <c:axPos val="b"/>
+        <c:majorGridlines>
+          <c:spPr>
+            <a:ln w="6350" cap="flat">
+              <a:solidFill>
+                <a:srgbClr val="546E7A"/>
+              </a:solidFill>
+              <a:prstDash val="solid"/>
+              <a:round/>
+            </a:ln>
+          </c:spPr>
+        </c:majorGridlines>
+        <c:title>
+          <c:tx>
+            <c:rich>
+              <a:bodyPr/>
+              <a:lstStyle/>
+              <a:p>
+                <a:pPr>
+                  <a:defRPr sz="1100" b="0" i="0" u="none" strike="noStrike">
+                    <a:solidFill>
+                      <a:srgbClr val="CFD8DC"/>
+                    </a:solidFill>
+                    <a:latin typeface="+mn-lt"/>
+                  </a:defRPr>
+                </a:pPr>
+                <a:r>
+                  <a:rPr sz="1100" b="0" i="0" u="none" strike="noStrike">
+                    <a:solidFill>
+                      <a:srgbClr val="CFD8DC"/>
+                    </a:solidFill>
+                    <a:latin typeface="+mn-lt"/>
+                  </a:rPr>
+                  <a:t>Mean seconds per image (50 images)</a:t>
+                </a:r>
+              </a:p>
+            </c:rich>
+          </c:tx>
+          <c:layout/>
+          <c:overlay val="0"/>
+        </c:title>
+        <c:numFmt formatCode="General" sourceLinked="0"/>
+        <c:majorTickMark val="out"/>
+        <c:minorTickMark val="none"/>
+        <c:tickLblPos val="low"/>
+        <c:spPr>
+          <a:ln w="12700" cap="flat">
+            <a:noFill/>
+            <a:prstDash val="solid"/>
+            <a:round/>
+          </a:ln>
+        </c:spPr>
+        <c:txPr>
+          <a:bodyPr/>
+          <a:lstStyle/>
+          <a:p>
+            <a:pPr>
+              <a:defRPr sz="1100" b="0" i="0" u="none" strike="noStrike">
+                <a:solidFill>
+                  <a:srgbClr val="CFD8DC"/>
+                </a:solidFill>
+                <a:latin typeface="+mn-lt"/>
+              </a:defRPr>
+            </a:pPr>
+            <a:endParaRPr lang="en-US"/>
+          </a:p>
+        </c:txPr>
+        <c:crossAx val="2094734554"/>
+        <c:crosses val="autoZero"/>
+        <c:crossBetween val="between"/>
+        <c:majorUnit val="20"/>
+      </c:valAx>
+      <c:spPr>
+        <a:noFill/>
+        <a:ln>
+          <a:noFill/>
+        </a:ln>
+        <a:effectLst/>
+      </c:spPr>
+    </c:plotArea>
     <c:plotVisOnly val="1"/>
     <c:dispBlanksAs val="span"/>
   </c:chart>
@@ -5046,7 +5690,7 @@
           <a:p>
             <a:r>
               <a:rPr lang="en-US" dirty="0"/>
-              <a:t>The actual times behind the speedups. Serial takes about 72 seconds per image, an hour for all 50. Threads with the GIL barely change that. Processes bring it down to about 11 seconds per image, under 9 minutes for the whole set. No-GIL threads land at 13.5 seconds, even though the free-threaded interpreter is about 11 percent slower single-threaded.</a:t>
+              <a:t>Here are the actual times. Serial takes about 72 seconds per image, roughly an hour for the whole set. Threads with the GIL barely move it. Processes bring it to 10.6 seconds per image, under 9 minutes for all 50. No-GIL threads come in at 13.5 seconds. The next slide has the full table, including the fastest and slowest image for each version.</a:t>
             </a:r>
             <a:endParaRPr lang="en-US" dirty="0"/>
           </a:p>
@@ -5222,7 +5866,7 @@
           <a:p>
             <a:r>
               <a:rPr lang="en-US" dirty="0"/>
-              <a:t>Python 3.14 officially supports a free-threaded build with no GIL. Plain threads then reach 5.8x at 16 tiles, close to processes. The interpreter is about 11 percent slower single-threaded, which explains most of the gap. The catch today is the ecosystem: OpenCV has no free-threaded build, so I reimplemented the four OpenCV calls SIFT needs in NumPy.</a:t>
+              <a:t>The actual times behind the speedups. Serial takes about 72 seconds per image, an hour for all 50. Threads with the GIL barely change that. Processes bring it down to about 11 seconds per image, under 9 minutes for the whole set. No-GIL threads land at 13.5 seconds, even though the free-threaded interpreter is about 11 percent slower single-threaded.</a:t>
             </a:r>
             <a:endParaRPr lang="en-US" dirty="0"/>
           </a:p>
@@ -5310,7 +5954,7 @@
           <a:p>
             <a:r>
               <a:rPr lang="en-US" dirty="0"/>
-              <a:t>Splitting the image isn't free. Each tile is processed as if it were a whole image, so a strip along every cut gets no keypoints. 4 tiles lose 3 percent of keypoints and 16 tiles lose 8 percent on average, up to 12 percent. That is also why serial code on 16 tiles is slightly faster: less descriptor work.</a:t>
+              <a:t>Python 3.14 officially supports a free-threaded build with no GIL. Plain threads then reach 5.8x at 16 tiles, close to processes. The interpreter is about 11 percent slower single-threaded, which explains most of the gap. The catch today is the ecosystem: OpenCV has no free-threaded build, so I reimplemented the four OpenCV calls SIFT needs in NumPy.</a:t>
             </a:r>
             <a:endParaRPr lang="en-US" dirty="0"/>
           </a:p>
@@ -5398,7 +6042,7 @@
           <a:p>
             <a:r>
               <a:rPr lang="en-US" dirty="0"/>
-              <a:t>Rebuilding the code turned up three bugs. The most interesting is a race: each thread appended its result when it finished, but the merge assumed submission order, so keypoints could be shifted into the wrong quadrant. Timings and counts weren't affected.</a:t>
+              <a:t>Splitting the image isn't free. Each tile is processed as if it were a whole image, so a strip along every cut gets no keypoints. 4 tiles lose 3 percent of keypoints and 16 tiles lose 8 percent on average, up to 12 percent. That is also why serial code on 16 tiles is slightly faster: less descriptor work.</a:t>
             </a:r>
             <a:endParaRPr lang="en-US" dirty="0"/>
           </a:p>
@@ -5486,7 +6130,7 @@
           <a:p>
             <a:r>
               <a:rPr lang="en-US" dirty="0"/>
-              <a:t>What I learned and what I'd do next.</a:t>
+              <a:t>Rebuilding the code turned up three bugs. The most interesting is a race: each thread appended its result when it finished, but the merge assumed submission order, so keypoints could be shifted into the wrong quadrant. Timings and counts weren't affected.</a:t>
             </a:r>
             <a:endParaRPr lang="en-US" dirty="0"/>
           </a:p>
@@ -5574,7 +6218,7 @@
           <a:p>
             <a:r>
               <a:rPr lang="en-US" dirty="0"/>
-              <a:t>Three conclusions. The 2023 null result was caused by the GIL, not by the tiling idea. The small gain 16 tiles showed came from losing keypoints, not from parallelism. And with real parallelism, either processes or Python without the GIL, the speedup is large and 16 tiles do beat 4.</a:t>
+              <a:t>What I learned and what I'd do next.</a:t>
             </a:r>
             <a:endParaRPr lang="en-US" dirty="0"/>
           </a:p>
@@ -5662,7 +6306,7 @@
           <a:p>
             <a:r>
               <a:rPr lang="en-US" dirty="0"/>
-              <a:t>Next steps. First, get further around the GIL by compiling the hot loops so they release it. Second, move SIFT to a GPU, since nearly every stage is data-parallel, batching images so transfer costs don't dominate. Third, stop losing keypoints with overlapping tiles. Fourth, measure whether lost keypoints hurt retrieval. And for perspective: compiled SIFT is about 600 times faster than this pure-Python version, so per-core speed matters even more than core count.</a:t>
+              <a:t>Three conclusions. The 2023 null result was caused by the GIL, not by the tiling idea. The small gain 16 tiles showed came from losing keypoints, not from parallelism. And with real parallelism, either processes or Python without the GIL, the speedup is large and 16 tiles do beat 4.</a:t>
             </a:r>
             <a:endParaRPr lang="en-US" dirty="0"/>
           </a:p>
@@ -5750,7 +6394,7 @@
           <a:p>
             <a:r>
               <a:rPr lang="en-US" dirty="0"/>
-              <a:t>References.</a:t>
+              <a:t>Next steps. First, get further around the GIL by compiling the hot loops so they release it. Second, move SIFT to a GPU, since nearly every stage is data-parallel, batching images so transfer costs don't dominate. Third, stop losing keypoints with overlapping tiles. Fourth, measure whether lost keypoints hurt retrieval. And for perspective: compiled SIFT is about 600 times faster than this pure-Python version, so per-core speed matters even more than core count.</a:t>
             </a:r>
             <a:endParaRPr lang="en-US" dirty="0"/>
           </a:p>
@@ -5838,7 +6482,7 @@
           <a:p>
             <a:r>
               <a:rPr lang="en-US" dirty="0"/>
-              <a:t>Thanks to Sairaj Jadhav and Dr. John Korah for the original NMS-SIFT code. Everything, including the raw timings and the notebook, is in the GitHub repository.</a:t>
+              <a:t>References.</a:t>
             </a:r>
             <a:endParaRPr lang="en-US" dirty="0"/>
           </a:p>
@@ -5862,6 +6506,94 @@
             <a:fld id="{F7021451-1387-4CA6-816F-3879F97B5CBC}" type="slidenum">
               <a:rPr lang="en-US"/>
               <a:t>27</a:t>
+            </a:fld>
+            <a:endParaRPr lang="en-US"/>
+          </a:p>
+        </p:txBody>
+      </p:sp>
+    </p:spTree>
+    <p:extLst>
+      <p:ext uri="{BB962C8B-B14F-4D97-AF65-F5344CB8AC3E}">
+        <p14:creationId xmlns:p14="http://schemas.microsoft.com/office/powerpoint/2010/main" val="1024086991"/>
+      </p:ext>
+    </p:extLst>
+  </p:cSld>
+  <p:clrMapOvr>
+    <a:masterClrMapping/>
+  </p:clrMapOvr>
+</p:notes>
+</file>
+
+<file path=ppt/notesSlides/notesSlide28.xml><?xml version="1.0" encoding="utf-8"?>
+<p:notes xmlns:a="http://schemas.openxmlformats.org/drawingml/2006/main" xmlns:r="http://schemas.openxmlformats.org/officeDocument/2006/relationships" xmlns:p="http://schemas.openxmlformats.org/presentationml/2006/main">
+  <p:cSld>
+    <p:spTree>
+      <p:nvGrpSpPr>
+        <p:cNvPr id="1" name=""/>
+        <p:cNvGrpSpPr/>
+        <p:nvPr/>
+      </p:nvGrpSpPr>
+      <p:grpSpPr>
+        <a:xfrm>
+          <a:off x="0" y="0"/>
+          <a:ext cx="0" cy="0"/>
+          <a:chOff x="0" y="0"/>
+          <a:chExt cx="0" cy="0"/>
+        </a:xfrm>
+      </p:grpSpPr>
+      <p:sp>
+        <p:nvSpPr>
+          <p:cNvPr id="2" name="Slide Image Placeholder 1"/>
+          <p:cNvSpPr>
+            <a:spLocks noGrp="1" noRot="1" noChangeAspect="1"/>
+          </p:cNvSpPr>
+          <p:nvPr>
+            <p:ph type="sldImg"/>
+          </p:nvPr>
+        </p:nvSpPr>
+        <p:spPr/>
+      </p:sp>
+      <p:sp>
+        <p:nvSpPr>
+          <p:cNvPr id="3" name="Notes Placeholder 2"/>
+          <p:cNvSpPr>
+            <a:spLocks noGrp="1"/>
+          </p:cNvSpPr>
+          <p:nvPr>
+            <p:ph type="body" idx="1"/>
+          </p:nvPr>
+        </p:nvSpPr>
+        <p:spPr/>
+        <p:txBody>
+          <a:bodyPr/>
+          <a:lstStyle/>
+          <a:p>
+            <a:r>
+              <a:rPr lang="en-US" dirty="0"/>
+              <a:t>Thanks to Sairaj Jadhav and Dr. John Korah for the original NMS-SIFT code. Everything, including the raw timings and the notebook, is in the GitHub repository.</a:t>
+            </a:r>
+            <a:endParaRPr lang="en-US" dirty="0"/>
+          </a:p>
+        </p:txBody>
+      </p:sp>
+      <p:sp>
+        <p:nvSpPr>
+          <p:cNvPr id="4" name="Slide Number Placeholder 3"/>
+          <p:cNvSpPr>
+            <a:spLocks noGrp="1"/>
+          </p:cNvSpPr>
+          <p:nvPr>
+            <p:ph type="sldNum" sz="quarter" idx="10"/>
+          </p:nvPr>
+        </p:nvSpPr>
+        <p:spPr/>
+        <p:txBody>
+          <a:bodyPr/>
+          <a:lstStyle/>
+          <a:p>
+            <a:fld id="{F7021451-1387-4CA6-816F-3879F97B5CBC}" type="slidenum">
+              <a:rPr lang="en-US"/>
+              <a:t>28</a:t>
             </a:fld>
             <a:endParaRPr lang="en-US"/>
           </a:p>
@@ -11885,6 +12617,938 @@
                   <a:schemeClr val="bg1"/>
                 </a:solidFill>
               </a:rPr>
+              <a:t>Processing time: seconds per image</a:t>
+            </a:r>
+            <a:endParaRPr lang="en-US" sz="3000" dirty="0"/>
+          </a:p>
+        </p:txBody>
+      </p:sp>
+      <p:graphicFrame>
+        <p:nvGraphicFramePr>
+          <p:cNvPr id="3" name="chart-times" descr=""/>
+          <p:cNvGraphicFramePr/>
+          <p:nvPr/>
+        </p:nvGraphicFramePr>
+        <p:xfrm>
+          <a:off x="365760" y="1051560"/>
+          <a:ext cx="6035040" cy="3611880"/>
+        </p:xfrm>
+        <a:graphic xmlns:a="http://schemas.openxmlformats.org/drawingml/2006/main">
+          <a:graphicData uri="http://schemas.openxmlformats.org/drawingml/2006/chart">
+            <c:chart xmlns:c="http://schemas.openxmlformats.org/drawingml/2006/chart" r:id="rId1"/>
+          </a:graphicData>
+        </a:graphic>
+      </p:graphicFrame>
+      <p:sp>
+        <p:nvSpPr>
+          <p:cNvPr id="4" name="card-153"/>
+          <p:cNvSpPr/>
+          <p:nvPr/>
+        </p:nvSpPr>
+        <p:spPr>
+          <a:xfrm>
+            <a:off x="6583680" y="1188720"/>
+            <a:ext cx="2103120" cy="1005840"/>
+          </a:xfrm>
+          <a:prstGeom prst="roundRect">
+            <a:avLst>
+              <a:gd name="adj" fmla="val 7273"/>
+            </a:avLst>
+          </a:prstGeom>
+          <a:solidFill>
+            <a:schemeClr val="accent6"/>
+          </a:solidFill>
+          <a:ln/>
+        </p:spPr>
+      </p:sp>
+      <p:sp>
+        <p:nvSpPr>
+          <p:cNvPr id="5" name="text-154"/>
+          <p:cNvSpPr txBox="1"/>
+          <p:nvPr/>
+        </p:nvSpPr>
+        <p:spPr>
+          <a:xfrm>
+            <a:off x="6720840" y="1280160"/>
+            <a:ext cx="1828800" cy="457200"/>
+          </a:xfrm>
+          <a:prstGeom prst="rect">
+            <a:avLst/>
+          </a:prstGeom>
+          <a:noFill/>
+          <a:ln/>
+        </p:spPr>
+        <p:txBody>
+          <a:bodyPr wrap="square" lIns="0" tIns="0" rIns="0" bIns="0" rtlCol="0" anchor="ctr"/>
+          <a:lstStyle/>
+          <a:p>
+            <a:pPr indent="0" marL="0">
+              <a:buNone/>
+            </a:pPr>
+            <a:r>
+              <a:rPr lang="en-US" sz="2400" b="1" dirty="0">
+                <a:solidFill>
+                  <a:schemeClr val="accent1"/>
+                </a:solidFill>
+                <a:latin typeface="Bahnschrift" pitchFamily="34" charset="0"/>
+                <a:ea typeface="Bahnschrift" pitchFamily="34" charset="-122"/>
+                <a:cs typeface="Bahnschrift" pitchFamily="34" charset="-120"/>
+              </a:rPr>
+              <a:t>59.6 min</a:t>
+            </a:r>
+            <a:endParaRPr lang="en-US" sz="2400" dirty="0"/>
+          </a:p>
+        </p:txBody>
+      </p:sp>
+      <p:sp>
+        <p:nvSpPr>
+          <p:cNvPr id="6" name="text-155"/>
+          <p:cNvSpPr txBox="1"/>
+          <p:nvPr/>
+        </p:nvSpPr>
+        <p:spPr>
+          <a:xfrm>
+            <a:off x="6720840" y="1737360"/>
+            <a:ext cx="1828800" cy="411480"/>
+          </a:xfrm>
+          <a:prstGeom prst="rect">
+            <a:avLst/>
+          </a:prstGeom>
+          <a:noFill/>
+          <a:ln/>
+        </p:spPr>
+        <p:txBody>
+          <a:bodyPr wrap="square" lIns="0" tIns="0" rIns="0" bIns="0" rtlCol="0" anchor="ctr"/>
+          <a:lstStyle/>
+          <a:p>
+            <a:pPr indent="0" marL="0">
+              <a:buNone/>
+            </a:pPr>
+            <a:r>
+              <a:rPr lang="en-US" sz="1200" dirty="0">
+                <a:solidFill>
+                  <a:schemeClr val="bg1"/>
+                </a:solidFill>
+                <a:latin typeface="Cambria" pitchFamily="34" charset="0"/>
+                <a:ea typeface="Cambria" pitchFamily="34" charset="-122"/>
+                <a:cs typeface="Cambria" pitchFamily="34" charset="-120"/>
+              </a:rPr>
+              <a:t>serial, all 50 images</a:t>
+            </a:r>
+            <a:endParaRPr lang="en-US" sz="1200" dirty="0"/>
+          </a:p>
+        </p:txBody>
+      </p:sp>
+      <p:sp>
+        <p:nvSpPr>
+          <p:cNvPr id="7" name="card-156"/>
+          <p:cNvSpPr/>
+          <p:nvPr/>
+        </p:nvSpPr>
+        <p:spPr>
+          <a:xfrm>
+            <a:off x="6583680" y="2331720"/>
+            <a:ext cx="2103120" cy="1005840"/>
+          </a:xfrm>
+          <a:prstGeom prst="roundRect">
+            <a:avLst>
+              <a:gd name="adj" fmla="val 7273"/>
+            </a:avLst>
+          </a:prstGeom>
+          <a:solidFill>
+            <a:schemeClr val="accent6"/>
+          </a:solidFill>
+          <a:ln/>
+        </p:spPr>
+      </p:sp>
+      <p:sp>
+        <p:nvSpPr>
+          <p:cNvPr id="8" name="text-157"/>
+          <p:cNvSpPr txBox="1"/>
+          <p:nvPr/>
+        </p:nvSpPr>
+        <p:spPr>
+          <a:xfrm>
+            <a:off x="6720840" y="2423160"/>
+            <a:ext cx="1828800" cy="457200"/>
+          </a:xfrm>
+          <a:prstGeom prst="rect">
+            <a:avLst/>
+          </a:prstGeom>
+          <a:noFill/>
+          <a:ln/>
+        </p:spPr>
+        <p:txBody>
+          <a:bodyPr wrap="square" lIns="0" tIns="0" rIns="0" bIns="0" rtlCol="0" anchor="ctr"/>
+          <a:lstStyle/>
+          <a:p>
+            <a:pPr indent="0" marL="0">
+              <a:buNone/>
+            </a:pPr>
+            <a:r>
+              <a:rPr lang="en-US" sz="2400" b="1" dirty="0">
+                <a:solidFill>
+                  <a:schemeClr val="accent1"/>
+                </a:solidFill>
+                <a:latin typeface="Bahnschrift" pitchFamily="34" charset="0"/>
+                <a:ea typeface="Bahnschrift" pitchFamily="34" charset="-122"/>
+                <a:cs typeface="Bahnschrift" pitchFamily="34" charset="-120"/>
+              </a:rPr>
+              <a:t>8.8 min</a:t>
+            </a:r>
+            <a:endParaRPr lang="en-US" sz="2400" dirty="0"/>
+          </a:p>
+        </p:txBody>
+      </p:sp>
+      <p:sp>
+        <p:nvSpPr>
+          <p:cNvPr id="9" name="text-158"/>
+          <p:cNvSpPr txBox="1"/>
+          <p:nvPr/>
+        </p:nvSpPr>
+        <p:spPr>
+          <a:xfrm>
+            <a:off x="6720840" y="2880360"/>
+            <a:ext cx="1828800" cy="411480"/>
+          </a:xfrm>
+          <a:prstGeom prst="rect">
+            <a:avLst/>
+          </a:prstGeom>
+          <a:noFill/>
+          <a:ln/>
+        </p:spPr>
+        <p:txBody>
+          <a:bodyPr wrap="square" lIns="0" tIns="0" rIns="0" bIns="0" rtlCol="0" anchor="ctr"/>
+          <a:lstStyle/>
+          <a:p>
+            <a:pPr indent="0" marL="0">
+              <a:buNone/>
+            </a:pPr>
+            <a:r>
+              <a:rPr lang="en-US" sz="1200" dirty="0">
+                <a:solidFill>
+                  <a:schemeClr val="bg1"/>
+                </a:solidFill>
+                <a:latin typeface="Cambria" pitchFamily="34" charset="0"/>
+                <a:ea typeface="Cambria" pitchFamily="34" charset="-122"/>
+                <a:cs typeface="Cambria" pitchFamily="34" charset="-120"/>
+              </a:rPr>
+              <a:t>16 processes, same 50 images</a:t>
+            </a:r>
+            <a:endParaRPr lang="en-US" sz="1200" dirty="0"/>
+          </a:p>
+        </p:txBody>
+      </p:sp>
+      <p:sp>
+        <p:nvSpPr>
+          <p:cNvPr id="10" name="card-159"/>
+          <p:cNvSpPr/>
+          <p:nvPr/>
+        </p:nvSpPr>
+        <p:spPr>
+          <a:xfrm>
+            <a:off x="6583680" y="3474720"/>
+            <a:ext cx="2103120" cy="1005840"/>
+          </a:xfrm>
+          <a:prstGeom prst="roundRect">
+            <a:avLst>
+              <a:gd name="adj" fmla="val 7273"/>
+            </a:avLst>
+          </a:prstGeom>
+          <a:solidFill>
+            <a:schemeClr val="accent6"/>
+          </a:solidFill>
+          <a:ln/>
+        </p:spPr>
+      </p:sp>
+      <p:sp>
+        <p:nvSpPr>
+          <p:cNvPr id="11" name="text-160"/>
+          <p:cNvSpPr txBox="1"/>
+          <p:nvPr/>
+        </p:nvSpPr>
+        <p:spPr>
+          <a:xfrm>
+            <a:off x="6720840" y="3566160"/>
+            <a:ext cx="1828800" cy="457200"/>
+          </a:xfrm>
+          <a:prstGeom prst="rect">
+            <a:avLst/>
+          </a:prstGeom>
+          <a:noFill/>
+          <a:ln/>
+        </p:spPr>
+        <p:txBody>
+          <a:bodyPr wrap="square" lIns="0" tIns="0" rIns="0" bIns="0" rtlCol="0" anchor="ctr"/>
+          <a:lstStyle/>
+          <a:p>
+            <a:pPr indent="0" marL="0">
+              <a:buNone/>
+            </a:pPr>
+            <a:r>
+              <a:rPr lang="en-US" sz="2400" b="1" dirty="0">
+                <a:solidFill>
+                  <a:schemeClr val="accent1"/>
+                </a:solidFill>
+                <a:latin typeface="Bahnschrift" pitchFamily="34" charset="0"/>
+                <a:ea typeface="Bahnschrift" pitchFamily="34" charset="-122"/>
+                <a:cs typeface="Bahnschrift" pitchFamily="34" charset="-120"/>
+              </a:rPr>
+              <a:t>−85%</a:t>
+            </a:r>
+            <a:endParaRPr lang="en-US" sz="2400" dirty="0"/>
+          </a:p>
+        </p:txBody>
+      </p:sp>
+      <p:sp>
+        <p:nvSpPr>
+          <p:cNvPr id="12" name="text-161"/>
+          <p:cNvSpPr txBox="1"/>
+          <p:nvPr/>
+        </p:nvSpPr>
+        <p:spPr>
+          <a:xfrm>
+            <a:off x="6720840" y="4023360"/>
+            <a:ext cx="1828800" cy="411480"/>
+          </a:xfrm>
+          <a:prstGeom prst="rect">
+            <a:avLst/>
+          </a:prstGeom>
+          <a:noFill/>
+          <a:ln/>
+        </p:spPr>
+        <p:txBody>
+          <a:bodyPr wrap="square" lIns="0" tIns="0" rIns="0" bIns="0" rtlCol="0" anchor="ctr"/>
+          <a:lstStyle/>
+          <a:p>
+            <a:pPr indent="0" marL="0">
+              <a:buNone/>
+            </a:pPr>
+            <a:r>
+              <a:rPr lang="en-US" sz="1200" dirty="0">
+                <a:solidFill>
+                  <a:schemeClr val="bg1"/>
+                </a:solidFill>
+                <a:latin typeface="Cambria" pitchFamily="34" charset="0"/>
+                <a:ea typeface="Cambria" pitchFamily="34" charset="-122"/>
+                <a:cs typeface="Cambria" pitchFamily="34" charset="-120"/>
+              </a:rPr>
+              <a:t>time per image: 71.5 s to 10.6 s</a:t>
+            </a:r>
+            <a:endParaRPr lang="en-US" sz="1200" dirty="0"/>
+          </a:p>
+        </p:txBody>
+      </p:sp>
+      <p:sp>
+        <p:nvSpPr>
+          <p:cNvPr id="25" name="Slide Number Placeholder 0"/>
+          <p:cNvSpPr>
+            <a:spLocks noGrp="1"/>
+          </p:cNvSpPr>
+          <p:nvPr>
+            <p:ph type="sldNum" sz="quarter" idx="4294967295"/>
+          </p:nvPr>
+        </p:nvSpPr>
+        <p:spPr>
+          <a:xfrm>
+            <a:off x="8229600" y="4754880"/>
+            <a:ext cx="457200" cy="274320"/>
+          </a:xfrm>
+          <a:prstGeom prst="rect">
+            <a:avLst/>
+          </a:prstGeom>
+          <a:extLst>
+            <a:ext uri="{C572A759-6A51-4108-AA02-DFA0A04FC94B}">
+              <ma14:wrappingTextBoxFlag xmlns:ma14="http://schemas.microsoft.com/office/mac/drawingml/2011/main" val="0"/>
+            </a:ext>
+          </a:extLst>
+        </p:spPr>
+        <p:txBody>
+          <a:bodyPr/>
+          <a:lstStyle>
+            <a:lvl1pPr>
+              <a:defRPr sz="1000">
+                <a:solidFill>
+                  <a:schemeClr val="bg2"/>
+                </a:solidFill>
+              </a:defRPr>
+            </a:lvl1pPr>
+          </a:lstStyle>
+          <a:p>
+            <a:pPr algn="r"/>
+            <a:fld id="{F7021451-1387-4CA6-816F-3879F97B5CBC}" type="slidenum">
+              <a:rPr b="0" lang="en-US"/>
+              <a:t>19</a:t>
+            </a:fld>
+            <a:endParaRPr lang="en-US"/>
+          </a:p>
+        </p:txBody>
+      </p:sp>
+    </p:spTree>
+  </p:cSld>
+  <p:clrMapOvr>
+    <a:masterClrMapping/>
+  </p:clrMapOvr>
+</p:sld>
+</file>
+
+<file path=ppt/slides/slide2.xml><?xml version="1.0" encoding="utf-8"?>
+<p:sld xmlns:a="http://schemas.openxmlformats.org/drawingml/2006/main" xmlns:r="http://schemas.openxmlformats.org/officeDocument/2006/relationships" xmlns:p="http://schemas.openxmlformats.org/presentationml/2006/main">
+  <p:cSld name="Slide 2">
+    <p:spTree>
+      <p:nvGrpSpPr>
+        <p:cNvPr id="1" name=""/>
+        <p:cNvGrpSpPr/>
+        <p:nvPr/>
+      </p:nvGrpSpPr>
+      <p:grpSpPr>
+        <a:xfrm>
+          <a:off x="0" y="0"/>
+          <a:ext cx="0" cy="0"/>
+          <a:chOff x="0" y="0"/>
+          <a:chExt cx="0" cy="0"/>
+        </a:xfrm>
+      </p:grpSpPr>
+      <p:sp>
+        <p:nvSpPr>
+          <p:cNvPr id="2" name="Text 0"/>
+          <p:cNvSpPr/>
+          <p:nvPr>
+            <p:ph idx="100" type="title" hasCustomPrompt="1"/>
+          </p:nvPr>
+        </p:nvSpPr>
+        <p:spPr>
+          <a:xfrm>
+            <a:off x="457200" y="274320"/>
+            <a:ext cx="8229600" cy="685800"/>
+          </a:xfrm>
+          <a:prstGeom prst="rect">
+            <a:avLst/>
+          </a:prstGeom>
+          <a:noFill/>
+          <a:ln/>
+        </p:spPr>
+        <p:txBody>
+          <a:bodyPr wrap="square" lIns="0" tIns="0" rIns="0" bIns="0" rtlCol="0" anchor="ctr"/>
+          <a:lstStyle/>
+          <a:p>
+            <a:pPr algn="l" indent="0" marL="0">
+              <a:buNone/>
+            </a:pPr>
+            <a:r>
+              <a:rPr lang="en-US" sz="3000" b="1" dirty="0">
+                <a:solidFill>
+                  <a:schemeClr val="bg1"/>
+                </a:solidFill>
+              </a:rPr>
+              <a:t>The project in four numbers</a:t>
+            </a:r>
+            <a:endParaRPr lang="en-US" sz="3000" dirty="0"/>
+          </a:p>
+        </p:txBody>
+      </p:sp>
+      <p:sp>
+        <p:nvSpPr>
+          <p:cNvPr id="3" name="card-2"/>
+          <p:cNvSpPr/>
+          <p:nvPr/>
+        </p:nvSpPr>
+        <p:spPr>
+          <a:xfrm>
+            <a:off x="457200" y="1371600"/>
+            <a:ext cx="1920240" cy="2468880"/>
+          </a:xfrm>
+          <a:prstGeom prst="roundRect">
+            <a:avLst>
+              <a:gd name="adj" fmla="val 3810"/>
+            </a:avLst>
+          </a:prstGeom>
+          <a:solidFill>
+            <a:schemeClr val="accent6"/>
+          </a:solidFill>
+          <a:ln/>
+        </p:spPr>
+      </p:sp>
+      <p:sp>
+        <p:nvSpPr>
+          <p:cNvPr id="4" name="text-3"/>
+          <p:cNvSpPr txBox="1"/>
+          <p:nvPr/>
+        </p:nvSpPr>
+        <p:spPr>
+          <a:xfrm>
+            <a:off x="640080" y="1600200"/>
+            <a:ext cx="1554480" cy="822960"/>
+          </a:xfrm>
+          <a:prstGeom prst="rect">
+            <a:avLst/>
+          </a:prstGeom>
+          <a:noFill/>
+          <a:ln/>
+        </p:spPr>
+        <p:txBody>
+          <a:bodyPr wrap="square" lIns="0" tIns="0" rIns="0" bIns="0" rtlCol="0" anchor="ctr"/>
+          <a:lstStyle/>
+          <a:p>
+            <a:pPr indent="0" marL="0">
+              <a:buNone/>
+            </a:pPr>
+            <a:r>
+              <a:rPr lang="en-US" sz="4000" b="1" dirty="0">
+                <a:solidFill>
+                  <a:schemeClr val="accent1"/>
+                </a:solidFill>
+                <a:latin typeface="Bahnschrift" pitchFamily="34" charset="0"/>
+                <a:ea typeface="Bahnschrift" pitchFamily="34" charset="-122"/>
+                <a:cs typeface="Bahnschrift" pitchFamily="34" charset="-120"/>
+              </a:rPr>
+              <a:t>1.4%</a:t>
+            </a:r>
+            <a:endParaRPr lang="en-US" sz="4000" dirty="0"/>
+          </a:p>
+        </p:txBody>
+      </p:sp>
+      <p:sp>
+        <p:nvSpPr>
+          <p:cNvPr id="5" name="text-4"/>
+          <p:cNvSpPr txBox="1"/>
+          <p:nvPr/>
+        </p:nvSpPr>
+        <p:spPr>
+          <a:xfrm>
+            <a:off x="640080" y="2560320"/>
+            <a:ext cx="1554480" cy="1463040"/>
+          </a:xfrm>
+          <a:prstGeom prst="rect">
+            <a:avLst/>
+          </a:prstGeom>
+          <a:noFill/>
+          <a:ln/>
+        </p:spPr>
+        <p:txBody>
+          <a:bodyPr wrap="square" lIns="0" tIns="0" rIns="0" bIns="0" rtlCol="0" anchor="t"/>
+          <a:lstStyle/>
+          <a:p>
+            <a:pPr indent="0" marL="0">
+              <a:buNone/>
+            </a:pPr>
+            <a:r>
+              <a:rPr lang="en-US" sz="1400" dirty="0">
+                <a:solidFill>
+                  <a:schemeClr val="bg1"/>
+                </a:solidFill>
+                <a:latin typeface="Cambria" pitchFamily="34" charset="0"/>
+                <a:ea typeface="Cambria" pitchFamily="34" charset="-122"/>
+                <a:cs typeface="Cambria" pitchFamily="34" charset="-120"/>
+              </a:rPr>
+              <a:t>average gain from 16 threaded tiles over 4 in 2023: not significant</a:t>
+            </a:r>
+            <a:endParaRPr lang="en-US" sz="1400" dirty="0"/>
+          </a:p>
+        </p:txBody>
+      </p:sp>
+      <p:sp>
+        <p:nvSpPr>
+          <p:cNvPr id="6" name="card-5"/>
+          <p:cNvSpPr/>
+          <p:nvPr/>
+        </p:nvSpPr>
+        <p:spPr>
+          <a:xfrm>
+            <a:off x="2560320" y="1371600"/>
+            <a:ext cx="1920240" cy="2468880"/>
+          </a:xfrm>
+          <a:prstGeom prst="roundRect">
+            <a:avLst>
+              <a:gd name="adj" fmla="val 3810"/>
+            </a:avLst>
+          </a:prstGeom>
+          <a:solidFill>
+            <a:schemeClr val="accent6"/>
+          </a:solidFill>
+          <a:ln/>
+        </p:spPr>
+      </p:sp>
+      <p:sp>
+        <p:nvSpPr>
+          <p:cNvPr id="7" name="text-6"/>
+          <p:cNvSpPr txBox="1"/>
+          <p:nvPr/>
+        </p:nvSpPr>
+        <p:spPr>
+          <a:xfrm>
+            <a:off x="2743200" y="1600200"/>
+            <a:ext cx="1554480" cy="822960"/>
+          </a:xfrm>
+          <a:prstGeom prst="rect">
+            <a:avLst/>
+          </a:prstGeom>
+          <a:noFill/>
+          <a:ln/>
+        </p:spPr>
+        <p:txBody>
+          <a:bodyPr wrap="square" lIns="0" tIns="0" rIns="0" bIns="0" rtlCol="0" anchor="ctr"/>
+          <a:lstStyle/>
+          <a:p>
+            <a:pPr indent="0" marL="0">
+              <a:buNone/>
+            </a:pPr>
+            <a:r>
+              <a:rPr lang="en-US" sz="4000" b="1" dirty="0">
+                <a:solidFill>
+                  <a:schemeClr val="accent1"/>
+                </a:solidFill>
+                <a:latin typeface="Bahnschrift" pitchFamily="34" charset="0"/>
+                <a:ea typeface="Bahnschrift" pitchFamily="34" charset="-122"/>
+                <a:cs typeface="Bahnschrift" pitchFamily="34" charset="-120"/>
+              </a:rPr>
+              <a:t>1.0</a:t>
+            </a:r>
+            <a:endParaRPr lang="en-US" sz="4000" dirty="0"/>
+          </a:p>
+        </p:txBody>
+      </p:sp>
+      <p:sp>
+        <p:nvSpPr>
+          <p:cNvPr id="8" name="text-7"/>
+          <p:cNvSpPr txBox="1"/>
+          <p:nvPr/>
+        </p:nvSpPr>
+        <p:spPr>
+          <a:xfrm>
+            <a:off x="2743200" y="2560320"/>
+            <a:ext cx="1554480" cy="1463040"/>
+          </a:xfrm>
+          <a:prstGeom prst="rect">
+            <a:avLst/>
+          </a:prstGeom>
+          <a:noFill/>
+          <a:ln/>
+        </p:spPr>
+        <p:txBody>
+          <a:bodyPr wrap="square" lIns="0" tIns="0" rIns="0" bIns="0" rtlCol="0" anchor="t"/>
+          <a:lstStyle/>
+          <a:p>
+            <a:pPr indent="0" marL="0">
+              <a:buNone/>
+            </a:pPr>
+            <a:r>
+              <a:rPr lang="en-US" sz="1400" dirty="0">
+                <a:solidFill>
+                  <a:schemeClr val="bg1"/>
+                </a:solidFill>
+                <a:latin typeface="Cambria" pitchFamily="34" charset="0"/>
+                <a:ea typeface="Cambria" pitchFamily="34" charset="-122"/>
+                <a:cs typeface="Cambria" pitchFamily="34" charset="-120"/>
+              </a:rPr>
+              <a:t>CPU cores actually busy with threads, on an 8-core CPU</a:t>
+            </a:r>
+            <a:endParaRPr lang="en-US" sz="1400" dirty="0"/>
+          </a:p>
+        </p:txBody>
+      </p:sp>
+      <p:sp>
+        <p:nvSpPr>
+          <p:cNvPr id="9" name="card-8"/>
+          <p:cNvSpPr/>
+          <p:nvPr/>
+        </p:nvSpPr>
+        <p:spPr>
+          <a:xfrm>
+            <a:off x="4663440" y="1371600"/>
+            <a:ext cx="1920240" cy="2468880"/>
+          </a:xfrm>
+          <a:prstGeom prst="roundRect">
+            <a:avLst>
+              <a:gd name="adj" fmla="val 3810"/>
+            </a:avLst>
+          </a:prstGeom>
+          <a:solidFill>
+            <a:schemeClr val="accent6"/>
+          </a:solidFill>
+          <a:ln/>
+        </p:spPr>
+      </p:sp>
+      <p:sp>
+        <p:nvSpPr>
+          <p:cNvPr id="10" name="text-9"/>
+          <p:cNvSpPr txBox="1"/>
+          <p:nvPr/>
+        </p:nvSpPr>
+        <p:spPr>
+          <a:xfrm>
+            <a:off x="4846320" y="1600200"/>
+            <a:ext cx="1554480" cy="822960"/>
+          </a:xfrm>
+          <a:prstGeom prst="rect">
+            <a:avLst/>
+          </a:prstGeom>
+          <a:noFill/>
+          <a:ln/>
+        </p:spPr>
+        <p:txBody>
+          <a:bodyPr wrap="square" lIns="0" tIns="0" rIns="0" bIns="0" rtlCol="0" anchor="ctr"/>
+          <a:lstStyle/>
+          <a:p>
+            <a:pPr indent="0" marL="0">
+              <a:buNone/>
+            </a:pPr>
+            <a:r>
+              <a:rPr lang="en-US" sz="4000" b="1" dirty="0">
+                <a:solidFill>
+                  <a:schemeClr val="accent1"/>
+                </a:solidFill>
+                <a:latin typeface="Bahnschrift" pitchFamily="34" charset="0"/>
+                <a:ea typeface="Bahnschrift" pitchFamily="34" charset="-122"/>
+                <a:cs typeface="Bahnschrift" pitchFamily="34" charset="-120"/>
+              </a:rPr>
+              <a:t>6.65×</a:t>
+            </a:r>
+            <a:endParaRPr lang="en-US" sz="4000" dirty="0"/>
+          </a:p>
+        </p:txBody>
+      </p:sp>
+      <p:sp>
+        <p:nvSpPr>
+          <p:cNvPr id="11" name="text-10"/>
+          <p:cNvSpPr txBox="1"/>
+          <p:nvPr/>
+        </p:nvSpPr>
+        <p:spPr>
+          <a:xfrm>
+            <a:off x="4846320" y="2560320"/>
+            <a:ext cx="1554480" cy="1463040"/>
+          </a:xfrm>
+          <a:prstGeom prst="rect">
+            <a:avLst/>
+          </a:prstGeom>
+          <a:noFill/>
+          <a:ln/>
+        </p:spPr>
+        <p:txBody>
+          <a:bodyPr wrap="square" lIns="0" tIns="0" rIns="0" bIns="0" rtlCol="0" anchor="t"/>
+          <a:lstStyle/>
+          <a:p>
+            <a:pPr indent="0" marL="0">
+              <a:buNone/>
+            </a:pPr>
+            <a:r>
+              <a:rPr lang="en-US" sz="1400" dirty="0">
+                <a:solidFill>
+                  <a:schemeClr val="bg1"/>
+                </a:solidFill>
+                <a:latin typeface="Cambria" pitchFamily="34" charset="0"/>
+                <a:ea typeface="Cambria" pitchFamily="34" charset="-122"/>
+                <a:cs typeface="Cambria" pitchFamily="34" charset="-120"/>
+              </a:rPr>
+              <a:t>speedup with processes at 16 tiles, the fix</a:t>
+            </a:r>
+            <a:endParaRPr lang="en-US" sz="1400" dirty="0"/>
+          </a:p>
+        </p:txBody>
+      </p:sp>
+      <p:sp>
+        <p:nvSpPr>
+          <p:cNvPr id="12" name="card-11"/>
+          <p:cNvSpPr/>
+          <p:nvPr/>
+        </p:nvSpPr>
+        <p:spPr>
+          <a:xfrm>
+            <a:off x="6766560" y="1371600"/>
+            <a:ext cx="1920240" cy="2468880"/>
+          </a:xfrm>
+          <a:prstGeom prst="roundRect">
+            <a:avLst>
+              <a:gd name="adj" fmla="val 3810"/>
+            </a:avLst>
+          </a:prstGeom>
+          <a:solidFill>
+            <a:schemeClr val="accent6"/>
+          </a:solidFill>
+          <a:ln/>
+        </p:spPr>
+      </p:sp>
+      <p:sp>
+        <p:nvSpPr>
+          <p:cNvPr id="13" name="text-12"/>
+          <p:cNvSpPr txBox="1"/>
+          <p:nvPr/>
+        </p:nvSpPr>
+        <p:spPr>
+          <a:xfrm>
+            <a:off x="6949440" y="1600200"/>
+            <a:ext cx="1554480" cy="822960"/>
+          </a:xfrm>
+          <a:prstGeom prst="rect">
+            <a:avLst/>
+          </a:prstGeom>
+          <a:noFill/>
+          <a:ln/>
+        </p:spPr>
+        <p:txBody>
+          <a:bodyPr wrap="square" lIns="0" tIns="0" rIns="0" bIns="0" rtlCol="0" anchor="ctr"/>
+          <a:lstStyle/>
+          <a:p>
+            <a:pPr indent="0" marL="0">
+              <a:buNone/>
+            </a:pPr>
+            <a:r>
+              <a:rPr lang="en-US" sz="4000" b="1" dirty="0">
+                <a:solidFill>
+                  <a:schemeClr val="accent1"/>
+                </a:solidFill>
+                <a:latin typeface="Bahnschrift" pitchFamily="34" charset="0"/>
+                <a:ea typeface="Bahnschrift" pitchFamily="34" charset="-122"/>
+                <a:cs typeface="Bahnschrift" pitchFamily="34" charset="-120"/>
+              </a:rPr>
+              <a:t>−7.9%</a:t>
+            </a:r>
+            <a:endParaRPr lang="en-US" sz="4000" dirty="0"/>
+          </a:p>
+        </p:txBody>
+      </p:sp>
+      <p:sp>
+        <p:nvSpPr>
+          <p:cNvPr id="14" name="text-13"/>
+          <p:cNvSpPr txBox="1"/>
+          <p:nvPr/>
+        </p:nvSpPr>
+        <p:spPr>
+          <a:xfrm>
+            <a:off x="6949440" y="2560320"/>
+            <a:ext cx="1554480" cy="1463040"/>
+          </a:xfrm>
+          <a:prstGeom prst="rect">
+            <a:avLst/>
+          </a:prstGeom>
+          <a:noFill/>
+          <a:ln/>
+        </p:spPr>
+        <p:txBody>
+          <a:bodyPr wrap="square" lIns="0" tIns="0" rIns="0" bIns="0" rtlCol="0" anchor="t"/>
+          <a:lstStyle/>
+          <a:p>
+            <a:pPr indent="0" marL="0">
+              <a:buNone/>
+            </a:pPr>
+            <a:r>
+              <a:rPr lang="en-US" sz="1400" dirty="0">
+                <a:solidFill>
+                  <a:schemeClr val="bg1"/>
+                </a:solidFill>
+                <a:latin typeface="Cambria" pitchFamily="34" charset="0"/>
+                <a:ea typeface="Cambria" pitchFamily="34" charset="-122"/>
+                <a:cs typeface="Cambria" pitchFamily="34" charset="-120"/>
+              </a:rPr>
+              <a:t>keypoints lost at tile borders with 16 tiles</a:t>
+            </a:r>
+            <a:endParaRPr lang="en-US" sz="1400" dirty="0"/>
+          </a:p>
+        </p:txBody>
+      </p:sp>
+      <p:sp>
+        <p:nvSpPr>
+          <p:cNvPr id="25" name="Slide Number Placeholder 0"/>
+          <p:cNvSpPr>
+            <a:spLocks noGrp="1"/>
+          </p:cNvSpPr>
+          <p:nvPr>
+            <p:ph type="sldNum" sz="quarter" idx="4294967295"/>
+          </p:nvPr>
+        </p:nvSpPr>
+        <p:spPr>
+          <a:xfrm>
+            <a:off x="8229600" y="4754880"/>
+            <a:ext cx="457200" cy="274320"/>
+          </a:xfrm>
+          <a:prstGeom prst="rect">
+            <a:avLst/>
+          </a:prstGeom>
+          <a:extLst>
+            <a:ext uri="{C572A759-6A51-4108-AA02-DFA0A04FC94B}">
+              <ma14:wrappingTextBoxFlag xmlns:ma14="http://schemas.microsoft.com/office/mac/drawingml/2011/main" val="0"/>
+            </a:ext>
+          </a:extLst>
+        </p:spPr>
+        <p:txBody>
+          <a:bodyPr/>
+          <a:lstStyle>
+            <a:lvl1pPr>
+              <a:defRPr sz="1000">
+                <a:solidFill>
+                  <a:schemeClr val="bg2"/>
+                </a:solidFill>
+              </a:defRPr>
+            </a:lvl1pPr>
+          </a:lstStyle>
+          <a:p>
+            <a:pPr algn="r"/>
+            <a:fld id="{F7021451-1387-4CA6-816F-3879F97B5CBC}" type="slidenum">
+              <a:rPr b="0" lang="en-US"/>
+              <a:t>2</a:t>
+            </a:fld>
+            <a:endParaRPr lang="en-US"/>
+          </a:p>
+        </p:txBody>
+      </p:sp>
+    </p:spTree>
+  </p:cSld>
+  <p:clrMapOvr>
+    <a:masterClrMapping/>
+  </p:clrMapOvr>
+</p:sld>
+</file>
+
+<file path=ppt/slides/slide20.xml><?xml version="1.0" encoding="utf-8"?>
+<p:sld xmlns:a="http://schemas.openxmlformats.org/drawingml/2006/main" xmlns:r="http://schemas.openxmlformats.org/officeDocument/2006/relationships" xmlns:p="http://schemas.openxmlformats.org/presentationml/2006/main">
+  <p:cSld name="Slide 20">
+    <p:spTree>
+      <p:nvGrpSpPr>
+        <p:cNvPr id="1" name=""/>
+        <p:cNvGrpSpPr/>
+        <p:nvPr/>
+      </p:nvGrpSpPr>
+      <p:grpSpPr>
+        <a:xfrm>
+          <a:off x="0" y="0"/>
+          <a:ext cx="0" cy="0"/>
+          <a:chOff x="0" y="0"/>
+          <a:chExt cx="0" cy="0"/>
+        </a:xfrm>
+      </p:grpSpPr>
+      <p:sp>
+        <p:nvSpPr>
+          <p:cNvPr id="2" name="Text 0"/>
+          <p:cNvSpPr/>
+          <p:nvPr>
+            <p:ph idx="100" type="title" hasCustomPrompt="1"/>
+          </p:nvPr>
+        </p:nvSpPr>
+        <p:spPr>
+          <a:xfrm>
+            <a:off x="457200" y="274320"/>
+            <a:ext cx="8229600" cy="685800"/>
+          </a:xfrm>
+          <a:prstGeom prst="rect">
+            <a:avLst/>
+          </a:prstGeom>
+          <a:noFill/>
+          <a:ln/>
+        </p:spPr>
+        <p:txBody>
+          <a:bodyPr wrap="square" lIns="0" tIns="0" rIns="0" bIns="0" rtlCol="0" anchor="ctr"/>
+          <a:lstStyle/>
+          <a:p>
+            <a:pPr algn="l" indent="0" marL="0">
+              <a:buNone/>
+            </a:pPr>
+            <a:r>
+              <a:rPr lang="en-US" sz="3000" b="1" dirty="0">
+                <a:solidFill>
+                  <a:schemeClr val="bg1"/>
+                </a:solidFill>
+              </a:rPr>
               <a:t>Processing time per version</a:t>
             </a:r>
             <a:endParaRPr lang="en-US" sz="3000" dirty="0"/>
@@ -11893,7 +13557,7 @@
       </p:sp>
       <p:graphicFrame>
         <p:nvGraphicFramePr>
-          <p:cNvPr id="20" name="table-times"/>
+          <p:cNvPr id="21" name="table-times"/>
           <p:cNvGraphicFramePr>
             <a:graphicFrameLocks noGrp="1"/>
           </p:cNvGraphicFramePr>
@@ -14939,7 +16603,7 @@
       </p:graphicFrame>
       <p:sp>
         <p:nvSpPr>
-          <p:cNvPr id="4" name="text-153"/>
+          <p:cNvPr id="4" name="text-162"/>
           <p:cNvSpPr txBox="1"/>
           <p:nvPr/>
         </p:nvSpPr>
@@ -14973,961 +16637,6 @@
               <a:t>Wall-clock time to extract keypoints and descriptors. Other rows: Python 3.14 with the GIL. No-GIL: free-threaded 3.14t.</a:t>
             </a:r>
             <a:endParaRPr lang="en-US" sz="1100" dirty="0"/>
-          </a:p>
-        </p:txBody>
-      </p:sp>
-      <p:sp>
-        <p:nvSpPr>
-          <p:cNvPr id="25" name="Slide Number Placeholder 0"/>
-          <p:cNvSpPr>
-            <a:spLocks noGrp="1"/>
-          </p:cNvSpPr>
-          <p:nvPr>
-            <p:ph type="sldNum" sz="quarter" idx="4294967295"/>
-          </p:nvPr>
-        </p:nvSpPr>
-        <p:spPr>
-          <a:xfrm>
-            <a:off x="8229600" y="4754880"/>
-            <a:ext cx="457200" cy="274320"/>
-          </a:xfrm>
-          <a:prstGeom prst="rect">
-            <a:avLst/>
-          </a:prstGeom>
-          <a:extLst>
-            <a:ext uri="{C572A759-6A51-4108-AA02-DFA0A04FC94B}">
-              <ma14:wrappingTextBoxFlag xmlns:ma14="http://schemas.microsoft.com/office/mac/drawingml/2011/main" val="0"/>
-            </a:ext>
-          </a:extLst>
-        </p:spPr>
-        <p:txBody>
-          <a:bodyPr/>
-          <a:lstStyle>
-            <a:lvl1pPr>
-              <a:defRPr sz="1000">
-                <a:solidFill>
-                  <a:schemeClr val="bg2"/>
-                </a:solidFill>
-              </a:defRPr>
-            </a:lvl1pPr>
-          </a:lstStyle>
-          <a:p>
-            <a:pPr algn="r"/>
-            <a:fld id="{F7021451-1387-4CA6-816F-3879F97B5CBC}" type="slidenum">
-              <a:rPr b="0" lang="en-US"/>
-              <a:t>19</a:t>
-            </a:fld>
-            <a:endParaRPr lang="en-US"/>
-          </a:p>
-        </p:txBody>
-      </p:sp>
-    </p:spTree>
-  </p:cSld>
-  <p:clrMapOvr>
-    <a:masterClrMapping/>
-  </p:clrMapOvr>
-</p:sld>
-</file>
-
-<file path=ppt/slides/slide2.xml><?xml version="1.0" encoding="utf-8"?>
-<p:sld xmlns:a="http://schemas.openxmlformats.org/drawingml/2006/main" xmlns:r="http://schemas.openxmlformats.org/officeDocument/2006/relationships" xmlns:p="http://schemas.openxmlformats.org/presentationml/2006/main">
-  <p:cSld name="Slide 2">
-    <p:spTree>
-      <p:nvGrpSpPr>
-        <p:cNvPr id="1" name=""/>
-        <p:cNvGrpSpPr/>
-        <p:nvPr/>
-      </p:nvGrpSpPr>
-      <p:grpSpPr>
-        <a:xfrm>
-          <a:off x="0" y="0"/>
-          <a:ext cx="0" cy="0"/>
-          <a:chOff x="0" y="0"/>
-          <a:chExt cx="0" cy="0"/>
-        </a:xfrm>
-      </p:grpSpPr>
-      <p:sp>
-        <p:nvSpPr>
-          <p:cNvPr id="2" name="Text 0"/>
-          <p:cNvSpPr/>
-          <p:nvPr>
-            <p:ph idx="100" type="title" hasCustomPrompt="1"/>
-          </p:nvPr>
-        </p:nvSpPr>
-        <p:spPr>
-          <a:xfrm>
-            <a:off x="457200" y="274320"/>
-            <a:ext cx="8229600" cy="685800"/>
-          </a:xfrm>
-          <a:prstGeom prst="rect">
-            <a:avLst/>
-          </a:prstGeom>
-          <a:noFill/>
-          <a:ln/>
-        </p:spPr>
-        <p:txBody>
-          <a:bodyPr wrap="square" lIns="0" tIns="0" rIns="0" bIns="0" rtlCol="0" anchor="ctr"/>
-          <a:lstStyle/>
-          <a:p>
-            <a:pPr algn="l" indent="0" marL="0">
-              <a:buNone/>
-            </a:pPr>
-            <a:r>
-              <a:rPr lang="en-US" sz="3000" b="1" dirty="0">
-                <a:solidFill>
-                  <a:schemeClr val="bg1"/>
-                </a:solidFill>
-              </a:rPr>
-              <a:t>The project in four numbers</a:t>
-            </a:r>
-            <a:endParaRPr lang="en-US" sz="3000" dirty="0"/>
-          </a:p>
-        </p:txBody>
-      </p:sp>
-      <p:sp>
-        <p:nvSpPr>
-          <p:cNvPr id="3" name="card-2"/>
-          <p:cNvSpPr/>
-          <p:nvPr/>
-        </p:nvSpPr>
-        <p:spPr>
-          <a:xfrm>
-            <a:off x="457200" y="1371600"/>
-            <a:ext cx="1920240" cy="2468880"/>
-          </a:xfrm>
-          <a:prstGeom prst="roundRect">
-            <a:avLst>
-              <a:gd name="adj" fmla="val 3810"/>
-            </a:avLst>
-          </a:prstGeom>
-          <a:solidFill>
-            <a:schemeClr val="accent6"/>
-          </a:solidFill>
-          <a:ln/>
-        </p:spPr>
-      </p:sp>
-      <p:sp>
-        <p:nvSpPr>
-          <p:cNvPr id="4" name="text-3"/>
-          <p:cNvSpPr txBox="1"/>
-          <p:nvPr/>
-        </p:nvSpPr>
-        <p:spPr>
-          <a:xfrm>
-            <a:off x="640080" y="1600200"/>
-            <a:ext cx="1554480" cy="822960"/>
-          </a:xfrm>
-          <a:prstGeom prst="rect">
-            <a:avLst/>
-          </a:prstGeom>
-          <a:noFill/>
-          <a:ln/>
-        </p:spPr>
-        <p:txBody>
-          <a:bodyPr wrap="square" lIns="0" tIns="0" rIns="0" bIns="0" rtlCol="0" anchor="ctr"/>
-          <a:lstStyle/>
-          <a:p>
-            <a:pPr indent="0" marL="0">
-              <a:buNone/>
-            </a:pPr>
-            <a:r>
-              <a:rPr lang="en-US" sz="4000" b="1" dirty="0">
-                <a:solidFill>
-                  <a:schemeClr val="accent1"/>
-                </a:solidFill>
-                <a:latin typeface="Bahnschrift" pitchFamily="34" charset="0"/>
-                <a:ea typeface="Bahnschrift" pitchFamily="34" charset="-122"/>
-                <a:cs typeface="Bahnschrift" pitchFamily="34" charset="-120"/>
-              </a:rPr>
-              <a:t>1.4%</a:t>
-            </a:r>
-            <a:endParaRPr lang="en-US" sz="4000" dirty="0"/>
-          </a:p>
-        </p:txBody>
-      </p:sp>
-      <p:sp>
-        <p:nvSpPr>
-          <p:cNvPr id="5" name="text-4"/>
-          <p:cNvSpPr txBox="1"/>
-          <p:nvPr/>
-        </p:nvSpPr>
-        <p:spPr>
-          <a:xfrm>
-            <a:off x="640080" y="2560320"/>
-            <a:ext cx="1554480" cy="1463040"/>
-          </a:xfrm>
-          <a:prstGeom prst="rect">
-            <a:avLst/>
-          </a:prstGeom>
-          <a:noFill/>
-          <a:ln/>
-        </p:spPr>
-        <p:txBody>
-          <a:bodyPr wrap="square" lIns="0" tIns="0" rIns="0" bIns="0" rtlCol="0" anchor="t"/>
-          <a:lstStyle/>
-          <a:p>
-            <a:pPr indent="0" marL="0">
-              <a:buNone/>
-            </a:pPr>
-            <a:r>
-              <a:rPr lang="en-US" sz="1400" dirty="0">
-                <a:solidFill>
-                  <a:schemeClr val="bg1"/>
-                </a:solidFill>
-                <a:latin typeface="Cambria" pitchFamily="34" charset="0"/>
-                <a:ea typeface="Cambria" pitchFamily="34" charset="-122"/>
-                <a:cs typeface="Cambria" pitchFamily="34" charset="-120"/>
-              </a:rPr>
-              <a:t>average gain from 16 threaded tiles over 4 in 2023: not significant</a:t>
-            </a:r>
-            <a:endParaRPr lang="en-US" sz="1400" dirty="0"/>
-          </a:p>
-        </p:txBody>
-      </p:sp>
-      <p:sp>
-        <p:nvSpPr>
-          <p:cNvPr id="6" name="card-5"/>
-          <p:cNvSpPr/>
-          <p:nvPr/>
-        </p:nvSpPr>
-        <p:spPr>
-          <a:xfrm>
-            <a:off x="2560320" y="1371600"/>
-            <a:ext cx="1920240" cy="2468880"/>
-          </a:xfrm>
-          <a:prstGeom prst="roundRect">
-            <a:avLst>
-              <a:gd name="adj" fmla="val 3810"/>
-            </a:avLst>
-          </a:prstGeom>
-          <a:solidFill>
-            <a:schemeClr val="accent6"/>
-          </a:solidFill>
-          <a:ln/>
-        </p:spPr>
-      </p:sp>
-      <p:sp>
-        <p:nvSpPr>
-          <p:cNvPr id="7" name="text-6"/>
-          <p:cNvSpPr txBox="1"/>
-          <p:nvPr/>
-        </p:nvSpPr>
-        <p:spPr>
-          <a:xfrm>
-            <a:off x="2743200" y="1600200"/>
-            <a:ext cx="1554480" cy="822960"/>
-          </a:xfrm>
-          <a:prstGeom prst="rect">
-            <a:avLst/>
-          </a:prstGeom>
-          <a:noFill/>
-          <a:ln/>
-        </p:spPr>
-        <p:txBody>
-          <a:bodyPr wrap="square" lIns="0" tIns="0" rIns="0" bIns="0" rtlCol="0" anchor="ctr"/>
-          <a:lstStyle/>
-          <a:p>
-            <a:pPr indent="0" marL="0">
-              <a:buNone/>
-            </a:pPr>
-            <a:r>
-              <a:rPr lang="en-US" sz="4000" b="1" dirty="0">
-                <a:solidFill>
-                  <a:schemeClr val="accent1"/>
-                </a:solidFill>
-                <a:latin typeface="Bahnschrift" pitchFamily="34" charset="0"/>
-                <a:ea typeface="Bahnschrift" pitchFamily="34" charset="-122"/>
-                <a:cs typeface="Bahnschrift" pitchFamily="34" charset="-120"/>
-              </a:rPr>
-              <a:t>1.0</a:t>
-            </a:r>
-            <a:endParaRPr lang="en-US" sz="4000" dirty="0"/>
-          </a:p>
-        </p:txBody>
-      </p:sp>
-      <p:sp>
-        <p:nvSpPr>
-          <p:cNvPr id="8" name="text-7"/>
-          <p:cNvSpPr txBox="1"/>
-          <p:nvPr/>
-        </p:nvSpPr>
-        <p:spPr>
-          <a:xfrm>
-            <a:off x="2743200" y="2560320"/>
-            <a:ext cx="1554480" cy="1463040"/>
-          </a:xfrm>
-          <a:prstGeom prst="rect">
-            <a:avLst/>
-          </a:prstGeom>
-          <a:noFill/>
-          <a:ln/>
-        </p:spPr>
-        <p:txBody>
-          <a:bodyPr wrap="square" lIns="0" tIns="0" rIns="0" bIns="0" rtlCol="0" anchor="t"/>
-          <a:lstStyle/>
-          <a:p>
-            <a:pPr indent="0" marL="0">
-              <a:buNone/>
-            </a:pPr>
-            <a:r>
-              <a:rPr lang="en-US" sz="1400" dirty="0">
-                <a:solidFill>
-                  <a:schemeClr val="bg1"/>
-                </a:solidFill>
-                <a:latin typeface="Cambria" pitchFamily="34" charset="0"/>
-                <a:ea typeface="Cambria" pitchFamily="34" charset="-122"/>
-                <a:cs typeface="Cambria" pitchFamily="34" charset="-120"/>
-              </a:rPr>
-              <a:t>CPU cores actually busy with threads, on an 8-core CPU</a:t>
-            </a:r>
-            <a:endParaRPr lang="en-US" sz="1400" dirty="0"/>
-          </a:p>
-        </p:txBody>
-      </p:sp>
-      <p:sp>
-        <p:nvSpPr>
-          <p:cNvPr id="9" name="card-8"/>
-          <p:cNvSpPr/>
-          <p:nvPr/>
-        </p:nvSpPr>
-        <p:spPr>
-          <a:xfrm>
-            <a:off x="4663440" y="1371600"/>
-            <a:ext cx="1920240" cy="2468880"/>
-          </a:xfrm>
-          <a:prstGeom prst="roundRect">
-            <a:avLst>
-              <a:gd name="adj" fmla="val 3810"/>
-            </a:avLst>
-          </a:prstGeom>
-          <a:solidFill>
-            <a:schemeClr val="accent6"/>
-          </a:solidFill>
-          <a:ln/>
-        </p:spPr>
-      </p:sp>
-      <p:sp>
-        <p:nvSpPr>
-          <p:cNvPr id="10" name="text-9"/>
-          <p:cNvSpPr txBox="1"/>
-          <p:nvPr/>
-        </p:nvSpPr>
-        <p:spPr>
-          <a:xfrm>
-            <a:off x="4846320" y="1600200"/>
-            <a:ext cx="1554480" cy="822960"/>
-          </a:xfrm>
-          <a:prstGeom prst="rect">
-            <a:avLst/>
-          </a:prstGeom>
-          <a:noFill/>
-          <a:ln/>
-        </p:spPr>
-        <p:txBody>
-          <a:bodyPr wrap="square" lIns="0" tIns="0" rIns="0" bIns="0" rtlCol="0" anchor="ctr"/>
-          <a:lstStyle/>
-          <a:p>
-            <a:pPr indent="0" marL="0">
-              <a:buNone/>
-            </a:pPr>
-            <a:r>
-              <a:rPr lang="en-US" sz="4000" b="1" dirty="0">
-                <a:solidFill>
-                  <a:schemeClr val="accent1"/>
-                </a:solidFill>
-                <a:latin typeface="Bahnschrift" pitchFamily="34" charset="0"/>
-                <a:ea typeface="Bahnschrift" pitchFamily="34" charset="-122"/>
-                <a:cs typeface="Bahnschrift" pitchFamily="34" charset="-120"/>
-              </a:rPr>
-              <a:t>6.65×</a:t>
-            </a:r>
-            <a:endParaRPr lang="en-US" sz="4000" dirty="0"/>
-          </a:p>
-        </p:txBody>
-      </p:sp>
-      <p:sp>
-        <p:nvSpPr>
-          <p:cNvPr id="11" name="text-10"/>
-          <p:cNvSpPr txBox="1"/>
-          <p:nvPr/>
-        </p:nvSpPr>
-        <p:spPr>
-          <a:xfrm>
-            <a:off x="4846320" y="2560320"/>
-            <a:ext cx="1554480" cy="1463040"/>
-          </a:xfrm>
-          <a:prstGeom prst="rect">
-            <a:avLst/>
-          </a:prstGeom>
-          <a:noFill/>
-          <a:ln/>
-        </p:spPr>
-        <p:txBody>
-          <a:bodyPr wrap="square" lIns="0" tIns="0" rIns="0" bIns="0" rtlCol="0" anchor="t"/>
-          <a:lstStyle/>
-          <a:p>
-            <a:pPr indent="0" marL="0">
-              <a:buNone/>
-            </a:pPr>
-            <a:r>
-              <a:rPr lang="en-US" sz="1400" dirty="0">
-                <a:solidFill>
-                  <a:schemeClr val="bg1"/>
-                </a:solidFill>
-                <a:latin typeface="Cambria" pitchFamily="34" charset="0"/>
-                <a:ea typeface="Cambria" pitchFamily="34" charset="-122"/>
-                <a:cs typeface="Cambria" pitchFamily="34" charset="-120"/>
-              </a:rPr>
-              <a:t>speedup with processes at 16 tiles, the fix</a:t>
-            </a:r>
-            <a:endParaRPr lang="en-US" sz="1400" dirty="0"/>
-          </a:p>
-        </p:txBody>
-      </p:sp>
-      <p:sp>
-        <p:nvSpPr>
-          <p:cNvPr id="12" name="card-11"/>
-          <p:cNvSpPr/>
-          <p:nvPr/>
-        </p:nvSpPr>
-        <p:spPr>
-          <a:xfrm>
-            <a:off x="6766560" y="1371600"/>
-            <a:ext cx="1920240" cy="2468880"/>
-          </a:xfrm>
-          <a:prstGeom prst="roundRect">
-            <a:avLst>
-              <a:gd name="adj" fmla="val 3810"/>
-            </a:avLst>
-          </a:prstGeom>
-          <a:solidFill>
-            <a:schemeClr val="accent6"/>
-          </a:solidFill>
-          <a:ln/>
-        </p:spPr>
-      </p:sp>
-      <p:sp>
-        <p:nvSpPr>
-          <p:cNvPr id="13" name="text-12"/>
-          <p:cNvSpPr txBox="1"/>
-          <p:nvPr/>
-        </p:nvSpPr>
-        <p:spPr>
-          <a:xfrm>
-            <a:off x="6949440" y="1600200"/>
-            <a:ext cx="1554480" cy="822960"/>
-          </a:xfrm>
-          <a:prstGeom prst="rect">
-            <a:avLst/>
-          </a:prstGeom>
-          <a:noFill/>
-          <a:ln/>
-        </p:spPr>
-        <p:txBody>
-          <a:bodyPr wrap="square" lIns="0" tIns="0" rIns="0" bIns="0" rtlCol="0" anchor="ctr"/>
-          <a:lstStyle/>
-          <a:p>
-            <a:pPr indent="0" marL="0">
-              <a:buNone/>
-            </a:pPr>
-            <a:r>
-              <a:rPr lang="en-US" sz="4000" b="1" dirty="0">
-                <a:solidFill>
-                  <a:schemeClr val="accent1"/>
-                </a:solidFill>
-                <a:latin typeface="Bahnschrift" pitchFamily="34" charset="0"/>
-                <a:ea typeface="Bahnschrift" pitchFamily="34" charset="-122"/>
-                <a:cs typeface="Bahnschrift" pitchFamily="34" charset="-120"/>
-              </a:rPr>
-              <a:t>−7.9%</a:t>
-            </a:r>
-            <a:endParaRPr lang="en-US" sz="4000" dirty="0"/>
-          </a:p>
-        </p:txBody>
-      </p:sp>
-      <p:sp>
-        <p:nvSpPr>
-          <p:cNvPr id="14" name="text-13"/>
-          <p:cNvSpPr txBox="1"/>
-          <p:nvPr/>
-        </p:nvSpPr>
-        <p:spPr>
-          <a:xfrm>
-            <a:off x="6949440" y="2560320"/>
-            <a:ext cx="1554480" cy="1463040"/>
-          </a:xfrm>
-          <a:prstGeom prst="rect">
-            <a:avLst/>
-          </a:prstGeom>
-          <a:noFill/>
-          <a:ln/>
-        </p:spPr>
-        <p:txBody>
-          <a:bodyPr wrap="square" lIns="0" tIns="0" rIns="0" bIns="0" rtlCol="0" anchor="t"/>
-          <a:lstStyle/>
-          <a:p>
-            <a:pPr indent="0" marL="0">
-              <a:buNone/>
-            </a:pPr>
-            <a:r>
-              <a:rPr lang="en-US" sz="1400" dirty="0">
-                <a:solidFill>
-                  <a:schemeClr val="bg1"/>
-                </a:solidFill>
-                <a:latin typeface="Cambria" pitchFamily="34" charset="0"/>
-                <a:ea typeface="Cambria" pitchFamily="34" charset="-122"/>
-                <a:cs typeface="Cambria" pitchFamily="34" charset="-120"/>
-              </a:rPr>
-              <a:t>keypoints lost at tile borders with 16 tiles</a:t>
-            </a:r>
-            <a:endParaRPr lang="en-US" sz="1400" dirty="0"/>
-          </a:p>
-        </p:txBody>
-      </p:sp>
-      <p:sp>
-        <p:nvSpPr>
-          <p:cNvPr id="25" name="Slide Number Placeholder 0"/>
-          <p:cNvSpPr>
-            <a:spLocks noGrp="1"/>
-          </p:cNvSpPr>
-          <p:nvPr>
-            <p:ph type="sldNum" sz="quarter" idx="4294967295"/>
-          </p:nvPr>
-        </p:nvSpPr>
-        <p:spPr>
-          <a:xfrm>
-            <a:off x="8229600" y="4754880"/>
-            <a:ext cx="457200" cy="274320"/>
-          </a:xfrm>
-          <a:prstGeom prst="rect">
-            <a:avLst/>
-          </a:prstGeom>
-          <a:extLst>
-            <a:ext uri="{C572A759-6A51-4108-AA02-DFA0A04FC94B}">
-              <ma14:wrappingTextBoxFlag xmlns:ma14="http://schemas.microsoft.com/office/mac/drawingml/2011/main" val="0"/>
-            </a:ext>
-          </a:extLst>
-        </p:spPr>
-        <p:txBody>
-          <a:bodyPr/>
-          <a:lstStyle>
-            <a:lvl1pPr>
-              <a:defRPr sz="1000">
-                <a:solidFill>
-                  <a:schemeClr val="bg2"/>
-                </a:solidFill>
-              </a:defRPr>
-            </a:lvl1pPr>
-          </a:lstStyle>
-          <a:p>
-            <a:pPr algn="r"/>
-            <a:fld id="{F7021451-1387-4CA6-816F-3879F97B5CBC}" type="slidenum">
-              <a:rPr b="0" lang="en-US"/>
-              <a:t>2</a:t>
-            </a:fld>
-            <a:endParaRPr lang="en-US"/>
-          </a:p>
-        </p:txBody>
-      </p:sp>
-    </p:spTree>
-  </p:cSld>
-  <p:clrMapOvr>
-    <a:masterClrMapping/>
-  </p:clrMapOvr>
-</p:sld>
-</file>
-
-<file path=ppt/slides/slide20.xml><?xml version="1.0" encoding="utf-8"?>
-<p:sld xmlns:a="http://schemas.openxmlformats.org/drawingml/2006/main" xmlns:r="http://schemas.openxmlformats.org/officeDocument/2006/relationships" xmlns:p="http://schemas.openxmlformats.org/presentationml/2006/main">
-  <p:cSld name="Slide 20">
-    <p:spTree>
-      <p:nvGrpSpPr>
-        <p:cNvPr id="1" name=""/>
-        <p:cNvGrpSpPr/>
-        <p:nvPr/>
-      </p:nvGrpSpPr>
-      <p:grpSpPr>
-        <a:xfrm>
-          <a:off x="0" y="0"/>
-          <a:ext cx="0" cy="0"/>
-          <a:chOff x="0" y="0"/>
-          <a:chExt cx="0" cy="0"/>
-        </a:xfrm>
-      </p:grpSpPr>
-      <p:sp>
-        <p:nvSpPr>
-          <p:cNvPr id="2" name="Text 0"/>
-          <p:cNvSpPr/>
-          <p:nvPr>
-            <p:ph idx="100" type="title" hasCustomPrompt="1"/>
-          </p:nvPr>
-        </p:nvSpPr>
-        <p:spPr>
-          <a:xfrm>
-            <a:off x="457200" y="274320"/>
-            <a:ext cx="8229600" cy="685800"/>
-          </a:xfrm>
-          <a:prstGeom prst="rect">
-            <a:avLst/>
-          </a:prstGeom>
-          <a:noFill/>
-          <a:ln/>
-        </p:spPr>
-        <p:txBody>
-          <a:bodyPr wrap="square" lIns="0" tIns="0" rIns="0" bIns="0" rtlCol="0" anchor="ctr"/>
-          <a:lstStyle/>
-          <a:p>
-            <a:pPr algn="l" indent="0" marL="0">
-              <a:buNone/>
-            </a:pPr>
-            <a:r>
-              <a:rPr lang="en-US" sz="3000" b="1" dirty="0">
-                <a:solidFill>
-                  <a:schemeClr val="bg1"/>
-                </a:solidFill>
-              </a:rPr>
-              <a:t>Python 3.14 without the GIL: threads finally scale</a:t>
-            </a:r>
-            <a:endParaRPr lang="en-US" sz="3000" dirty="0"/>
-          </a:p>
-        </p:txBody>
-      </p:sp>
-      <p:sp>
-        <p:nvSpPr>
-          <p:cNvPr id="3" name="card-154"/>
-          <p:cNvSpPr/>
-          <p:nvPr/>
-        </p:nvSpPr>
-        <p:spPr>
-          <a:xfrm>
-            <a:off x="457200" y="1234440"/>
-            <a:ext cx="2606040" cy="2651760"/>
-          </a:xfrm>
-          <a:prstGeom prst="roundRect">
-            <a:avLst>
-              <a:gd name="adj" fmla="val 2807"/>
-            </a:avLst>
-          </a:prstGeom>
-          <a:solidFill>
-            <a:schemeClr val="accent6"/>
-          </a:solidFill>
-          <a:ln/>
-        </p:spPr>
-      </p:sp>
-      <p:sp>
-        <p:nvSpPr>
-          <p:cNvPr id="4" name="text-155"/>
-          <p:cNvSpPr txBox="1"/>
-          <p:nvPr/>
-        </p:nvSpPr>
-        <p:spPr>
-          <a:xfrm>
-            <a:off x="685800" y="1463040"/>
-            <a:ext cx="2148840" cy="822960"/>
-          </a:xfrm>
-          <a:prstGeom prst="rect">
-            <a:avLst/>
-          </a:prstGeom>
-          <a:noFill/>
-          <a:ln/>
-        </p:spPr>
-        <p:txBody>
-          <a:bodyPr wrap="square" lIns="0" tIns="0" rIns="0" bIns="0" rtlCol="0" anchor="ctr"/>
-          <a:lstStyle/>
-          <a:p>
-            <a:pPr indent="0" marL="0">
-              <a:buNone/>
-            </a:pPr>
-            <a:r>
-              <a:rPr lang="en-US" sz="4000" b="1" dirty="0">
-                <a:solidFill>
-                  <a:schemeClr val="accent4"/>
-                </a:solidFill>
-                <a:latin typeface="Bahnschrift" pitchFamily="34" charset="0"/>
-                <a:ea typeface="Bahnschrift" pitchFamily="34" charset="-122"/>
-                <a:cs typeface="Bahnschrift" pitchFamily="34" charset="-120"/>
-              </a:rPr>
-              <a:t>5.82×</a:t>
-            </a:r>
-            <a:endParaRPr lang="en-US" sz="4000" dirty="0"/>
-          </a:p>
-        </p:txBody>
-      </p:sp>
-      <p:sp>
-        <p:nvSpPr>
-          <p:cNvPr id="5" name="text-156"/>
-          <p:cNvSpPr txBox="1"/>
-          <p:nvPr/>
-        </p:nvSpPr>
-        <p:spPr>
-          <a:xfrm>
-            <a:off x="685800" y="2377440"/>
-            <a:ext cx="2148840" cy="1371600"/>
-          </a:xfrm>
-          <a:prstGeom prst="rect">
-            <a:avLst/>
-          </a:prstGeom>
-          <a:noFill/>
-          <a:ln/>
-        </p:spPr>
-        <p:txBody>
-          <a:bodyPr wrap="square" lIns="0" tIns="0" rIns="0" bIns="0" rtlCol="0" anchor="t"/>
-          <a:lstStyle/>
-          <a:p>
-            <a:pPr indent="0" marL="0">
-              <a:buNone/>
-            </a:pPr>
-            <a:r>
-              <a:rPr lang="en-US" sz="1500" dirty="0">
-                <a:solidFill>
-                  <a:schemeClr val="bg1"/>
-                </a:solidFill>
-                <a:latin typeface="Cambria" pitchFamily="34" charset="0"/>
-                <a:ea typeface="Cambria" pitchFamily="34" charset="-122"/>
-                <a:cs typeface="Cambria" pitchFamily="34" charset="-120"/>
-              </a:rPr>
-              <a:t>No-GIL threads at 16 tiles (3.30× at 4), close to processes</a:t>
-            </a:r>
-            <a:endParaRPr lang="en-US" sz="1500" dirty="0"/>
-          </a:p>
-        </p:txBody>
-      </p:sp>
-      <p:sp>
-        <p:nvSpPr>
-          <p:cNvPr id="6" name="card-157"/>
-          <p:cNvSpPr/>
-          <p:nvPr/>
-        </p:nvSpPr>
-        <p:spPr>
-          <a:xfrm>
-            <a:off x="3246120" y="1234440"/>
-            <a:ext cx="2606040" cy="2651760"/>
-          </a:xfrm>
-          <a:prstGeom prst="roundRect">
-            <a:avLst>
-              <a:gd name="adj" fmla="val 2807"/>
-            </a:avLst>
-          </a:prstGeom>
-          <a:solidFill>
-            <a:schemeClr val="accent6"/>
-          </a:solidFill>
-          <a:ln/>
-        </p:spPr>
-      </p:sp>
-      <p:sp>
-        <p:nvSpPr>
-          <p:cNvPr id="7" name="text-158"/>
-          <p:cNvSpPr txBox="1"/>
-          <p:nvPr/>
-        </p:nvSpPr>
-        <p:spPr>
-          <a:xfrm>
-            <a:off x="3474720" y="1463040"/>
-            <a:ext cx="2148840" cy="822960"/>
-          </a:xfrm>
-          <a:prstGeom prst="rect">
-            <a:avLst/>
-          </a:prstGeom>
-          <a:noFill/>
-          <a:ln/>
-        </p:spPr>
-        <p:txBody>
-          <a:bodyPr wrap="square" lIns="0" tIns="0" rIns="0" bIns="0" rtlCol="0" anchor="ctr"/>
-          <a:lstStyle/>
-          <a:p>
-            <a:pPr indent="0" marL="0">
-              <a:buNone/>
-            </a:pPr>
-            <a:r>
-              <a:rPr lang="en-US" sz="4000" b="1" dirty="0">
-                <a:solidFill>
-                  <a:schemeClr val="accent4"/>
-                </a:solidFill>
-                <a:latin typeface="Bahnschrift" pitchFamily="34" charset="0"/>
-                <a:ea typeface="Bahnschrift" pitchFamily="34" charset="-122"/>
-                <a:cs typeface="Bahnschrift" pitchFamily="34" charset="-120"/>
-              </a:rPr>
-              <a:t>+11%</a:t>
-            </a:r>
-            <a:endParaRPr lang="en-US" sz="4000" dirty="0"/>
-          </a:p>
-        </p:txBody>
-      </p:sp>
-      <p:sp>
-        <p:nvSpPr>
-          <p:cNvPr id="8" name="text-159"/>
-          <p:cNvSpPr txBox="1"/>
-          <p:nvPr/>
-        </p:nvSpPr>
-        <p:spPr>
-          <a:xfrm>
-            <a:off x="3474720" y="2377440"/>
-            <a:ext cx="2148840" cy="1371600"/>
-          </a:xfrm>
-          <a:prstGeom prst="rect">
-            <a:avLst/>
-          </a:prstGeom>
-          <a:noFill/>
-          <a:ln/>
-        </p:spPr>
-        <p:txBody>
-          <a:bodyPr wrap="square" lIns="0" tIns="0" rIns="0" bIns="0" rtlCol="0" anchor="t"/>
-          <a:lstStyle/>
-          <a:p>
-            <a:pPr indent="0" marL="0">
-              <a:buNone/>
-            </a:pPr>
-            <a:r>
-              <a:rPr lang="en-US" sz="1500" dirty="0">
-                <a:solidFill>
-                  <a:schemeClr val="bg1"/>
-                </a:solidFill>
-                <a:latin typeface="Cambria" pitchFamily="34" charset="0"/>
-                <a:ea typeface="Cambria" pitchFamily="34" charset="-122"/>
-                <a:cs typeface="Cambria" pitchFamily="34" charset="-120"/>
-              </a:rPr>
-              <a:t>Slower single-threaded: the cost of a thread-safe interpreter</a:t>
-            </a:r>
-            <a:endParaRPr lang="en-US" sz="1500" dirty="0"/>
-          </a:p>
-        </p:txBody>
-      </p:sp>
-      <p:sp>
-        <p:nvSpPr>
-          <p:cNvPr id="9" name="card-160"/>
-          <p:cNvSpPr/>
-          <p:nvPr/>
-        </p:nvSpPr>
-        <p:spPr>
-          <a:xfrm>
-            <a:off x="6035040" y="1234440"/>
-            <a:ext cx="2606040" cy="2651760"/>
-          </a:xfrm>
-          <a:prstGeom prst="roundRect">
-            <a:avLst>
-              <a:gd name="adj" fmla="val 2807"/>
-            </a:avLst>
-          </a:prstGeom>
-          <a:solidFill>
-            <a:schemeClr val="accent6"/>
-          </a:solidFill>
-          <a:ln/>
-        </p:spPr>
-      </p:sp>
-      <p:sp>
-        <p:nvSpPr>
-          <p:cNvPr id="10" name="text-161"/>
-          <p:cNvSpPr txBox="1"/>
-          <p:nvPr/>
-        </p:nvSpPr>
-        <p:spPr>
-          <a:xfrm>
-            <a:off x="6263640" y="1463040"/>
-            <a:ext cx="2148840" cy="822960"/>
-          </a:xfrm>
-          <a:prstGeom prst="rect">
-            <a:avLst/>
-          </a:prstGeom>
-          <a:noFill/>
-          <a:ln/>
-        </p:spPr>
-        <p:txBody>
-          <a:bodyPr wrap="square" lIns="0" tIns="0" rIns="0" bIns="0" rtlCol="0" anchor="ctr"/>
-          <a:lstStyle/>
-          <a:p>
-            <a:pPr indent="0" marL="0">
-              <a:buNone/>
-            </a:pPr>
-            <a:r>
-              <a:rPr lang="en-US" sz="4000" b="1" dirty="0">
-                <a:solidFill>
-                  <a:schemeClr val="accent4"/>
-                </a:solidFill>
-                <a:latin typeface="Bahnschrift" pitchFamily="34" charset="0"/>
-                <a:ea typeface="Bahnschrift" pitchFamily="34" charset="-122"/>
-                <a:cs typeface="Bahnschrift" pitchFamily="34" charset="-120"/>
-              </a:rPr>
-              <a:t>0</a:t>
-            </a:r>
-            <a:endParaRPr lang="en-US" sz="4000" dirty="0"/>
-          </a:p>
-        </p:txBody>
-      </p:sp>
-      <p:sp>
-        <p:nvSpPr>
-          <p:cNvPr id="11" name="text-162"/>
-          <p:cNvSpPr txBox="1"/>
-          <p:nvPr/>
-        </p:nvSpPr>
-        <p:spPr>
-          <a:xfrm>
-            <a:off x="6263640" y="2377440"/>
-            <a:ext cx="2148840" cy="1371600"/>
-          </a:xfrm>
-          <a:prstGeom prst="rect">
-            <a:avLst/>
-          </a:prstGeom>
-          <a:noFill/>
-          <a:ln/>
-        </p:spPr>
-        <p:txBody>
-          <a:bodyPr wrap="square" lIns="0" tIns="0" rIns="0" bIns="0" rtlCol="0" anchor="t"/>
-          <a:lstStyle/>
-          <a:p>
-            <a:pPr indent="0" marL="0">
-              <a:buNone/>
-            </a:pPr>
-            <a:r>
-              <a:rPr lang="en-US" sz="1500" dirty="0">
-                <a:solidFill>
-                  <a:schemeClr val="bg1"/>
-                </a:solidFill>
-                <a:latin typeface="Cambria" pitchFamily="34" charset="0"/>
-                <a:ea typeface="Cambria" pitchFamily="34" charset="-122"/>
-                <a:cs typeface="Cambria" pitchFamily="34" charset="-120"/>
-              </a:rPr>
-              <a:t>OpenCV builds for free-threaded Python. I reimplemented 4 calls in NumPy</a:t>
-            </a:r>
-            <a:endParaRPr lang="en-US" sz="1500" dirty="0"/>
-          </a:p>
-        </p:txBody>
-      </p:sp>
-      <p:sp>
-        <p:nvSpPr>
-          <p:cNvPr id="12" name="text-163"/>
-          <p:cNvSpPr txBox="1"/>
-          <p:nvPr/>
-        </p:nvSpPr>
-        <p:spPr>
-          <a:xfrm>
-            <a:off x="457200" y="4069080"/>
-            <a:ext cx="8229600" cy="457200"/>
-          </a:xfrm>
-          <a:prstGeom prst="rect">
-            <a:avLst/>
-          </a:prstGeom>
-          <a:noFill/>
-          <a:ln/>
-        </p:spPr>
-        <p:txBody>
-          <a:bodyPr wrap="square" lIns="0" tIns="0" rIns="0" bIns="0" rtlCol="0" anchor="ctr"/>
-          <a:lstStyle/>
-          <a:p>
-            <a:pPr indent="0" marL="0">
-              <a:buNone/>
-            </a:pPr>
-            <a:r>
-              <a:rPr lang="en-US" sz="1400" dirty="0">
-                <a:solidFill>
-                  <a:schemeClr val="bg2"/>
-                </a:solidFill>
-                <a:latin typeface="Cambria" pitchFamily="34" charset="0"/>
-                <a:ea typeface="Cambria" pitchFamily="34" charset="-122"/>
-                <a:cs typeface="Cambria" pitchFamily="34" charset="-120"/>
-              </a:rPr>
-              <a:t>PEP 703 made the GIL optional [7]. For this workload it already works, though libraries are still catching up.</a:t>
-            </a:r>
-            <a:endParaRPr lang="en-US" sz="1400" dirty="0"/>
           </a:p>
         </p:txBody>
       </p:sp>
@@ -16033,6 +16742,453 @@
                   <a:schemeClr val="bg1"/>
                 </a:solidFill>
               </a:rPr>
+              <a:t>Python 3.14 without the GIL: threads finally scale</a:t>
+            </a:r>
+            <a:endParaRPr lang="en-US" sz="3000" dirty="0"/>
+          </a:p>
+        </p:txBody>
+      </p:sp>
+      <p:sp>
+        <p:nvSpPr>
+          <p:cNvPr id="3" name="card-163"/>
+          <p:cNvSpPr/>
+          <p:nvPr/>
+        </p:nvSpPr>
+        <p:spPr>
+          <a:xfrm>
+            <a:off x="457200" y="1234440"/>
+            <a:ext cx="2606040" cy="2651760"/>
+          </a:xfrm>
+          <a:prstGeom prst="roundRect">
+            <a:avLst>
+              <a:gd name="adj" fmla="val 2807"/>
+            </a:avLst>
+          </a:prstGeom>
+          <a:solidFill>
+            <a:schemeClr val="accent6"/>
+          </a:solidFill>
+          <a:ln/>
+        </p:spPr>
+      </p:sp>
+      <p:sp>
+        <p:nvSpPr>
+          <p:cNvPr id="4" name="text-164"/>
+          <p:cNvSpPr txBox="1"/>
+          <p:nvPr/>
+        </p:nvSpPr>
+        <p:spPr>
+          <a:xfrm>
+            <a:off x="685800" y="1463040"/>
+            <a:ext cx="2148840" cy="822960"/>
+          </a:xfrm>
+          <a:prstGeom prst="rect">
+            <a:avLst/>
+          </a:prstGeom>
+          <a:noFill/>
+          <a:ln/>
+        </p:spPr>
+        <p:txBody>
+          <a:bodyPr wrap="square" lIns="0" tIns="0" rIns="0" bIns="0" rtlCol="0" anchor="ctr"/>
+          <a:lstStyle/>
+          <a:p>
+            <a:pPr indent="0" marL="0">
+              <a:buNone/>
+            </a:pPr>
+            <a:r>
+              <a:rPr lang="en-US" sz="4000" b="1" dirty="0">
+                <a:solidFill>
+                  <a:schemeClr val="accent4"/>
+                </a:solidFill>
+                <a:latin typeface="Bahnschrift" pitchFamily="34" charset="0"/>
+                <a:ea typeface="Bahnschrift" pitchFamily="34" charset="-122"/>
+                <a:cs typeface="Bahnschrift" pitchFamily="34" charset="-120"/>
+              </a:rPr>
+              <a:t>5.82×</a:t>
+            </a:r>
+            <a:endParaRPr lang="en-US" sz="4000" dirty="0"/>
+          </a:p>
+        </p:txBody>
+      </p:sp>
+      <p:sp>
+        <p:nvSpPr>
+          <p:cNvPr id="5" name="text-165"/>
+          <p:cNvSpPr txBox="1"/>
+          <p:nvPr/>
+        </p:nvSpPr>
+        <p:spPr>
+          <a:xfrm>
+            <a:off x="685800" y="2377440"/>
+            <a:ext cx="2148840" cy="1371600"/>
+          </a:xfrm>
+          <a:prstGeom prst="rect">
+            <a:avLst/>
+          </a:prstGeom>
+          <a:noFill/>
+          <a:ln/>
+        </p:spPr>
+        <p:txBody>
+          <a:bodyPr wrap="square" lIns="0" tIns="0" rIns="0" bIns="0" rtlCol="0" anchor="t"/>
+          <a:lstStyle/>
+          <a:p>
+            <a:pPr indent="0" marL="0">
+              <a:buNone/>
+            </a:pPr>
+            <a:r>
+              <a:rPr lang="en-US" sz="1500" dirty="0">
+                <a:solidFill>
+                  <a:schemeClr val="bg1"/>
+                </a:solidFill>
+                <a:latin typeface="Cambria" pitchFamily="34" charset="0"/>
+                <a:ea typeface="Cambria" pitchFamily="34" charset="-122"/>
+                <a:cs typeface="Cambria" pitchFamily="34" charset="-120"/>
+              </a:rPr>
+              <a:t>No-GIL threads at 16 tiles (3.30× at 4), close to processes</a:t>
+            </a:r>
+            <a:endParaRPr lang="en-US" sz="1500" dirty="0"/>
+          </a:p>
+        </p:txBody>
+      </p:sp>
+      <p:sp>
+        <p:nvSpPr>
+          <p:cNvPr id="6" name="card-166"/>
+          <p:cNvSpPr/>
+          <p:nvPr/>
+        </p:nvSpPr>
+        <p:spPr>
+          <a:xfrm>
+            <a:off x="3246120" y="1234440"/>
+            <a:ext cx="2606040" cy="2651760"/>
+          </a:xfrm>
+          <a:prstGeom prst="roundRect">
+            <a:avLst>
+              <a:gd name="adj" fmla="val 2807"/>
+            </a:avLst>
+          </a:prstGeom>
+          <a:solidFill>
+            <a:schemeClr val="accent6"/>
+          </a:solidFill>
+          <a:ln/>
+        </p:spPr>
+      </p:sp>
+      <p:sp>
+        <p:nvSpPr>
+          <p:cNvPr id="7" name="text-167"/>
+          <p:cNvSpPr txBox="1"/>
+          <p:nvPr/>
+        </p:nvSpPr>
+        <p:spPr>
+          <a:xfrm>
+            <a:off x="3474720" y="1463040"/>
+            <a:ext cx="2148840" cy="822960"/>
+          </a:xfrm>
+          <a:prstGeom prst="rect">
+            <a:avLst/>
+          </a:prstGeom>
+          <a:noFill/>
+          <a:ln/>
+        </p:spPr>
+        <p:txBody>
+          <a:bodyPr wrap="square" lIns="0" tIns="0" rIns="0" bIns="0" rtlCol="0" anchor="ctr"/>
+          <a:lstStyle/>
+          <a:p>
+            <a:pPr indent="0" marL="0">
+              <a:buNone/>
+            </a:pPr>
+            <a:r>
+              <a:rPr lang="en-US" sz="4000" b="1" dirty="0">
+                <a:solidFill>
+                  <a:schemeClr val="accent4"/>
+                </a:solidFill>
+                <a:latin typeface="Bahnschrift" pitchFamily="34" charset="0"/>
+                <a:ea typeface="Bahnschrift" pitchFamily="34" charset="-122"/>
+                <a:cs typeface="Bahnschrift" pitchFamily="34" charset="-120"/>
+              </a:rPr>
+              <a:t>+11%</a:t>
+            </a:r>
+            <a:endParaRPr lang="en-US" sz="4000" dirty="0"/>
+          </a:p>
+        </p:txBody>
+      </p:sp>
+      <p:sp>
+        <p:nvSpPr>
+          <p:cNvPr id="8" name="text-168"/>
+          <p:cNvSpPr txBox="1"/>
+          <p:nvPr/>
+        </p:nvSpPr>
+        <p:spPr>
+          <a:xfrm>
+            <a:off x="3474720" y="2377440"/>
+            <a:ext cx="2148840" cy="1371600"/>
+          </a:xfrm>
+          <a:prstGeom prst="rect">
+            <a:avLst/>
+          </a:prstGeom>
+          <a:noFill/>
+          <a:ln/>
+        </p:spPr>
+        <p:txBody>
+          <a:bodyPr wrap="square" lIns="0" tIns="0" rIns="0" bIns="0" rtlCol="0" anchor="t"/>
+          <a:lstStyle/>
+          <a:p>
+            <a:pPr indent="0" marL="0">
+              <a:buNone/>
+            </a:pPr>
+            <a:r>
+              <a:rPr lang="en-US" sz="1500" dirty="0">
+                <a:solidFill>
+                  <a:schemeClr val="bg1"/>
+                </a:solidFill>
+                <a:latin typeface="Cambria" pitchFamily="34" charset="0"/>
+                <a:ea typeface="Cambria" pitchFamily="34" charset="-122"/>
+                <a:cs typeface="Cambria" pitchFamily="34" charset="-120"/>
+              </a:rPr>
+              <a:t>Slower single-threaded: the cost of a thread-safe interpreter</a:t>
+            </a:r>
+            <a:endParaRPr lang="en-US" sz="1500" dirty="0"/>
+          </a:p>
+        </p:txBody>
+      </p:sp>
+      <p:sp>
+        <p:nvSpPr>
+          <p:cNvPr id="9" name="card-169"/>
+          <p:cNvSpPr/>
+          <p:nvPr/>
+        </p:nvSpPr>
+        <p:spPr>
+          <a:xfrm>
+            <a:off x="6035040" y="1234440"/>
+            <a:ext cx="2606040" cy="2651760"/>
+          </a:xfrm>
+          <a:prstGeom prst="roundRect">
+            <a:avLst>
+              <a:gd name="adj" fmla="val 2807"/>
+            </a:avLst>
+          </a:prstGeom>
+          <a:solidFill>
+            <a:schemeClr val="accent6"/>
+          </a:solidFill>
+          <a:ln/>
+        </p:spPr>
+      </p:sp>
+      <p:sp>
+        <p:nvSpPr>
+          <p:cNvPr id="10" name="text-170"/>
+          <p:cNvSpPr txBox="1"/>
+          <p:nvPr/>
+        </p:nvSpPr>
+        <p:spPr>
+          <a:xfrm>
+            <a:off x="6263640" y="1463040"/>
+            <a:ext cx="2148840" cy="822960"/>
+          </a:xfrm>
+          <a:prstGeom prst="rect">
+            <a:avLst/>
+          </a:prstGeom>
+          <a:noFill/>
+          <a:ln/>
+        </p:spPr>
+        <p:txBody>
+          <a:bodyPr wrap="square" lIns="0" tIns="0" rIns="0" bIns="0" rtlCol="0" anchor="ctr"/>
+          <a:lstStyle/>
+          <a:p>
+            <a:pPr indent="0" marL="0">
+              <a:buNone/>
+            </a:pPr>
+            <a:r>
+              <a:rPr lang="en-US" sz="4000" b="1" dirty="0">
+                <a:solidFill>
+                  <a:schemeClr val="accent4"/>
+                </a:solidFill>
+                <a:latin typeface="Bahnschrift" pitchFamily="34" charset="0"/>
+                <a:ea typeface="Bahnschrift" pitchFamily="34" charset="-122"/>
+                <a:cs typeface="Bahnschrift" pitchFamily="34" charset="-120"/>
+              </a:rPr>
+              <a:t>0</a:t>
+            </a:r>
+            <a:endParaRPr lang="en-US" sz="4000" dirty="0"/>
+          </a:p>
+        </p:txBody>
+      </p:sp>
+      <p:sp>
+        <p:nvSpPr>
+          <p:cNvPr id="11" name="text-171"/>
+          <p:cNvSpPr txBox="1"/>
+          <p:nvPr/>
+        </p:nvSpPr>
+        <p:spPr>
+          <a:xfrm>
+            <a:off x="6263640" y="2377440"/>
+            <a:ext cx="2148840" cy="1371600"/>
+          </a:xfrm>
+          <a:prstGeom prst="rect">
+            <a:avLst/>
+          </a:prstGeom>
+          <a:noFill/>
+          <a:ln/>
+        </p:spPr>
+        <p:txBody>
+          <a:bodyPr wrap="square" lIns="0" tIns="0" rIns="0" bIns="0" rtlCol="0" anchor="t"/>
+          <a:lstStyle/>
+          <a:p>
+            <a:pPr indent="0" marL="0">
+              <a:buNone/>
+            </a:pPr>
+            <a:r>
+              <a:rPr lang="en-US" sz="1500" dirty="0">
+                <a:solidFill>
+                  <a:schemeClr val="bg1"/>
+                </a:solidFill>
+                <a:latin typeface="Cambria" pitchFamily="34" charset="0"/>
+                <a:ea typeface="Cambria" pitchFamily="34" charset="-122"/>
+                <a:cs typeface="Cambria" pitchFamily="34" charset="-120"/>
+              </a:rPr>
+              <a:t>OpenCV builds for free-threaded Python. I reimplemented 4 calls in NumPy</a:t>
+            </a:r>
+            <a:endParaRPr lang="en-US" sz="1500" dirty="0"/>
+          </a:p>
+        </p:txBody>
+      </p:sp>
+      <p:sp>
+        <p:nvSpPr>
+          <p:cNvPr id="12" name="text-172"/>
+          <p:cNvSpPr txBox="1"/>
+          <p:nvPr/>
+        </p:nvSpPr>
+        <p:spPr>
+          <a:xfrm>
+            <a:off x="457200" y="4069080"/>
+            <a:ext cx="8229600" cy="457200"/>
+          </a:xfrm>
+          <a:prstGeom prst="rect">
+            <a:avLst/>
+          </a:prstGeom>
+          <a:noFill/>
+          <a:ln/>
+        </p:spPr>
+        <p:txBody>
+          <a:bodyPr wrap="square" lIns="0" tIns="0" rIns="0" bIns="0" rtlCol="0" anchor="ctr"/>
+          <a:lstStyle/>
+          <a:p>
+            <a:pPr indent="0" marL="0">
+              <a:buNone/>
+            </a:pPr>
+            <a:r>
+              <a:rPr lang="en-US" sz="1400" dirty="0">
+                <a:solidFill>
+                  <a:schemeClr val="bg2"/>
+                </a:solidFill>
+                <a:latin typeface="Cambria" pitchFamily="34" charset="0"/>
+                <a:ea typeface="Cambria" pitchFamily="34" charset="-122"/>
+                <a:cs typeface="Cambria" pitchFamily="34" charset="-120"/>
+              </a:rPr>
+              <a:t>PEP 703 made the GIL optional [7]. For this workload it already works, though libraries are still catching up.</a:t>
+            </a:r>
+            <a:endParaRPr lang="en-US" sz="1400" dirty="0"/>
+          </a:p>
+        </p:txBody>
+      </p:sp>
+      <p:sp>
+        <p:nvSpPr>
+          <p:cNvPr id="25" name="Slide Number Placeholder 0"/>
+          <p:cNvSpPr>
+            <a:spLocks noGrp="1"/>
+          </p:cNvSpPr>
+          <p:nvPr>
+            <p:ph type="sldNum" sz="quarter" idx="4294967295"/>
+          </p:nvPr>
+        </p:nvSpPr>
+        <p:spPr>
+          <a:xfrm>
+            <a:off x="8229600" y="4754880"/>
+            <a:ext cx="457200" cy="274320"/>
+          </a:xfrm>
+          <a:prstGeom prst="rect">
+            <a:avLst/>
+          </a:prstGeom>
+          <a:extLst>
+            <a:ext uri="{C572A759-6A51-4108-AA02-DFA0A04FC94B}">
+              <ma14:wrappingTextBoxFlag xmlns:ma14="http://schemas.microsoft.com/office/mac/drawingml/2011/main" val="0"/>
+            </a:ext>
+          </a:extLst>
+        </p:spPr>
+        <p:txBody>
+          <a:bodyPr/>
+          <a:lstStyle>
+            <a:lvl1pPr>
+              <a:defRPr sz="1000">
+                <a:solidFill>
+                  <a:schemeClr val="bg2"/>
+                </a:solidFill>
+              </a:defRPr>
+            </a:lvl1pPr>
+          </a:lstStyle>
+          <a:p>
+            <a:pPr algn="r"/>
+            <a:fld id="{F7021451-1387-4CA6-816F-3879F97B5CBC}" type="slidenum">
+              <a:rPr b="0" lang="en-US"/>
+              <a:t>21</a:t>
+            </a:fld>
+            <a:endParaRPr lang="en-US"/>
+          </a:p>
+        </p:txBody>
+      </p:sp>
+    </p:spTree>
+  </p:cSld>
+  <p:clrMapOvr>
+    <a:masterClrMapping/>
+  </p:clrMapOvr>
+</p:sld>
+</file>
+
+<file path=ppt/slides/slide22.xml><?xml version="1.0" encoding="utf-8"?>
+<p:sld xmlns:a="http://schemas.openxmlformats.org/drawingml/2006/main" xmlns:r="http://schemas.openxmlformats.org/officeDocument/2006/relationships" xmlns:p="http://schemas.openxmlformats.org/presentationml/2006/main">
+  <p:cSld name="Slide 22">
+    <p:spTree>
+      <p:nvGrpSpPr>
+        <p:cNvPr id="1" name=""/>
+        <p:cNvGrpSpPr/>
+        <p:nvPr/>
+      </p:nvGrpSpPr>
+      <p:grpSpPr>
+        <a:xfrm>
+          <a:off x="0" y="0"/>
+          <a:ext cx="0" cy="0"/>
+          <a:chOff x="0" y="0"/>
+          <a:chExt cx="0" cy="0"/>
+        </a:xfrm>
+      </p:grpSpPr>
+      <p:sp>
+        <p:nvSpPr>
+          <p:cNvPr id="2" name="Text 0"/>
+          <p:cNvSpPr/>
+          <p:nvPr>
+            <p:ph idx="100" type="title" hasCustomPrompt="1"/>
+          </p:nvPr>
+        </p:nvSpPr>
+        <p:spPr>
+          <a:xfrm>
+            <a:off x="457200" y="274320"/>
+            <a:ext cx="8229600" cy="685800"/>
+          </a:xfrm>
+          <a:prstGeom prst="rect">
+            <a:avLst/>
+          </a:prstGeom>
+          <a:noFill/>
+          <a:ln/>
+        </p:spPr>
+        <p:txBody>
+          <a:bodyPr wrap="square" lIns="0" tIns="0" rIns="0" bIns="0" rtlCol="0" anchor="ctr"/>
+          <a:lstStyle/>
+          <a:p>
+            <a:pPr algn="l" indent="0" marL="0">
+              <a:buNone/>
+            </a:pPr>
+            <a:r>
+              <a:rPr lang="en-US" sz="3000" b="1" dirty="0">
+                <a:solidFill>
+                  <a:schemeClr val="bg1"/>
+                </a:solidFill>
+              </a:rPr>
               <a:t>The hidden cost: keypoints lost at tile borders</a:t>
             </a:r>
             <a:endParaRPr lang="en-US" sz="3000" dirty="0"/>
@@ -16041,7 +17197,7 @@
       </p:sp>
       <p:sp>
         <p:nvSpPr>
-          <p:cNvPr id="3" name="frame-164"/>
+          <p:cNvPr id="3" name="frame-173"/>
           <p:cNvSpPr/>
           <p:nvPr/>
         </p:nvSpPr>
@@ -16063,7 +17219,7 @@
       </p:sp>
       <p:pic>
         <p:nvPicPr>
-          <p:cNvPr id="4" name="image-165" descr="C:\Users\Musa Waghu\.claude\jobs\3cc2589d\tmp\deck\kp_lost16.png">    </p:cNvPr>
+          <p:cNvPr id="4" name="image-174" descr="C:\Users\Musa Waghu\.claude\jobs\3cc2589d\tmp\deck\kp_lost16.png">    </p:cNvPr>
           <p:cNvPicPr>
             <a:picLocks noChangeAspect="1"/>
           </p:cNvPicPr>
@@ -16087,7 +17243,7 @@
       </p:pic>
       <p:sp>
         <p:nvSpPr>
-          <p:cNvPr id="5" name="text-166"/>
+          <p:cNvPr id="5" name="text-175"/>
           <p:cNvSpPr txBox="1"/>
           <p:nvPr/>
         </p:nvSpPr>
@@ -16126,7 +17282,7 @@
       </p:sp>
       <p:graphicFrame>
         <p:nvGraphicFramePr>
-          <p:cNvPr id="22" name="table-keypoints"/>
+          <p:cNvPr id="23" name="table-keypoints"/>
           <p:cNvGraphicFramePr>
             <a:graphicFrameLocks noGrp="1"/>
           </p:cNvGraphicFramePr>
@@ -16981,7 +18137,7 @@
       </p:graphicFrame>
       <p:sp>
         <p:nvSpPr>
-          <p:cNvPr id="7" name="text-167"/>
+          <p:cNvPr id="7" name="text-176"/>
           <p:cNvSpPr txBox="1"/>
           <p:nvPr/>
         </p:nvSpPr>
@@ -17059,546 +18215,6 @@
                 <a:cs typeface="Cambria" pitchFamily="34" charset="-120"/>
               </a:rPr>
               <a:t>Worst image loses 12.1% at 16 tiles</a:t>
-            </a:r>
-            <a:endParaRPr lang="en-US" sz="1400" dirty="0"/>
-          </a:p>
-        </p:txBody>
-      </p:sp>
-      <p:sp>
-        <p:nvSpPr>
-          <p:cNvPr id="25" name="Slide Number Placeholder 0"/>
-          <p:cNvSpPr>
-            <a:spLocks noGrp="1"/>
-          </p:cNvSpPr>
-          <p:nvPr>
-            <p:ph type="sldNum" sz="quarter" idx="4294967295"/>
-          </p:nvPr>
-        </p:nvSpPr>
-        <p:spPr>
-          <a:xfrm>
-            <a:off x="8229600" y="4754880"/>
-            <a:ext cx="457200" cy="274320"/>
-          </a:xfrm>
-          <a:prstGeom prst="rect">
-            <a:avLst/>
-          </a:prstGeom>
-          <a:extLst>
-            <a:ext uri="{C572A759-6A51-4108-AA02-DFA0A04FC94B}">
-              <ma14:wrappingTextBoxFlag xmlns:ma14="http://schemas.microsoft.com/office/mac/drawingml/2011/main" val="0"/>
-            </a:ext>
-          </a:extLst>
-        </p:spPr>
-        <p:txBody>
-          <a:bodyPr/>
-          <a:lstStyle>
-            <a:lvl1pPr>
-              <a:defRPr sz="1000">
-                <a:solidFill>
-                  <a:schemeClr val="bg2"/>
-                </a:solidFill>
-              </a:defRPr>
-            </a:lvl1pPr>
-          </a:lstStyle>
-          <a:p>
-            <a:pPr algn="r"/>
-            <a:fld id="{F7021451-1387-4CA6-816F-3879F97B5CBC}" type="slidenum">
-              <a:rPr b="0" lang="en-US"/>
-              <a:t>21</a:t>
-            </a:fld>
-            <a:endParaRPr lang="en-US"/>
-          </a:p>
-        </p:txBody>
-      </p:sp>
-    </p:spTree>
-  </p:cSld>
-  <p:clrMapOvr>
-    <a:masterClrMapping/>
-  </p:clrMapOvr>
-</p:sld>
-</file>
-
-<file path=ppt/slides/slide22.xml><?xml version="1.0" encoding="utf-8"?>
-<p:sld xmlns:a="http://schemas.openxmlformats.org/drawingml/2006/main" xmlns:r="http://schemas.openxmlformats.org/officeDocument/2006/relationships" xmlns:p="http://schemas.openxmlformats.org/presentationml/2006/main">
-  <p:cSld name="Slide 22">
-    <p:spTree>
-      <p:nvGrpSpPr>
-        <p:cNvPr id="1" name=""/>
-        <p:cNvGrpSpPr/>
-        <p:nvPr/>
-      </p:nvGrpSpPr>
-      <p:grpSpPr>
-        <a:xfrm>
-          <a:off x="0" y="0"/>
-          <a:ext cx="0" cy="0"/>
-          <a:chOff x="0" y="0"/>
-          <a:chExt cx="0" cy="0"/>
-        </a:xfrm>
-      </p:grpSpPr>
-      <p:sp>
-        <p:nvSpPr>
-          <p:cNvPr id="2" name="Text 0"/>
-          <p:cNvSpPr/>
-          <p:nvPr>
-            <p:ph idx="100" type="title" hasCustomPrompt="1"/>
-          </p:nvPr>
-        </p:nvSpPr>
-        <p:spPr>
-          <a:xfrm>
-            <a:off x="457200" y="274320"/>
-            <a:ext cx="8229600" cy="685800"/>
-          </a:xfrm>
-          <a:prstGeom prst="rect">
-            <a:avLst/>
-          </a:prstGeom>
-          <a:noFill/>
-          <a:ln/>
-        </p:spPr>
-        <p:txBody>
-          <a:bodyPr wrap="square" lIns="0" tIns="0" rIns="0" bIns="0" rtlCol="0" anchor="ctr"/>
-          <a:lstStyle/>
-          <a:p>
-            <a:pPr algn="l" indent="0" marL="0">
-              <a:buNone/>
-            </a:pPr>
-            <a:r>
-              <a:rPr lang="en-US" sz="3000" b="1" dirty="0">
-                <a:solidFill>
-                  <a:schemeClr val="bg1"/>
-                </a:solidFill>
-              </a:rPr>
-              <a:t>Bugs found while rebuilding</a:t>
-            </a:r>
-            <a:endParaRPr lang="en-US" sz="3000" dirty="0"/>
-          </a:p>
-        </p:txBody>
-      </p:sp>
-      <p:sp>
-        <p:nvSpPr>
-          <p:cNvPr id="3" name="card-168"/>
-          <p:cNvSpPr/>
-          <p:nvPr/>
-        </p:nvSpPr>
-        <p:spPr>
-          <a:xfrm>
-            <a:off x="457200" y="1234440"/>
-            <a:ext cx="2606040" cy="3108960"/>
-          </a:xfrm>
-          <a:prstGeom prst="roundRect">
-            <a:avLst>
-              <a:gd name="adj" fmla="val 2807"/>
-            </a:avLst>
-          </a:prstGeom>
-          <a:solidFill>
-            <a:schemeClr val="accent6"/>
-          </a:solidFill>
-          <a:ln/>
-        </p:spPr>
-      </p:sp>
-      <p:sp>
-        <p:nvSpPr>
-          <p:cNvPr id="4" name="icon-bg-169"/>
-          <p:cNvSpPr/>
-          <p:nvPr/>
-        </p:nvSpPr>
-        <p:spPr>
-          <a:xfrm>
-            <a:off x="685800" y="1463040"/>
-            <a:ext cx="548640" cy="548640"/>
-          </a:xfrm>
-          <a:prstGeom prst="ellipse">
-            <a:avLst/>
-          </a:prstGeom>
-          <a:solidFill>
-            <a:schemeClr val="accent1"/>
-          </a:solidFill>
-          <a:ln/>
-        </p:spPr>
-      </p:sp>
-      <p:pic>
-        <p:nvPicPr>
-          <p:cNvPr id="5" name="icon-170" descr="preencoded.png">    </p:cNvPr>
-          <p:cNvPicPr>
-            <a:picLocks noChangeAspect="1"/>
-          </p:cNvPicPr>
-          <p:nvPr/>
-        </p:nvPicPr>
-        <p:blipFill>
-          <a:blip r:embed="rId1"/>
-          <a:stretch>
-            <a:fillRect/>
-          </a:stretch>
-        </p:blipFill>
-        <p:spPr>
-          <a:xfrm>
-            <a:off x="806501" y="1583741"/>
-            <a:ext cx="307238" cy="307238"/>
-          </a:xfrm>
-          <a:prstGeom prst="rect">
-            <a:avLst/>
-          </a:prstGeom>
-        </p:spPr>
-      </p:pic>
-      <p:sp>
-        <p:nvSpPr>
-          <p:cNvPr id="6" name="text-171"/>
-          <p:cNvSpPr txBox="1"/>
-          <p:nvPr/>
-        </p:nvSpPr>
-        <p:spPr>
-          <a:xfrm>
-            <a:off x="685800" y="2194560"/>
-            <a:ext cx="2148840" cy="411480"/>
-          </a:xfrm>
-          <a:prstGeom prst="rect">
-            <a:avLst/>
-          </a:prstGeom>
-          <a:noFill/>
-          <a:ln/>
-        </p:spPr>
-        <p:txBody>
-          <a:bodyPr wrap="square" lIns="0" tIns="0" rIns="0" bIns="0" rtlCol="0" anchor="ctr"/>
-          <a:lstStyle/>
-          <a:p>
-            <a:pPr indent="0" marL="0">
-              <a:buNone/>
-            </a:pPr>
-            <a:r>
-              <a:rPr lang="en-US" sz="1800" b="1" dirty="0">
-                <a:solidFill>
-                  <a:schemeClr val="bg1"/>
-                </a:solidFill>
-                <a:latin typeface="Bahnschrift" pitchFamily="34" charset="0"/>
-                <a:ea typeface="Bahnschrift" pitchFamily="34" charset="-122"/>
-                <a:cs typeface="Bahnschrift" pitchFamily="34" charset="-120"/>
-              </a:rPr>
-              <a:t>Ordering race</a:t>
-            </a:r>
-            <a:endParaRPr lang="en-US" sz="1800" dirty="0"/>
-          </a:p>
-        </p:txBody>
-      </p:sp>
-      <p:sp>
-        <p:nvSpPr>
-          <p:cNvPr id="7" name="text-172"/>
-          <p:cNvSpPr txBox="1"/>
-          <p:nvPr/>
-        </p:nvSpPr>
-        <p:spPr>
-          <a:xfrm>
-            <a:off x="685800" y="2651760"/>
-            <a:ext cx="2148840" cy="1600200"/>
-          </a:xfrm>
-          <a:prstGeom prst="rect">
-            <a:avLst/>
-          </a:prstGeom>
-          <a:noFill/>
-          <a:ln/>
-        </p:spPr>
-        <p:txBody>
-          <a:bodyPr wrap="square" lIns="0" tIns="0" rIns="0" bIns="0" rtlCol="0" anchor="t"/>
-          <a:lstStyle/>
-          <a:p>
-            <a:pPr indent="0" marL="0">
-              <a:buNone/>
-            </a:pPr>
-            <a:r>
-              <a:rPr lang="en-US" sz="1400" dirty="0">
-                <a:solidFill>
-                  <a:schemeClr val="bg1"/>
-                </a:solidFill>
-                <a:latin typeface="Cambria" pitchFamily="34" charset="0"/>
-                <a:ea typeface="Cambria" pitchFamily="34" charset="-122"/>
-                <a:cs typeface="Cambria" pitchFamily="34" charset="-120"/>
-              </a:rPr>
-              <a:t>Threads saved results as they finished (e.g. 3, 1, 0, 2), but merging assumed order 0 to 3. Keypoints could land in the wrong quadrant.</a:t>
-            </a:r>
-            <a:endParaRPr lang="en-US" sz="1400" dirty="0"/>
-          </a:p>
-        </p:txBody>
-      </p:sp>
-      <p:sp>
-        <p:nvSpPr>
-          <p:cNvPr id="8" name="card-173"/>
-          <p:cNvSpPr/>
-          <p:nvPr/>
-        </p:nvSpPr>
-        <p:spPr>
-          <a:xfrm>
-            <a:off x="3246120" y="1234440"/>
-            <a:ext cx="2606040" cy="3108960"/>
-          </a:xfrm>
-          <a:prstGeom prst="roundRect">
-            <a:avLst>
-              <a:gd name="adj" fmla="val 2807"/>
-            </a:avLst>
-          </a:prstGeom>
-          <a:solidFill>
-            <a:schemeClr val="accent6"/>
-          </a:solidFill>
-          <a:ln/>
-        </p:spPr>
-      </p:sp>
-      <p:sp>
-        <p:nvSpPr>
-          <p:cNvPr id="9" name="icon-bg-174"/>
-          <p:cNvSpPr/>
-          <p:nvPr/>
-        </p:nvSpPr>
-        <p:spPr>
-          <a:xfrm>
-            <a:off x="3474720" y="1463040"/>
-            <a:ext cx="548640" cy="548640"/>
-          </a:xfrm>
-          <a:prstGeom prst="ellipse">
-            <a:avLst/>
-          </a:prstGeom>
-          <a:solidFill>
-            <a:schemeClr val="accent1"/>
-          </a:solidFill>
-          <a:ln/>
-        </p:spPr>
-      </p:sp>
-      <p:pic>
-        <p:nvPicPr>
-          <p:cNvPr id="10" name="icon-175" descr="preencoded.png">    </p:cNvPr>
-          <p:cNvPicPr>
-            <a:picLocks noChangeAspect="1"/>
-          </p:cNvPicPr>
-          <p:nvPr/>
-        </p:nvPicPr>
-        <p:blipFill>
-          <a:blip r:embed="rId2"/>
-          <a:stretch>
-            <a:fillRect/>
-          </a:stretch>
-        </p:blipFill>
-        <p:spPr>
-          <a:xfrm>
-            <a:off x="3595421" y="1583741"/>
-            <a:ext cx="307238" cy="307238"/>
-          </a:xfrm>
-          <a:prstGeom prst="rect">
-            <a:avLst/>
-          </a:prstGeom>
-        </p:spPr>
-      </p:pic>
-      <p:sp>
-        <p:nvSpPr>
-          <p:cNvPr id="11" name="text-176"/>
-          <p:cNvSpPr txBox="1"/>
-          <p:nvPr/>
-        </p:nvSpPr>
-        <p:spPr>
-          <a:xfrm>
-            <a:off x="3474720" y="2194560"/>
-            <a:ext cx="2148840" cy="411480"/>
-          </a:xfrm>
-          <a:prstGeom prst="rect">
-            <a:avLst/>
-          </a:prstGeom>
-          <a:noFill/>
-          <a:ln/>
-        </p:spPr>
-        <p:txBody>
-          <a:bodyPr wrap="square" lIns="0" tIns="0" rIns="0" bIns="0" rtlCol="0" anchor="ctr"/>
-          <a:lstStyle/>
-          <a:p>
-            <a:pPr indent="0" marL="0">
-              <a:buNone/>
-            </a:pPr>
-            <a:r>
-              <a:rPr lang="en-US" sz="1800" b="1" dirty="0">
-                <a:solidFill>
-                  <a:schemeClr val="bg1"/>
-                </a:solidFill>
-                <a:latin typeface="Bahnschrift" pitchFamily="34" charset="0"/>
-                <a:ea typeface="Bahnschrift" pitchFamily="34" charset="-122"/>
-                <a:cs typeface="Bahnschrift" pitchFamily="34" charset="-120"/>
-              </a:rPr>
-              <a:t>Pickling error</a:t>
-            </a:r>
-            <a:endParaRPr lang="en-US" sz="1800" dirty="0"/>
-          </a:p>
-        </p:txBody>
-      </p:sp>
-      <p:sp>
-        <p:nvSpPr>
-          <p:cNvPr id="12" name="text-177"/>
-          <p:cNvSpPr txBox="1"/>
-          <p:nvPr/>
-        </p:nvSpPr>
-        <p:spPr>
-          <a:xfrm>
-            <a:off x="3474720" y="2651760"/>
-            <a:ext cx="2148840" cy="1600200"/>
-          </a:xfrm>
-          <a:prstGeom prst="rect">
-            <a:avLst/>
-          </a:prstGeom>
-          <a:noFill/>
-          <a:ln/>
-        </p:spPr>
-        <p:txBody>
-          <a:bodyPr wrap="square" lIns="0" tIns="0" rIns="0" bIns="0" rtlCol="0" anchor="t"/>
-          <a:lstStyle/>
-          <a:p>
-            <a:pPr indent="0" marL="0">
-              <a:buNone/>
-            </a:pPr>
-            <a:r>
-              <a:rPr lang="en-US" sz="1400" dirty="0">
-                <a:solidFill>
-                  <a:schemeClr val="bg1"/>
-                </a:solidFill>
-                <a:latin typeface="Cambria" pitchFamily="34" charset="0"/>
-                <a:ea typeface="Cambria" pitchFamily="34" charset="-122"/>
-                <a:cs typeface="Cambria" pitchFamily="34" charset="-120"/>
-              </a:rPr>
-              <a:t>cv2.KeyPoint can't be pickled, which blocks saving results and multiprocessing. Fixed by passing plain tuples.</a:t>
-            </a:r>
-            <a:endParaRPr lang="en-US" sz="1400" dirty="0"/>
-          </a:p>
-        </p:txBody>
-      </p:sp>
-      <p:sp>
-        <p:nvSpPr>
-          <p:cNvPr id="13" name="card-178"/>
-          <p:cNvSpPr/>
-          <p:nvPr/>
-        </p:nvSpPr>
-        <p:spPr>
-          <a:xfrm>
-            <a:off x="6035040" y="1234440"/>
-            <a:ext cx="2606040" cy="3108960"/>
-          </a:xfrm>
-          <a:prstGeom prst="roundRect">
-            <a:avLst>
-              <a:gd name="adj" fmla="val 2807"/>
-            </a:avLst>
-          </a:prstGeom>
-          <a:solidFill>
-            <a:schemeClr val="accent6"/>
-          </a:solidFill>
-          <a:ln/>
-        </p:spPr>
-      </p:sp>
-      <p:sp>
-        <p:nvSpPr>
-          <p:cNvPr id="14" name="icon-bg-179"/>
-          <p:cNvSpPr/>
-          <p:nvPr/>
-        </p:nvSpPr>
-        <p:spPr>
-          <a:xfrm>
-            <a:off x="6263640" y="1463040"/>
-            <a:ext cx="548640" cy="548640"/>
-          </a:xfrm>
-          <a:prstGeom prst="ellipse">
-            <a:avLst/>
-          </a:prstGeom>
-          <a:solidFill>
-            <a:schemeClr val="accent1"/>
-          </a:solidFill>
-          <a:ln/>
-        </p:spPr>
-      </p:sp>
-      <p:pic>
-        <p:nvPicPr>
-          <p:cNvPr id="15" name="icon-180" descr="preencoded.png">    </p:cNvPr>
-          <p:cNvPicPr>
-            <a:picLocks noChangeAspect="1"/>
-          </p:cNvPicPr>
-          <p:nvPr/>
-        </p:nvPicPr>
-        <p:blipFill>
-          <a:blip r:embed="rId3"/>
-          <a:stretch>
-            <a:fillRect/>
-          </a:stretch>
-        </p:blipFill>
-        <p:spPr>
-          <a:xfrm>
-            <a:off x="6384341" y="1583741"/>
-            <a:ext cx="307238" cy="307238"/>
-          </a:xfrm>
-          <a:prstGeom prst="rect">
-            <a:avLst/>
-          </a:prstGeom>
-        </p:spPr>
-      </p:pic>
-      <p:sp>
-        <p:nvSpPr>
-          <p:cNvPr id="16" name="text-181"/>
-          <p:cNvSpPr txBox="1"/>
-          <p:nvPr/>
-        </p:nvSpPr>
-        <p:spPr>
-          <a:xfrm>
-            <a:off x="6263640" y="2194560"/>
-            <a:ext cx="2148840" cy="411480"/>
-          </a:xfrm>
-          <a:prstGeom prst="rect">
-            <a:avLst/>
-          </a:prstGeom>
-          <a:noFill/>
-          <a:ln/>
-        </p:spPr>
-        <p:txBody>
-          <a:bodyPr wrap="square" lIns="0" tIns="0" rIns="0" bIns="0" rtlCol="0" anchor="ctr"/>
-          <a:lstStyle/>
-          <a:p>
-            <a:pPr indent="0" marL="0">
-              <a:buNone/>
-            </a:pPr>
-            <a:r>
-              <a:rPr lang="en-US" sz="1800" b="1" dirty="0">
-                <a:solidFill>
-                  <a:schemeClr val="bg1"/>
-                </a:solidFill>
-                <a:latin typeface="Bahnschrift" pitchFamily="34" charset="0"/>
-                <a:ea typeface="Bahnschrift" pitchFamily="34" charset="-122"/>
-                <a:cs typeface="Bahnschrift" pitchFamily="34" charset="-120"/>
-              </a:rPr>
-              <a:t>Matching crash</a:t>
-            </a:r>
-            <a:endParaRPr lang="en-US" sz="1800" dirty="0"/>
-          </a:p>
-        </p:txBody>
-      </p:sp>
-      <p:sp>
-        <p:nvSpPr>
-          <p:cNvPr id="17" name="text-182"/>
-          <p:cNvSpPr txBox="1"/>
-          <p:nvPr/>
-        </p:nvSpPr>
-        <p:spPr>
-          <a:xfrm>
-            <a:off x="6263640" y="2651760"/>
-            <a:ext cx="2148840" cy="1600200"/>
-          </a:xfrm>
-          <a:prstGeom prst="rect">
-            <a:avLst/>
-          </a:prstGeom>
-          <a:noFill/>
-          <a:ln/>
-        </p:spPr>
-        <p:txBody>
-          <a:bodyPr wrap="square" lIns="0" tIns="0" rIns="0" bIns="0" rtlCol="0" anchor="t"/>
-          <a:lstStyle/>
-          <a:p>
-            <a:pPr indent="0" marL="0">
-              <a:buNone/>
-            </a:pPr>
-            <a:r>
-              <a:rPr lang="en-US" sz="1400" dirty="0">
-                <a:solidFill>
-                  <a:schemeClr val="bg1"/>
-                </a:solidFill>
-                <a:latin typeface="Cambria" pitchFamily="34" charset="0"/>
-                <a:ea typeface="Cambria" pitchFamily="34" charset="-122"/>
-                <a:cs typeface="Cambria" pitchFamily="34" charset="-120"/>
-              </a:rPr>
-              <a:t>The retrieval step passed the wrong image shape to perspectiveTransform.</a:t>
             </a:r>
             <a:endParaRPr lang="en-US" sz="1400" dirty="0"/>
           </a:p>
@@ -17676,14 +18292,118 @@
       </p:grpSpPr>
       <p:sp>
         <p:nvSpPr>
-          <p:cNvPr id="2" name="text-183"/>
+          <p:cNvPr id="2" name="Text 0"/>
+          <p:cNvSpPr/>
+          <p:nvPr>
+            <p:ph idx="100" type="title" hasCustomPrompt="1"/>
+          </p:nvPr>
+        </p:nvSpPr>
+        <p:spPr>
+          <a:xfrm>
+            <a:off x="457200" y="274320"/>
+            <a:ext cx="8229600" cy="685800"/>
+          </a:xfrm>
+          <a:prstGeom prst="rect">
+            <a:avLst/>
+          </a:prstGeom>
+          <a:noFill/>
+          <a:ln/>
+        </p:spPr>
+        <p:txBody>
+          <a:bodyPr wrap="square" lIns="0" tIns="0" rIns="0" bIns="0" rtlCol="0" anchor="ctr"/>
+          <a:lstStyle/>
+          <a:p>
+            <a:pPr algn="l" indent="0" marL="0">
+              <a:buNone/>
+            </a:pPr>
+            <a:r>
+              <a:rPr lang="en-US" sz="3000" b="1" dirty="0">
+                <a:solidFill>
+                  <a:schemeClr val="bg1"/>
+                </a:solidFill>
+              </a:rPr>
+              <a:t>Bugs found while rebuilding</a:t>
+            </a:r>
+            <a:endParaRPr lang="en-US" sz="3000" dirty="0"/>
+          </a:p>
+        </p:txBody>
+      </p:sp>
+      <p:sp>
+        <p:nvSpPr>
+          <p:cNvPr id="3" name="card-177"/>
+          <p:cNvSpPr/>
+          <p:nvPr/>
+        </p:nvSpPr>
+        <p:spPr>
+          <a:xfrm>
+            <a:off x="457200" y="1234440"/>
+            <a:ext cx="2606040" cy="3108960"/>
+          </a:xfrm>
+          <a:prstGeom prst="roundRect">
+            <a:avLst>
+              <a:gd name="adj" fmla="val 2807"/>
+            </a:avLst>
+          </a:prstGeom>
+          <a:solidFill>
+            <a:schemeClr val="accent6"/>
+          </a:solidFill>
+          <a:ln/>
+        </p:spPr>
+      </p:sp>
+      <p:sp>
+        <p:nvSpPr>
+          <p:cNvPr id="4" name="icon-bg-178"/>
+          <p:cNvSpPr/>
+          <p:nvPr/>
+        </p:nvSpPr>
+        <p:spPr>
+          <a:xfrm>
+            <a:off x="685800" y="1463040"/>
+            <a:ext cx="548640" cy="548640"/>
+          </a:xfrm>
+          <a:prstGeom prst="ellipse">
+            <a:avLst/>
+          </a:prstGeom>
+          <a:solidFill>
+            <a:schemeClr val="accent1"/>
+          </a:solidFill>
+          <a:ln/>
+        </p:spPr>
+      </p:sp>
+      <p:pic>
+        <p:nvPicPr>
+          <p:cNvPr id="5" name="icon-179" descr="preencoded.png">    </p:cNvPr>
+          <p:cNvPicPr>
+            <a:picLocks noChangeAspect="1"/>
+          </p:cNvPicPr>
+          <p:nvPr/>
+        </p:nvPicPr>
+        <p:blipFill>
+          <a:blip r:embed="rId1"/>
+          <a:stretch>
+            <a:fillRect/>
+          </a:stretch>
+        </p:blipFill>
+        <p:spPr>
+          <a:xfrm>
+            <a:off x="806501" y="1583741"/>
+            <a:ext cx="307238" cy="307238"/>
+          </a:xfrm>
+          <a:prstGeom prst="rect">
+            <a:avLst/>
+          </a:prstGeom>
+        </p:spPr>
+      </p:pic>
+      <p:sp>
+        <p:nvSpPr>
+          <p:cNvPr id="6" name="text-180"/>
           <p:cNvSpPr txBox="1"/>
           <p:nvPr/>
         </p:nvSpPr>
         <p:spPr>
           <a:xfrm>
-            <a:off x="548640" y="1554480"/>
-            <a:ext cx="8046720" cy="411480"/>
+            <a:off x="685800" y="2194560"/>
+            <a:ext cx="2148840" cy="411480"/>
           </a:xfrm>
           <a:prstGeom prst="rect">
             <a:avLst/>
@@ -17699,32 +18419,135 @@
               <a:buNone/>
             </a:pPr>
             <a:r>
-              <a:rPr lang="en-US" sz="1800" dirty="0">
+              <a:rPr lang="en-US" sz="1800" b="1" dirty="0">
                 <a:solidFill>
-                  <a:schemeClr val="accent1"/>
+                  <a:schemeClr val="bg1"/>
+                </a:solidFill>
+                <a:latin typeface="Bahnschrift" pitchFamily="34" charset="0"/>
+                <a:ea typeface="Bahnschrift" pitchFamily="34" charset="-122"/>
+                <a:cs typeface="Bahnschrift" pitchFamily="34" charset="-120"/>
+              </a:rPr>
+              <a:t>Ordering race</a:t>
+            </a:r>
+            <a:endParaRPr lang="en-US" sz="1800" dirty="0"/>
+          </a:p>
+        </p:txBody>
+      </p:sp>
+      <p:sp>
+        <p:nvSpPr>
+          <p:cNvPr id="7" name="text-181"/>
+          <p:cNvSpPr txBox="1"/>
+          <p:nvPr/>
+        </p:nvSpPr>
+        <p:spPr>
+          <a:xfrm>
+            <a:off x="685800" y="2651760"/>
+            <a:ext cx="2148840" cy="1600200"/>
+          </a:xfrm>
+          <a:prstGeom prst="rect">
+            <a:avLst/>
+          </a:prstGeom>
+          <a:noFill/>
+          <a:ln/>
+        </p:spPr>
+        <p:txBody>
+          <a:bodyPr wrap="square" lIns="0" tIns="0" rIns="0" bIns="0" rtlCol="0" anchor="t"/>
+          <a:lstStyle/>
+          <a:p>
+            <a:pPr indent="0" marL="0">
+              <a:buNone/>
+            </a:pPr>
+            <a:r>
+              <a:rPr lang="en-US" sz="1400" dirty="0">
+                <a:solidFill>
+                  <a:schemeClr val="bg1"/>
                 </a:solidFill>
                 <a:latin typeface="Cambria" pitchFamily="34" charset="0"/>
                 <a:ea typeface="Cambria" pitchFamily="34" charset="-122"/>
                 <a:cs typeface="Cambria" pitchFamily="34" charset="-120"/>
               </a:rPr>
-              <a:t>Part 5</a:t>
+              <a:t>Threads saved results as they finished (e.g. 3, 1, 0, 2), but merging assumed order 0 to 3. Keypoints could land in the wrong quadrant.</a:t>
             </a:r>
-            <a:endParaRPr lang="en-US" sz="1800" dirty="0"/>
-          </a:p>
-        </p:txBody>
-      </p:sp>
-      <p:sp>
-        <p:nvSpPr>
-          <p:cNvPr id="3" name="Text 0"/>
+            <a:endParaRPr lang="en-US" sz="1400" dirty="0"/>
+          </a:p>
+        </p:txBody>
+      </p:sp>
+      <p:sp>
+        <p:nvSpPr>
+          <p:cNvPr id="8" name="card-182"/>
           <p:cNvSpPr/>
-          <p:nvPr>
-            <p:ph idx="100" type="title" hasCustomPrompt="1"/>
-          </p:nvPr>
-        </p:nvSpPr>
-        <p:spPr>
-          <a:xfrm>
-            <a:off x="548640" y="2011680"/>
-            <a:ext cx="8046720" cy="1097280"/>
+          <p:nvPr/>
+        </p:nvSpPr>
+        <p:spPr>
+          <a:xfrm>
+            <a:off x="3246120" y="1234440"/>
+            <a:ext cx="2606040" cy="3108960"/>
+          </a:xfrm>
+          <a:prstGeom prst="roundRect">
+            <a:avLst>
+              <a:gd name="adj" fmla="val 2807"/>
+            </a:avLst>
+          </a:prstGeom>
+          <a:solidFill>
+            <a:schemeClr val="accent6"/>
+          </a:solidFill>
+          <a:ln/>
+        </p:spPr>
+      </p:sp>
+      <p:sp>
+        <p:nvSpPr>
+          <p:cNvPr id="9" name="icon-bg-183"/>
+          <p:cNvSpPr/>
+          <p:nvPr/>
+        </p:nvSpPr>
+        <p:spPr>
+          <a:xfrm>
+            <a:off x="3474720" y="1463040"/>
+            <a:ext cx="548640" cy="548640"/>
+          </a:xfrm>
+          <a:prstGeom prst="ellipse">
+            <a:avLst/>
+          </a:prstGeom>
+          <a:solidFill>
+            <a:schemeClr val="accent1"/>
+          </a:solidFill>
+          <a:ln/>
+        </p:spPr>
+      </p:sp>
+      <p:pic>
+        <p:nvPicPr>
+          <p:cNvPr id="10" name="icon-184" descr="preencoded.png">    </p:cNvPr>
+          <p:cNvPicPr>
+            <a:picLocks noChangeAspect="1"/>
+          </p:cNvPicPr>
+          <p:nvPr/>
+        </p:nvPicPr>
+        <p:blipFill>
+          <a:blip r:embed="rId2"/>
+          <a:stretch>
+            <a:fillRect/>
+          </a:stretch>
+        </p:blipFill>
+        <p:spPr>
+          <a:xfrm>
+            <a:off x="3595421" y="1583741"/>
+            <a:ext cx="307238" cy="307238"/>
+          </a:xfrm>
+          <a:prstGeom prst="rect">
+            <a:avLst/>
+          </a:prstGeom>
+        </p:spPr>
+      </p:pic>
+      <p:sp>
+        <p:nvSpPr>
+          <p:cNvPr id="11" name="text-185"/>
+          <p:cNvSpPr txBox="1"/>
+          <p:nvPr/>
+        </p:nvSpPr>
+        <p:spPr>
+          <a:xfrm>
+            <a:off x="3474720" y="2194560"/>
+            <a:ext cx="2148840" cy="411480"/>
           </a:xfrm>
           <a:prstGeom prst="rect">
             <a:avLst/>
@@ -17733,21 +18556,207 @@
           <a:ln/>
         </p:spPr>
         <p:txBody>
-          <a:bodyPr wrap="square" lIns="0" tIns="0" rIns="0" bIns="0" rtlCol="0" anchor="t"/>
+          <a:bodyPr wrap="square" lIns="0" tIns="0" rIns="0" bIns="0" rtlCol="0" anchor="ctr"/>
           <a:lstStyle/>
           <a:p>
-            <a:pPr algn="l" indent="0" marL="0">
+            <a:pPr indent="0" marL="0">
               <a:buNone/>
             </a:pPr>
             <a:r>
-              <a:rPr lang="en-US" sz="4000" b="1" dirty="0">
+              <a:rPr lang="en-US" sz="1800" b="1" dirty="0">
                 <a:solidFill>
                   <a:schemeClr val="bg1"/>
                 </a:solidFill>
+                <a:latin typeface="Bahnschrift" pitchFamily="34" charset="0"/>
+                <a:ea typeface="Bahnschrift" pitchFamily="34" charset="-122"/>
+                <a:cs typeface="Bahnschrift" pitchFamily="34" charset="-120"/>
               </a:rPr>
-              <a:t>Conclusions and future work</a:t>
+              <a:t>Pickling error</a:t>
             </a:r>
-            <a:endParaRPr lang="en-US" sz="4000" dirty="0"/>
+            <a:endParaRPr lang="en-US" sz="1800" dirty="0"/>
+          </a:p>
+        </p:txBody>
+      </p:sp>
+      <p:sp>
+        <p:nvSpPr>
+          <p:cNvPr id="12" name="text-186"/>
+          <p:cNvSpPr txBox="1"/>
+          <p:nvPr/>
+        </p:nvSpPr>
+        <p:spPr>
+          <a:xfrm>
+            <a:off x="3474720" y="2651760"/>
+            <a:ext cx="2148840" cy="1600200"/>
+          </a:xfrm>
+          <a:prstGeom prst="rect">
+            <a:avLst/>
+          </a:prstGeom>
+          <a:noFill/>
+          <a:ln/>
+        </p:spPr>
+        <p:txBody>
+          <a:bodyPr wrap="square" lIns="0" tIns="0" rIns="0" bIns="0" rtlCol="0" anchor="t"/>
+          <a:lstStyle/>
+          <a:p>
+            <a:pPr indent="0" marL="0">
+              <a:buNone/>
+            </a:pPr>
+            <a:r>
+              <a:rPr lang="en-US" sz="1400" dirty="0">
+                <a:solidFill>
+                  <a:schemeClr val="bg1"/>
+                </a:solidFill>
+                <a:latin typeface="Cambria" pitchFamily="34" charset="0"/>
+                <a:ea typeface="Cambria" pitchFamily="34" charset="-122"/>
+                <a:cs typeface="Cambria" pitchFamily="34" charset="-120"/>
+              </a:rPr>
+              <a:t>cv2.KeyPoint can't be pickled, which blocks saving results and multiprocessing. Fixed by passing plain tuples.</a:t>
+            </a:r>
+            <a:endParaRPr lang="en-US" sz="1400" dirty="0"/>
+          </a:p>
+        </p:txBody>
+      </p:sp>
+      <p:sp>
+        <p:nvSpPr>
+          <p:cNvPr id="13" name="card-187"/>
+          <p:cNvSpPr/>
+          <p:nvPr/>
+        </p:nvSpPr>
+        <p:spPr>
+          <a:xfrm>
+            <a:off x="6035040" y="1234440"/>
+            <a:ext cx="2606040" cy="3108960"/>
+          </a:xfrm>
+          <a:prstGeom prst="roundRect">
+            <a:avLst>
+              <a:gd name="adj" fmla="val 2807"/>
+            </a:avLst>
+          </a:prstGeom>
+          <a:solidFill>
+            <a:schemeClr val="accent6"/>
+          </a:solidFill>
+          <a:ln/>
+        </p:spPr>
+      </p:sp>
+      <p:sp>
+        <p:nvSpPr>
+          <p:cNvPr id="14" name="icon-bg-188"/>
+          <p:cNvSpPr/>
+          <p:nvPr/>
+        </p:nvSpPr>
+        <p:spPr>
+          <a:xfrm>
+            <a:off x="6263640" y="1463040"/>
+            <a:ext cx="548640" cy="548640"/>
+          </a:xfrm>
+          <a:prstGeom prst="ellipse">
+            <a:avLst/>
+          </a:prstGeom>
+          <a:solidFill>
+            <a:schemeClr val="accent1"/>
+          </a:solidFill>
+          <a:ln/>
+        </p:spPr>
+      </p:sp>
+      <p:pic>
+        <p:nvPicPr>
+          <p:cNvPr id="15" name="icon-189" descr="preencoded.png">    </p:cNvPr>
+          <p:cNvPicPr>
+            <a:picLocks noChangeAspect="1"/>
+          </p:cNvPicPr>
+          <p:nvPr/>
+        </p:nvPicPr>
+        <p:blipFill>
+          <a:blip r:embed="rId3"/>
+          <a:stretch>
+            <a:fillRect/>
+          </a:stretch>
+        </p:blipFill>
+        <p:spPr>
+          <a:xfrm>
+            <a:off x="6384341" y="1583741"/>
+            <a:ext cx="307238" cy="307238"/>
+          </a:xfrm>
+          <a:prstGeom prst="rect">
+            <a:avLst/>
+          </a:prstGeom>
+        </p:spPr>
+      </p:pic>
+      <p:sp>
+        <p:nvSpPr>
+          <p:cNvPr id="16" name="text-190"/>
+          <p:cNvSpPr txBox="1"/>
+          <p:nvPr/>
+        </p:nvSpPr>
+        <p:spPr>
+          <a:xfrm>
+            <a:off x="6263640" y="2194560"/>
+            <a:ext cx="2148840" cy="411480"/>
+          </a:xfrm>
+          <a:prstGeom prst="rect">
+            <a:avLst/>
+          </a:prstGeom>
+          <a:noFill/>
+          <a:ln/>
+        </p:spPr>
+        <p:txBody>
+          <a:bodyPr wrap="square" lIns="0" tIns="0" rIns="0" bIns="0" rtlCol="0" anchor="ctr"/>
+          <a:lstStyle/>
+          <a:p>
+            <a:pPr indent="0" marL="0">
+              <a:buNone/>
+            </a:pPr>
+            <a:r>
+              <a:rPr lang="en-US" sz="1800" b="1" dirty="0">
+                <a:solidFill>
+                  <a:schemeClr val="bg1"/>
+                </a:solidFill>
+                <a:latin typeface="Bahnschrift" pitchFamily="34" charset="0"/>
+                <a:ea typeface="Bahnschrift" pitchFamily="34" charset="-122"/>
+                <a:cs typeface="Bahnschrift" pitchFamily="34" charset="-120"/>
+              </a:rPr>
+              <a:t>Matching crash</a:t>
+            </a:r>
+            <a:endParaRPr lang="en-US" sz="1800" dirty="0"/>
+          </a:p>
+        </p:txBody>
+      </p:sp>
+      <p:sp>
+        <p:nvSpPr>
+          <p:cNvPr id="17" name="text-191"/>
+          <p:cNvSpPr txBox="1"/>
+          <p:nvPr/>
+        </p:nvSpPr>
+        <p:spPr>
+          <a:xfrm>
+            <a:off x="6263640" y="2651760"/>
+            <a:ext cx="2148840" cy="1600200"/>
+          </a:xfrm>
+          <a:prstGeom prst="rect">
+            <a:avLst/>
+          </a:prstGeom>
+          <a:noFill/>
+          <a:ln/>
+        </p:spPr>
+        <p:txBody>
+          <a:bodyPr wrap="square" lIns="0" tIns="0" rIns="0" bIns="0" rtlCol="0" anchor="t"/>
+          <a:lstStyle/>
+          <a:p>
+            <a:pPr indent="0" marL="0">
+              <a:buNone/>
+            </a:pPr>
+            <a:r>
+              <a:rPr lang="en-US" sz="1400" dirty="0">
+                <a:solidFill>
+                  <a:schemeClr val="bg1"/>
+                </a:solidFill>
+                <a:latin typeface="Cambria" pitchFamily="34" charset="0"/>
+                <a:ea typeface="Cambria" pitchFamily="34" charset="-122"/>
+                <a:cs typeface="Cambria" pitchFamily="34" charset="-120"/>
+              </a:rPr>
+              <a:t>The retrieval step passed the wrong image shape to perspectiveTransform.</a:t>
+            </a:r>
+            <a:endParaRPr lang="en-US" sz="1400" dirty="0"/>
           </a:p>
         </p:txBody>
       </p:sp>
@@ -17823,111 +18832,14 @@
       </p:grpSpPr>
       <p:sp>
         <p:nvSpPr>
-          <p:cNvPr id="2" name="Text 0"/>
-          <p:cNvSpPr/>
-          <p:nvPr>
-            <p:ph idx="100" type="title" hasCustomPrompt="1"/>
-          </p:nvPr>
-        </p:nvSpPr>
-        <p:spPr>
-          <a:xfrm>
-            <a:off x="457200" y="274320"/>
-            <a:ext cx="8229600" cy="685800"/>
-          </a:xfrm>
-          <a:prstGeom prst="rect">
-            <a:avLst/>
-          </a:prstGeom>
-          <a:noFill/>
-          <a:ln/>
-        </p:spPr>
-        <p:txBody>
-          <a:bodyPr wrap="square" lIns="0" tIns="0" rIns="0" bIns="0" rtlCol="0" anchor="ctr"/>
-          <a:lstStyle/>
-          <a:p>
-            <a:pPr algn="l" indent="0" marL="0">
-              <a:buNone/>
-            </a:pPr>
-            <a:r>
-              <a:rPr lang="en-US" sz="3000" b="1" dirty="0">
-                <a:solidFill>
-                  <a:schemeClr val="bg1"/>
-                </a:solidFill>
-              </a:rPr>
-              <a:t>Conclusions</a:t>
-            </a:r>
-            <a:endParaRPr lang="en-US" sz="3000" dirty="0"/>
-          </a:p>
-        </p:txBody>
-      </p:sp>
-      <p:sp>
-        <p:nvSpPr>
-          <p:cNvPr id="3" name="num-184"/>
-          <p:cNvSpPr/>
-          <p:nvPr/>
-        </p:nvSpPr>
-        <p:spPr>
-          <a:xfrm>
-            <a:off x="457200" y="1280160"/>
-            <a:ext cx="548640" cy="548640"/>
-          </a:xfrm>
-          <a:prstGeom prst="ellipse">
-            <a:avLst/>
-          </a:prstGeom>
-          <a:solidFill>
-            <a:schemeClr val="accent1"/>
-          </a:solidFill>
-          <a:ln/>
-        </p:spPr>
-      </p:sp>
-      <p:sp>
-        <p:nvSpPr>
-          <p:cNvPr id="4" name="text-185"/>
+          <p:cNvPr id="2" name="text-192"/>
           <p:cNvSpPr txBox="1"/>
           <p:nvPr/>
         </p:nvSpPr>
         <p:spPr>
           <a:xfrm>
-            <a:off x="457200" y="1280160"/>
-            <a:ext cx="548640" cy="548640"/>
-          </a:xfrm>
-          <a:prstGeom prst="rect">
-            <a:avLst/>
-          </a:prstGeom>
-          <a:noFill/>
-          <a:ln/>
-        </p:spPr>
-        <p:txBody>
-          <a:bodyPr wrap="square" lIns="0" tIns="0" rIns="0" bIns="0" rtlCol="0" anchor="ctr"/>
-          <a:lstStyle/>
-          <a:p>
-            <a:pPr algn="ctr" indent="0" marL="0">
-              <a:buNone/>
-            </a:pPr>
-            <a:r>
-              <a:rPr lang="en-US" sz="2200" b="1" dirty="0">
-                <a:solidFill>
-                  <a:schemeClr val="tx1"/>
-                </a:solidFill>
-                <a:latin typeface="Bahnschrift" pitchFamily="34" charset="0"/>
-                <a:ea typeface="Bahnschrift" pitchFamily="34" charset="-122"/>
-                <a:cs typeface="Bahnschrift" pitchFamily="34" charset="-120"/>
-              </a:rPr>
-              <a:t>1</a:t>
-            </a:r>
-            <a:endParaRPr lang="en-US" sz="2200" dirty="0"/>
-          </a:p>
-        </p:txBody>
-      </p:sp>
-      <p:sp>
-        <p:nvSpPr>
-          <p:cNvPr id="5" name="text-186"/>
-          <p:cNvSpPr txBox="1"/>
-          <p:nvPr/>
-        </p:nvSpPr>
-        <p:spPr>
-          <a:xfrm>
-            <a:off x="1234440" y="1188720"/>
-            <a:ext cx="7406640" cy="411480"/>
+            <a:off x="548640" y="1554480"/>
+            <a:ext cx="8046720" cy="411480"/>
           </a:xfrm>
           <a:prstGeom prst="rect">
             <a:avLst/>
@@ -17943,89 +18855,32 @@
               <a:buNone/>
             </a:pPr>
             <a:r>
-              <a:rPr lang="en-US" sz="2000" b="1" dirty="0">
+              <a:rPr lang="en-US" sz="1800" dirty="0">
                 <a:solidFill>
-                  <a:schemeClr val="bg1"/>
-                </a:solidFill>
-                <a:latin typeface="Bahnschrift" pitchFamily="34" charset="0"/>
-                <a:ea typeface="Bahnschrift" pitchFamily="34" charset="-122"/>
-                <a:cs typeface="Bahnschrift" pitchFamily="34" charset="-120"/>
-              </a:rPr>
-              <a:t>The GIL, not the idea, sank 2023</a:t>
-            </a:r>
-            <a:endParaRPr lang="en-US" sz="2000" dirty="0"/>
-          </a:p>
-        </p:txBody>
-      </p:sp>
-      <p:sp>
-        <p:nvSpPr>
-          <p:cNvPr id="6" name="text-187"/>
-          <p:cNvSpPr txBox="1"/>
-          <p:nvPr/>
-        </p:nvSpPr>
-        <p:spPr>
-          <a:xfrm>
-            <a:off x="1234440" y="1600200"/>
-            <a:ext cx="7406640" cy="365760"/>
-          </a:xfrm>
-          <a:prstGeom prst="rect">
-            <a:avLst/>
-          </a:prstGeom>
-          <a:noFill/>
-          <a:ln/>
-        </p:spPr>
-        <p:txBody>
-          <a:bodyPr wrap="square" lIns="0" tIns="0" rIns="0" bIns="0" rtlCol="0" anchor="ctr"/>
-          <a:lstStyle/>
-          <a:p>
-            <a:pPr indent="0" marL="0">
-              <a:buNone/>
-            </a:pPr>
-            <a:r>
-              <a:rPr lang="en-US" sz="1500" dirty="0">
-                <a:solidFill>
-                  <a:schemeClr val="bg2"/>
+                  <a:schemeClr val="accent1"/>
                 </a:solidFill>
                 <a:latin typeface="Cambria" pitchFamily="34" charset="0"/>
                 <a:ea typeface="Cambria" pitchFamily="34" charset="-122"/>
                 <a:cs typeface="Cambria" pitchFamily="34" charset="-120"/>
               </a:rPr>
-              <a:t>Pure-Python loops on threads never used more than one core.</a:t>
+              <a:t>Part 5</a:t>
             </a:r>
-            <a:endParaRPr lang="en-US" sz="1500" dirty="0"/>
-          </a:p>
-        </p:txBody>
-      </p:sp>
-      <p:sp>
-        <p:nvSpPr>
-          <p:cNvPr id="7" name="num-188"/>
+            <a:endParaRPr lang="en-US" sz="1800" dirty="0"/>
+          </a:p>
+        </p:txBody>
+      </p:sp>
+      <p:sp>
+        <p:nvSpPr>
+          <p:cNvPr id="3" name="Text 0"/>
           <p:cNvSpPr/>
-          <p:nvPr/>
-        </p:nvSpPr>
-        <p:spPr>
-          <a:xfrm>
-            <a:off x="457200" y="2377440"/>
-            <a:ext cx="548640" cy="548640"/>
-          </a:xfrm>
-          <a:prstGeom prst="ellipse">
-            <a:avLst/>
-          </a:prstGeom>
-          <a:solidFill>
-            <a:schemeClr val="accent1"/>
-          </a:solidFill>
-          <a:ln/>
-        </p:spPr>
-      </p:sp>
-      <p:sp>
-        <p:nvSpPr>
-          <p:cNvPr id="8" name="text-189"/>
-          <p:cNvSpPr txBox="1"/>
-          <p:nvPr/>
-        </p:nvSpPr>
-        <p:spPr>
-          <a:xfrm>
-            <a:off x="457200" y="2377440"/>
-            <a:ext cx="548640" cy="548640"/>
+          <p:nvPr>
+            <p:ph idx="100" type="title" hasCustomPrompt="1"/>
+          </p:nvPr>
+        </p:nvSpPr>
+        <p:spPr>
+          <a:xfrm>
+            <a:off x="548640" y="2011680"/>
+            <a:ext cx="8046720" cy="1097280"/>
           </a:xfrm>
           <a:prstGeom prst="rect">
             <a:avLst/>
@@ -18034,239 +18889,21 @@
           <a:ln/>
         </p:spPr>
         <p:txBody>
-          <a:bodyPr wrap="square" lIns="0" tIns="0" rIns="0" bIns="0" rtlCol="0" anchor="ctr"/>
+          <a:bodyPr wrap="square" lIns="0" tIns="0" rIns="0" bIns="0" rtlCol="0" anchor="t"/>
           <a:lstStyle/>
           <a:p>
-            <a:pPr algn="ctr" indent="0" marL="0">
+            <a:pPr algn="l" indent="0" marL="0">
               <a:buNone/>
             </a:pPr>
             <a:r>
-              <a:rPr lang="en-US" sz="2200" b="1" dirty="0">
-                <a:solidFill>
-                  <a:schemeClr val="tx1"/>
-                </a:solidFill>
-                <a:latin typeface="Bahnschrift" pitchFamily="34" charset="0"/>
-                <a:ea typeface="Bahnschrift" pitchFamily="34" charset="-122"/>
-                <a:cs typeface="Bahnschrift" pitchFamily="34" charset="-120"/>
-              </a:rPr>
-              <a:t>2</a:t>
-            </a:r>
-            <a:endParaRPr lang="en-US" sz="2200" dirty="0"/>
-          </a:p>
-        </p:txBody>
-      </p:sp>
-      <p:sp>
-        <p:nvSpPr>
-          <p:cNvPr id="9" name="text-190"/>
-          <p:cNvSpPr txBox="1"/>
-          <p:nvPr/>
-        </p:nvSpPr>
-        <p:spPr>
-          <a:xfrm>
-            <a:off x="1234440" y="2286000"/>
-            <a:ext cx="7406640" cy="411480"/>
-          </a:xfrm>
-          <a:prstGeom prst="rect">
-            <a:avLst/>
-          </a:prstGeom>
-          <a:noFill/>
-          <a:ln/>
-        </p:spPr>
-        <p:txBody>
-          <a:bodyPr wrap="square" lIns="0" tIns="0" rIns="0" bIns="0" rtlCol="0" anchor="ctr"/>
-          <a:lstStyle/>
-          <a:p>
-            <a:pPr indent="0" marL="0">
-              <a:buNone/>
-            </a:pPr>
-            <a:r>
-              <a:rPr lang="en-US" sz="2000" b="1" dirty="0">
+              <a:rPr lang="en-US" sz="4000" b="1" dirty="0">
                 <a:solidFill>
                   <a:schemeClr val="bg1"/>
                 </a:solidFill>
-                <a:latin typeface="Bahnschrift" pitchFamily="34" charset="0"/>
-                <a:ea typeface="Bahnschrift" pitchFamily="34" charset="-122"/>
-                <a:cs typeface="Bahnschrift" pitchFamily="34" charset="-120"/>
               </a:rPr>
-              <a:t>The small 2023 gain came from tiling</a:t>
+              <a:t>Conclusions and future work</a:t>
             </a:r>
-            <a:endParaRPr lang="en-US" sz="2000" dirty="0"/>
-          </a:p>
-        </p:txBody>
-      </p:sp>
-      <p:sp>
-        <p:nvSpPr>
-          <p:cNvPr id="10" name="text-191"/>
-          <p:cNvSpPr txBox="1"/>
-          <p:nvPr/>
-        </p:nvSpPr>
-        <p:spPr>
-          <a:xfrm>
-            <a:off x="1234440" y="2697480"/>
-            <a:ext cx="7406640" cy="365760"/>
-          </a:xfrm>
-          <a:prstGeom prst="rect">
-            <a:avLst/>
-          </a:prstGeom>
-          <a:noFill/>
-          <a:ln/>
-        </p:spPr>
-        <p:txBody>
-          <a:bodyPr wrap="square" lIns="0" tIns="0" rIns="0" bIns="0" rtlCol="0" anchor="ctr"/>
-          <a:lstStyle/>
-          <a:p>
-            <a:pPr indent="0" marL="0">
-              <a:buNone/>
-            </a:pPr>
-            <a:r>
-              <a:rPr lang="en-US" sz="1500" dirty="0">
-                <a:solidFill>
-                  <a:schemeClr val="bg2"/>
-                </a:solidFill>
-                <a:latin typeface="Cambria" pitchFamily="34" charset="0"/>
-                <a:ea typeface="Cambria" pitchFamily="34" charset="-122"/>
-                <a:cs typeface="Cambria" pitchFamily="34" charset="-120"/>
-              </a:rPr>
-              <a:t>Fewer keypoints meant less work, at the cost of accuracy.</a:t>
-            </a:r>
-            <a:endParaRPr lang="en-US" sz="1500" dirty="0"/>
-          </a:p>
-        </p:txBody>
-      </p:sp>
-      <p:sp>
-        <p:nvSpPr>
-          <p:cNvPr id="11" name="num-192"/>
-          <p:cNvSpPr/>
-          <p:nvPr/>
-        </p:nvSpPr>
-        <p:spPr>
-          <a:xfrm>
-            <a:off x="457200" y="3474720"/>
-            <a:ext cx="548640" cy="548640"/>
-          </a:xfrm>
-          <a:prstGeom prst="ellipse">
-            <a:avLst/>
-          </a:prstGeom>
-          <a:solidFill>
-            <a:schemeClr val="accent1"/>
-          </a:solidFill>
-          <a:ln/>
-        </p:spPr>
-      </p:sp>
-      <p:sp>
-        <p:nvSpPr>
-          <p:cNvPr id="12" name="text-193"/>
-          <p:cNvSpPr txBox="1"/>
-          <p:nvPr/>
-        </p:nvSpPr>
-        <p:spPr>
-          <a:xfrm>
-            <a:off x="457200" y="3474720"/>
-            <a:ext cx="548640" cy="548640"/>
-          </a:xfrm>
-          <a:prstGeom prst="rect">
-            <a:avLst/>
-          </a:prstGeom>
-          <a:noFill/>
-          <a:ln/>
-        </p:spPr>
-        <p:txBody>
-          <a:bodyPr wrap="square" lIns="0" tIns="0" rIns="0" bIns="0" rtlCol="0" anchor="ctr"/>
-          <a:lstStyle/>
-          <a:p>
-            <a:pPr algn="ctr" indent="0" marL="0">
-              <a:buNone/>
-            </a:pPr>
-            <a:r>
-              <a:rPr lang="en-US" sz="2200" b="1" dirty="0">
-                <a:solidFill>
-                  <a:schemeClr val="tx1"/>
-                </a:solidFill>
-                <a:latin typeface="Bahnschrift" pitchFamily="34" charset="0"/>
-                <a:ea typeface="Bahnschrift" pitchFamily="34" charset="-122"/>
-                <a:cs typeface="Bahnschrift" pitchFamily="34" charset="-120"/>
-              </a:rPr>
-              <a:t>3</a:t>
-            </a:r>
-            <a:endParaRPr lang="en-US" sz="2200" dirty="0"/>
-          </a:p>
-        </p:txBody>
-      </p:sp>
-      <p:sp>
-        <p:nvSpPr>
-          <p:cNvPr id="13" name="text-194"/>
-          <p:cNvSpPr txBox="1"/>
-          <p:nvPr/>
-        </p:nvSpPr>
-        <p:spPr>
-          <a:xfrm>
-            <a:off x="1234440" y="3383280"/>
-            <a:ext cx="7406640" cy="411480"/>
-          </a:xfrm>
-          <a:prstGeom prst="rect">
-            <a:avLst/>
-          </a:prstGeom>
-          <a:noFill/>
-          <a:ln/>
-        </p:spPr>
-        <p:txBody>
-          <a:bodyPr wrap="square" lIns="0" tIns="0" rIns="0" bIns="0" rtlCol="0" anchor="ctr"/>
-          <a:lstStyle/>
-          <a:p>
-            <a:pPr indent="0" marL="0">
-              <a:buNone/>
-            </a:pPr>
-            <a:r>
-              <a:rPr lang="en-US" sz="2000" b="1" dirty="0">
-                <a:solidFill>
-                  <a:schemeClr val="bg1"/>
-                </a:solidFill>
-                <a:latin typeface="Bahnschrift" pitchFamily="34" charset="0"/>
-                <a:ea typeface="Bahnschrift" pitchFamily="34" charset="-122"/>
-                <a:cs typeface="Bahnschrift" pitchFamily="34" charset="-120"/>
-              </a:rPr>
-              <a:t>Real parallelism works</a:t>
-            </a:r>
-            <a:endParaRPr lang="en-US" sz="2000" dirty="0"/>
-          </a:p>
-        </p:txBody>
-      </p:sp>
-      <p:sp>
-        <p:nvSpPr>
-          <p:cNvPr id="14" name="text-195"/>
-          <p:cNvSpPr txBox="1"/>
-          <p:nvPr/>
-        </p:nvSpPr>
-        <p:spPr>
-          <a:xfrm>
-            <a:off x="1234440" y="3794760"/>
-            <a:ext cx="7406640" cy="365760"/>
-          </a:xfrm>
-          <a:prstGeom prst="rect">
-            <a:avLst/>
-          </a:prstGeom>
-          <a:noFill/>
-          <a:ln/>
-        </p:spPr>
-        <p:txBody>
-          <a:bodyPr wrap="square" lIns="0" tIns="0" rIns="0" bIns="0" rtlCol="0" anchor="ctr"/>
-          <a:lstStyle/>
-          <a:p>
-            <a:pPr indent="0" marL="0">
-              <a:buNone/>
-            </a:pPr>
-            <a:r>
-              <a:rPr lang="en-US" sz="1500" dirty="0">
-                <a:solidFill>
-                  <a:schemeClr val="bg2"/>
-                </a:solidFill>
-                <a:latin typeface="Cambria" pitchFamily="34" charset="0"/>
-                <a:ea typeface="Cambria" pitchFamily="34" charset="-122"/>
-                <a:cs typeface="Cambria" pitchFamily="34" charset="-120"/>
-              </a:rPr>
-              <a:t>Processes: 6.65×. No-GIL threads: 5.82×. 16 tiles beat 4.</a:t>
-            </a:r>
-            <a:endParaRPr lang="en-US" sz="1500" dirty="0"/>
+            <a:endParaRPr lang="en-US" sz="4000" dirty="0"/>
           </a:p>
         </p:txBody>
       </p:sp>
@@ -18372,6 +19009,525 @@
                   <a:schemeClr val="bg1"/>
                 </a:solidFill>
               </a:rPr>
+              <a:t>Conclusions</a:t>
+            </a:r>
+            <a:endParaRPr lang="en-US" sz="3000" dirty="0"/>
+          </a:p>
+        </p:txBody>
+      </p:sp>
+      <p:sp>
+        <p:nvSpPr>
+          <p:cNvPr id="3" name="num-193"/>
+          <p:cNvSpPr/>
+          <p:nvPr/>
+        </p:nvSpPr>
+        <p:spPr>
+          <a:xfrm>
+            <a:off x="457200" y="1280160"/>
+            <a:ext cx="548640" cy="548640"/>
+          </a:xfrm>
+          <a:prstGeom prst="ellipse">
+            <a:avLst/>
+          </a:prstGeom>
+          <a:solidFill>
+            <a:schemeClr val="accent1"/>
+          </a:solidFill>
+          <a:ln/>
+        </p:spPr>
+      </p:sp>
+      <p:sp>
+        <p:nvSpPr>
+          <p:cNvPr id="4" name="text-194"/>
+          <p:cNvSpPr txBox="1"/>
+          <p:nvPr/>
+        </p:nvSpPr>
+        <p:spPr>
+          <a:xfrm>
+            <a:off x="457200" y="1280160"/>
+            <a:ext cx="548640" cy="548640"/>
+          </a:xfrm>
+          <a:prstGeom prst="rect">
+            <a:avLst/>
+          </a:prstGeom>
+          <a:noFill/>
+          <a:ln/>
+        </p:spPr>
+        <p:txBody>
+          <a:bodyPr wrap="square" lIns="0" tIns="0" rIns="0" bIns="0" rtlCol="0" anchor="ctr"/>
+          <a:lstStyle/>
+          <a:p>
+            <a:pPr algn="ctr" indent="0" marL="0">
+              <a:buNone/>
+            </a:pPr>
+            <a:r>
+              <a:rPr lang="en-US" sz="2200" b="1" dirty="0">
+                <a:solidFill>
+                  <a:schemeClr val="tx1"/>
+                </a:solidFill>
+                <a:latin typeface="Bahnschrift" pitchFamily="34" charset="0"/>
+                <a:ea typeface="Bahnschrift" pitchFamily="34" charset="-122"/>
+                <a:cs typeface="Bahnschrift" pitchFamily="34" charset="-120"/>
+              </a:rPr>
+              <a:t>1</a:t>
+            </a:r>
+            <a:endParaRPr lang="en-US" sz="2200" dirty="0"/>
+          </a:p>
+        </p:txBody>
+      </p:sp>
+      <p:sp>
+        <p:nvSpPr>
+          <p:cNvPr id="5" name="text-195"/>
+          <p:cNvSpPr txBox="1"/>
+          <p:nvPr/>
+        </p:nvSpPr>
+        <p:spPr>
+          <a:xfrm>
+            <a:off x="1234440" y="1188720"/>
+            <a:ext cx="7406640" cy="411480"/>
+          </a:xfrm>
+          <a:prstGeom prst="rect">
+            <a:avLst/>
+          </a:prstGeom>
+          <a:noFill/>
+          <a:ln/>
+        </p:spPr>
+        <p:txBody>
+          <a:bodyPr wrap="square" lIns="0" tIns="0" rIns="0" bIns="0" rtlCol="0" anchor="ctr"/>
+          <a:lstStyle/>
+          <a:p>
+            <a:pPr indent="0" marL="0">
+              <a:buNone/>
+            </a:pPr>
+            <a:r>
+              <a:rPr lang="en-US" sz="2000" b="1" dirty="0">
+                <a:solidFill>
+                  <a:schemeClr val="bg1"/>
+                </a:solidFill>
+                <a:latin typeface="Bahnschrift" pitchFamily="34" charset="0"/>
+                <a:ea typeface="Bahnschrift" pitchFamily="34" charset="-122"/>
+                <a:cs typeface="Bahnschrift" pitchFamily="34" charset="-120"/>
+              </a:rPr>
+              <a:t>The GIL, not the idea, sank 2023</a:t>
+            </a:r>
+            <a:endParaRPr lang="en-US" sz="2000" dirty="0"/>
+          </a:p>
+        </p:txBody>
+      </p:sp>
+      <p:sp>
+        <p:nvSpPr>
+          <p:cNvPr id="6" name="text-196"/>
+          <p:cNvSpPr txBox="1"/>
+          <p:nvPr/>
+        </p:nvSpPr>
+        <p:spPr>
+          <a:xfrm>
+            <a:off x="1234440" y="1600200"/>
+            <a:ext cx="7406640" cy="365760"/>
+          </a:xfrm>
+          <a:prstGeom prst="rect">
+            <a:avLst/>
+          </a:prstGeom>
+          <a:noFill/>
+          <a:ln/>
+        </p:spPr>
+        <p:txBody>
+          <a:bodyPr wrap="square" lIns="0" tIns="0" rIns="0" bIns="0" rtlCol="0" anchor="ctr"/>
+          <a:lstStyle/>
+          <a:p>
+            <a:pPr indent="0" marL="0">
+              <a:buNone/>
+            </a:pPr>
+            <a:r>
+              <a:rPr lang="en-US" sz="1500" dirty="0">
+                <a:solidFill>
+                  <a:schemeClr val="bg2"/>
+                </a:solidFill>
+                <a:latin typeface="Cambria" pitchFamily="34" charset="0"/>
+                <a:ea typeface="Cambria" pitchFamily="34" charset="-122"/>
+                <a:cs typeface="Cambria" pitchFamily="34" charset="-120"/>
+              </a:rPr>
+              <a:t>Pure-Python loops on threads never used more than one core.</a:t>
+            </a:r>
+            <a:endParaRPr lang="en-US" sz="1500" dirty="0"/>
+          </a:p>
+        </p:txBody>
+      </p:sp>
+      <p:sp>
+        <p:nvSpPr>
+          <p:cNvPr id="7" name="num-197"/>
+          <p:cNvSpPr/>
+          <p:nvPr/>
+        </p:nvSpPr>
+        <p:spPr>
+          <a:xfrm>
+            <a:off x="457200" y="2377440"/>
+            <a:ext cx="548640" cy="548640"/>
+          </a:xfrm>
+          <a:prstGeom prst="ellipse">
+            <a:avLst/>
+          </a:prstGeom>
+          <a:solidFill>
+            <a:schemeClr val="accent1"/>
+          </a:solidFill>
+          <a:ln/>
+        </p:spPr>
+      </p:sp>
+      <p:sp>
+        <p:nvSpPr>
+          <p:cNvPr id="8" name="text-198"/>
+          <p:cNvSpPr txBox="1"/>
+          <p:nvPr/>
+        </p:nvSpPr>
+        <p:spPr>
+          <a:xfrm>
+            <a:off x="457200" y="2377440"/>
+            <a:ext cx="548640" cy="548640"/>
+          </a:xfrm>
+          <a:prstGeom prst="rect">
+            <a:avLst/>
+          </a:prstGeom>
+          <a:noFill/>
+          <a:ln/>
+        </p:spPr>
+        <p:txBody>
+          <a:bodyPr wrap="square" lIns="0" tIns="0" rIns="0" bIns="0" rtlCol="0" anchor="ctr"/>
+          <a:lstStyle/>
+          <a:p>
+            <a:pPr algn="ctr" indent="0" marL="0">
+              <a:buNone/>
+            </a:pPr>
+            <a:r>
+              <a:rPr lang="en-US" sz="2200" b="1" dirty="0">
+                <a:solidFill>
+                  <a:schemeClr val="tx1"/>
+                </a:solidFill>
+                <a:latin typeface="Bahnschrift" pitchFamily="34" charset="0"/>
+                <a:ea typeface="Bahnschrift" pitchFamily="34" charset="-122"/>
+                <a:cs typeface="Bahnschrift" pitchFamily="34" charset="-120"/>
+              </a:rPr>
+              <a:t>2</a:t>
+            </a:r>
+            <a:endParaRPr lang="en-US" sz="2200" dirty="0"/>
+          </a:p>
+        </p:txBody>
+      </p:sp>
+      <p:sp>
+        <p:nvSpPr>
+          <p:cNvPr id="9" name="text-199"/>
+          <p:cNvSpPr txBox="1"/>
+          <p:nvPr/>
+        </p:nvSpPr>
+        <p:spPr>
+          <a:xfrm>
+            <a:off x="1234440" y="2286000"/>
+            <a:ext cx="7406640" cy="411480"/>
+          </a:xfrm>
+          <a:prstGeom prst="rect">
+            <a:avLst/>
+          </a:prstGeom>
+          <a:noFill/>
+          <a:ln/>
+        </p:spPr>
+        <p:txBody>
+          <a:bodyPr wrap="square" lIns="0" tIns="0" rIns="0" bIns="0" rtlCol="0" anchor="ctr"/>
+          <a:lstStyle/>
+          <a:p>
+            <a:pPr indent="0" marL="0">
+              <a:buNone/>
+            </a:pPr>
+            <a:r>
+              <a:rPr lang="en-US" sz="2000" b="1" dirty="0">
+                <a:solidFill>
+                  <a:schemeClr val="bg1"/>
+                </a:solidFill>
+                <a:latin typeface="Bahnschrift" pitchFamily="34" charset="0"/>
+                <a:ea typeface="Bahnschrift" pitchFamily="34" charset="-122"/>
+                <a:cs typeface="Bahnschrift" pitchFamily="34" charset="-120"/>
+              </a:rPr>
+              <a:t>The small 2023 gain came from tiling</a:t>
+            </a:r>
+            <a:endParaRPr lang="en-US" sz="2000" dirty="0"/>
+          </a:p>
+        </p:txBody>
+      </p:sp>
+      <p:sp>
+        <p:nvSpPr>
+          <p:cNvPr id="10" name="text-200"/>
+          <p:cNvSpPr txBox="1"/>
+          <p:nvPr/>
+        </p:nvSpPr>
+        <p:spPr>
+          <a:xfrm>
+            <a:off x="1234440" y="2697480"/>
+            <a:ext cx="7406640" cy="365760"/>
+          </a:xfrm>
+          <a:prstGeom prst="rect">
+            <a:avLst/>
+          </a:prstGeom>
+          <a:noFill/>
+          <a:ln/>
+        </p:spPr>
+        <p:txBody>
+          <a:bodyPr wrap="square" lIns="0" tIns="0" rIns="0" bIns="0" rtlCol="0" anchor="ctr"/>
+          <a:lstStyle/>
+          <a:p>
+            <a:pPr indent="0" marL="0">
+              <a:buNone/>
+            </a:pPr>
+            <a:r>
+              <a:rPr lang="en-US" sz="1500" dirty="0">
+                <a:solidFill>
+                  <a:schemeClr val="bg2"/>
+                </a:solidFill>
+                <a:latin typeface="Cambria" pitchFamily="34" charset="0"/>
+                <a:ea typeface="Cambria" pitchFamily="34" charset="-122"/>
+                <a:cs typeface="Cambria" pitchFamily="34" charset="-120"/>
+              </a:rPr>
+              <a:t>Fewer keypoints meant less work, at the cost of accuracy.</a:t>
+            </a:r>
+            <a:endParaRPr lang="en-US" sz="1500" dirty="0"/>
+          </a:p>
+        </p:txBody>
+      </p:sp>
+      <p:sp>
+        <p:nvSpPr>
+          <p:cNvPr id="11" name="num-201"/>
+          <p:cNvSpPr/>
+          <p:nvPr/>
+        </p:nvSpPr>
+        <p:spPr>
+          <a:xfrm>
+            <a:off x="457200" y="3474720"/>
+            <a:ext cx="548640" cy="548640"/>
+          </a:xfrm>
+          <a:prstGeom prst="ellipse">
+            <a:avLst/>
+          </a:prstGeom>
+          <a:solidFill>
+            <a:schemeClr val="accent1"/>
+          </a:solidFill>
+          <a:ln/>
+        </p:spPr>
+      </p:sp>
+      <p:sp>
+        <p:nvSpPr>
+          <p:cNvPr id="12" name="text-202"/>
+          <p:cNvSpPr txBox="1"/>
+          <p:nvPr/>
+        </p:nvSpPr>
+        <p:spPr>
+          <a:xfrm>
+            <a:off x="457200" y="3474720"/>
+            <a:ext cx="548640" cy="548640"/>
+          </a:xfrm>
+          <a:prstGeom prst="rect">
+            <a:avLst/>
+          </a:prstGeom>
+          <a:noFill/>
+          <a:ln/>
+        </p:spPr>
+        <p:txBody>
+          <a:bodyPr wrap="square" lIns="0" tIns="0" rIns="0" bIns="0" rtlCol="0" anchor="ctr"/>
+          <a:lstStyle/>
+          <a:p>
+            <a:pPr algn="ctr" indent="0" marL="0">
+              <a:buNone/>
+            </a:pPr>
+            <a:r>
+              <a:rPr lang="en-US" sz="2200" b="1" dirty="0">
+                <a:solidFill>
+                  <a:schemeClr val="tx1"/>
+                </a:solidFill>
+                <a:latin typeface="Bahnschrift" pitchFamily="34" charset="0"/>
+                <a:ea typeface="Bahnschrift" pitchFamily="34" charset="-122"/>
+                <a:cs typeface="Bahnschrift" pitchFamily="34" charset="-120"/>
+              </a:rPr>
+              <a:t>3</a:t>
+            </a:r>
+            <a:endParaRPr lang="en-US" sz="2200" dirty="0"/>
+          </a:p>
+        </p:txBody>
+      </p:sp>
+      <p:sp>
+        <p:nvSpPr>
+          <p:cNvPr id="13" name="text-203"/>
+          <p:cNvSpPr txBox="1"/>
+          <p:nvPr/>
+        </p:nvSpPr>
+        <p:spPr>
+          <a:xfrm>
+            <a:off x="1234440" y="3383280"/>
+            <a:ext cx="7406640" cy="411480"/>
+          </a:xfrm>
+          <a:prstGeom prst="rect">
+            <a:avLst/>
+          </a:prstGeom>
+          <a:noFill/>
+          <a:ln/>
+        </p:spPr>
+        <p:txBody>
+          <a:bodyPr wrap="square" lIns="0" tIns="0" rIns="0" bIns="0" rtlCol="0" anchor="ctr"/>
+          <a:lstStyle/>
+          <a:p>
+            <a:pPr indent="0" marL="0">
+              <a:buNone/>
+            </a:pPr>
+            <a:r>
+              <a:rPr lang="en-US" sz="2000" b="1" dirty="0">
+                <a:solidFill>
+                  <a:schemeClr val="bg1"/>
+                </a:solidFill>
+                <a:latin typeface="Bahnschrift" pitchFamily="34" charset="0"/>
+                <a:ea typeface="Bahnschrift" pitchFamily="34" charset="-122"/>
+                <a:cs typeface="Bahnschrift" pitchFamily="34" charset="-120"/>
+              </a:rPr>
+              <a:t>Real parallelism works</a:t>
+            </a:r>
+            <a:endParaRPr lang="en-US" sz="2000" dirty="0"/>
+          </a:p>
+        </p:txBody>
+      </p:sp>
+      <p:sp>
+        <p:nvSpPr>
+          <p:cNvPr id="14" name="text-204"/>
+          <p:cNvSpPr txBox="1"/>
+          <p:nvPr/>
+        </p:nvSpPr>
+        <p:spPr>
+          <a:xfrm>
+            <a:off x="1234440" y="3794760"/>
+            <a:ext cx="7406640" cy="365760"/>
+          </a:xfrm>
+          <a:prstGeom prst="rect">
+            <a:avLst/>
+          </a:prstGeom>
+          <a:noFill/>
+          <a:ln/>
+        </p:spPr>
+        <p:txBody>
+          <a:bodyPr wrap="square" lIns="0" tIns="0" rIns="0" bIns="0" rtlCol="0" anchor="ctr"/>
+          <a:lstStyle/>
+          <a:p>
+            <a:pPr indent="0" marL="0">
+              <a:buNone/>
+            </a:pPr>
+            <a:r>
+              <a:rPr lang="en-US" sz="1500" dirty="0">
+                <a:solidFill>
+                  <a:schemeClr val="bg2"/>
+                </a:solidFill>
+                <a:latin typeface="Cambria" pitchFamily="34" charset="0"/>
+                <a:ea typeface="Cambria" pitchFamily="34" charset="-122"/>
+                <a:cs typeface="Cambria" pitchFamily="34" charset="-120"/>
+              </a:rPr>
+              <a:t>Processes: 6.65×. No-GIL threads: 5.82×. 16 tiles beat 4.</a:t>
+            </a:r>
+            <a:endParaRPr lang="en-US" sz="1500" dirty="0"/>
+          </a:p>
+        </p:txBody>
+      </p:sp>
+      <p:sp>
+        <p:nvSpPr>
+          <p:cNvPr id="25" name="Slide Number Placeholder 0"/>
+          <p:cNvSpPr>
+            <a:spLocks noGrp="1"/>
+          </p:cNvSpPr>
+          <p:nvPr>
+            <p:ph type="sldNum" sz="quarter" idx="4294967295"/>
+          </p:nvPr>
+        </p:nvSpPr>
+        <p:spPr>
+          <a:xfrm>
+            <a:off x="8229600" y="4754880"/>
+            <a:ext cx="457200" cy="274320"/>
+          </a:xfrm>
+          <a:prstGeom prst="rect">
+            <a:avLst/>
+          </a:prstGeom>
+          <a:extLst>
+            <a:ext uri="{C572A759-6A51-4108-AA02-DFA0A04FC94B}">
+              <ma14:wrappingTextBoxFlag xmlns:ma14="http://schemas.microsoft.com/office/mac/drawingml/2011/main" val="0"/>
+            </a:ext>
+          </a:extLst>
+        </p:spPr>
+        <p:txBody>
+          <a:bodyPr/>
+          <a:lstStyle>
+            <a:lvl1pPr>
+              <a:defRPr sz="1000">
+                <a:solidFill>
+                  <a:schemeClr val="bg2"/>
+                </a:solidFill>
+              </a:defRPr>
+            </a:lvl1pPr>
+          </a:lstStyle>
+          <a:p>
+            <a:pPr algn="r"/>
+            <a:fld id="{F7021451-1387-4CA6-816F-3879F97B5CBC}" type="slidenum">
+              <a:rPr b="0" lang="en-US"/>
+              <a:t>25</a:t>
+            </a:fld>
+            <a:endParaRPr lang="en-US"/>
+          </a:p>
+        </p:txBody>
+      </p:sp>
+    </p:spTree>
+  </p:cSld>
+  <p:clrMapOvr>
+    <a:masterClrMapping/>
+  </p:clrMapOvr>
+</p:sld>
+</file>
+
+<file path=ppt/slides/slide26.xml><?xml version="1.0" encoding="utf-8"?>
+<p:sld xmlns:a="http://schemas.openxmlformats.org/drawingml/2006/main" xmlns:r="http://schemas.openxmlformats.org/officeDocument/2006/relationships" xmlns:p="http://schemas.openxmlformats.org/presentationml/2006/main">
+  <p:cSld name="Slide 26">
+    <p:spTree>
+      <p:nvGrpSpPr>
+        <p:cNvPr id="1" name=""/>
+        <p:cNvGrpSpPr/>
+        <p:nvPr/>
+      </p:nvGrpSpPr>
+      <p:grpSpPr>
+        <a:xfrm>
+          <a:off x="0" y="0"/>
+          <a:ext cx="0" cy="0"/>
+          <a:chOff x="0" y="0"/>
+          <a:chExt cx="0" cy="0"/>
+        </a:xfrm>
+      </p:grpSpPr>
+      <p:sp>
+        <p:nvSpPr>
+          <p:cNvPr id="2" name="Text 0"/>
+          <p:cNvSpPr/>
+          <p:nvPr>
+            <p:ph idx="100" type="title" hasCustomPrompt="1"/>
+          </p:nvPr>
+        </p:nvSpPr>
+        <p:spPr>
+          <a:xfrm>
+            <a:off x="457200" y="274320"/>
+            <a:ext cx="8229600" cy="685800"/>
+          </a:xfrm>
+          <a:prstGeom prst="rect">
+            <a:avLst/>
+          </a:prstGeom>
+          <a:noFill/>
+          <a:ln/>
+        </p:spPr>
+        <p:txBody>
+          <a:bodyPr wrap="square" lIns="0" tIns="0" rIns="0" bIns="0" rtlCol="0" anchor="ctr"/>
+          <a:lstStyle/>
+          <a:p>
+            <a:pPr algn="l" indent="0" marL="0">
+              <a:buNone/>
+            </a:pPr>
+            <a:r>
+              <a:rPr lang="en-US" sz="3000" b="1" dirty="0">
+                <a:solidFill>
+                  <a:schemeClr val="bg1"/>
+                </a:solidFill>
+              </a:rPr>
               <a:t>Future work</a:t>
             </a:r>
             <a:endParaRPr lang="en-US" sz="3000" dirty="0"/>
@@ -18380,7 +19536,7 @@
       </p:sp>
       <p:sp>
         <p:nvSpPr>
-          <p:cNvPr id="3" name="card-196"/>
+          <p:cNvPr id="3" name="card-205"/>
           <p:cNvSpPr/>
           <p:nvPr/>
         </p:nvSpPr>
@@ -18402,7 +19558,7 @@
       </p:sp>
       <p:sp>
         <p:nvSpPr>
-          <p:cNvPr id="4" name="icon-bg-197"/>
+          <p:cNvPr id="4" name="icon-bg-206"/>
           <p:cNvSpPr/>
           <p:nvPr/>
         </p:nvSpPr>
@@ -18422,7 +19578,7 @@
       </p:sp>
       <p:pic>
         <p:nvPicPr>
-          <p:cNvPr id="5" name="icon-198" descr="preencoded.png">    </p:cNvPr>
+          <p:cNvPr id="5" name="icon-207" descr="preencoded.png">    </p:cNvPr>
           <p:cNvPicPr>
             <a:picLocks noChangeAspect="1"/>
           </p:cNvPicPr>
@@ -18446,7 +19602,7 @@
       </p:pic>
       <p:sp>
         <p:nvSpPr>
-          <p:cNvPr id="6" name="text-199"/>
+          <p:cNvPr id="6" name="text-208"/>
           <p:cNvSpPr txBox="1"/>
           <p:nvPr/>
         </p:nvSpPr>
@@ -18485,7 +19641,7 @@
       </p:sp>
       <p:sp>
         <p:nvSpPr>
-          <p:cNvPr id="7" name="text-200"/>
+          <p:cNvPr id="7" name="text-209"/>
           <p:cNvSpPr txBox="1"/>
           <p:nvPr/>
         </p:nvSpPr>
@@ -18524,7 +19680,7 @@
       </p:sp>
       <p:sp>
         <p:nvSpPr>
-          <p:cNvPr id="8" name="card-201"/>
+          <p:cNvPr id="8" name="card-210"/>
           <p:cNvSpPr/>
           <p:nvPr/>
         </p:nvSpPr>
@@ -18546,7 +19702,7 @@
       </p:sp>
       <p:sp>
         <p:nvSpPr>
-          <p:cNvPr id="9" name="icon-bg-202"/>
+          <p:cNvPr id="9" name="icon-bg-211"/>
           <p:cNvSpPr/>
           <p:nvPr/>
         </p:nvSpPr>
@@ -18566,7 +19722,7 @@
       </p:sp>
       <p:pic>
         <p:nvPicPr>
-          <p:cNvPr id="10" name="icon-203" descr="preencoded.png">    </p:cNvPr>
+          <p:cNvPr id="10" name="icon-212" descr="preencoded.png">    </p:cNvPr>
           <p:cNvPicPr>
             <a:picLocks noChangeAspect="1"/>
           </p:cNvPicPr>
@@ -18590,7 +19746,7 @@
       </p:pic>
       <p:sp>
         <p:nvSpPr>
-          <p:cNvPr id="11" name="text-204"/>
+          <p:cNvPr id="11" name="text-213"/>
           <p:cNvSpPr txBox="1"/>
           <p:nvPr/>
         </p:nvSpPr>
@@ -18629,7 +19785,7 @@
       </p:sp>
       <p:sp>
         <p:nvSpPr>
-          <p:cNvPr id="12" name="text-205"/>
+          <p:cNvPr id="12" name="text-214"/>
           <p:cNvSpPr txBox="1"/>
           <p:nvPr/>
         </p:nvSpPr>
@@ -18668,7 +19824,7 @@
       </p:sp>
       <p:sp>
         <p:nvSpPr>
-          <p:cNvPr id="13" name="card-206"/>
+          <p:cNvPr id="13" name="card-215"/>
           <p:cNvSpPr/>
           <p:nvPr/>
         </p:nvSpPr>
@@ -18690,7 +19846,7 @@
       </p:sp>
       <p:sp>
         <p:nvSpPr>
-          <p:cNvPr id="14" name="icon-bg-207"/>
+          <p:cNvPr id="14" name="icon-bg-216"/>
           <p:cNvSpPr/>
           <p:nvPr/>
         </p:nvSpPr>
@@ -18710,7 +19866,7 @@
       </p:sp>
       <p:pic>
         <p:nvPicPr>
-          <p:cNvPr id="15" name="icon-208" descr="preencoded.png">    </p:cNvPr>
+          <p:cNvPr id="15" name="icon-217" descr="preencoded.png">    </p:cNvPr>
           <p:cNvPicPr>
             <a:picLocks noChangeAspect="1"/>
           </p:cNvPicPr>
@@ -18734,7 +19890,7 @@
       </p:pic>
       <p:sp>
         <p:nvSpPr>
-          <p:cNvPr id="16" name="text-209"/>
+          <p:cNvPr id="16" name="text-218"/>
           <p:cNvSpPr txBox="1"/>
           <p:nvPr/>
         </p:nvSpPr>
@@ -18773,7 +19929,7 @@
       </p:sp>
       <p:sp>
         <p:nvSpPr>
-          <p:cNvPr id="17" name="text-210"/>
+          <p:cNvPr id="17" name="text-219"/>
           <p:cNvSpPr txBox="1"/>
           <p:nvPr/>
         </p:nvSpPr>
@@ -18812,7 +19968,7 @@
       </p:sp>
       <p:sp>
         <p:nvSpPr>
-          <p:cNvPr id="18" name="card-211"/>
+          <p:cNvPr id="18" name="card-220"/>
           <p:cNvSpPr/>
           <p:nvPr/>
         </p:nvSpPr>
@@ -18834,7 +19990,7 @@
       </p:sp>
       <p:sp>
         <p:nvSpPr>
-          <p:cNvPr id="19" name="icon-bg-212"/>
+          <p:cNvPr id="19" name="icon-bg-221"/>
           <p:cNvSpPr/>
           <p:nvPr/>
         </p:nvSpPr>
@@ -18854,7 +20010,7 @@
       </p:sp>
       <p:pic>
         <p:nvPicPr>
-          <p:cNvPr id="20" name="icon-213" descr="preencoded.png">    </p:cNvPr>
+          <p:cNvPr id="20" name="icon-222" descr="preencoded.png">    </p:cNvPr>
           <p:cNvPicPr>
             <a:picLocks noChangeAspect="1"/>
           </p:cNvPicPr>
@@ -18878,7 +20034,7 @@
       </p:pic>
       <p:sp>
         <p:nvSpPr>
-          <p:cNvPr id="21" name="text-214"/>
+          <p:cNvPr id="21" name="text-223"/>
           <p:cNvSpPr txBox="1"/>
           <p:nvPr/>
         </p:nvSpPr>
@@ -18917,7 +20073,7 @@
       </p:sp>
       <p:sp>
         <p:nvSpPr>
-          <p:cNvPr id="22" name="text-215"/>
+          <p:cNvPr id="22" name="text-224"/>
           <p:cNvSpPr txBox="1"/>
           <p:nvPr/>
         </p:nvSpPr>
@@ -18956,7 +20112,7 @@
       </p:sp>
       <p:sp>
         <p:nvSpPr>
-          <p:cNvPr id="23" name="text-216"/>
+          <p:cNvPr id="23" name="text-225"/>
           <p:cNvSpPr txBox="1"/>
           <p:nvPr/>
         </p:nvSpPr>
@@ -19046,296 +20202,6 @@
             <a:pPr algn="r"/>
             <a:fld id="{F7021451-1387-4CA6-816F-3879F97B5CBC}" type="slidenum">
               <a:rPr b="0" lang="en-US"/>
-              <a:t>25</a:t>
-            </a:fld>
-            <a:endParaRPr lang="en-US"/>
-          </a:p>
-        </p:txBody>
-      </p:sp>
-    </p:spTree>
-  </p:cSld>
-  <p:clrMapOvr>
-    <a:masterClrMapping/>
-  </p:clrMapOvr>
-</p:sld>
-</file>
-
-<file path=ppt/slides/slide26.xml><?xml version="1.0" encoding="utf-8"?>
-<p:sld xmlns:a="http://schemas.openxmlformats.org/drawingml/2006/main" xmlns:r="http://schemas.openxmlformats.org/officeDocument/2006/relationships" xmlns:p="http://schemas.openxmlformats.org/presentationml/2006/main">
-  <p:cSld name="Slide 26">
-    <p:spTree>
-      <p:nvGrpSpPr>
-        <p:cNvPr id="1" name=""/>
-        <p:cNvGrpSpPr/>
-        <p:nvPr/>
-      </p:nvGrpSpPr>
-      <p:grpSpPr>
-        <a:xfrm>
-          <a:off x="0" y="0"/>
-          <a:ext cx="0" cy="0"/>
-          <a:chOff x="0" y="0"/>
-          <a:chExt cx="0" cy="0"/>
-        </a:xfrm>
-      </p:grpSpPr>
-      <p:sp>
-        <p:nvSpPr>
-          <p:cNvPr id="2" name="Text 0"/>
-          <p:cNvSpPr/>
-          <p:nvPr>
-            <p:ph idx="100" type="title" hasCustomPrompt="1"/>
-          </p:nvPr>
-        </p:nvSpPr>
-        <p:spPr>
-          <a:xfrm>
-            <a:off x="457200" y="274320"/>
-            <a:ext cx="8229600" cy="685800"/>
-          </a:xfrm>
-          <a:prstGeom prst="rect">
-            <a:avLst/>
-          </a:prstGeom>
-          <a:noFill/>
-          <a:ln/>
-        </p:spPr>
-        <p:txBody>
-          <a:bodyPr wrap="square" lIns="0" tIns="0" rIns="0" bIns="0" rtlCol="0" anchor="ctr"/>
-          <a:lstStyle/>
-          <a:p>
-            <a:pPr algn="l" indent="0" marL="0">
-              <a:buNone/>
-            </a:pPr>
-            <a:r>
-              <a:rPr lang="en-US" sz="3000" b="1" dirty="0">
-                <a:solidFill>
-                  <a:schemeClr val="bg1"/>
-                </a:solidFill>
-              </a:rPr>
-              <a:t>References</a:t>
-            </a:r>
-            <a:endParaRPr lang="en-US" sz="3000" dirty="0"/>
-          </a:p>
-        </p:txBody>
-      </p:sp>
-      <p:sp>
-        <p:nvSpPr>
-          <p:cNvPr id="3" name="text-217"/>
-          <p:cNvSpPr txBox="1"/>
-          <p:nvPr/>
-        </p:nvSpPr>
-        <p:spPr>
-          <a:xfrm>
-            <a:off x="457200" y="1143000"/>
-            <a:ext cx="8229600" cy="3474720"/>
-          </a:xfrm>
-          <a:prstGeom prst="rect">
-            <a:avLst/>
-          </a:prstGeom>
-          <a:noFill/>
-          <a:ln/>
-        </p:spPr>
-        <p:txBody>
-          <a:bodyPr wrap="square" lIns="0" tIns="0" rIns="0" bIns="0" rtlCol="0" anchor="t"/>
-          <a:lstStyle/>
-          <a:p>
-            <a:pPr indent="0" marL="0">
-              <a:spcAft>
-                <a:spcPts val="600"/>
-              </a:spcAft>
-              <a:buNone/>
-            </a:pPr>
-            <a:r>
-              <a:rPr lang="en-US" sz="1200" dirty="0">
-                <a:solidFill>
-                  <a:schemeClr val="bg1"/>
-                </a:solidFill>
-                <a:latin typeface="Cambria" pitchFamily="34" charset="0"/>
-                <a:ea typeface="Cambria" pitchFamily="34" charset="-122"/>
-                <a:cs typeface="Cambria" pitchFamily="34" charset="-120"/>
-              </a:rPr>
-              <a:t>[1] Statista, "Data growth worldwide 2010–2025." Accessed Nov. 2023.</a:t>
-            </a:r>
-            <a:endParaRPr lang="en-US" sz="1200" dirty="0"/>
-          </a:p>
-          <a:p>
-            <a:pPr indent="0" marL="0">
-              <a:spcAft>
-                <a:spcPts val="600"/>
-              </a:spcAft>
-              <a:buNone/>
-            </a:pPr>
-            <a:r>
-              <a:rPr lang="en-US" sz="1200" dirty="0">
-                <a:solidFill>
-                  <a:schemeClr val="bg1"/>
-                </a:solidFill>
-                <a:latin typeface="Cambria" pitchFamily="34" charset="0"/>
-                <a:ea typeface="Cambria" pitchFamily="34" charset="-122"/>
-                <a:cs typeface="Cambria" pitchFamily="34" charset="-120"/>
-              </a:rPr>
-              <a:t>[2] Baeldung, "What is content-based image retrieval?" Accessed Nov. 2023.</a:t>
-            </a:r>
-            <a:endParaRPr lang="en-US" sz="1200" dirty="0"/>
-          </a:p>
-          <a:p>
-            <a:pPr indent="0" marL="0">
-              <a:spcAft>
-                <a:spcPts val="600"/>
-              </a:spcAft>
-              <a:buNone/>
-            </a:pPr>
-            <a:r>
-              <a:rPr lang="en-US" sz="1200" dirty="0">
-                <a:solidFill>
-                  <a:schemeClr val="bg1"/>
-                </a:solidFill>
-                <a:latin typeface="Cambria" pitchFamily="34" charset="0"/>
-                <a:ea typeface="Cambria" pitchFamily="34" charset="-122"/>
-                <a:cs typeface="Cambria" pitchFamily="34" charset="-120"/>
-              </a:rPr>
-              <a:t>[3] G. Kumar, P. K. Bhatia, "A detailed review of feature extraction in image processing systems," ACCT, 2014.</a:t>
-            </a:r>
-            <a:endParaRPr lang="en-US" sz="1200" dirty="0"/>
-          </a:p>
-          <a:p>
-            <a:pPr indent="0" marL="0">
-              <a:spcAft>
-                <a:spcPts val="600"/>
-              </a:spcAft>
-              <a:buNone/>
-            </a:pPr>
-            <a:r>
-              <a:rPr lang="en-US" sz="1200" dirty="0">
-                <a:solidFill>
-                  <a:schemeClr val="bg1"/>
-                </a:solidFill>
-                <a:latin typeface="Cambria" pitchFamily="34" charset="0"/>
-                <a:ea typeface="Cambria" pitchFamily="34" charset="-122"/>
-                <a:cs typeface="Cambria" pitchFamily="34" charset="-120"/>
-              </a:rPr>
-              <a:t>[4] D. G. Lowe, "Object recognition from local scale-invariant features," ICCV, 1999.</a:t>
-            </a:r>
-            <a:endParaRPr lang="en-US" sz="1200" dirty="0"/>
-          </a:p>
-          <a:p>
-            <a:pPr indent="0" marL="0">
-              <a:spcAft>
-                <a:spcPts val="600"/>
-              </a:spcAft>
-              <a:buNone/>
-            </a:pPr>
-            <a:r>
-              <a:rPr lang="en-US" sz="1200" dirty="0">
-                <a:solidFill>
-                  <a:schemeClr val="bg1"/>
-                </a:solidFill>
-                <a:latin typeface="Cambria" pitchFamily="34" charset="0"/>
-                <a:ea typeface="Cambria" pitchFamily="34" charset="-122"/>
-                <a:cs typeface="Cambria" pitchFamily="34" charset="-120"/>
-              </a:rPr>
-              <a:t>[5] J. Hosang, R. Benenson, B. Schiele, "Learning non-maximum suppression," CVPR, 2017.</a:t>
-            </a:r>
-            <a:endParaRPr lang="en-US" sz="1200" dirty="0"/>
-          </a:p>
-          <a:p>
-            <a:pPr indent="0" marL="0">
-              <a:spcAft>
-                <a:spcPts val="600"/>
-              </a:spcAft>
-              <a:buNone/>
-            </a:pPr>
-            <a:r>
-              <a:rPr lang="en-US" sz="1200" dirty="0">
-                <a:solidFill>
-                  <a:schemeClr val="bg1"/>
-                </a:solidFill>
-                <a:latin typeface="Cambria" pitchFamily="34" charset="0"/>
-                <a:ea typeface="Cambria" pitchFamily="34" charset="-122"/>
-                <a:cs typeface="Cambria" pitchFamily="34" charset="-120"/>
-              </a:rPr>
-              <a:t>[6] M.-E. Nilsback, A. Zisserman, "Automated flower classification over a large number of classes," ICVGIP, 2008.</a:t>
-            </a:r>
-            <a:endParaRPr lang="en-US" sz="1200" dirty="0"/>
-          </a:p>
-          <a:p>
-            <a:pPr indent="0" marL="0">
-              <a:spcAft>
-                <a:spcPts val="600"/>
-              </a:spcAft>
-              <a:buNone/>
-            </a:pPr>
-            <a:r>
-              <a:rPr lang="en-US" sz="1200" dirty="0">
-                <a:solidFill>
-                  <a:schemeClr val="bg1"/>
-                </a:solidFill>
-                <a:latin typeface="Cambria" pitchFamily="34" charset="0"/>
-                <a:ea typeface="Cambria" pitchFamily="34" charset="-122"/>
-                <a:cs typeface="Cambria" pitchFamily="34" charset="-120"/>
-              </a:rPr>
-              <a:t>[7] S. Gross, "PEP 703: Making the Global Interpreter Lock optional in CPython," 2023.</a:t>
-            </a:r>
-            <a:endParaRPr lang="en-US" sz="1200" dirty="0"/>
-          </a:p>
-          <a:p>
-            <a:pPr indent="0" marL="0">
-              <a:spcAft>
-                <a:spcPts val="600"/>
-              </a:spcAft>
-              <a:buNone/>
-            </a:pPr>
-            <a:r>
-              <a:rPr lang="en-US" sz="1200" dirty="0">
-                <a:solidFill>
-                  <a:schemeClr val="bg1"/>
-                </a:solidFill>
-                <a:latin typeface="Cambria" pitchFamily="34" charset="0"/>
-                <a:ea typeface="Cambria" pitchFamily="34" charset="-122"/>
-                <a:cs typeface="Cambria" pitchFamily="34" charset="-120"/>
-              </a:rPr>
-              <a:t>[8] M. Singh et al., "A comparative study of feature extraction techniques and similarity measures for image retrieval," INCOFT, 2022.</a:t>
-            </a:r>
-            <a:endParaRPr lang="en-US" sz="1200" dirty="0"/>
-          </a:p>
-        </p:txBody>
-      </p:sp>
-      <p:sp>
-        <p:nvSpPr>
-          <p:cNvPr id="25" name="Slide Number Placeholder 0"/>
-          <p:cNvSpPr>
-            <a:spLocks noGrp="1"/>
-          </p:cNvSpPr>
-          <p:nvPr>
-            <p:ph type="sldNum" sz="quarter" idx="4294967295"/>
-          </p:nvPr>
-        </p:nvSpPr>
-        <p:spPr>
-          <a:xfrm>
-            <a:off x="8229600" y="4754880"/>
-            <a:ext cx="457200" cy="274320"/>
-          </a:xfrm>
-          <a:prstGeom prst="rect">
-            <a:avLst/>
-          </a:prstGeom>
-          <a:extLst>
-            <a:ext uri="{C572A759-6A51-4108-AA02-DFA0A04FC94B}">
-              <ma14:wrappingTextBoxFlag xmlns:ma14="http://schemas.microsoft.com/office/mac/drawingml/2011/main" val="0"/>
-            </a:ext>
-          </a:extLst>
-        </p:spPr>
-        <p:txBody>
-          <a:bodyPr/>
-          <a:lstStyle>
-            <a:lvl1pPr>
-              <a:defRPr sz="1000">
-                <a:solidFill>
-                  <a:schemeClr val="bg2"/>
-                </a:solidFill>
-              </a:defRPr>
-            </a:lvl1pPr>
-          </a:lstStyle>
-          <a:p>
-            <a:pPr algn="r"/>
-            <a:fld id="{F7021451-1387-4CA6-816F-3879F97B5CBC}" type="slidenum">
-              <a:rPr b="0" lang="en-US"/>
               <a:t>26</a:t>
             </a:fld>
             <a:endParaRPr lang="en-US"/>
@@ -19377,6 +20243,296 @@
         </p:nvSpPr>
         <p:spPr>
           <a:xfrm>
+            <a:off x="457200" y="274320"/>
+            <a:ext cx="8229600" cy="685800"/>
+          </a:xfrm>
+          <a:prstGeom prst="rect">
+            <a:avLst/>
+          </a:prstGeom>
+          <a:noFill/>
+          <a:ln/>
+        </p:spPr>
+        <p:txBody>
+          <a:bodyPr wrap="square" lIns="0" tIns="0" rIns="0" bIns="0" rtlCol="0" anchor="ctr"/>
+          <a:lstStyle/>
+          <a:p>
+            <a:pPr algn="l" indent="0" marL="0">
+              <a:buNone/>
+            </a:pPr>
+            <a:r>
+              <a:rPr lang="en-US" sz="3000" b="1" dirty="0">
+                <a:solidFill>
+                  <a:schemeClr val="bg1"/>
+                </a:solidFill>
+              </a:rPr>
+              <a:t>References</a:t>
+            </a:r>
+            <a:endParaRPr lang="en-US" sz="3000" dirty="0"/>
+          </a:p>
+        </p:txBody>
+      </p:sp>
+      <p:sp>
+        <p:nvSpPr>
+          <p:cNvPr id="3" name="text-226"/>
+          <p:cNvSpPr txBox="1"/>
+          <p:nvPr/>
+        </p:nvSpPr>
+        <p:spPr>
+          <a:xfrm>
+            <a:off x="457200" y="1143000"/>
+            <a:ext cx="8229600" cy="3474720"/>
+          </a:xfrm>
+          <a:prstGeom prst="rect">
+            <a:avLst/>
+          </a:prstGeom>
+          <a:noFill/>
+          <a:ln/>
+        </p:spPr>
+        <p:txBody>
+          <a:bodyPr wrap="square" lIns="0" tIns="0" rIns="0" bIns="0" rtlCol="0" anchor="t"/>
+          <a:lstStyle/>
+          <a:p>
+            <a:pPr indent="0" marL="0">
+              <a:spcAft>
+                <a:spcPts val="600"/>
+              </a:spcAft>
+              <a:buNone/>
+            </a:pPr>
+            <a:r>
+              <a:rPr lang="en-US" sz="1200" dirty="0">
+                <a:solidFill>
+                  <a:schemeClr val="bg1"/>
+                </a:solidFill>
+                <a:latin typeface="Cambria" pitchFamily="34" charset="0"/>
+                <a:ea typeface="Cambria" pitchFamily="34" charset="-122"/>
+                <a:cs typeface="Cambria" pitchFamily="34" charset="-120"/>
+              </a:rPr>
+              <a:t>[1] Statista, "Data growth worldwide 2010–2025." Accessed Nov. 2023.</a:t>
+            </a:r>
+            <a:endParaRPr lang="en-US" sz="1200" dirty="0"/>
+          </a:p>
+          <a:p>
+            <a:pPr indent="0" marL="0">
+              <a:spcAft>
+                <a:spcPts val="600"/>
+              </a:spcAft>
+              <a:buNone/>
+            </a:pPr>
+            <a:r>
+              <a:rPr lang="en-US" sz="1200" dirty="0">
+                <a:solidFill>
+                  <a:schemeClr val="bg1"/>
+                </a:solidFill>
+                <a:latin typeface="Cambria" pitchFamily="34" charset="0"/>
+                <a:ea typeface="Cambria" pitchFamily="34" charset="-122"/>
+                <a:cs typeface="Cambria" pitchFamily="34" charset="-120"/>
+              </a:rPr>
+              <a:t>[2] Baeldung, "What is content-based image retrieval?" Accessed Nov. 2023.</a:t>
+            </a:r>
+            <a:endParaRPr lang="en-US" sz="1200" dirty="0"/>
+          </a:p>
+          <a:p>
+            <a:pPr indent="0" marL="0">
+              <a:spcAft>
+                <a:spcPts val="600"/>
+              </a:spcAft>
+              <a:buNone/>
+            </a:pPr>
+            <a:r>
+              <a:rPr lang="en-US" sz="1200" dirty="0">
+                <a:solidFill>
+                  <a:schemeClr val="bg1"/>
+                </a:solidFill>
+                <a:latin typeface="Cambria" pitchFamily="34" charset="0"/>
+                <a:ea typeface="Cambria" pitchFamily="34" charset="-122"/>
+                <a:cs typeface="Cambria" pitchFamily="34" charset="-120"/>
+              </a:rPr>
+              <a:t>[3] G. Kumar, P. K. Bhatia, "A detailed review of feature extraction in image processing systems," ACCT, 2014.</a:t>
+            </a:r>
+            <a:endParaRPr lang="en-US" sz="1200" dirty="0"/>
+          </a:p>
+          <a:p>
+            <a:pPr indent="0" marL="0">
+              <a:spcAft>
+                <a:spcPts val="600"/>
+              </a:spcAft>
+              <a:buNone/>
+            </a:pPr>
+            <a:r>
+              <a:rPr lang="en-US" sz="1200" dirty="0">
+                <a:solidFill>
+                  <a:schemeClr val="bg1"/>
+                </a:solidFill>
+                <a:latin typeface="Cambria" pitchFamily="34" charset="0"/>
+                <a:ea typeface="Cambria" pitchFamily="34" charset="-122"/>
+                <a:cs typeface="Cambria" pitchFamily="34" charset="-120"/>
+              </a:rPr>
+              <a:t>[4] D. G. Lowe, "Object recognition from local scale-invariant features," ICCV, 1999.</a:t>
+            </a:r>
+            <a:endParaRPr lang="en-US" sz="1200" dirty="0"/>
+          </a:p>
+          <a:p>
+            <a:pPr indent="0" marL="0">
+              <a:spcAft>
+                <a:spcPts val="600"/>
+              </a:spcAft>
+              <a:buNone/>
+            </a:pPr>
+            <a:r>
+              <a:rPr lang="en-US" sz="1200" dirty="0">
+                <a:solidFill>
+                  <a:schemeClr val="bg1"/>
+                </a:solidFill>
+                <a:latin typeface="Cambria" pitchFamily="34" charset="0"/>
+                <a:ea typeface="Cambria" pitchFamily="34" charset="-122"/>
+                <a:cs typeface="Cambria" pitchFamily="34" charset="-120"/>
+              </a:rPr>
+              <a:t>[5] J. Hosang, R. Benenson, B. Schiele, "Learning non-maximum suppression," CVPR, 2017.</a:t>
+            </a:r>
+            <a:endParaRPr lang="en-US" sz="1200" dirty="0"/>
+          </a:p>
+          <a:p>
+            <a:pPr indent="0" marL="0">
+              <a:spcAft>
+                <a:spcPts val="600"/>
+              </a:spcAft>
+              <a:buNone/>
+            </a:pPr>
+            <a:r>
+              <a:rPr lang="en-US" sz="1200" dirty="0">
+                <a:solidFill>
+                  <a:schemeClr val="bg1"/>
+                </a:solidFill>
+                <a:latin typeface="Cambria" pitchFamily="34" charset="0"/>
+                <a:ea typeface="Cambria" pitchFamily="34" charset="-122"/>
+                <a:cs typeface="Cambria" pitchFamily="34" charset="-120"/>
+              </a:rPr>
+              <a:t>[6] M.-E. Nilsback, A. Zisserman, "Automated flower classification over a large number of classes," ICVGIP, 2008.</a:t>
+            </a:r>
+            <a:endParaRPr lang="en-US" sz="1200" dirty="0"/>
+          </a:p>
+          <a:p>
+            <a:pPr indent="0" marL="0">
+              <a:spcAft>
+                <a:spcPts val="600"/>
+              </a:spcAft>
+              <a:buNone/>
+            </a:pPr>
+            <a:r>
+              <a:rPr lang="en-US" sz="1200" dirty="0">
+                <a:solidFill>
+                  <a:schemeClr val="bg1"/>
+                </a:solidFill>
+                <a:latin typeface="Cambria" pitchFamily="34" charset="0"/>
+                <a:ea typeface="Cambria" pitchFamily="34" charset="-122"/>
+                <a:cs typeface="Cambria" pitchFamily="34" charset="-120"/>
+              </a:rPr>
+              <a:t>[7] S. Gross, "PEP 703: Making the Global Interpreter Lock optional in CPython," 2023.</a:t>
+            </a:r>
+            <a:endParaRPr lang="en-US" sz="1200" dirty="0"/>
+          </a:p>
+          <a:p>
+            <a:pPr indent="0" marL="0">
+              <a:spcAft>
+                <a:spcPts val="600"/>
+              </a:spcAft>
+              <a:buNone/>
+            </a:pPr>
+            <a:r>
+              <a:rPr lang="en-US" sz="1200" dirty="0">
+                <a:solidFill>
+                  <a:schemeClr val="bg1"/>
+                </a:solidFill>
+                <a:latin typeface="Cambria" pitchFamily="34" charset="0"/>
+                <a:ea typeface="Cambria" pitchFamily="34" charset="-122"/>
+                <a:cs typeface="Cambria" pitchFamily="34" charset="-120"/>
+              </a:rPr>
+              <a:t>[8] M. Singh et al., "A comparative study of feature extraction techniques and similarity measures for image retrieval," INCOFT, 2022.</a:t>
+            </a:r>
+            <a:endParaRPr lang="en-US" sz="1200" dirty="0"/>
+          </a:p>
+        </p:txBody>
+      </p:sp>
+      <p:sp>
+        <p:nvSpPr>
+          <p:cNvPr id="25" name="Slide Number Placeholder 0"/>
+          <p:cNvSpPr>
+            <a:spLocks noGrp="1"/>
+          </p:cNvSpPr>
+          <p:nvPr>
+            <p:ph type="sldNum" sz="quarter" idx="4294967295"/>
+          </p:nvPr>
+        </p:nvSpPr>
+        <p:spPr>
+          <a:xfrm>
+            <a:off x="8229600" y="4754880"/>
+            <a:ext cx="457200" cy="274320"/>
+          </a:xfrm>
+          <a:prstGeom prst="rect">
+            <a:avLst/>
+          </a:prstGeom>
+          <a:extLst>
+            <a:ext uri="{C572A759-6A51-4108-AA02-DFA0A04FC94B}">
+              <ma14:wrappingTextBoxFlag xmlns:ma14="http://schemas.microsoft.com/office/mac/drawingml/2011/main" val="0"/>
+            </a:ext>
+          </a:extLst>
+        </p:spPr>
+        <p:txBody>
+          <a:bodyPr/>
+          <a:lstStyle>
+            <a:lvl1pPr>
+              <a:defRPr sz="1000">
+                <a:solidFill>
+                  <a:schemeClr val="bg2"/>
+                </a:solidFill>
+              </a:defRPr>
+            </a:lvl1pPr>
+          </a:lstStyle>
+          <a:p>
+            <a:pPr algn="r"/>
+            <a:fld id="{F7021451-1387-4CA6-816F-3879F97B5CBC}" type="slidenum">
+              <a:rPr b="0" lang="en-US"/>
+              <a:t>27</a:t>
+            </a:fld>
+            <a:endParaRPr lang="en-US"/>
+          </a:p>
+        </p:txBody>
+      </p:sp>
+    </p:spTree>
+  </p:cSld>
+  <p:clrMapOvr>
+    <a:masterClrMapping/>
+  </p:clrMapOvr>
+</p:sld>
+</file>
+
+<file path=ppt/slides/slide28.xml><?xml version="1.0" encoding="utf-8"?>
+<p:sld xmlns:a="http://schemas.openxmlformats.org/drawingml/2006/main" xmlns:r="http://schemas.openxmlformats.org/officeDocument/2006/relationships" xmlns:p="http://schemas.openxmlformats.org/presentationml/2006/main">
+  <p:cSld name="Slide 28">
+    <p:spTree>
+      <p:nvGrpSpPr>
+        <p:cNvPr id="1" name=""/>
+        <p:cNvGrpSpPr/>
+        <p:nvPr/>
+      </p:nvGrpSpPr>
+      <p:grpSpPr>
+        <a:xfrm>
+          <a:off x="0" y="0"/>
+          <a:ext cx="0" cy="0"/>
+          <a:chOff x="0" y="0"/>
+          <a:chExt cx="0" cy="0"/>
+        </a:xfrm>
+      </p:grpSpPr>
+      <p:sp>
+        <p:nvSpPr>
+          <p:cNvPr id="2" name="Text 0"/>
+          <p:cNvSpPr/>
+          <p:nvPr>
+            <p:ph idx="100" type="title" hasCustomPrompt="1"/>
+          </p:nvPr>
+        </p:nvSpPr>
+        <p:spPr>
+          <a:xfrm>
             <a:off x="548640" y="1234440"/>
             <a:ext cx="8046720" cy="1463040"/>
           </a:xfrm>
@@ -19445,7 +20601,7 @@
       </p:sp>
       <p:sp>
         <p:nvSpPr>
-          <p:cNvPr id="4" name="text-218"/>
+          <p:cNvPr id="4" name="text-227"/>
           <p:cNvSpPr txBox="1"/>
           <p:nvPr/>
         </p:nvSpPr>
